--- a/1) Ciclo do Software e Versionamento.pptx
+++ b/1) Ciclo do Software e Versionamento.pptx
@@ -5,31 +5,32 @@
     <p:sldMasterId id="2147483648" r:id="rId1"/>
   </p:sldMasterIdLst>
   <p:sldIdLst>
-    <p:sldId id="256" r:id="rId2"/>
-    <p:sldId id="257" r:id="rId3"/>
-    <p:sldId id="258" r:id="rId4"/>
-    <p:sldId id="259" r:id="rId5"/>
-    <p:sldId id="260" r:id="rId6"/>
-    <p:sldId id="261" r:id="rId7"/>
-    <p:sldId id="262" r:id="rId8"/>
-    <p:sldId id="263" r:id="rId9"/>
-    <p:sldId id="264" r:id="rId10"/>
-    <p:sldId id="265" r:id="rId11"/>
-    <p:sldId id="266" r:id="rId12"/>
-    <p:sldId id="267" r:id="rId13"/>
-    <p:sldId id="268" r:id="rId14"/>
-    <p:sldId id="269" r:id="rId15"/>
-    <p:sldId id="270" r:id="rId16"/>
-    <p:sldId id="271" r:id="rId17"/>
-    <p:sldId id="272" r:id="rId18"/>
-    <p:sldId id="273" r:id="rId19"/>
-    <p:sldId id="274" r:id="rId20"/>
-    <p:sldId id="276" r:id="rId21"/>
-    <p:sldId id="277" r:id="rId22"/>
-    <p:sldId id="278" r:id="rId23"/>
-    <p:sldId id="279" r:id="rId24"/>
-    <p:sldId id="280" r:id="rId25"/>
-    <p:sldId id="281" r:id="rId26"/>
+    <p:sldId id="283" r:id="rId2"/>
+    <p:sldId id="256" r:id="rId3"/>
+    <p:sldId id="257" r:id="rId4"/>
+    <p:sldId id="258" r:id="rId5"/>
+    <p:sldId id="282" r:id="rId6"/>
+    <p:sldId id="260" r:id="rId7"/>
+    <p:sldId id="261" r:id="rId8"/>
+    <p:sldId id="262" r:id="rId9"/>
+    <p:sldId id="281" r:id="rId10"/>
+    <p:sldId id="264" r:id="rId11"/>
+    <p:sldId id="265" r:id="rId12"/>
+    <p:sldId id="266" r:id="rId13"/>
+    <p:sldId id="267" r:id="rId14"/>
+    <p:sldId id="268" r:id="rId15"/>
+    <p:sldId id="269" r:id="rId16"/>
+    <p:sldId id="270" r:id="rId17"/>
+    <p:sldId id="271" r:id="rId18"/>
+    <p:sldId id="272" r:id="rId19"/>
+    <p:sldId id="273" r:id="rId20"/>
+    <p:sldId id="274" r:id="rId21"/>
+    <p:sldId id="275" r:id="rId22"/>
+    <p:sldId id="276" r:id="rId23"/>
+    <p:sldId id="277" r:id="rId24"/>
+    <p:sldId id="278" r:id="rId25"/>
+    <p:sldId id="279" r:id="rId26"/>
+    <p:sldId id="280" r:id="rId27"/>
   </p:sldIdLst>
   <p:sldSz cx="12192000" cy="6858000"/>
   <p:notesSz cx="6858000" cy="9144000"/>
@@ -128,20 +129,7 @@
       </a:defRPr>
     </a:lvl9pPr>
   </p:defaultTextStyle>
-  <p:extLst>
-    <p:ext uri="{EFAFB233-063F-42B5-8137-9DF3F51BA10A}">
-      <p15:sldGuideLst xmlns:p15="http://schemas.microsoft.com/office/powerpoint/2012/main"/>
-    </p:ext>
-  </p:extLst>
 </p:presentation>
-</file>
-
-<file path=ppt/revisionInfo.xml><?xml version="1.0" encoding="utf-8"?>
-<p1510:revInfo xmlns:a="http://schemas.openxmlformats.org/drawingml/2006/main" xmlns:r="http://schemas.openxmlformats.org/officeDocument/2006/relationships" xmlns:p1510="http://schemas.microsoft.com/office/powerpoint/2015/10/main">
-  <p1510:revLst>
-    <p1510:client id="{0D6708AA-5517-433E-A3AC-B488FEF3DBF5}" v="2" dt="2026-03-31T00:49:45.330"/>
-  </p1510:revLst>
-</p1510:revInfo>
 </file>
 
 <file path=ppt/slideLayouts/slideLayout1.xml><?xml version="1.0" encoding="utf-8"?>
@@ -166,7 +154,7 @@
           <p:cNvPr id="2" name="Title 1">
             <a:extLst>
               <a:ext uri="{FF2B5EF4-FFF2-40B4-BE49-F238E27FC236}">
-                <a16:creationId xmlns:a16="http://schemas.microsoft.com/office/drawing/2014/main" id="{0B833EA4-6D85-77B6-9234-A9E4AF33FB9E}"/>
+                <a16:creationId xmlns:a16="http://schemas.microsoft.com/office/drawing/2014/main" id="{33BABEA9-9EFB-5A81-7244-13F2E6C72D8E}"/>
               </a:ext>
             </a:extLst>
           </p:cNvPr>
@@ -204,7 +192,7 @@
           <p:cNvPr id="3" name="Subtitle 2">
             <a:extLst>
               <a:ext uri="{FF2B5EF4-FFF2-40B4-BE49-F238E27FC236}">
-                <a16:creationId xmlns:a16="http://schemas.microsoft.com/office/drawing/2014/main" id="{4BE45F33-6650-4F83-1EA0-969EC3AB6503}"/>
+                <a16:creationId xmlns:a16="http://schemas.microsoft.com/office/drawing/2014/main" id="{ACB16139-04B4-6CE8-5F76-E24D5AAE7395}"/>
               </a:ext>
             </a:extLst>
           </p:cNvPr>
@@ -275,7 +263,7 @@
           <p:cNvPr id="4" name="Date Placeholder 3">
             <a:extLst>
               <a:ext uri="{FF2B5EF4-FFF2-40B4-BE49-F238E27FC236}">
-                <a16:creationId xmlns:a16="http://schemas.microsoft.com/office/drawing/2014/main" id="{85442571-8E86-F1A9-CB0B-DE4524017B96}"/>
+                <a16:creationId xmlns:a16="http://schemas.microsoft.com/office/drawing/2014/main" id="{4F461152-3A79-708B-A1DB-C9CF126E0D44}"/>
               </a:ext>
             </a:extLst>
           </p:cNvPr>
@@ -291,9 +279,9 @@
           <a:bodyPr/>
           <a:lstStyle/>
           <a:p>
-            <a:fld id="{86EA31F5-4D48-40F0-A61D-825EC73FB2DF}" type="datetimeFigureOut">
+            <a:fld id="{80E93315-FBCE-476D-880E-C4D57017A703}" type="datetimeFigureOut">
               <a:rPr lang="en-GB" smtClean="0"/>
-              <a:t>12/04/2026</a:t>
+              <a:t>11/05/2026</a:t>
             </a:fld>
             <a:endParaRPr lang="en-GB"/>
           </a:p>
@@ -304,7 +292,7 @@
           <p:cNvPr id="5" name="Footer Placeholder 4">
             <a:extLst>
               <a:ext uri="{FF2B5EF4-FFF2-40B4-BE49-F238E27FC236}">
-                <a16:creationId xmlns:a16="http://schemas.microsoft.com/office/drawing/2014/main" id="{8E5B8BD6-25B7-8443-3587-EFDC74DB1760}"/>
+                <a16:creationId xmlns:a16="http://schemas.microsoft.com/office/drawing/2014/main" id="{7A2F55E3-0B5A-A915-8EA6-908968EDBF4F}"/>
               </a:ext>
             </a:extLst>
           </p:cNvPr>
@@ -329,7 +317,7 @@
           <p:cNvPr id="6" name="Slide Number Placeholder 5">
             <a:extLst>
               <a:ext uri="{FF2B5EF4-FFF2-40B4-BE49-F238E27FC236}">
-                <a16:creationId xmlns:a16="http://schemas.microsoft.com/office/drawing/2014/main" id="{678D01C9-D03D-A2C4-D617-8D988ADE2648}"/>
+                <a16:creationId xmlns:a16="http://schemas.microsoft.com/office/drawing/2014/main" id="{47F6A3F9-6F25-0CE6-9BBC-8B75A6334E1E}"/>
               </a:ext>
             </a:extLst>
           </p:cNvPr>
@@ -345,7 +333,7 @@
           <a:bodyPr/>
           <a:lstStyle/>
           <a:p>
-            <a:fld id="{F9FBF8E4-69AE-49CF-9F9E-EE5CD0D95335}" type="slidenum">
+            <a:fld id="{6D53001D-B168-4697-92BC-8F16254BD672}" type="slidenum">
               <a:rPr lang="en-GB" smtClean="0"/>
               <a:t>‹#›</a:t>
             </a:fld>
@@ -356,7 +344,7 @@
     </p:spTree>
     <p:extLst>
       <p:ext uri="{BB962C8B-B14F-4D97-AF65-F5344CB8AC3E}">
-        <p14:creationId xmlns:p14="http://schemas.microsoft.com/office/powerpoint/2010/main" val="3203894999"/>
+        <p14:creationId xmlns:p14="http://schemas.microsoft.com/office/powerpoint/2010/main" val="4208368265"/>
       </p:ext>
     </p:extLst>
   </p:cSld>
@@ -388,7 +376,7 @@
           <p:cNvPr id="2" name="Title 1">
             <a:extLst>
               <a:ext uri="{FF2B5EF4-FFF2-40B4-BE49-F238E27FC236}">
-                <a16:creationId xmlns:a16="http://schemas.microsoft.com/office/drawing/2014/main" id="{674521B8-A298-D6DF-0294-185A4E9C8E7A}"/>
+                <a16:creationId xmlns:a16="http://schemas.microsoft.com/office/drawing/2014/main" id="{292E1980-121D-0BC8-8FF9-6F1A558CABE4}"/>
               </a:ext>
             </a:extLst>
           </p:cNvPr>
@@ -417,7 +405,7 @@
           <p:cNvPr id="3" name="Vertical Text Placeholder 2">
             <a:extLst>
               <a:ext uri="{FF2B5EF4-FFF2-40B4-BE49-F238E27FC236}">
-                <a16:creationId xmlns:a16="http://schemas.microsoft.com/office/drawing/2014/main" id="{A826F777-7D80-C7A1-907A-10C0CDD62CAF}"/>
+                <a16:creationId xmlns:a16="http://schemas.microsoft.com/office/drawing/2014/main" id="{4EA5D057-8A17-2C53-D84C-9719F0C154EF}"/>
               </a:ext>
             </a:extLst>
           </p:cNvPr>
@@ -475,7 +463,7 @@
           <p:cNvPr id="4" name="Date Placeholder 3">
             <a:extLst>
               <a:ext uri="{FF2B5EF4-FFF2-40B4-BE49-F238E27FC236}">
-                <a16:creationId xmlns:a16="http://schemas.microsoft.com/office/drawing/2014/main" id="{D0F0D364-F362-5162-2BC6-6BC686DF0968}"/>
+                <a16:creationId xmlns:a16="http://schemas.microsoft.com/office/drawing/2014/main" id="{908E62B5-CB7E-EBE6-EDBD-7AB54CAA6869}"/>
               </a:ext>
             </a:extLst>
           </p:cNvPr>
@@ -491,9 +479,9 @@
           <a:bodyPr/>
           <a:lstStyle/>
           <a:p>
-            <a:fld id="{86EA31F5-4D48-40F0-A61D-825EC73FB2DF}" type="datetimeFigureOut">
+            <a:fld id="{80E93315-FBCE-476D-880E-C4D57017A703}" type="datetimeFigureOut">
               <a:rPr lang="en-GB" smtClean="0"/>
-              <a:t>12/04/2026</a:t>
+              <a:t>11/05/2026</a:t>
             </a:fld>
             <a:endParaRPr lang="en-GB"/>
           </a:p>
@@ -504,7 +492,7 @@
           <p:cNvPr id="5" name="Footer Placeholder 4">
             <a:extLst>
               <a:ext uri="{FF2B5EF4-FFF2-40B4-BE49-F238E27FC236}">
-                <a16:creationId xmlns:a16="http://schemas.microsoft.com/office/drawing/2014/main" id="{8A670F82-90F2-B52B-4BDF-3F6444777C73}"/>
+                <a16:creationId xmlns:a16="http://schemas.microsoft.com/office/drawing/2014/main" id="{F62222ED-E1A6-6752-424E-F8FABE3AE5FB}"/>
               </a:ext>
             </a:extLst>
           </p:cNvPr>
@@ -529,7 +517,7 @@
           <p:cNvPr id="6" name="Slide Number Placeholder 5">
             <a:extLst>
               <a:ext uri="{FF2B5EF4-FFF2-40B4-BE49-F238E27FC236}">
-                <a16:creationId xmlns:a16="http://schemas.microsoft.com/office/drawing/2014/main" id="{FD35711C-5988-F215-6D55-8BC5273A1173}"/>
+                <a16:creationId xmlns:a16="http://schemas.microsoft.com/office/drawing/2014/main" id="{4C0AD66C-2366-9881-C0BD-77C67B9FAB10}"/>
               </a:ext>
             </a:extLst>
           </p:cNvPr>
@@ -545,7 +533,7 @@
           <a:bodyPr/>
           <a:lstStyle/>
           <a:p>
-            <a:fld id="{F9FBF8E4-69AE-49CF-9F9E-EE5CD0D95335}" type="slidenum">
+            <a:fld id="{6D53001D-B168-4697-92BC-8F16254BD672}" type="slidenum">
               <a:rPr lang="en-GB" smtClean="0"/>
               <a:t>‹#›</a:t>
             </a:fld>
@@ -556,7 +544,7 @@
     </p:spTree>
     <p:extLst>
       <p:ext uri="{BB962C8B-B14F-4D97-AF65-F5344CB8AC3E}">
-        <p14:creationId xmlns:p14="http://schemas.microsoft.com/office/powerpoint/2010/main" val="921827105"/>
+        <p14:creationId xmlns:p14="http://schemas.microsoft.com/office/powerpoint/2010/main" val="1162514548"/>
       </p:ext>
     </p:extLst>
   </p:cSld>
@@ -588,7 +576,7 @@
           <p:cNvPr id="2" name="Vertical Title 1">
             <a:extLst>
               <a:ext uri="{FF2B5EF4-FFF2-40B4-BE49-F238E27FC236}">
-                <a16:creationId xmlns:a16="http://schemas.microsoft.com/office/drawing/2014/main" id="{92E281B3-88EE-B8E6-0F78-189D1F3A6F57}"/>
+                <a16:creationId xmlns:a16="http://schemas.microsoft.com/office/drawing/2014/main" id="{B78030A2-8566-D8B8-0C9B-43428B2D8076}"/>
               </a:ext>
             </a:extLst>
           </p:cNvPr>
@@ -622,7 +610,7 @@
           <p:cNvPr id="3" name="Vertical Text Placeholder 2">
             <a:extLst>
               <a:ext uri="{FF2B5EF4-FFF2-40B4-BE49-F238E27FC236}">
-                <a16:creationId xmlns:a16="http://schemas.microsoft.com/office/drawing/2014/main" id="{529AAAF4-A742-52BA-3B48-368B5D676E9E}"/>
+                <a16:creationId xmlns:a16="http://schemas.microsoft.com/office/drawing/2014/main" id="{F2A1D8A9-7F52-A4A4-E0E5-B224617E51D2}"/>
               </a:ext>
             </a:extLst>
           </p:cNvPr>
@@ -685,7 +673,7 @@
           <p:cNvPr id="4" name="Date Placeholder 3">
             <a:extLst>
               <a:ext uri="{FF2B5EF4-FFF2-40B4-BE49-F238E27FC236}">
-                <a16:creationId xmlns:a16="http://schemas.microsoft.com/office/drawing/2014/main" id="{75067E9A-CA66-A8A5-2B45-DFEB00E4B8C5}"/>
+                <a16:creationId xmlns:a16="http://schemas.microsoft.com/office/drawing/2014/main" id="{E265FB4E-E400-6045-CE3C-5ECEAAF3AEBE}"/>
               </a:ext>
             </a:extLst>
           </p:cNvPr>
@@ -701,9 +689,9 @@
           <a:bodyPr/>
           <a:lstStyle/>
           <a:p>
-            <a:fld id="{86EA31F5-4D48-40F0-A61D-825EC73FB2DF}" type="datetimeFigureOut">
+            <a:fld id="{80E93315-FBCE-476D-880E-C4D57017A703}" type="datetimeFigureOut">
               <a:rPr lang="en-GB" smtClean="0"/>
-              <a:t>12/04/2026</a:t>
+              <a:t>11/05/2026</a:t>
             </a:fld>
             <a:endParaRPr lang="en-GB"/>
           </a:p>
@@ -714,7 +702,7 @@
           <p:cNvPr id="5" name="Footer Placeholder 4">
             <a:extLst>
               <a:ext uri="{FF2B5EF4-FFF2-40B4-BE49-F238E27FC236}">
-                <a16:creationId xmlns:a16="http://schemas.microsoft.com/office/drawing/2014/main" id="{368D131F-C19C-4DB8-103C-1B199A68E61C}"/>
+                <a16:creationId xmlns:a16="http://schemas.microsoft.com/office/drawing/2014/main" id="{80DC5741-1109-245E-16C9-0C575AA13673}"/>
               </a:ext>
             </a:extLst>
           </p:cNvPr>
@@ -739,7 +727,7 @@
           <p:cNvPr id="6" name="Slide Number Placeholder 5">
             <a:extLst>
               <a:ext uri="{FF2B5EF4-FFF2-40B4-BE49-F238E27FC236}">
-                <a16:creationId xmlns:a16="http://schemas.microsoft.com/office/drawing/2014/main" id="{E522C4D3-9007-53B4-4379-940D198F98B2}"/>
+                <a16:creationId xmlns:a16="http://schemas.microsoft.com/office/drawing/2014/main" id="{4F11D1E5-66A9-2BDD-DD89-9FE4DF1F1AA4}"/>
               </a:ext>
             </a:extLst>
           </p:cNvPr>
@@ -755,7 +743,7 @@
           <a:bodyPr/>
           <a:lstStyle/>
           <a:p>
-            <a:fld id="{F9FBF8E4-69AE-49CF-9F9E-EE5CD0D95335}" type="slidenum">
+            <a:fld id="{6D53001D-B168-4697-92BC-8F16254BD672}" type="slidenum">
               <a:rPr lang="en-GB" smtClean="0"/>
               <a:t>‹#›</a:t>
             </a:fld>
@@ -766,7 +754,7 @@
     </p:spTree>
     <p:extLst>
       <p:ext uri="{BB962C8B-B14F-4D97-AF65-F5344CB8AC3E}">
-        <p14:creationId xmlns:p14="http://schemas.microsoft.com/office/powerpoint/2010/main" val="2272411794"/>
+        <p14:creationId xmlns:p14="http://schemas.microsoft.com/office/powerpoint/2010/main" val="2696263110"/>
       </p:ext>
     </p:extLst>
   </p:cSld>
@@ -798,7 +786,7 @@
           <p:cNvPr id="2" name="Title 1">
             <a:extLst>
               <a:ext uri="{FF2B5EF4-FFF2-40B4-BE49-F238E27FC236}">
-                <a16:creationId xmlns:a16="http://schemas.microsoft.com/office/drawing/2014/main" id="{C9615374-883C-B5F2-7741-06211A636FF5}"/>
+                <a16:creationId xmlns:a16="http://schemas.microsoft.com/office/drawing/2014/main" id="{0773821F-2F88-D99E-6A4F-26B9149C7151}"/>
               </a:ext>
             </a:extLst>
           </p:cNvPr>
@@ -827,7 +815,7 @@
           <p:cNvPr id="3" name="Content Placeholder 2">
             <a:extLst>
               <a:ext uri="{FF2B5EF4-FFF2-40B4-BE49-F238E27FC236}">
-                <a16:creationId xmlns:a16="http://schemas.microsoft.com/office/drawing/2014/main" id="{08117C7E-F35F-153E-5BBF-257B6EED57D2}"/>
+                <a16:creationId xmlns:a16="http://schemas.microsoft.com/office/drawing/2014/main" id="{B5052582-B2E9-25D2-D9B5-4195AFFE6638}"/>
               </a:ext>
             </a:extLst>
           </p:cNvPr>
@@ -885,7 +873,7 @@
           <p:cNvPr id="4" name="Date Placeholder 3">
             <a:extLst>
               <a:ext uri="{FF2B5EF4-FFF2-40B4-BE49-F238E27FC236}">
-                <a16:creationId xmlns:a16="http://schemas.microsoft.com/office/drawing/2014/main" id="{C90D242B-77B6-263A-EDA9-DEF5E0D50C32}"/>
+                <a16:creationId xmlns:a16="http://schemas.microsoft.com/office/drawing/2014/main" id="{B7EEB3E4-9F9C-5813-49D7-FE3AB1BC3C19}"/>
               </a:ext>
             </a:extLst>
           </p:cNvPr>
@@ -901,9 +889,9 @@
           <a:bodyPr/>
           <a:lstStyle/>
           <a:p>
-            <a:fld id="{86EA31F5-4D48-40F0-A61D-825EC73FB2DF}" type="datetimeFigureOut">
+            <a:fld id="{80E93315-FBCE-476D-880E-C4D57017A703}" type="datetimeFigureOut">
               <a:rPr lang="en-GB" smtClean="0"/>
-              <a:t>12/04/2026</a:t>
+              <a:t>11/05/2026</a:t>
             </a:fld>
             <a:endParaRPr lang="en-GB"/>
           </a:p>
@@ -914,7 +902,7 @@
           <p:cNvPr id="5" name="Footer Placeholder 4">
             <a:extLst>
               <a:ext uri="{FF2B5EF4-FFF2-40B4-BE49-F238E27FC236}">
-                <a16:creationId xmlns:a16="http://schemas.microsoft.com/office/drawing/2014/main" id="{99CF0106-5F7F-22A0-451C-F848D099E3D6}"/>
+                <a16:creationId xmlns:a16="http://schemas.microsoft.com/office/drawing/2014/main" id="{5A250850-8C2E-819B-604C-B014D234ADEC}"/>
               </a:ext>
             </a:extLst>
           </p:cNvPr>
@@ -939,7 +927,7 @@
           <p:cNvPr id="6" name="Slide Number Placeholder 5">
             <a:extLst>
               <a:ext uri="{FF2B5EF4-FFF2-40B4-BE49-F238E27FC236}">
-                <a16:creationId xmlns:a16="http://schemas.microsoft.com/office/drawing/2014/main" id="{EFFCAC94-C646-5361-F554-096308F91947}"/>
+                <a16:creationId xmlns:a16="http://schemas.microsoft.com/office/drawing/2014/main" id="{D7C6A63F-138C-B756-50CD-89DC13DC1D16}"/>
               </a:ext>
             </a:extLst>
           </p:cNvPr>
@@ -955,7 +943,7 @@
           <a:bodyPr/>
           <a:lstStyle/>
           <a:p>
-            <a:fld id="{F9FBF8E4-69AE-49CF-9F9E-EE5CD0D95335}" type="slidenum">
+            <a:fld id="{6D53001D-B168-4697-92BC-8F16254BD672}" type="slidenum">
               <a:rPr lang="en-GB" smtClean="0"/>
               <a:t>‹#›</a:t>
             </a:fld>
@@ -966,7 +954,7 @@
     </p:spTree>
     <p:extLst>
       <p:ext uri="{BB962C8B-B14F-4D97-AF65-F5344CB8AC3E}">
-        <p14:creationId xmlns:p14="http://schemas.microsoft.com/office/powerpoint/2010/main" val="3951183520"/>
+        <p14:creationId xmlns:p14="http://schemas.microsoft.com/office/powerpoint/2010/main" val="939105808"/>
       </p:ext>
     </p:extLst>
   </p:cSld>
@@ -998,7 +986,7 @@
           <p:cNvPr id="2" name="Title 1">
             <a:extLst>
               <a:ext uri="{FF2B5EF4-FFF2-40B4-BE49-F238E27FC236}">
-                <a16:creationId xmlns:a16="http://schemas.microsoft.com/office/drawing/2014/main" id="{43A8D1CA-3986-F800-2558-90ABA355963C}"/>
+                <a16:creationId xmlns:a16="http://schemas.microsoft.com/office/drawing/2014/main" id="{180BABDC-C573-67C7-AAEE-0D7E77804D01}"/>
               </a:ext>
             </a:extLst>
           </p:cNvPr>
@@ -1036,7 +1024,7 @@
           <p:cNvPr id="3" name="Text Placeholder 2">
             <a:extLst>
               <a:ext uri="{FF2B5EF4-FFF2-40B4-BE49-F238E27FC236}">
-                <a16:creationId xmlns:a16="http://schemas.microsoft.com/office/drawing/2014/main" id="{70511ED7-5DF2-ECD2-E82C-D8E6650DD668}"/>
+                <a16:creationId xmlns:a16="http://schemas.microsoft.com/office/drawing/2014/main" id="{C8CA2144-BFE0-853B-3A18-4B76EC0E6A38}"/>
               </a:ext>
             </a:extLst>
           </p:cNvPr>
@@ -1061,7 +1049,7 @@
               <a:defRPr sz="2400">
                 <a:solidFill>
                   <a:schemeClr val="tx1">
-                    <a:tint val="82000"/>
+                    <a:tint val="75000"/>
                   </a:schemeClr>
                 </a:solidFill>
               </a:defRPr>
@@ -1071,7 +1059,7 @@
               <a:defRPr sz="2000">
                 <a:solidFill>
                   <a:schemeClr val="tx1">
-                    <a:tint val="82000"/>
+                    <a:tint val="75000"/>
                   </a:schemeClr>
                 </a:solidFill>
               </a:defRPr>
@@ -1081,7 +1069,7 @@
               <a:defRPr sz="1800">
                 <a:solidFill>
                   <a:schemeClr val="tx1">
-                    <a:tint val="82000"/>
+                    <a:tint val="75000"/>
                   </a:schemeClr>
                 </a:solidFill>
               </a:defRPr>
@@ -1091,7 +1079,7 @@
               <a:defRPr sz="1600">
                 <a:solidFill>
                   <a:schemeClr val="tx1">
-                    <a:tint val="82000"/>
+                    <a:tint val="75000"/>
                   </a:schemeClr>
                 </a:solidFill>
               </a:defRPr>
@@ -1101,7 +1089,7 @@
               <a:defRPr sz="1600">
                 <a:solidFill>
                   <a:schemeClr val="tx1">
-                    <a:tint val="82000"/>
+                    <a:tint val="75000"/>
                   </a:schemeClr>
                 </a:solidFill>
               </a:defRPr>
@@ -1111,7 +1099,7 @@
               <a:defRPr sz="1600">
                 <a:solidFill>
                   <a:schemeClr val="tx1">
-                    <a:tint val="82000"/>
+                    <a:tint val="75000"/>
                   </a:schemeClr>
                 </a:solidFill>
               </a:defRPr>
@@ -1121,7 +1109,7 @@
               <a:defRPr sz="1600">
                 <a:solidFill>
                   <a:schemeClr val="tx1">
-                    <a:tint val="82000"/>
+                    <a:tint val="75000"/>
                   </a:schemeClr>
                 </a:solidFill>
               </a:defRPr>
@@ -1131,7 +1119,7 @@
               <a:defRPr sz="1600">
                 <a:solidFill>
                   <a:schemeClr val="tx1">
-                    <a:tint val="82000"/>
+                    <a:tint val="75000"/>
                   </a:schemeClr>
                 </a:solidFill>
               </a:defRPr>
@@ -1141,7 +1129,7 @@
               <a:defRPr sz="1600">
                 <a:solidFill>
                   <a:schemeClr val="tx1">
-                    <a:tint val="82000"/>
+                    <a:tint val="75000"/>
                   </a:schemeClr>
                 </a:solidFill>
               </a:defRPr>
@@ -1161,7 +1149,7 @@
           <p:cNvPr id="4" name="Date Placeholder 3">
             <a:extLst>
               <a:ext uri="{FF2B5EF4-FFF2-40B4-BE49-F238E27FC236}">
-                <a16:creationId xmlns:a16="http://schemas.microsoft.com/office/drawing/2014/main" id="{2B2EC228-2ECF-A5C0-7D5C-6FDC6446E5A3}"/>
+                <a16:creationId xmlns:a16="http://schemas.microsoft.com/office/drawing/2014/main" id="{1A799C61-02DA-9346-7748-A95CD1B9E2C7}"/>
               </a:ext>
             </a:extLst>
           </p:cNvPr>
@@ -1177,9 +1165,9 @@
           <a:bodyPr/>
           <a:lstStyle/>
           <a:p>
-            <a:fld id="{86EA31F5-4D48-40F0-A61D-825EC73FB2DF}" type="datetimeFigureOut">
+            <a:fld id="{80E93315-FBCE-476D-880E-C4D57017A703}" type="datetimeFigureOut">
               <a:rPr lang="en-GB" smtClean="0"/>
-              <a:t>12/04/2026</a:t>
+              <a:t>11/05/2026</a:t>
             </a:fld>
             <a:endParaRPr lang="en-GB"/>
           </a:p>
@@ -1190,7 +1178,7 @@
           <p:cNvPr id="5" name="Footer Placeholder 4">
             <a:extLst>
               <a:ext uri="{FF2B5EF4-FFF2-40B4-BE49-F238E27FC236}">
-                <a16:creationId xmlns:a16="http://schemas.microsoft.com/office/drawing/2014/main" id="{5B60DB8D-0735-9E68-3A65-AC2025985E2C}"/>
+                <a16:creationId xmlns:a16="http://schemas.microsoft.com/office/drawing/2014/main" id="{5B46852A-7C30-F12E-D7EB-1DA81AD6F69E}"/>
               </a:ext>
             </a:extLst>
           </p:cNvPr>
@@ -1215,7 +1203,7 @@
           <p:cNvPr id="6" name="Slide Number Placeholder 5">
             <a:extLst>
               <a:ext uri="{FF2B5EF4-FFF2-40B4-BE49-F238E27FC236}">
-                <a16:creationId xmlns:a16="http://schemas.microsoft.com/office/drawing/2014/main" id="{C9CC4414-8A88-9CF0-22F9-E08831ED89E3}"/>
+                <a16:creationId xmlns:a16="http://schemas.microsoft.com/office/drawing/2014/main" id="{6F1B6B34-5D3B-6241-CFFB-2EF2A0575958}"/>
               </a:ext>
             </a:extLst>
           </p:cNvPr>
@@ -1231,7 +1219,7 @@
           <a:bodyPr/>
           <a:lstStyle/>
           <a:p>
-            <a:fld id="{F9FBF8E4-69AE-49CF-9F9E-EE5CD0D95335}" type="slidenum">
+            <a:fld id="{6D53001D-B168-4697-92BC-8F16254BD672}" type="slidenum">
               <a:rPr lang="en-GB" smtClean="0"/>
               <a:t>‹#›</a:t>
             </a:fld>
@@ -1242,7 +1230,7 @@
     </p:spTree>
     <p:extLst>
       <p:ext uri="{BB962C8B-B14F-4D97-AF65-F5344CB8AC3E}">
-        <p14:creationId xmlns:p14="http://schemas.microsoft.com/office/powerpoint/2010/main" val="2524581545"/>
+        <p14:creationId xmlns:p14="http://schemas.microsoft.com/office/powerpoint/2010/main" val="1727869446"/>
       </p:ext>
     </p:extLst>
   </p:cSld>
@@ -1274,7 +1262,7 @@
           <p:cNvPr id="2" name="Title 1">
             <a:extLst>
               <a:ext uri="{FF2B5EF4-FFF2-40B4-BE49-F238E27FC236}">
-                <a16:creationId xmlns:a16="http://schemas.microsoft.com/office/drawing/2014/main" id="{8AE3BE73-3D1F-938F-7AD8-93191CC20E47}"/>
+                <a16:creationId xmlns:a16="http://schemas.microsoft.com/office/drawing/2014/main" id="{F2D6B5B3-6806-0895-44A9-BA9D7AFC79F7}"/>
               </a:ext>
             </a:extLst>
           </p:cNvPr>
@@ -1303,7 +1291,7 @@
           <p:cNvPr id="3" name="Content Placeholder 2">
             <a:extLst>
               <a:ext uri="{FF2B5EF4-FFF2-40B4-BE49-F238E27FC236}">
-                <a16:creationId xmlns:a16="http://schemas.microsoft.com/office/drawing/2014/main" id="{6AE5A556-C36B-CD71-006E-BB0803A41A8E}"/>
+                <a16:creationId xmlns:a16="http://schemas.microsoft.com/office/drawing/2014/main" id="{E43F792F-BF87-5CB4-414E-24E8954DF15F}"/>
               </a:ext>
             </a:extLst>
           </p:cNvPr>
@@ -1366,7 +1354,7 @@
           <p:cNvPr id="4" name="Content Placeholder 3">
             <a:extLst>
               <a:ext uri="{FF2B5EF4-FFF2-40B4-BE49-F238E27FC236}">
-                <a16:creationId xmlns:a16="http://schemas.microsoft.com/office/drawing/2014/main" id="{74718AC3-98EC-13BB-3EB2-AB26BB45ACBA}"/>
+                <a16:creationId xmlns:a16="http://schemas.microsoft.com/office/drawing/2014/main" id="{5291B213-92B5-2F79-43BA-2EB214AEEC0C}"/>
               </a:ext>
             </a:extLst>
           </p:cNvPr>
@@ -1429,7 +1417,7 @@
           <p:cNvPr id="5" name="Date Placeholder 4">
             <a:extLst>
               <a:ext uri="{FF2B5EF4-FFF2-40B4-BE49-F238E27FC236}">
-                <a16:creationId xmlns:a16="http://schemas.microsoft.com/office/drawing/2014/main" id="{A2676C7D-C2C5-B84C-878F-5866188577DC}"/>
+                <a16:creationId xmlns:a16="http://schemas.microsoft.com/office/drawing/2014/main" id="{1A66A0E8-52B6-6E61-B3E0-7503A16FE1AD}"/>
               </a:ext>
             </a:extLst>
           </p:cNvPr>
@@ -1445,9 +1433,9 @@
           <a:bodyPr/>
           <a:lstStyle/>
           <a:p>
-            <a:fld id="{86EA31F5-4D48-40F0-A61D-825EC73FB2DF}" type="datetimeFigureOut">
+            <a:fld id="{80E93315-FBCE-476D-880E-C4D57017A703}" type="datetimeFigureOut">
               <a:rPr lang="en-GB" smtClean="0"/>
-              <a:t>12/04/2026</a:t>
+              <a:t>11/05/2026</a:t>
             </a:fld>
             <a:endParaRPr lang="en-GB"/>
           </a:p>
@@ -1458,7 +1446,7 @@
           <p:cNvPr id="6" name="Footer Placeholder 5">
             <a:extLst>
               <a:ext uri="{FF2B5EF4-FFF2-40B4-BE49-F238E27FC236}">
-                <a16:creationId xmlns:a16="http://schemas.microsoft.com/office/drawing/2014/main" id="{A923286E-FDB7-3997-7FD4-8B8497CAC023}"/>
+                <a16:creationId xmlns:a16="http://schemas.microsoft.com/office/drawing/2014/main" id="{4C8573AE-4434-9950-5F3D-A671AA4C0A64}"/>
               </a:ext>
             </a:extLst>
           </p:cNvPr>
@@ -1483,7 +1471,7 @@
           <p:cNvPr id="7" name="Slide Number Placeholder 6">
             <a:extLst>
               <a:ext uri="{FF2B5EF4-FFF2-40B4-BE49-F238E27FC236}">
-                <a16:creationId xmlns:a16="http://schemas.microsoft.com/office/drawing/2014/main" id="{A833A71C-D569-9BA6-E6FE-9E8E9812DD4D}"/>
+                <a16:creationId xmlns:a16="http://schemas.microsoft.com/office/drawing/2014/main" id="{F7EA558A-4346-DEAF-4A86-BB5B8002D281}"/>
               </a:ext>
             </a:extLst>
           </p:cNvPr>
@@ -1499,7 +1487,7 @@
           <a:bodyPr/>
           <a:lstStyle/>
           <a:p>
-            <a:fld id="{F9FBF8E4-69AE-49CF-9F9E-EE5CD0D95335}" type="slidenum">
+            <a:fld id="{6D53001D-B168-4697-92BC-8F16254BD672}" type="slidenum">
               <a:rPr lang="en-GB" smtClean="0"/>
               <a:t>‹#›</a:t>
             </a:fld>
@@ -1510,7 +1498,7 @@
     </p:spTree>
     <p:extLst>
       <p:ext uri="{BB962C8B-B14F-4D97-AF65-F5344CB8AC3E}">
-        <p14:creationId xmlns:p14="http://schemas.microsoft.com/office/powerpoint/2010/main" val="1570756740"/>
+        <p14:creationId xmlns:p14="http://schemas.microsoft.com/office/powerpoint/2010/main" val="1266436591"/>
       </p:ext>
     </p:extLst>
   </p:cSld>
@@ -1542,7 +1530,7 @@
           <p:cNvPr id="2" name="Title 1">
             <a:extLst>
               <a:ext uri="{FF2B5EF4-FFF2-40B4-BE49-F238E27FC236}">
-                <a16:creationId xmlns:a16="http://schemas.microsoft.com/office/drawing/2014/main" id="{3ABDC903-C74A-00FF-9405-2E4683828709}"/>
+                <a16:creationId xmlns:a16="http://schemas.microsoft.com/office/drawing/2014/main" id="{5386CD31-A843-C428-A629-11E19A5B6408}"/>
               </a:ext>
             </a:extLst>
           </p:cNvPr>
@@ -1576,7 +1564,7 @@
           <p:cNvPr id="3" name="Text Placeholder 2">
             <a:extLst>
               <a:ext uri="{FF2B5EF4-FFF2-40B4-BE49-F238E27FC236}">
-                <a16:creationId xmlns:a16="http://schemas.microsoft.com/office/drawing/2014/main" id="{E8256092-9743-43BB-C1C0-1576C68379DB}"/>
+                <a16:creationId xmlns:a16="http://schemas.microsoft.com/office/drawing/2014/main" id="{1B57766F-7B0E-ACCD-D9A3-50AB2B1B95D4}"/>
               </a:ext>
             </a:extLst>
           </p:cNvPr>
@@ -1647,7 +1635,7 @@
           <p:cNvPr id="4" name="Content Placeholder 3">
             <a:extLst>
               <a:ext uri="{FF2B5EF4-FFF2-40B4-BE49-F238E27FC236}">
-                <a16:creationId xmlns:a16="http://schemas.microsoft.com/office/drawing/2014/main" id="{5BDA2160-E4D1-1188-1930-BBBCA732E92C}"/>
+                <a16:creationId xmlns:a16="http://schemas.microsoft.com/office/drawing/2014/main" id="{74301E6E-369D-B1F5-C08D-7B6517592034}"/>
               </a:ext>
             </a:extLst>
           </p:cNvPr>
@@ -1710,7 +1698,7 @@
           <p:cNvPr id="5" name="Text Placeholder 4">
             <a:extLst>
               <a:ext uri="{FF2B5EF4-FFF2-40B4-BE49-F238E27FC236}">
-                <a16:creationId xmlns:a16="http://schemas.microsoft.com/office/drawing/2014/main" id="{11C91B48-0CC9-A095-6221-B7E7B8A5FD86}"/>
+                <a16:creationId xmlns:a16="http://schemas.microsoft.com/office/drawing/2014/main" id="{EF980B86-21B5-F6BF-48AE-671224512B28}"/>
               </a:ext>
             </a:extLst>
           </p:cNvPr>
@@ -1781,7 +1769,7 @@
           <p:cNvPr id="6" name="Content Placeholder 5">
             <a:extLst>
               <a:ext uri="{FF2B5EF4-FFF2-40B4-BE49-F238E27FC236}">
-                <a16:creationId xmlns:a16="http://schemas.microsoft.com/office/drawing/2014/main" id="{6B5B3830-AF47-0B7E-ECEA-C07868717CD0}"/>
+                <a16:creationId xmlns:a16="http://schemas.microsoft.com/office/drawing/2014/main" id="{A9F8F89E-D148-77C5-5C1E-93C87312DC1C}"/>
               </a:ext>
             </a:extLst>
           </p:cNvPr>
@@ -1844,7 +1832,7 @@
           <p:cNvPr id="7" name="Date Placeholder 6">
             <a:extLst>
               <a:ext uri="{FF2B5EF4-FFF2-40B4-BE49-F238E27FC236}">
-                <a16:creationId xmlns:a16="http://schemas.microsoft.com/office/drawing/2014/main" id="{8C155BEB-368B-3005-8E0F-AD13E600E36F}"/>
+                <a16:creationId xmlns:a16="http://schemas.microsoft.com/office/drawing/2014/main" id="{138A21E3-0427-F112-DFE7-881F9175174E}"/>
               </a:ext>
             </a:extLst>
           </p:cNvPr>
@@ -1860,9 +1848,9 @@
           <a:bodyPr/>
           <a:lstStyle/>
           <a:p>
-            <a:fld id="{86EA31F5-4D48-40F0-A61D-825EC73FB2DF}" type="datetimeFigureOut">
+            <a:fld id="{80E93315-FBCE-476D-880E-C4D57017A703}" type="datetimeFigureOut">
               <a:rPr lang="en-GB" smtClean="0"/>
-              <a:t>12/04/2026</a:t>
+              <a:t>11/05/2026</a:t>
             </a:fld>
             <a:endParaRPr lang="en-GB"/>
           </a:p>
@@ -1873,7 +1861,7 @@
           <p:cNvPr id="8" name="Footer Placeholder 7">
             <a:extLst>
               <a:ext uri="{FF2B5EF4-FFF2-40B4-BE49-F238E27FC236}">
-                <a16:creationId xmlns:a16="http://schemas.microsoft.com/office/drawing/2014/main" id="{74670FBB-4F93-7578-85B9-41FAE785A067}"/>
+                <a16:creationId xmlns:a16="http://schemas.microsoft.com/office/drawing/2014/main" id="{A6FF596D-CA5F-F031-A0E3-68E247B5DE73}"/>
               </a:ext>
             </a:extLst>
           </p:cNvPr>
@@ -1898,7 +1886,7 @@
           <p:cNvPr id="9" name="Slide Number Placeholder 8">
             <a:extLst>
               <a:ext uri="{FF2B5EF4-FFF2-40B4-BE49-F238E27FC236}">
-                <a16:creationId xmlns:a16="http://schemas.microsoft.com/office/drawing/2014/main" id="{BB4C1177-EAD8-7C3B-69F4-DA078665DE8C}"/>
+                <a16:creationId xmlns:a16="http://schemas.microsoft.com/office/drawing/2014/main" id="{2EA2B863-C266-C6EC-75AE-67B53A8D10C6}"/>
               </a:ext>
             </a:extLst>
           </p:cNvPr>
@@ -1914,7 +1902,7 @@
           <a:bodyPr/>
           <a:lstStyle/>
           <a:p>
-            <a:fld id="{F9FBF8E4-69AE-49CF-9F9E-EE5CD0D95335}" type="slidenum">
+            <a:fld id="{6D53001D-B168-4697-92BC-8F16254BD672}" type="slidenum">
               <a:rPr lang="en-GB" smtClean="0"/>
               <a:t>‹#›</a:t>
             </a:fld>
@@ -1925,7 +1913,7 @@
     </p:spTree>
     <p:extLst>
       <p:ext uri="{BB962C8B-B14F-4D97-AF65-F5344CB8AC3E}">
-        <p14:creationId xmlns:p14="http://schemas.microsoft.com/office/powerpoint/2010/main" val="3100989821"/>
+        <p14:creationId xmlns:p14="http://schemas.microsoft.com/office/powerpoint/2010/main" val="1326200139"/>
       </p:ext>
     </p:extLst>
   </p:cSld>
@@ -1957,7 +1945,7 @@
           <p:cNvPr id="2" name="Title 1">
             <a:extLst>
               <a:ext uri="{FF2B5EF4-FFF2-40B4-BE49-F238E27FC236}">
-                <a16:creationId xmlns:a16="http://schemas.microsoft.com/office/drawing/2014/main" id="{782B7639-1D23-AFA4-55CE-BF677261C3C2}"/>
+                <a16:creationId xmlns:a16="http://schemas.microsoft.com/office/drawing/2014/main" id="{912E605F-5BCC-ACB0-CD33-02F2BF037C89}"/>
               </a:ext>
             </a:extLst>
           </p:cNvPr>
@@ -1986,7 +1974,7 @@
           <p:cNvPr id="3" name="Date Placeholder 2">
             <a:extLst>
               <a:ext uri="{FF2B5EF4-FFF2-40B4-BE49-F238E27FC236}">
-                <a16:creationId xmlns:a16="http://schemas.microsoft.com/office/drawing/2014/main" id="{9F33F047-8BE2-03D5-45B9-B4BF6EA30A82}"/>
+                <a16:creationId xmlns:a16="http://schemas.microsoft.com/office/drawing/2014/main" id="{C568E62A-008E-4571-246F-BFB4436226E8}"/>
               </a:ext>
             </a:extLst>
           </p:cNvPr>
@@ -2002,9 +1990,9 @@
           <a:bodyPr/>
           <a:lstStyle/>
           <a:p>
-            <a:fld id="{86EA31F5-4D48-40F0-A61D-825EC73FB2DF}" type="datetimeFigureOut">
+            <a:fld id="{80E93315-FBCE-476D-880E-C4D57017A703}" type="datetimeFigureOut">
               <a:rPr lang="en-GB" smtClean="0"/>
-              <a:t>12/04/2026</a:t>
+              <a:t>11/05/2026</a:t>
             </a:fld>
             <a:endParaRPr lang="en-GB"/>
           </a:p>
@@ -2015,7 +2003,7 @@
           <p:cNvPr id="4" name="Footer Placeholder 3">
             <a:extLst>
               <a:ext uri="{FF2B5EF4-FFF2-40B4-BE49-F238E27FC236}">
-                <a16:creationId xmlns:a16="http://schemas.microsoft.com/office/drawing/2014/main" id="{2582FFF6-5E25-153D-ED15-8FF5F97D02CA}"/>
+                <a16:creationId xmlns:a16="http://schemas.microsoft.com/office/drawing/2014/main" id="{CCB7E934-518D-2832-3C23-EEE637C1EB75}"/>
               </a:ext>
             </a:extLst>
           </p:cNvPr>
@@ -2040,7 +2028,7 @@
           <p:cNvPr id="5" name="Slide Number Placeholder 4">
             <a:extLst>
               <a:ext uri="{FF2B5EF4-FFF2-40B4-BE49-F238E27FC236}">
-                <a16:creationId xmlns:a16="http://schemas.microsoft.com/office/drawing/2014/main" id="{E7C3B7DF-CE88-9898-7D69-B23F00BE4027}"/>
+                <a16:creationId xmlns:a16="http://schemas.microsoft.com/office/drawing/2014/main" id="{D22ED511-112F-E140-4A79-B54C3ED398E3}"/>
               </a:ext>
             </a:extLst>
           </p:cNvPr>
@@ -2056,7 +2044,7 @@
           <a:bodyPr/>
           <a:lstStyle/>
           <a:p>
-            <a:fld id="{F9FBF8E4-69AE-49CF-9F9E-EE5CD0D95335}" type="slidenum">
+            <a:fld id="{6D53001D-B168-4697-92BC-8F16254BD672}" type="slidenum">
               <a:rPr lang="en-GB" smtClean="0"/>
               <a:t>‹#›</a:t>
             </a:fld>
@@ -2067,7 +2055,7 @@
     </p:spTree>
     <p:extLst>
       <p:ext uri="{BB962C8B-B14F-4D97-AF65-F5344CB8AC3E}">
-        <p14:creationId xmlns:p14="http://schemas.microsoft.com/office/powerpoint/2010/main" val="745796690"/>
+        <p14:creationId xmlns:p14="http://schemas.microsoft.com/office/powerpoint/2010/main" val="1871055262"/>
       </p:ext>
     </p:extLst>
   </p:cSld>
@@ -2099,7 +2087,7 @@
           <p:cNvPr id="2" name="Date Placeholder 1">
             <a:extLst>
               <a:ext uri="{FF2B5EF4-FFF2-40B4-BE49-F238E27FC236}">
-                <a16:creationId xmlns:a16="http://schemas.microsoft.com/office/drawing/2014/main" id="{774F0CBD-D560-7943-D98C-BDD6695D220D}"/>
+                <a16:creationId xmlns:a16="http://schemas.microsoft.com/office/drawing/2014/main" id="{D1F1A71D-288E-E7AD-C097-C3F237DF50A7}"/>
               </a:ext>
             </a:extLst>
           </p:cNvPr>
@@ -2115,9 +2103,9 @@
           <a:bodyPr/>
           <a:lstStyle/>
           <a:p>
-            <a:fld id="{86EA31F5-4D48-40F0-A61D-825EC73FB2DF}" type="datetimeFigureOut">
+            <a:fld id="{80E93315-FBCE-476D-880E-C4D57017A703}" type="datetimeFigureOut">
               <a:rPr lang="en-GB" smtClean="0"/>
-              <a:t>12/04/2026</a:t>
+              <a:t>11/05/2026</a:t>
             </a:fld>
             <a:endParaRPr lang="en-GB"/>
           </a:p>
@@ -2128,7 +2116,7 @@
           <p:cNvPr id="3" name="Footer Placeholder 2">
             <a:extLst>
               <a:ext uri="{FF2B5EF4-FFF2-40B4-BE49-F238E27FC236}">
-                <a16:creationId xmlns:a16="http://schemas.microsoft.com/office/drawing/2014/main" id="{70F64AF9-02DB-E764-0416-5565776E7247}"/>
+                <a16:creationId xmlns:a16="http://schemas.microsoft.com/office/drawing/2014/main" id="{EC363FE6-F680-5A22-3BEA-56ACB4CDB076}"/>
               </a:ext>
             </a:extLst>
           </p:cNvPr>
@@ -2153,7 +2141,7 @@
           <p:cNvPr id="4" name="Slide Number Placeholder 3">
             <a:extLst>
               <a:ext uri="{FF2B5EF4-FFF2-40B4-BE49-F238E27FC236}">
-                <a16:creationId xmlns:a16="http://schemas.microsoft.com/office/drawing/2014/main" id="{264B46AE-5078-8A1A-390A-EB34F0DA96BA}"/>
+                <a16:creationId xmlns:a16="http://schemas.microsoft.com/office/drawing/2014/main" id="{716AD541-3AFC-587A-1ECF-68EB7F1746E4}"/>
               </a:ext>
             </a:extLst>
           </p:cNvPr>
@@ -2169,7 +2157,7 @@
           <a:bodyPr/>
           <a:lstStyle/>
           <a:p>
-            <a:fld id="{F9FBF8E4-69AE-49CF-9F9E-EE5CD0D95335}" type="slidenum">
+            <a:fld id="{6D53001D-B168-4697-92BC-8F16254BD672}" type="slidenum">
               <a:rPr lang="en-GB" smtClean="0"/>
               <a:t>‹#›</a:t>
             </a:fld>
@@ -2180,7 +2168,7 @@
     </p:spTree>
     <p:extLst>
       <p:ext uri="{BB962C8B-B14F-4D97-AF65-F5344CB8AC3E}">
-        <p14:creationId xmlns:p14="http://schemas.microsoft.com/office/powerpoint/2010/main" val="1511610000"/>
+        <p14:creationId xmlns:p14="http://schemas.microsoft.com/office/powerpoint/2010/main" val="73846804"/>
       </p:ext>
     </p:extLst>
   </p:cSld>
@@ -2212,7 +2200,7 @@
           <p:cNvPr id="2" name="Title 1">
             <a:extLst>
               <a:ext uri="{FF2B5EF4-FFF2-40B4-BE49-F238E27FC236}">
-                <a16:creationId xmlns:a16="http://schemas.microsoft.com/office/drawing/2014/main" id="{5D58222C-EA5A-D492-568C-675D5D5A4E19}"/>
+                <a16:creationId xmlns:a16="http://schemas.microsoft.com/office/drawing/2014/main" id="{392B9636-8843-4316-58B1-E35A33D5F14E}"/>
               </a:ext>
             </a:extLst>
           </p:cNvPr>
@@ -2250,7 +2238,7 @@
           <p:cNvPr id="3" name="Content Placeholder 2">
             <a:extLst>
               <a:ext uri="{FF2B5EF4-FFF2-40B4-BE49-F238E27FC236}">
-                <a16:creationId xmlns:a16="http://schemas.microsoft.com/office/drawing/2014/main" id="{26A236DE-1D90-8BC1-B0C7-0B40020E5A2F}"/>
+                <a16:creationId xmlns:a16="http://schemas.microsoft.com/office/drawing/2014/main" id="{01AAD7F8-D492-5EC8-D90C-EE8EA6DA1F34}"/>
               </a:ext>
             </a:extLst>
           </p:cNvPr>
@@ -2341,7 +2329,7 @@
           <p:cNvPr id="4" name="Text Placeholder 3">
             <a:extLst>
               <a:ext uri="{FF2B5EF4-FFF2-40B4-BE49-F238E27FC236}">
-                <a16:creationId xmlns:a16="http://schemas.microsoft.com/office/drawing/2014/main" id="{5DA0E84B-AD28-A9F0-8275-F7068A887AF6}"/>
+                <a16:creationId xmlns:a16="http://schemas.microsoft.com/office/drawing/2014/main" id="{9E9570A7-2EA7-66D2-D706-06717E5AB287}"/>
               </a:ext>
             </a:extLst>
           </p:cNvPr>
@@ -2412,7 +2400,7 @@
           <p:cNvPr id="5" name="Date Placeholder 4">
             <a:extLst>
               <a:ext uri="{FF2B5EF4-FFF2-40B4-BE49-F238E27FC236}">
-                <a16:creationId xmlns:a16="http://schemas.microsoft.com/office/drawing/2014/main" id="{23FEDE47-1217-13D7-BA07-736DC9A2B2FB}"/>
+                <a16:creationId xmlns:a16="http://schemas.microsoft.com/office/drawing/2014/main" id="{E90F15DC-1E97-06DB-912B-67C5D699C511}"/>
               </a:ext>
             </a:extLst>
           </p:cNvPr>
@@ -2428,9 +2416,9 @@
           <a:bodyPr/>
           <a:lstStyle/>
           <a:p>
-            <a:fld id="{86EA31F5-4D48-40F0-A61D-825EC73FB2DF}" type="datetimeFigureOut">
+            <a:fld id="{80E93315-FBCE-476D-880E-C4D57017A703}" type="datetimeFigureOut">
               <a:rPr lang="en-GB" smtClean="0"/>
-              <a:t>12/04/2026</a:t>
+              <a:t>11/05/2026</a:t>
             </a:fld>
             <a:endParaRPr lang="en-GB"/>
           </a:p>
@@ -2441,7 +2429,7 @@
           <p:cNvPr id="6" name="Footer Placeholder 5">
             <a:extLst>
               <a:ext uri="{FF2B5EF4-FFF2-40B4-BE49-F238E27FC236}">
-                <a16:creationId xmlns:a16="http://schemas.microsoft.com/office/drawing/2014/main" id="{E49C3696-4409-B246-8722-92EDEECE51D5}"/>
+                <a16:creationId xmlns:a16="http://schemas.microsoft.com/office/drawing/2014/main" id="{534BB941-CCEE-2647-0452-E4598FF63CEE}"/>
               </a:ext>
             </a:extLst>
           </p:cNvPr>
@@ -2466,7 +2454,7 @@
           <p:cNvPr id="7" name="Slide Number Placeholder 6">
             <a:extLst>
               <a:ext uri="{FF2B5EF4-FFF2-40B4-BE49-F238E27FC236}">
-                <a16:creationId xmlns:a16="http://schemas.microsoft.com/office/drawing/2014/main" id="{B16165CF-EF58-67A4-2AB9-0DECBD12D8BB}"/>
+                <a16:creationId xmlns:a16="http://schemas.microsoft.com/office/drawing/2014/main" id="{D102E49F-2FB6-358F-44E6-2153A36BA0E6}"/>
               </a:ext>
             </a:extLst>
           </p:cNvPr>
@@ -2482,7 +2470,7 @@
           <a:bodyPr/>
           <a:lstStyle/>
           <a:p>
-            <a:fld id="{F9FBF8E4-69AE-49CF-9F9E-EE5CD0D95335}" type="slidenum">
+            <a:fld id="{6D53001D-B168-4697-92BC-8F16254BD672}" type="slidenum">
               <a:rPr lang="en-GB" smtClean="0"/>
               <a:t>‹#›</a:t>
             </a:fld>
@@ -2493,7 +2481,7 @@
     </p:spTree>
     <p:extLst>
       <p:ext uri="{BB962C8B-B14F-4D97-AF65-F5344CB8AC3E}">
-        <p14:creationId xmlns:p14="http://schemas.microsoft.com/office/powerpoint/2010/main" val="2293208305"/>
+        <p14:creationId xmlns:p14="http://schemas.microsoft.com/office/powerpoint/2010/main" val="1823766950"/>
       </p:ext>
     </p:extLst>
   </p:cSld>
@@ -2525,7 +2513,7 @@
           <p:cNvPr id="2" name="Title 1">
             <a:extLst>
               <a:ext uri="{FF2B5EF4-FFF2-40B4-BE49-F238E27FC236}">
-                <a16:creationId xmlns:a16="http://schemas.microsoft.com/office/drawing/2014/main" id="{A2438DFA-763D-CB69-5CC3-4606EFB20F62}"/>
+                <a16:creationId xmlns:a16="http://schemas.microsoft.com/office/drawing/2014/main" id="{C0114C05-B4CD-6D4F-728E-BD1DBF5E4F98}"/>
               </a:ext>
             </a:extLst>
           </p:cNvPr>
@@ -2563,7 +2551,7 @@
           <p:cNvPr id="3" name="Picture Placeholder 2">
             <a:extLst>
               <a:ext uri="{FF2B5EF4-FFF2-40B4-BE49-F238E27FC236}">
-                <a16:creationId xmlns:a16="http://schemas.microsoft.com/office/drawing/2014/main" id="{8B2D26B1-62E5-91B1-70DB-E72EA35A28EB}"/>
+                <a16:creationId xmlns:a16="http://schemas.microsoft.com/office/drawing/2014/main" id="{7ADDA8C4-A4BA-28BB-7BD0-44ADC1A84C14}"/>
               </a:ext>
             </a:extLst>
           </p:cNvPr>
@@ -2630,7 +2618,7 @@
           <p:cNvPr id="4" name="Text Placeholder 3">
             <a:extLst>
               <a:ext uri="{FF2B5EF4-FFF2-40B4-BE49-F238E27FC236}">
-                <a16:creationId xmlns:a16="http://schemas.microsoft.com/office/drawing/2014/main" id="{79BBA9FD-C53E-FAAE-D019-846E51CA96C2}"/>
+                <a16:creationId xmlns:a16="http://schemas.microsoft.com/office/drawing/2014/main" id="{A0E681D6-D27B-016E-2125-FB95532644A0}"/>
               </a:ext>
             </a:extLst>
           </p:cNvPr>
@@ -2701,7 +2689,7 @@
           <p:cNvPr id="5" name="Date Placeholder 4">
             <a:extLst>
               <a:ext uri="{FF2B5EF4-FFF2-40B4-BE49-F238E27FC236}">
-                <a16:creationId xmlns:a16="http://schemas.microsoft.com/office/drawing/2014/main" id="{EEBD2D0E-021D-4538-00A0-482BF7EDD6FD}"/>
+                <a16:creationId xmlns:a16="http://schemas.microsoft.com/office/drawing/2014/main" id="{9408E065-3C69-78CF-AFAE-88378CF35A4D}"/>
               </a:ext>
             </a:extLst>
           </p:cNvPr>
@@ -2717,9 +2705,9 @@
           <a:bodyPr/>
           <a:lstStyle/>
           <a:p>
-            <a:fld id="{86EA31F5-4D48-40F0-A61D-825EC73FB2DF}" type="datetimeFigureOut">
+            <a:fld id="{80E93315-FBCE-476D-880E-C4D57017A703}" type="datetimeFigureOut">
               <a:rPr lang="en-GB" smtClean="0"/>
-              <a:t>12/04/2026</a:t>
+              <a:t>11/05/2026</a:t>
             </a:fld>
             <a:endParaRPr lang="en-GB"/>
           </a:p>
@@ -2730,7 +2718,7 @@
           <p:cNvPr id="6" name="Footer Placeholder 5">
             <a:extLst>
               <a:ext uri="{FF2B5EF4-FFF2-40B4-BE49-F238E27FC236}">
-                <a16:creationId xmlns:a16="http://schemas.microsoft.com/office/drawing/2014/main" id="{87EF7D24-37D7-3AF3-D471-4CBCF0F4677A}"/>
+                <a16:creationId xmlns:a16="http://schemas.microsoft.com/office/drawing/2014/main" id="{203791FC-878D-270E-7F47-07DE89C9BA6A}"/>
               </a:ext>
             </a:extLst>
           </p:cNvPr>
@@ -2755,7 +2743,7 @@
           <p:cNvPr id="7" name="Slide Number Placeholder 6">
             <a:extLst>
               <a:ext uri="{FF2B5EF4-FFF2-40B4-BE49-F238E27FC236}">
-                <a16:creationId xmlns:a16="http://schemas.microsoft.com/office/drawing/2014/main" id="{50BD41EF-E430-2AE0-EB08-3B46BB7554C2}"/>
+                <a16:creationId xmlns:a16="http://schemas.microsoft.com/office/drawing/2014/main" id="{31F910B1-52BD-720A-B67C-DE26861BFBCC}"/>
               </a:ext>
             </a:extLst>
           </p:cNvPr>
@@ -2771,7 +2759,7 @@
           <a:bodyPr/>
           <a:lstStyle/>
           <a:p>
-            <a:fld id="{F9FBF8E4-69AE-49CF-9F9E-EE5CD0D95335}" type="slidenum">
+            <a:fld id="{6D53001D-B168-4697-92BC-8F16254BD672}" type="slidenum">
               <a:rPr lang="en-GB" smtClean="0"/>
               <a:t>‹#›</a:t>
             </a:fld>
@@ -2782,7 +2770,7 @@
     </p:spTree>
     <p:extLst>
       <p:ext uri="{BB962C8B-B14F-4D97-AF65-F5344CB8AC3E}">
-        <p14:creationId xmlns:p14="http://schemas.microsoft.com/office/powerpoint/2010/main" val="153562004"/>
+        <p14:creationId xmlns:p14="http://schemas.microsoft.com/office/powerpoint/2010/main" val="1753695101"/>
       </p:ext>
     </p:extLst>
   </p:cSld>
@@ -2819,7 +2807,7 @@
           <p:cNvPr id="2" name="Title Placeholder 1">
             <a:extLst>
               <a:ext uri="{FF2B5EF4-FFF2-40B4-BE49-F238E27FC236}">
-                <a16:creationId xmlns:a16="http://schemas.microsoft.com/office/drawing/2014/main" id="{D5CA5A8B-17B8-84EA-E15B-8F5D47A4ECF6}"/>
+                <a16:creationId xmlns:a16="http://schemas.microsoft.com/office/drawing/2014/main" id="{A35EEDD4-B494-150E-D326-F8176E63E8A5}"/>
               </a:ext>
             </a:extLst>
           </p:cNvPr>
@@ -2858,7 +2846,7 @@
           <p:cNvPr id="3" name="Text Placeholder 2">
             <a:extLst>
               <a:ext uri="{FF2B5EF4-FFF2-40B4-BE49-F238E27FC236}">
-                <a16:creationId xmlns:a16="http://schemas.microsoft.com/office/drawing/2014/main" id="{9538C61E-58BA-CB9D-9B47-AE91EDC9B6ED}"/>
+                <a16:creationId xmlns:a16="http://schemas.microsoft.com/office/drawing/2014/main" id="{030C33F6-06A9-B4C4-515D-138A1C81D4B8}"/>
               </a:ext>
             </a:extLst>
           </p:cNvPr>
@@ -2926,7 +2914,7 @@
           <p:cNvPr id="4" name="Date Placeholder 3">
             <a:extLst>
               <a:ext uri="{FF2B5EF4-FFF2-40B4-BE49-F238E27FC236}">
-                <a16:creationId xmlns:a16="http://schemas.microsoft.com/office/drawing/2014/main" id="{87ACAF0A-8505-72D4-D001-78515375B013}"/>
+                <a16:creationId xmlns:a16="http://schemas.microsoft.com/office/drawing/2014/main" id="{F39099F9-C4F8-8096-8F3E-B26DD49993FC}"/>
               </a:ext>
             </a:extLst>
           </p:cNvPr>
@@ -2953,16 +2941,16 @@
               <a:defRPr sz="1200">
                 <a:solidFill>
                   <a:schemeClr val="tx1">
-                    <a:tint val="82000"/>
+                    <a:tint val="75000"/>
                   </a:schemeClr>
                 </a:solidFill>
               </a:defRPr>
             </a:lvl1pPr>
           </a:lstStyle>
           <a:p>
-            <a:fld id="{86EA31F5-4D48-40F0-A61D-825EC73FB2DF}" type="datetimeFigureOut">
+            <a:fld id="{80E93315-FBCE-476D-880E-C4D57017A703}" type="datetimeFigureOut">
               <a:rPr lang="en-GB" smtClean="0"/>
-              <a:t>12/04/2026</a:t>
+              <a:t>11/05/2026</a:t>
             </a:fld>
             <a:endParaRPr lang="en-GB"/>
           </a:p>
@@ -2973,7 +2961,7 @@
           <p:cNvPr id="5" name="Footer Placeholder 4">
             <a:extLst>
               <a:ext uri="{FF2B5EF4-FFF2-40B4-BE49-F238E27FC236}">
-                <a16:creationId xmlns:a16="http://schemas.microsoft.com/office/drawing/2014/main" id="{192ADC6D-B80C-1496-926A-0C3AA420B58A}"/>
+                <a16:creationId xmlns:a16="http://schemas.microsoft.com/office/drawing/2014/main" id="{871B2DDB-6FD3-6BBE-6375-4CAB22A6AF77}"/>
               </a:ext>
             </a:extLst>
           </p:cNvPr>
@@ -3000,7 +2988,7 @@
               <a:defRPr sz="1200">
                 <a:solidFill>
                   <a:schemeClr val="tx1">
-                    <a:tint val="82000"/>
+                    <a:tint val="75000"/>
                   </a:schemeClr>
                 </a:solidFill>
               </a:defRPr>
@@ -3016,7 +3004,7 @@
           <p:cNvPr id="6" name="Slide Number Placeholder 5">
             <a:extLst>
               <a:ext uri="{FF2B5EF4-FFF2-40B4-BE49-F238E27FC236}">
-                <a16:creationId xmlns:a16="http://schemas.microsoft.com/office/drawing/2014/main" id="{A0D60143-27A1-5ED8-79F4-75BAA74F9A30}"/>
+                <a16:creationId xmlns:a16="http://schemas.microsoft.com/office/drawing/2014/main" id="{1B16C081-71E4-795E-4AB8-EB9BD447D90B}"/>
               </a:ext>
             </a:extLst>
           </p:cNvPr>
@@ -3043,14 +3031,14 @@
               <a:defRPr sz="1200">
                 <a:solidFill>
                   <a:schemeClr val="tx1">
-                    <a:tint val="82000"/>
+                    <a:tint val="75000"/>
                   </a:schemeClr>
                 </a:solidFill>
               </a:defRPr>
             </a:lvl1pPr>
           </a:lstStyle>
           <a:p>
-            <a:fld id="{F9FBF8E4-69AE-49CF-9F9E-EE5CD0D95335}" type="slidenum">
+            <a:fld id="{6D53001D-B168-4697-92BC-8F16254BD672}" type="slidenum">
               <a:rPr lang="en-GB" smtClean="0"/>
               <a:t>‹#›</a:t>
             </a:fld>
@@ -3061,7 +3049,7 @@
     </p:spTree>
     <p:extLst>
       <p:ext uri="{BB962C8B-B14F-4D97-AF65-F5344CB8AC3E}">
-        <p14:creationId xmlns:p14="http://schemas.microsoft.com/office/powerpoint/2010/main" val="4051091870"/>
+        <p14:creationId xmlns:p14="http://schemas.microsoft.com/office/powerpoint/2010/main" val="3014322152"/>
       </p:ext>
     </p:extLst>
   </p:cSld>
@@ -3367,7 +3355,13 @@
   <p:cSld>
     <p:spTree>
       <p:nvGrpSpPr>
-        <p:cNvPr id="1" name=""/>
+        <p:cNvPr id="1" name="">
+          <a:extLst>
+            <a:ext uri="{FF2B5EF4-FFF2-40B4-BE49-F238E27FC236}">
+              <a16:creationId xmlns:a16="http://schemas.microsoft.com/office/drawing/2014/main" id="{C92C7484-A660-0827-24AF-3C33232545B2}"/>
+            </a:ext>
+          </a:extLst>
+        </p:cNvPr>
         <p:cNvGrpSpPr/>
         <p:nvPr/>
       </p:nvGrpSpPr>
@@ -3379,59 +3373,12 @@
           <a:chExt cx="0" cy="0"/>
         </a:xfrm>
       </p:grpSpPr>
-      <p:pic>
-        <p:nvPicPr>
-          <p:cNvPr id="1026" name="Picture 2">
-            <a:extLst>
-              <a:ext uri="{FF2B5EF4-FFF2-40B4-BE49-F238E27FC236}">
-                <a16:creationId xmlns:a16="http://schemas.microsoft.com/office/drawing/2014/main" id="{FC86E878-BB73-3D04-121D-EA248AFD70B8}"/>
-              </a:ext>
-            </a:extLst>
-          </p:cNvPr>
-          <p:cNvPicPr>
-            <a:picLocks noChangeAspect="1" noChangeArrowheads="1"/>
-          </p:cNvPicPr>
-          <p:nvPr/>
-        </p:nvPicPr>
-        <p:blipFill>
-          <a:blip r:embed="rId2">
-            <a:extLst>
-              <a:ext uri="{28A0092B-C50C-407E-A947-70E740481C1C}">
-                <a14:useLocalDpi xmlns:a14="http://schemas.microsoft.com/office/drawing/2010/main" val="0"/>
-              </a:ext>
-            </a:extLst>
-          </a:blip>
-          <a:srcRect/>
-          <a:stretch>
-            <a:fillRect/>
-          </a:stretch>
-        </p:blipFill>
-        <p:spPr bwMode="auto">
-          <a:xfrm>
-            <a:off x="10899648" y="6374980"/>
-            <a:ext cx="1149447" cy="295025"/>
-          </a:xfrm>
-          <a:prstGeom prst="rect">
-            <a:avLst/>
-          </a:prstGeom>
-          <a:noFill/>
-          <a:extLst>
-            <a:ext uri="{909E8E84-426E-40DD-AFC4-6F175D3DCCD1}">
-              <a14:hiddenFill xmlns:a14="http://schemas.microsoft.com/office/drawing/2010/main">
-                <a:solidFill>
-                  <a:srgbClr val="FFFFFF"/>
-                </a:solidFill>
-              </a14:hiddenFill>
-            </a:ext>
-          </a:extLst>
-        </p:spPr>
-      </p:pic>
-      <p:sp>
-        <p:nvSpPr>
-          <p:cNvPr id="4" name="Título 1">
-            <a:extLst>
-              <a:ext uri="{FF2B5EF4-FFF2-40B4-BE49-F238E27FC236}">
-                <a16:creationId xmlns:a16="http://schemas.microsoft.com/office/drawing/2014/main" id="{7D71ADB2-39B8-1361-2F98-767788A4A80F}"/>
+      <p:sp>
+        <p:nvSpPr>
+          <p:cNvPr id="6" name="Título 1">
+            <a:extLst>
+              <a:ext uri="{FF2B5EF4-FFF2-40B4-BE49-F238E27FC236}">
+                <a16:creationId xmlns:a16="http://schemas.microsoft.com/office/drawing/2014/main" id="{695BDDA8-0BD8-DEB9-1DC2-EACC5A33045A}"/>
               </a:ext>
             </a:extLst>
           </p:cNvPr>
@@ -3488,10 +3435,10 @@
       </p:sp>
       <p:sp>
         <p:nvSpPr>
-          <p:cNvPr id="5" name="Título 1">
-            <a:extLst>
-              <a:ext uri="{FF2B5EF4-FFF2-40B4-BE49-F238E27FC236}">
-                <a16:creationId xmlns:a16="http://schemas.microsoft.com/office/drawing/2014/main" id="{7560A06E-8533-D5E8-CC43-3C362EEF5054}"/>
+          <p:cNvPr id="7" name="Título 1">
+            <a:extLst>
+              <a:ext uri="{FF2B5EF4-FFF2-40B4-BE49-F238E27FC236}">
+                <a16:creationId xmlns:a16="http://schemas.microsoft.com/office/drawing/2014/main" id="{5FF02308-028A-2A6B-CA18-411A5C584797}"/>
               </a:ext>
             </a:extLst>
           </p:cNvPr>
@@ -3555,10 +3502,10 @@
       </p:sp>
       <p:pic>
         <p:nvPicPr>
-          <p:cNvPr id="2" name="Picture 2">
-            <a:extLst>
-              <a:ext uri="{FF2B5EF4-FFF2-40B4-BE49-F238E27FC236}">
-                <a16:creationId xmlns:a16="http://schemas.microsoft.com/office/drawing/2014/main" id="{30315D21-1867-3184-E9C4-67317A69A07A}"/>
+          <p:cNvPr id="8" name="Picture 2">
+            <a:extLst>
+              <a:ext uri="{FF2B5EF4-FFF2-40B4-BE49-F238E27FC236}">
+                <a16:creationId xmlns:a16="http://schemas.microsoft.com/office/drawing/2014/main" id="{EDD3E59E-13A9-572B-7554-73C50761A056}"/>
               </a:ext>
             </a:extLst>
           </p:cNvPr>
@@ -3568,7 +3515,7 @@
           <p:nvPr/>
         </p:nvPicPr>
         <p:blipFill rotWithShape="1">
-          <a:blip r:embed="rId3">
+          <a:blip r:embed="rId2">
             <a:extLst>
               <a:ext uri="{28A0092B-C50C-407E-A947-70E740481C1C}">
                 <a14:useLocalDpi xmlns:a14="http://schemas.microsoft.com/office/drawing/2010/main" val="0"/>
@@ -3602,10 +3549,10 @@
       </p:pic>
       <p:pic>
         <p:nvPicPr>
-          <p:cNvPr id="3" name="Picture 4" descr="Git - Logo Downloads">
-            <a:extLst>
-              <a:ext uri="{FF2B5EF4-FFF2-40B4-BE49-F238E27FC236}">
-                <a16:creationId xmlns:a16="http://schemas.microsoft.com/office/drawing/2014/main" id="{7E39DE38-C7FF-BF47-EBD3-8B8F788343CE}"/>
+          <p:cNvPr id="9" name="Picture 4" descr="Git - Logo Downloads">
+            <a:extLst>
+              <a:ext uri="{FF2B5EF4-FFF2-40B4-BE49-F238E27FC236}">
+                <a16:creationId xmlns:a16="http://schemas.microsoft.com/office/drawing/2014/main" id="{A62AD026-5F33-5249-C2CF-8CB8A4858D06}"/>
               </a:ext>
             </a:extLst>
           </p:cNvPr>
@@ -3615,7 +3562,7 @@
           <p:nvPr/>
         </p:nvPicPr>
         <p:blipFill>
-          <a:blip r:embed="rId4">
+          <a:blip r:embed="rId3">
             <a:extLst>
               <a:ext uri="{28A0092B-C50C-407E-A947-70E740481C1C}">
                 <a14:useLocalDpi xmlns:a14="http://schemas.microsoft.com/office/drawing/2010/main" val="0"/>
@@ -3650,7 +3597,7 @@
     </p:spTree>
     <p:extLst>
       <p:ext uri="{BB962C8B-B14F-4D97-AF65-F5344CB8AC3E}">
-        <p14:creationId xmlns:p14="http://schemas.microsoft.com/office/powerpoint/2010/main" val="1652101634"/>
+        <p14:creationId xmlns:p14="http://schemas.microsoft.com/office/powerpoint/2010/main" val="63015333"/>
       </p:ext>
     </p:extLst>
   </p:cSld>
@@ -3668,7 +3615,7 @@
         <p:cNvPr id="1" name="">
           <a:extLst>
             <a:ext uri="{FF2B5EF4-FFF2-40B4-BE49-F238E27FC236}">
-              <a16:creationId xmlns:a16="http://schemas.microsoft.com/office/drawing/2014/main" id="{94B20C58-088D-88C1-53AD-770BAA654F60}"/>
+              <a16:creationId xmlns:a16="http://schemas.microsoft.com/office/drawing/2014/main" id="{45E4C8C2-9643-5B69-A801-FF4B34A44154}"/>
             </a:ext>
           </a:extLst>
         </p:cNvPr>
@@ -3683,59 +3630,12 @@
           <a:chExt cx="0" cy="0"/>
         </a:xfrm>
       </p:grpSpPr>
-      <p:pic>
-        <p:nvPicPr>
-          <p:cNvPr id="1026" name="Picture 2">
-            <a:extLst>
-              <a:ext uri="{FF2B5EF4-FFF2-40B4-BE49-F238E27FC236}">
-                <a16:creationId xmlns:a16="http://schemas.microsoft.com/office/drawing/2014/main" id="{2AC66DC3-4677-EFA7-BD34-8381B88BFD2B}"/>
-              </a:ext>
-            </a:extLst>
-          </p:cNvPr>
-          <p:cNvPicPr>
-            <a:picLocks noChangeAspect="1" noChangeArrowheads="1"/>
-          </p:cNvPicPr>
-          <p:nvPr/>
-        </p:nvPicPr>
-        <p:blipFill>
-          <a:blip r:embed="rId2">
-            <a:extLst>
-              <a:ext uri="{28A0092B-C50C-407E-A947-70E740481C1C}">
-                <a14:useLocalDpi xmlns:a14="http://schemas.microsoft.com/office/drawing/2010/main" val="0"/>
-              </a:ext>
-            </a:extLst>
-          </a:blip>
-          <a:srcRect/>
-          <a:stretch>
-            <a:fillRect/>
-          </a:stretch>
-        </p:blipFill>
-        <p:spPr bwMode="auto">
-          <a:xfrm>
-            <a:off x="10899648" y="6374980"/>
-            <a:ext cx="1149447" cy="295025"/>
-          </a:xfrm>
-          <a:prstGeom prst="rect">
-            <a:avLst/>
-          </a:prstGeom>
-          <a:noFill/>
-          <a:extLst>
-            <a:ext uri="{909E8E84-426E-40DD-AFC4-6F175D3DCCD1}">
-              <a14:hiddenFill xmlns:a14="http://schemas.microsoft.com/office/drawing/2010/main">
-                <a:solidFill>
-                  <a:srgbClr val="FFFFFF"/>
-                </a:solidFill>
-              </a14:hiddenFill>
-            </a:ext>
-          </a:extLst>
-        </p:spPr>
-      </p:pic>
       <p:sp>
         <p:nvSpPr>
           <p:cNvPr id="5" name="Título 1">
             <a:extLst>
               <a:ext uri="{FF2B5EF4-FFF2-40B4-BE49-F238E27FC236}">
-                <a16:creationId xmlns:a16="http://schemas.microsoft.com/office/drawing/2014/main" id="{4035C651-EA1E-2079-C0CE-AAB717A275D0}"/>
+                <a16:creationId xmlns:a16="http://schemas.microsoft.com/office/drawing/2014/main" id="{5B94F358-59FC-4522-2AF4-51D3F5767621}"/>
               </a:ext>
             </a:extLst>
           </p:cNvPr>
@@ -3793,7 +3693,7 @@
           <p:cNvPr id="6" name="Título 1">
             <a:extLst>
               <a:ext uri="{FF2B5EF4-FFF2-40B4-BE49-F238E27FC236}">
-                <a16:creationId xmlns:a16="http://schemas.microsoft.com/office/drawing/2014/main" id="{384AB405-D5AF-71E0-8888-5FEEF2DECBC3}"/>
+                <a16:creationId xmlns:a16="http://schemas.microsoft.com/office/drawing/2014/main" id="{A6CF7CE7-7A71-9A80-5B36-0B8757993B0E}"/>
               </a:ext>
             </a:extLst>
           </p:cNvPr>
@@ -3851,7 +3751,7 @@
           <p:cNvPr id="7" name="TextBox 6">
             <a:extLst>
               <a:ext uri="{FF2B5EF4-FFF2-40B4-BE49-F238E27FC236}">
-                <a16:creationId xmlns:a16="http://schemas.microsoft.com/office/drawing/2014/main" id="{8D31676D-2D02-7F30-C5F2-B1FCD67DDAD5}"/>
+                <a16:creationId xmlns:a16="http://schemas.microsoft.com/office/drawing/2014/main" id="{335B1A38-CAFA-72A3-4E3D-57834F5EBF2D}"/>
               </a:ext>
             </a:extLst>
           </p:cNvPr>
@@ -3886,7 +3786,6 @@
                 <a:solidFill>
                   <a:prstClr val="black"/>
                 </a:solidFill>
-                <a:latin typeface="Calibri" panose="020F0502020204030204" pitchFamily="34" charset="0"/>
                 <a:cs typeface="Calibri" panose="020F0502020204030204" pitchFamily="34" charset="0"/>
               </a:rPr>
               <a:t>Além do texto da mensagem é comum colocar o tipo do commit</a:t>
@@ -3905,7 +3804,6 @@
                 <a:solidFill>
                   <a:prstClr val="black"/>
                 </a:solidFill>
-                <a:latin typeface="Calibri" panose="020F0502020204030204" pitchFamily="34" charset="0"/>
                 <a:cs typeface="Calibri" panose="020F0502020204030204" pitchFamily="34" charset="0"/>
               </a:rPr>
               <a:t>Tipo de mudança</a:t>
@@ -3924,7 +3822,6 @@
                 <a:solidFill>
                   <a:prstClr val="black"/>
                 </a:solidFill>
-                <a:latin typeface="Calibri" panose="020F0502020204030204" pitchFamily="34" charset="0"/>
                 <a:cs typeface="Calibri" panose="020F0502020204030204" pitchFamily="34" charset="0"/>
               </a:rPr>
               <a:t>feat: </a:t>
@@ -3934,7 +3831,6 @@
                 <a:solidFill>
                   <a:prstClr val="black"/>
                 </a:solidFill>
-                <a:latin typeface="Calibri" panose="020F0502020204030204" pitchFamily="34" charset="0"/>
                 <a:cs typeface="Calibri" panose="020F0502020204030204" pitchFamily="34" charset="0"/>
               </a:rPr>
               <a:t>Nova funcionalidade - </a:t>
@@ -3944,7 +3840,6 @@
                 <a:solidFill>
                   <a:prstClr val="black"/>
                 </a:solidFill>
-                <a:latin typeface="Calibri" panose="020F0502020204030204" pitchFamily="34" charset="0"/>
                 <a:cs typeface="Calibri" panose="020F0502020204030204" pitchFamily="34" charset="0"/>
               </a:rPr>
               <a:t>feat: adiciona suporte a login</a:t>
@@ -3963,7 +3858,6 @@
                 <a:solidFill>
                   <a:prstClr val="black"/>
                 </a:solidFill>
-                <a:latin typeface="Calibri" panose="020F0502020204030204" pitchFamily="34" charset="0"/>
                 <a:cs typeface="Calibri" panose="020F0502020204030204" pitchFamily="34" charset="0"/>
               </a:rPr>
               <a:t>fix</a:t>
@@ -3973,7 +3867,6 @@
                 <a:solidFill>
                   <a:prstClr val="black"/>
                 </a:solidFill>
-                <a:latin typeface="Calibri" panose="020F0502020204030204" pitchFamily="34" charset="0"/>
                 <a:cs typeface="Calibri" panose="020F0502020204030204" pitchFamily="34" charset="0"/>
               </a:rPr>
               <a:t>: </a:t>
@@ -3983,7 +3876,6 @@
                 <a:solidFill>
                   <a:prstClr val="black"/>
                 </a:solidFill>
-                <a:latin typeface="Calibri" panose="020F0502020204030204" pitchFamily="34" charset="0"/>
                 <a:cs typeface="Calibri" panose="020F0502020204030204" pitchFamily="34" charset="0"/>
               </a:rPr>
               <a:t>Correção de bug - </a:t>
@@ -3993,7 +3885,6 @@
                 <a:solidFill>
                   <a:prstClr val="black"/>
                 </a:solidFill>
-                <a:latin typeface="Calibri" panose="020F0502020204030204" pitchFamily="34" charset="0"/>
                 <a:cs typeface="Calibri" panose="020F0502020204030204" pitchFamily="34" charset="0"/>
               </a:rPr>
               <a:t>fix</a:t>
@@ -4003,7 +3894,6 @@
                 <a:solidFill>
                   <a:prstClr val="black"/>
                 </a:solidFill>
-                <a:latin typeface="Calibri" panose="020F0502020204030204" pitchFamily="34" charset="0"/>
                 <a:cs typeface="Calibri" panose="020F0502020204030204" pitchFamily="34" charset="0"/>
               </a:rPr>
               <a:t>: corrige alinhamento de botão</a:t>
@@ -4022,7 +3912,6 @@
                 <a:solidFill>
                   <a:prstClr val="black"/>
                 </a:solidFill>
-                <a:latin typeface="Calibri" panose="020F0502020204030204" pitchFamily="34" charset="0"/>
                 <a:cs typeface="Calibri" panose="020F0502020204030204" pitchFamily="34" charset="0"/>
               </a:rPr>
               <a:t>refactor</a:t>
@@ -4032,7 +3921,6 @@
                 <a:solidFill>
                   <a:prstClr val="black"/>
                 </a:solidFill>
-                <a:latin typeface="Calibri" panose="020F0502020204030204" pitchFamily="34" charset="0"/>
                 <a:cs typeface="Calibri" panose="020F0502020204030204" pitchFamily="34" charset="0"/>
               </a:rPr>
               <a:t>: </a:t>
@@ -4042,7 +3930,6 @@
                 <a:solidFill>
                   <a:prstClr val="black"/>
                 </a:solidFill>
-                <a:latin typeface="Calibri" panose="020F0502020204030204" pitchFamily="34" charset="0"/>
                 <a:cs typeface="Calibri" panose="020F0502020204030204" pitchFamily="34" charset="0"/>
               </a:rPr>
               <a:t>Reestruturação de código - </a:t>
@@ -4052,7 +3939,6 @@
                 <a:solidFill>
                   <a:prstClr val="black"/>
                 </a:solidFill>
-                <a:latin typeface="Calibri" panose="020F0502020204030204" pitchFamily="34" charset="0"/>
                 <a:cs typeface="Calibri" panose="020F0502020204030204" pitchFamily="34" charset="0"/>
               </a:rPr>
               <a:t>refactor</a:t>
@@ -4062,7 +3948,6 @@
                 <a:solidFill>
                   <a:prstClr val="black"/>
                 </a:solidFill>
-                <a:latin typeface="Calibri" panose="020F0502020204030204" pitchFamily="34" charset="0"/>
                 <a:cs typeface="Calibri" panose="020F0502020204030204" pitchFamily="34" charset="0"/>
               </a:rPr>
               <a:t>: simplifica tratamento de erros</a:t>
@@ -4081,7 +3966,6 @@
                 <a:solidFill>
                   <a:prstClr val="black"/>
                 </a:solidFill>
-                <a:latin typeface="Calibri" panose="020F0502020204030204" pitchFamily="34" charset="0"/>
                 <a:cs typeface="Calibri" panose="020F0502020204030204" pitchFamily="34" charset="0"/>
               </a:rPr>
               <a:t>docs</a:t>
@@ -4091,7 +3975,6 @@
                 <a:solidFill>
                   <a:prstClr val="black"/>
                 </a:solidFill>
-                <a:latin typeface="Calibri" panose="020F0502020204030204" pitchFamily="34" charset="0"/>
                 <a:cs typeface="Calibri" panose="020F0502020204030204" pitchFamily="34" charset="0"/>
               </a:rPr>
               <a:t>: </a:t>
@@ -4101,7 +3984,6 @@
                 <a:solidFill>
                   <a:prstClr val="black"/>
                 </a:solidFill>
-                <a:latin typeface="Calibri" panose="020F0502020204030204" pitchFamily="34" charset="0"/>
                 <a:cs typeface="Calibri" panose="020F0502020204030204" pitchFamily="34" charset="0"/>
               </a:rPr>
               <a:t>Mudanças na documentação - </a:t>
@@ -4111,7 +3993,6 @@
                 <a:solidFill>
                   <a:prstClr val="black"/>
                 </a:solidFill>
-                <a:latin typeface="Calibri" panose="020F0502020204030204" pitchFamily="34" charset="0"/>
                 <a:cs typeface="Calibri" panose="020F0502020204030204" pitchFamily="34" charset="0"/>
               </a:rPr>
               <a:t>docs</a:t>
@@ -4121,7 +4002,6 @@
                 <a:solidFill>
                   <a:prstClr val="black"/>
                 </a:solidFill>
-                <a:latin typeface="Calibri" panose="020F0502020204030204" pitchFamily="34" charset="0"/>
                 <a:cs typeface="Calibri" panose="020F0502020204030204" pitchFamily="34" charset="0"/>
               </a:rPr>
               <a:t>: atualiza </a:t>
@@ -4131,7 +4011,6 @@
                 <a:solidFill>
                   <a:prstClr val="black"/>
                 </a:solidFill>
-                <a:latin typeface="Calibri" panose="020F0502020204030204" pitchFamily="34" charset="0"/>
                 <a:cs typeface="Calibri" panose="020F0502020204030204" pitchFamily="34" charset="0"/>
               </a:rPr>
               <a:t>schema</a:t>
@@ -4141,7 +4020,6 @@
                 <a:solidFill>
                   <a:prstClr val="black"/>
                 </a:solidFill>
-                <a:latin typeface="Calibri" panose="020F0502020204030204" pitchFamily="34" charset="0"/>
                 <a:cs typeface="Calibri" panose="020F0502020204030204" pitchFamily="34" charset="0"/>
               </a:rPr>
               <a:t> do banco de dados</a:t>
@@ -4160,7 +4038,6 @@
                 <a:solidFill>
                   <a:prstClr val="black"/>
                 </a:solidFill>
-                <a:latin typeface="Calibri" panose="020F0502020204030204" pitchFamily="34" charset="0"/>
                 <a:cs typeface="Calibri" panose="020F0502020204030204" pitchFamily="34" charset="0"/>
               </a:rPr>
               <a:t>comment</a:t>
@@ -4170,7 +4047,6 @@
                 <a:solidFill>
                   <a:prstClr val="black"/>
                 </a:solidFill>
-                <a:latin typeface="Calibri" panose="020F0502020204030204" pitchFamily="34" charset="0"/>
                 <a:cs typeface="Calibri" panose="020F0502020204030204" pitchFamily="34" charset="0"/>
               </a:rPr>
               <a:t>: </a:t>
@@ -4180,7 +4056,6 @@
                 <a:solidFill>
                   <a:prstClr val="black"/>
                 </a:solidFill>
-                <a:latin typeface="Calibri" panose="020F0502020204030204" pitchFamily="34" charset="0"/>
                 <a:cs typeface="Calibri" panose="020F0502020204030204" pitchFamily="34" charset="0"/>
               </a:rPr>
               <a:t>Adição de comentários - </a:t>
@@ -4190,7 +4065,6 @@
                 <a:solidFill>
                   <a:prstClr val="black"/>
                 </a:solidFill>
-                <a:latin typeface="Calibri" panose="020F0502020204030204" pitchFamily="34" charset="0"/>
                 <a:cs typeface="Calibri" panose="020F0502020204030204" pitchFamily="34" charset="0"/>
               </a:rPr>
               <a:t>comment</a:t>
@@ -4200,7 +4074,6 @@
                 <a:solidFill>
                   <a:prstClr val="black"/>
                 </a:solidFill>
-                <a:latin typeface="Calibri" panose="020F0502020204030204" pitchFamily="34" charset="0"/>
                 <a:cs typeface="Calibri" panose="020F0502020204030204" pitchFamily="34" charset="0"/>
               </a:rPr>
               <a:t>: adiciona comentários</a:t>
@@ -4219,7 +4092,6 @@
                 <a:solidFill>
                   <a:prstClr val="black"/>
                 </a:solidFill>
-                <a:latin typeface="Calibri" panose="020F0502020204030204" pitchFamily="34" charset="0"/>
                 <a:cs typeface="Calibri" panose="020F0502020204030204" pitchFamily="34" charset="0"/>
               </a:rPr>
               <a:t>style</a:t>
@@ -4229,7 +4101,6 @@
                 <a:solidFill>
                   <a:prstClr val="black"/>
                 </a:solidFill>
-                <a:latin typeface="Calibri" panose="020F0502020204030204" pitchFamily="34" charset="0"/>
                 <a:cs typeface="Calibri" panose="020F0502020204030204" pitchFamily="34" charset="0"/>
               </a:rPr>
               <a:t>:</a:t>
@@ -4239,7 +4110,6 @@
                 <a:solidFill>
                   <a:prstClr val="black"/>
                 </a:solidFill>
-                <a:latin typeface="Calibri" panose="020F0502020204030204" pitchFamily="34" charset="0"/>
                 <a:cs typeface="Calibri" panose="020F0502020204030204" pitchFamily="34" charset="0"/>
               </a:rPr>
               <a:t> Indentação e separação de linhas </a:t>
@@ -4249,7 +4119,6 @@
                 <a:solidFill>
                   <a:prstClr val="black"/>
                 </a:solidFill>
-                <a:latin typeface="Calibri" panose="020F0502020204030204" pitchFamily="34" charset="0"/>
                 <a:cs typeface="Calibri" panose="020F0502020204030204" pitchFamily="34" charset="0"/>
               </a:rPr>
               <a:t>- </a:t>
@@ -4259,7 +4128,6 @@
                 <a:solidFill>
                   <a:prstClr val="black"/>
                 </a:solidFill>
-                <a:latin typeface="Calibri" panose="020F0502020204030204" pitchFamily="34" charset="0"/>
                 <a:cs typeface="Calibri" panose="020F0502020204030204" pitchFamily="34" charset="0"/>
               </a:rPr>
               <a:t>style</a:t>
@@ -4269,7 +4137,6 @@
                 <a:solidFill>
                   <a:prstClr val="black"/>
                 </a:solidFill>
-                <a:latin typeface="Calibri" panose="020F0502020204030204" pitchFamily="34" charset="0"/>
                 <a:cs typeface="Calibri" panose="020F0502020204030204" pitchFamily="34" charset="0"/>
               </a:rPr>
               <a:t>: remove linha em branco</a:t>
@@ -4280,7 +4147,7 @@
     </p:spTree>
     <p:extLst>
       <p:ext uri="{BB962C8B-B14F-4D97-AF65-F5344CB8AC3E}">
-        <p14:creationId xmlns:p14="http://schemas.microsoft.com/office/powerpoint/2010/main" val="2302484061"/>
+        <p14:creationId xmlns:p14="http://schemas.microsoft.com/office/powerpoint/2010/main" val="1958315996"/>
       </p:ext>
     </p:extLst>
   </p:cSld>
@@ -4298,7 +4165,7 @@
         <p:cNvPr id="1" name="">
           <a:extLst>
             <a:ext uri="{FF2B5EF4-FFF2-40B4-BE49-F238E27FC236}">
-              <a16:creationId xmlns:a16="http://schemas.microsoft.com/office/drawing/2014/main" id="{396EE89A-471E-8FA3-7545-0895F92B0BB7}"/>
+              <a16:creationId xmlns:a16="http://schemas.microsoft.com/office/drawing/2014/main" id="{90C943F8-E3F5-DAC5-F565-FA1E45462C88}"/>
             </a:ext>
           </a:extLst>
         </p:cNvPr>
@@ -4313,59 +4180,12 @@
           <a:chExt cx="0" cy="0"/>
         </a:xfrm>
       </p:grpSpPr>
-      <p:pic>
-        <p:nvPicPr>
-          <p:cNvPr id="1026" name="Picture 2">
-            <a:extLst>
-              <a:ext uri="{FF2B5EF4-FFF2-40B4-BE49-F238E27FC236}">
-                <a16:creationId xmlns:a16="http://schemas.microsoft.com/office/drawing/2014/main" id="{228B47DF-DF31-0908-A316-4A53B1B3B6D9}"/>
-              </a:ext>
-            </a:extLst>
-          </p:cNvPr>
-          <p:cNvPicPr>
-            <a:picLocks noChangeAspect="1" noChangeArrowheads="1"/>
-          </p:cNvPicPr>
-          <p:nvPr/>
-        </p:nvPicPr>
-        <p:blipFill>
-          <a:blip r:embed="rId2">
-            <a:extLst>
-              <a:ext uri="{28A0092B-C50C-407E-A947-70E740481C1C}">
-                <a14:useLocalDpi xmlns:a14="http://schemas.microsoft.com/office/drawing/2010/main" val="0"/>
-              </a:ext>
-            </a:extLst>
-          </a:blip>
-          <a:srcRect/>
-          <a:stretch>
-            <a:fillRect/>
-          </a:stretch>
-        </p:blipFill>
-        <p:spPr bwMode="auto">
-          <a:xfrm>
-            <a:off x="10899648" y="6374980"/>
-            <a:ext cx="1149447" cy="295025"/>
-          </a:xfrm>
-          <a:prstGeom prst="rect">
-            <a:avLst/>
-          </a:prstGeom>
-          <a:noFill/>
-          <a:extLst>
-            <a:ext uri="{909E8E84-426E-40DD-AFC4-6F175D3DCCD1}">
-              <a14:hiddenFill xmlns:a14="http://schemas.microsoft.com/office/drawing/2010/main">
-                <a:solidFill>
-                  <a:srgbClr val="FFFFFF"/>
-                </a:solidFill>
-              </a14:hiddenFill>
-            </a:ext>
-          </a:extLst>
-        </p:spPr>
-      </p:pic>
       <p:sp>
         <p:nvSpPr>
           <p:cNvPr id="5" name="Título 1">
             <a:extLst>
               <a:ext uri="{FF2B5EF4-FFF2-40B4-BE49-F238E27FC236}">
-                <a16:creationId xmlns:a16="http://schemas.microsoft.com/office/drawing/2014/main" id="{D054A4D8-BBEA-154E-3338-4444BE16DDBB}"/>
+                <a16:creationId xmlns:a16="http://schemas.microsoft.com/office/drawing/2014/main" id="{163C07C4-80B7-F80E-E75E-A641C18AA3AF}"/>
               </a:ext>
             </a:extLst>
           </p:cNvPr>
@@ -4423,7 +4243,7 @@
           <p:cNvPr id="6" name="Título 1">
             <a:extLst>
               <a:ext uri="{FF2B5EF4-FFF2-40B4-BE49-F238E27FC236}">
-                <a16:creationId xmlns:a16="http://schemas.microsoft.com/office/drawing/2014/main" id="{4EC64CBE-0C2F-856A-3CDC-C9410CA454FC}"/>
+                <a16:creationId xmlns:a16="http://schemas.microsoft.com/office/drawing/2014/main" id="{F4C0D2E0-E06C-682D-2386-FF8ED098E0ED}"/>
               </a:ext>
             </a:extLst>
           </p:cNvPr>
@@ -4499,7 +4319,7 @@
           <p:cNvPr id="7" name="TextBox 6">
             <a:extLst>
               <a:ext uri="{FF2B5EF4-FFF2-40B4-BE49-F238E27FC236}">
-                <a16:creationId xmlns:a16="http://schemas.microsoft.com/office/drawing/2014/main" id="{917CE66C-EA93-33B2-58A4-64856D0FE4DF}"/>
+                <a16:creationId xmlns:a16="http://schemas.microsoft.com/office/drawing/2014/main" id="{9FB8B56A-BF05-FCD6-8007-DED71E15D791}"/>
               </a:ext>
             </a:extLst>
           </p:cNvPr>
@@ -4534,7 +4354,6 @@
                 <a:solidFill>
                   <a:prstClr val="black"/>
                 </a:solidFill>
-                <a:latin typeface="Calibri" panose="020F0502020204030204" pitchFamily="34" charset="0"/>
                 <a:cs typeface="Calibri" panose="020F0502020204030204" pitchFamily="34" charset="0"/>
               </a:rPr>
               <a:t>Push</a:t>
@@ -4543,7 +4362,6 @@
               <a:solidFill>
                 <a:prstClr val="black"/>
               </a:solidFill>
-              <a:latin typeface="Calibri" panose="020F0502020204030204" pitchFamily="34" charset="0"/>
               <a:cs typeface="Calibri" panose="020F0502020204030204" pitchFamily="34" charset="0"/>
             </a:endParaRPr>
           </a:p>
@@ -4560,7 +4378,6 @@
                 <a:solidFill>
                   <a:prstClr val="black"/>
                 </a:solidFill>
-                <a:latin typeface="Calibri" panose="020F0502020204030204" pitchFamily="34" charset="0"/>
                 <a:cs typeface="Calibri" panose="020F0502020204030204" pitchFamily="34" charset="0"/>
               </a:rPr>
               <a:t>Ação de fazer upload da sua versão local para um repositório, disponibilizando suas alterações para outros</a:t>
@@ -4579,7 +4396,6 @@
                 <a:solidFill>
                   <a:prstClr val="black"/>
                 </a:solidFill>
-                <a:latin typeface="Calibri" panose="020F0502020204030204" pitchFamily="34" charset="0"/>
                 <a:cs typeface="Calibri" panose="020F0502020204030204" pitchFamily="34" charset="0"/>
               </a:rPr>
               <a:t>Pull</a:t>
@@ -4588,7 +4404,6 @@
               <a:solidFill>
                 <a:prstClr val="black"/>
               </a:solidFill>
-              <a:latin typeface="Calibri" panose="020F0502020204030204" pitchFamily="34" charset="0"/>
               <a:cs typeface="Calibri" panose="020F0502020204030204" pitchFamily="34" charset="0"/>
             </a:endParaRPr>
           </a:p>
@@ -4605,7 +4420,6 @@
                 <a:solidFill>
                   <a:prstClr val="black"/>
                 </a:solidFill>
-                <a:latin typeface="Calibri" panose="020F0502020204030204" pitchFamily="34" charset="0"/>
                 <a:cs typeface="Calibri" panose="020F0502020204030204" pitchFamily="34" charset="0"/>
               </a:rPr>
               <a:t>Processo de fazer download das alterações de um repositório para a sua versão</a:t>
@@ -4624,7 +4438,6 @@
                 <a:solidFill>
                   <a:prstClr val="black"/>
                 </a:solidFill>
-                <a:latin typeface="Calibri" panose="020F0502020204030204" pitchFamily="34" charset="0"/>
                 <a:cs typeface="Calibri" panose="020F0502020204030204" pitchFamily="34" charset="0"/>
               </a:rPr>
               <a:t>Usado para buscar e integrar mudanças do repositório remoto para o seu branch local</a:t>
@@ -4635,7 +4448,7 @@
     </p:spTree>
     <p:extLst>
       <p:ext uri="{BB962C8B-B14F-4D97-AF65-F5344CB8AC3E}">
-        <p14:creationId xmlns:p14="http://schemas.microsoft.com/office/powerpoint/2010/main" val="1659075948"/>
+        <p14:creationId xmlns:p14="http://schemas.microsoft.com/office/powerpoint/2010/main" val="1579098083"/>
       </p:ext>
     </p:extLst>
   </p:cSld>
@@ -4653,7 +4466,7 @@
         <p:cNvPr id="1" name="">
           <a:extLst>
             <a:ext uri="{FF2B5EF4-FFF2-40B4-BE49-F238E27FC236}">
-              <a16:creationId xmlns:a16="http://schemas.microsoft.com/office/drawing/2014/main" id="{F807F055-9FD3-C9DA-2CA2-11BE2CFF317F}"/>
+              <a16:creationId xmlns:a16="http://schemas.microsoft.com/office/drawing/2014/main" id="{0E626D91-716A-3384-FEBB-387F5A49CD5F}"/>
             </a:ext>
           </a:extLst>
         </p:cNvPr>
@@ -4668,59 +4481,12 @@
           <a:chExt cx="0" cy="0"/>
         </a:xfrm>
       </p:grpSpPr>
-      <p:pic>
-        <p:nvPicPr>
-          <p:cNvPr id="1026" name="Picture 2">
-            <a:extLst>
-              <a:ext uri="{FF2B5EF4-FFF2-40B4-BE49-F238E27FC236}">
-                <a16:creationId xmlns:a16="http://schemas.microsoft.com/office/drawing/2014/main" id="{AB114B28-4784-6ACF-439A-CD193A5515B4}"/>
-              </a:ext>
-            </a:extLst>
-          </p:cNvPr>
-          <p:cNvPicPr>
-            <a:picLocks noChangeAspect="1" noChangeArrowheads="1"/>
-          </p:cNvPicPr>
-          <p:nvPr/>
-        </p:nvPicPr>
-        <p:blipFill>
-          <a:blip r:embed="rId2">
-            <a:extLst>
-              <a:ext uri="{28A0092B-C50C-407E-A947-70E740481C1C}">
-                <a14:useLocalDpi xmlns:a14="http://schemas.microsoft.com/office/drawing/2010/main" val="0"/>
-              </a:ext>
-            </a:extLst>
-          </a:blip>
-          <a:srcRect/>
-          <a:stretch>
-            <a:fillRect/>
-          </a:stretch>
-        </p:blipFill>
-        <p:spPr bwMode="auto">
-          <a:xfrm>
-            <a:off x="10899648" y="6374980"/>
-            <a:ext cx="1149447" cy="295025"/>
-          </a:xfrm>
-          <a:prstGeom prst="rect">
-            <a:avLst/>
-          </a:prstGeom>
-          <a:noFill/>
-          <a:extLst>
-            <a:ext uri="{909E8E84-426E-40DD-AFC4-6F175D3DCCD1}">
-              <a14:hiddenFill xmlns:a14="http://schemas.microsoft.com/office/drawing/2010/main">
-                <a:solidFill>
-                  <a:srgbClr val="FFFFFF"/>
-                </a:solidFill>
-              </a14:hiddenFill>
-            </a:ext>
-          </a:extLst>
-        </p:spPr>
-      </p:pic>
       <p:sp>
         <p:nvSpPr>
           <p:cNvPr id="6" name="Título 1">
             <a:extLst>
               <a:ext uri="{FF2B5EF4-FFF2-40B4-BE49-F238E27FC236}">
-                <a16:creationId xmlns:a16="http://schemas.microsoft.com/office/drawing/2014/main" id="{B196D4BD-42E1-8F43-AA97-6E4DF004AC13}"/>
+                <a16:creationId xmlns:a16="http://schemas.microsoft.com/office/drawing/2014/main" id="{5B9BDD53-61A3-A4BC-F6FF-6D13E8AB83A6}"/>
               </a:ext>
             </a:extLst>
           </p:cNvPr>
@@ -4778,7 +4544,7 @@
           <p:cNvPr id="7" name="Título 1">
             <a:extLst>
               <a:ext uri="{FF2B5EF4-FFF2-40B4-BE49-F238E27FC236}">
-                <a16:creationId xmlns:a16="http://schemas.microsoft.com/office/drawing/2014/main" id="{61C76DB5-7509-D6B5-C502-FD3C874E150D}"/>
+                <a16:creationId xmlns:a16="http://schemas.microsoft.com/office/drawing/2014/main" id="{7DF180FB-D63F-10C7-28D1-B3FA54999BA9}"/>
               </a:ext>
             </a:extLst>
           </p:cNvPr>
@@ -4836,7 +4602,7 @@
           <p:cNvPr id="8" name="TextBox 7">
             <a:extLst>
               <a:ext uri="{FF2B5EF4-FFF2-40B4-BE49-F238E27FC236}">
-                <a16:creationId xmlns:a16="http://schemas.microsoft.com/office/drawing/2014/main" id="{747CAFEA-B3D4-24D0-08BC-6BB96A1A571D}"/>
+                <a16:creationId xmlns:a16="http://schemas.microsoft.com/office/drawing/2014/main" id="{E50A4617-9A16-C1D9-4840-E891F5B8101E}"/>
               </a:ext>
             </a:extLst>
           </p:cNvPr>
@@ -4871,7 +4637,6 @@
                 <a:solidFill>
                   <a:prstClr val="black"/>
                 </a:solidFill>
-                <a:latin typeface="Calibri" panose="020F0502020204030204" pitchFamily="34" charset="0"/>
                 <a:cs typeface="Calibri" panose="020F0502020204030204" pitchFamily="34" charset="0"/>
               </a:rPr>
               <a:t>Para checar se você tem o Git instalado na sua máquina, abra o </a:t>
@@ -4881,7 +4646,6 @@
                 <a:solidFill>
                   <a:prstClr val="black"/>
                 </a:solidFill>
-                <a:latin typeface="Calibri" panose="020F0502020204030204" pitchFamily="34" charset="0"/>
                 <a:cs typeface="Calibri" panose="020F0502020204030204" pitchFamily="34" charset="0"/>
               </a:rPr>
               <a:t>cmd</a:t>
@@ -4891,7 +4655,6 @@
                 <a:solidFill>
                   <a:prstClr val="black"/>
                 </a:solidFill>
-                <a:latin typeface="Calibri" panose="020F0502020204030204" pitchFamily="34" charset="0"/>
                 <a:cs typeface="Calibri" panose="020F0502020204030204" pitchFamily="34" charset="0"/>
               </a:rPr>
               <a:t> e digite: </a:t>
@@ -4901,7 +4664,6 @@
                 <a:solidFill>
                   <a:prstClr val="black"/>
                 </a:solidFill>
-                <a:latin typeface="Calibri" panose="020F0502020204030204" pitchFamily="34" charset="0"/>
                 <a:cs typeface="Calibri" panose="020F0502020204030204" pitchFamily="34" charset="0"/>
               </a:rPr>
               <a:t>git --</a:t>
@@ -4911,7 +4673,6 @@
                 <a:solidFill>
                   <a:prstClr val="black"/>
                 </a:solidFill>
-                <a:latin typeface="Calibri" panose="020F0502020204030204" pitchFamily="34" charset="0"/>
                 <a:cs typeface="Calibri" panose="020F0502020204030204" pitchFamily="34" charset="0"/>
               </a:rPr>
               <a:t>version</a:t>
@@ -4920,7 +4681,6 @@
               <a:solidFill>
                 <a:prstClr val="black"/>
               </a:solidFill>
-              <a:latin typeface="Calibri" panose="020F0502020204030204" pitchFamily="34" charset="0"/>
               <a:cs typeface="Calibri" panose="020F0502020204030204" pitchFamily="34" charset="0"/>
             </a:endParaRPr>
           </a:p>
@@ -4931,7 +4691,7 @@
           <p:cNvPr id="9" name="Picture 8">
             <a:extLst>
               <a:ext uri="{FF2B5EF4-FFF2-40B4-BE49-F238E27FC236}">
-                <a16:creationId xmlns:a16="http://schemas.microsoft.com/office/drawing/2014/main" id="{64201BAE-A3F8-C170-9CFC-A0AF5FCA085B}"/>
+                <a16:creationId xmlns:a16="http://schemas.microsoft.com/office/drawing/2014/main" id="{1B12A813-6ED8-9EE8-07AE-05EFD030300D}"/>
               </a:ext>
             </a:extLst>
           </p:cNvPr>
@@ -4941,7 +4701,7 @@
           <p:nvPr/>
         </p:nvPicPr>
         <p:blipFill>
-          <a:blip r:embed="rId3"/>
+          <a:blip r:embed="rId2"/>
           <a:stretch>
             <a:fillRect/>
           </a:stretch>
@@ -4959,7 +4719,7 @@
     </p:spTree>
     <p:extLst>
       <p:ext uri="{BB962C8B-B14F-4D97-AF65-F5344CB8AC3E}">
-        <p14:creationId xmlns:p14="http://schemas.microsoft.com/office/powerpoint/2010/main" val="1083121507"/>
+        <p14:creationId xmlns:p14="http://schemas.microsoft.com/office/powerpoint/2010/main" val="3156064777"/>
       </p:ext>
     </p:extLst>
   </p:cSld>
@@ -4977,7 +4737,7 @@
         <p:cNvPr id="1" name="">
           <a:extLst>
             <a:ext uri="{FF2B5EF4-FFF2-40B4-BE49-F238E27FC236}">
-              <a16:creationId xmlns:a16="http://schemas.microsoft.com/office/drawing/2014/main" id="{753CB133-448D-5517-850E-E3C707DE7951}"/>
+              <a16:creationId xmlns:a16="http://schemas.microsoft.com/office/drawing/2014/main" id="{332BC417-935D-27E5-29DD-7AA73F9850AB}"/>
             </a:ext>
           </a:extLst>
         </p:cNvPr>
@@ -4992,59 +4752,12 @@
           <a:chExt cx="0" cy="0"/>
         </a:xfrm>
       </p:grpSpPr>
-      <p:pic>
-        <p:nvPicPr>
-          <p:cNvPr id="1026" name="Picture 2">
-            <a:extLst>
-              <a:ext uri="{FF2B5EF4-FFF2-40B4-BE49-F238E27FC236}">
-                <a16:creationId xmlns:a16="http://schemas.microsoft.com/office/drawing/2014/main" id="{B93D5C26-5C0B-079A-5BE6-E8F1845B7201}"/>
-              </a:ext>
-            </a:extLst>
-          </p:cNvPr>
-          <p:cNvPicPr>
-            <a:picLocks noChangeAspect="1" noChangeArrowheads="1"/>
-          </p:cNvPicPr>
-          <p:nvPr/>
-        </p:nvPicPr>
-        <p:blipFill>
-          <a:blip r:embed="rId2">
-            <a:extLst>
-              <a:ext uri="{28A0092B-C50C-407E-A947-70E740481C1C}">
-                <a14:useLocalDpi xmlns:a14="http://schemas.microsoft.com/office/drawing/2010/main" val="0"/>
-              </a:ext>
-            </a:extLst>
-          </a:blip>
-          <a:srcRect/>
-          <a:stretch>
-            <a:fillRect/>
-          </a:stretch>
-        </p:blipFill>
-        <p:spPr bwMode="auto">
-          <a:xfrm>
-            <a:off x="10899648" y="6374980"/>
-            <a:ext cx="1149447" cy="295025"/>
-          </a:xfrm>
-          <a:prstGeom prst="rect">
-            <a:avLst/>
-          </a:prstGeom>
-          <a:noFill/>
-          <a:extLst>
-            <a:ext uri="{909E8E84-426E-40DD-AFC4-6F175D3DCCD1}">
-              <a14:hiddenFill xmlns:a14="http://schemas.microsoft.com/office/drawing/2010/main">
-                <a:solidFill>
-                  <a:srgbClr val="FFFFFF"/>
-                </a:solidFill>
-              </a14:hiddenFill>
-            </a:ext>
-          </a:extLst>
-        </p:spPr>
-      </p:pic>
       <p:sp>
         <p:nvSpPr>
           <p:cNvPr id="6" name="Título 1">
             <a:extLst>
               <a:ext uri="{FF2B5EF4-FFF2-40B4-BE49-F238E27FC236}">
-                <a16:creationId xmlns:a16="http://schemas.microsoft.com/office/drawing/2014/main" id="{BD797A38-350B-7530-63CB-11D5B9A72E42}"/>
+                <a16:creationId xmlns:a16="http://schemas.microsoft.com/office/drawing/2014/main" id="{FEF78AB8-D8CB-B957-CD14-BAA635EE919C}"/>
               </a:ext>
             </a:extLst>
           </p:cNvPr>
@@ -5102,7 +4815,7 @@
           <p:cNvPr id="7" name="Título 1">
             <a:extLst>
               <a:ext uri="{FF2B5EF4-FFF2-40B4-BE49-F238E27FC236}">
-                <a16:creationId xmlns:a16="http://schemas.microsoft.com/office/drawing/2014/main" id="{DA395F64-49DC-9EB8-144D-62E20305BEE5}"/>
+                <a16:creationId xmlns:a16="http://schemas.microsoft.com/office/drawing/2014/main" id="{216AFC4C-B916-7B3F-DB3E-0D2338005902}"/>
               </a:ext>
             </a:extLst>
           </p:cNvPr>
@@ -5160,7 +4873,7 @@
           <p:cNvPr id="8" name="TextBox 7">
             <a:extLst>
               <a:ext uri="{FF2B5EF4-FFF2-40B4-BE49-F238E27FC236}">
-                <a16:creationId xmlns:a16="http://schemas.microsoft.com/office/drawing/2014/main" id="{8B8E28EA-3838-0E22-D51D-ED249DB35E51}"/>
+                <a16:creationId xmlns:a16="http://schemas.microsoft.com/office/drawing/2014/main" id="{FB77A04C-1048-9577-6FCB-380F4F00F92B}"/>
               </a:ext>
             </a:extLst>
           </p:cNvPr>
@@ -5195,7 +4908,6 @@
                 <a:solidFill>
                   <a:prstClr val="black"/>
                 </a:solidFill>
-                <a:latin typeface="Calibri" panose="020F0502020204030204" pitchFamily="34" charset="0"/>
                 <a:cs typeface="Calibri" panose="020F0502020204030204" pitchFamily="34" charset="0"/>
               </a:rPr>
               <a:t>Caso você não tenha instalado, acesse o site do Git para baixar</a:t>
@@ -5206,10 +4918,10 @@
       <p:pic>
         <p:nvPicPr>
           <p:cNvPr id="9" name="Picture 8">
-            <a:hlinkClick r:id="rId3"/>
-            <a:extLst>
-              <a:ext uri="{FF2B5EF4-FFF2-40B4-BE49-F238E27FC236}">
-                <a16:creationId xmlns:a16="http://schemas.microsoft.com/office/drawing/2014/main" id="{92796A78-C7A4-0245-C789-5005C10B0F07}"/>
+            <a:hlinkClick r:id="rId2"/>
+            <a:extLst>
+              <a:ext uri="{FF2B5EF4-FFF2-40B4-BE49-F238E27FC236}">
+                <a16:creationId xmlns:a16="http://schemas.microsoft.com/office/drawing/2014/main" id="{A4A689CE-6D7E-20AB-EA76-42FA5497A7E5}"/>
               </a:ext>
             </a:extLst>
           </p:cNvPr>
@@ -5219,7 +4931,7 @@
           <p:nvPr/>
         </p:nvPicPr>
         <p:blipFill>
-          <a:blip r:embed="rId4"/>
+          <a:blip r:embed="rId3"/>
           <a:srcRect l="2668"/>
           <a:stretch>
             <a:fillRect/>
@@ -5238,7 +4950,7 @@
     </p:spTree>
     <p:extLst>
       <p:ext uri="{BB962C8B-B14F-4D97-AF65-F5344CB8AC3E}">
-        <p14:creationId xmlns:p14="http://schemas.microsoft.com/office/powerpoint/2010/main" val="2653493341"/>
+        <p14:creationId xmlns:p14="http://schemas.microsoft.com/office/powerpoint/2010/main" val="3456170836"/>
       </p:ext>
     </p:extLst>
   </p:cSld>
@@ -5256,7 +4968,7 @@
         <p:cNvPr id="1" name="">
           <a:extLst>
             <a:ext uri="{FF2B5EF4-FFF2-40B4-BE49-F238E27FC236}">
-              <a16:creationId xmlns:a16="http://schemas.microsoft.com/office/drawing/2014/main" id="{5D15A315-A2FD-7531-6DEA-1A2B0A8FB2F6}"/>
+              <a16:creationId xmlns:a16="http://schemas.microsoft.com/office/drawing/2014/main" id="{AA3C54C0-3775-8A7C-4A6B-398FA0DD98E5}"/>
             </a:ext>
           </a:extLst>
         </p:cNvPr>
@@ -5271,59 +4983,12 @@
           <a:chExt cx="0" cy="0"/>
         </a:xfrm>
       </p:grpSpPr>
-      <p:pic>
-        <p:nvPicPr>
-          <p:cNvPr id="1026" name="Picture 2">
-            <a:extLst>
-              <a:ext uri="{FF2B5EF4-FFF2-40B4-BE49-F238E27FC236}">
-                <a16:creationId xmlns:a16="http://schemas.microsoft.com/office/drawing/2014/main" id="{28CE370C-E7EB-435A-A180-BE03DE0390BC}"/>
-              </a:ext>
-            </a:extLst>
-          </p:cNvPr>
-          <p:cNvPicPr>
-            <a:picLocks noChangeAspect="1" noChangeArrowheads="1"/>
-          </p:cNvPicPr>
-          <p:nvPr/>
-        </p:nvPicPr>
-        <p:blipFill>
-          <a:blip r:embed="rId2">
-            <a:extLst>
-              <a:ext uri="{28A0092B-C50C-407E-A947-70E740481C1C}">
-                <a14:useLocalDpi xmlns:a14="http://schemas.microsoft.com/office/drawing/2010/main" val="0"/>
-              </a:ext>
-            </a:extLst>
-          </a:blip>
-          <a:srcRect/>
-          <a:stretch>
-            <a:fillRect/>
-          </a:stretch>
-        </p:blipFill>
-        <p:spPr bwMode="auto">
-          <a:xfrm>
-            <a:off x="10899648" y="6374980"/>
-            <a:ext cx="1149447" cy="295025"/>
-          </a:xfrm>
-          <a:prstGeom prst="rect">
-            <a:avLst/>
-          </a:prstGeom>
-          <a:noFill/>
-          <a:extLst>
-            <a:ext uri="{909E8E84-426E-40DD-AFC4-6F175D3DCCD1}">
-              <a14:hiddenFill xmlns:a14="http://schemas.microsoft.com/office/drawing/2010/main">
-                <a:solidFill>
-                  <a:srgbClr val="FFFFFF"/>
-                </a:solidFill>
-              </a14:hiddenFill>
-            </a:ext>
-          </a:extLst>
-        </p:spPr>
-      </p:pic>
       <p:sp>
         <p:nvSpPr>
           <p:cNvPr id="7" name="Título 1">
             <a:extLst>
               <a:ext uri="{FF2B5EF4-FFF2-40B4-BE49-F238E27FC236}">
-                <a16:creationId xmlns:a16="http://schemas.microsoft.com/office/drawing/2014/main" id="{20E25AF8-9DD7-EB0B-84F2-4CEF4B1546E7}"/>
+                <a16:creationId xmlns:a16="http://schemas.microsoft.com/office/drawing/2014/main" id="{7F68E7EE-1269-58CB-FB38-AD0CB73D74E0}"/>
               </a:ext>
             </a:extLst>
           </p:cNvPr>
@@ -5381,7 +5046,7 @@
           <p:cNvPr id="8" name="Título 1">
             <a:extLst>
               <a:ext uri="{FF2B5EF4-FFF2-40B4-BE49-F238E27FC236}">
-                <a16:creationId xmlns:a16="http://schemas.microsoft.com/office/drawing/2014/main" id="{6CCFEE0B-9EB5-2C68-C0AC-6EC8555365BC}"/>
+                <a16:creationId xmlns:a16="http://schemas.microsoft.com/office/drawing/2014/main" id="{22D54E33-8563-2884-4E12-C5374181C90D}"/>
               </a:ext>
             </a:extLst>
           </p:cNvPr>
@@ -5439,7 +5104,7 @@
           <p:cNvPr id="9" name="TextBox 8">
             <a:extLst>
               <a:ext uri="{FF2B5EF4-FFF2-40B4-BE49-F238E27FC236}">
-                <a16:creationId xmlns:a16="http://schemas.microsoft.com/office/drawing/2014/main" id="{86A1CA75-42AB-8319-3CE0-5CC985BF3806}"/>
+                <a16:creationId xmlns:a16="http://schemas.microsoft.com/office/drawing/2014/main" id="{631D7956-23B6-79DC-5F03-800CDCB807CA}"/>
               </a:ext>
             </a:extLst>
           </p:cNvPr>
@@ -5474,7 +5139,6 @@
                 <a:solidFill>
                   <a:prstClr val="black"/>
                 </a:solidFill>
-                <a:latin typeface="Calibri" panose="020F0502020204030204" pitchFamily="34" charset="0"/>
                 <a:cs typeface="Calibri" panose="020F0502020204030204" pitchFamily="34" charset="0"/>
               </a:rPr>
               <a:t>Assim que um repositório no GitHub é criado, essa tela aparece</a:t>
@@ -5487,7 +5151,7 @@
           <p:cNvPr id="10" name="Picture 9">
             <a:extLst>
               <a:ext uri="{FF2B5EF4-FFF2-40B4-BE49-F238E27FC236}">
-                <a16:creationId xmlns:a16="http://schemas.microsoft.com/office/drawing/2014/main" id="{9368759B-A83F-1822-F6BF-01A348209062}"/>
+                <a16:creationId xmlns:a16="http://schemas.microsoft.com/office/drawing/2014/main" id="{D070C3B9-63DF-8622-0894-25216B754B4A}"/>
               </a:ext>
             </a:extLst>
           </p:cNvPr>
@@ -5497,7 +5161,7 @@
           <p:nvPr/>
         </p:nvPicPr>
         <p:blipFill>
-          <a:blip r:embed="rId3"/>
+          <a:blip r:embed="rId2"/>
           <a:stretch>
             <a:fillRect/>
           </a:stretch>
@@ -5517,7 +5181,7 @@
           <p:cNvPr id="11" name="TextBox 10">
             <a:extLst>
               <a:ext uri="{FF2B5EF4-FFF2-40B4-BE49-F238E27FC236}">
-                <a16:creationId xmlns:a16="http://schemas.microsoft.com/office/drawing/2014/main" id="{2A64A0EE-1A02-A6A1-BC8E-C6A2DAA7F9CD}"/>
+                <a16:creationId xmlns:a16="http://schemas.microsoft.com/office/drawing/2014/main" id="{8BD582BB-26B2-6EA3-49E3-390F0772067F}"/>
               </a:ext>
             </a:extLst>
           </p:cNvPr>
@@ -5550,7 +5214,6 @@
                 <a:solidFill>
                   <a:prstClr val="black"/>
                 </a:solidFill>
-                <a:latin typeface="Calibri" panose="020F0502020204030204" pitchFamily="34" charset="0"/>
                 <a:cs typeface="Calibri" panose="020F0502020204030204" pitchFamily="34" charset="0"/>
               </a:rPr>
               <a:t>Agora:</a:t>
@@ -5569,7 +5232,6 @@
                 <a:solidFill>
                   <a:prstClr val="black"/>
                 </a:solidFill>
-                <a:latin typeface="Calibri" panose="020F0502020204030204" pitchFamily="34" charset="0"/>
                 <a:cs typeface="Calibri" panose="020F0502020204030204" pitchFamily="34" charset="0"/>
               </a:rPr>
               <a:t>Vamos criar um repositório no GitHub</a:t>
@@ -5580,7 +5242,7 @@
     </p:spTree>
     <p:extLst>
       <p:ext uri="{BB962C8B-B14F-4D97-AF65-F5344CB8AC3E}">
-        <p14:creationId xmlns:p14="http://schemas.microsoft.com/office/powerpoint/2010/main" val="1471609390"/>
+        <p14:creationId xmlns:p14="http://schemas.microsoft.com/office/powerpoint/2010/main" val="1707249885"/>
       </p:ext>
     </p:extLst>
   </p:cSld>
@@ -5676,7 +5338,7 @@
         <p:cNvPr id="1" name="">
           <a:extLst>
             <a:ext uri="{FF2B5EF4-FFF2-40B4-BE49-F238E27FC236}">
-              <a16:creationId xmlns:a16="http://schemas.microsoft.com/office/drawing/2014/main" id="{40899216-7A69-0DB7-7D58-A31DD2AE333B}"/>
+              <a16:creationId xmlns:a16="http://schemas.microsoft.com/office/drawing/2014/main" id="{42E22342-340E-82B1-B92C-9BEB6C73988E}"/>
             </a:ext>
           </a:extLst>
         </p:cNvPr>
@@ -5691,59 +5353,12 @@
           <a:chExt cx="0" cy="0"/>
         </a:xfrm>
       </p:grpSpPr>
-      <p:pic>
-        <p:nvPicPr>
-          <p:cNvPr id="1026" name="Picture 2">
-            <a:extLst>
-              <a:ext uri="{FF2B5EF4-FFF2-40B4-BE49-F238E27FC236}">
-                <a16:creationId xmlns:a16="http://schemas.microsoft.com/office/drawing/2014/main" id="{2E675283-384C-55B5-06AE-1A934DD3C9ED}"/>
-              </a:ext>
-            </a:extLst>
-          </p:cNvPr>
-          <p:cNvPicPr>
-            <a:picLocks noChangeAspect="1" noChangeArrowheads="1"/>
-          </p:cNvPicPr>
-          <p:nvPr/>
-        </p:nvPicPr>
-        <p:blipFill>
-          <a:blip r:embed="rId2">
-            <a:extLst>
-              <a:ext uri="{28A0092B-C50C-407E-A947-70E740481C1C}">
-                <a14:useLocalDpi xmlns:a14="http://schemas.microsoft.com/office/drawing/2010/main" val="0"/>
-              </a:ext>
-            </a:extLst>
-          </a:blip>
-          <a:srcRect/>
-          <a:stretch>
-            <a:fillRect/>
-          </a:stretch>
-        </p:blipFill>
-        <p:spPr bwMode="auto">
-          <a:xfrm>
-            <a:off x="10899648" y="6374980"/>
-            <a:ext cx="1149447" cy="295025"/>
-          </a:xfrm>
-          <a:prstGeom prst="rect">
-            <a:avLst/>
-          </a:prstGeom>
-          <a:noFill/>
-          <a:extLst>
-            <a:ext uri="{909E8E84-426E-40DD-AFC4-6F175D3DCCD1}">
-              <a14:hiddenFill xmlns:a14="http://schemas.microsoft.com/office/drawing/2010/main">
-                <a:solidFill>
-                  <a:srgbClr val="FFFFFF"/>
-                </a:solidFill>
-              </a14:hiddenFill>
-            </a:ext>
-          </a:extLst>
-        </p:spPr>
-      </p:pic>
       <p:sp>
         <p:nvSpPr>
           <p:cNvPr id="6" name="Título 1">
             <a:extLst>
               <a:ext uri="{FF2B5EF4-FFF2-40B4-BE49-F238E27FC236}">
-                <a16:creationId xmlns:a16="http://schemas.microsoft.com/office/drawing/2014/main" id="{4F5B75F2-A251-700F-F84B-54F1326D4A91}"/>
+                <a16:creationId xmlns:a16="http://schemas.microsoft.com/office/drawing/2014/main" id="{9B973E30-C103-BB16-84C4-5D5F952680CC}"/>
               </a:ext>
             </a:extLst>
           </p:cNvPr>
@@ -5801,7 +5416,7 @@
           <p:cNvPr id="7" name="Título 1">
             <a:extLst>
               <a:ext uri="{FF2B5EF4-FFF2-40B4-BE49-F238E27FC236}">
-                <a16:creationId xmlns:a16="http://schemas.microsoft.com/office/drawing/2014/main" id="{A007020C-510C-FC1A-4EE9-7B43DEDE5E90}"/>
+                <a16:creationId xmlns:a16="http://schemas.microsoft.com/office/drawing/2014/main" id="{D8D7A004-CDBA-0100-EF85-B2D3F37B3046}"/>
               </a:ext>
             </a:extLst>
           </p:cNvPr>
@@ -5859,7 +5474,7 @@
           <p:cNvPr id="8" name="TextBox 7">
             <a:extLst>
               <a:ext uri="{FF2B5EF4-FFF2-40B4-BE49-F238E27FC236}">
-                <a16:creationId xmlns:a16="http://schemas.microsoft.com/office/drawing/2014/main" id="{2822E8F3-6A24-7394-CE26-4F167933A5A0}"/>
+                <a16:creationId xmlns:a16="http://schemas.microsoft.com/office/drawing/2014/main" id="{35BB3C4B-565F-A966-D80C-9AC6A6316546}"/>
               </a:ext>
             </a:extLst>
           </p:cNvPr>
@@ -5894,7 +5509,6 @@
                 <a:solidFill>
                   <a:prstClr val="black"/>
                 </a:solidFill>
-                <a:latin typeface="Calibri" panose="020F0502020204030204" pitchFamily="34" charset="0"/>
                 <a:cs typeface="Calibri" panose="020F0502020204030204" pitchFamily="34" charset="0"/>
               </a:rPr>
               <a:t>Crie uma pasta no seu computador</a:t>
@@ -5913,7 +5527,6 @@
                 <a:solidFill>
                   <a:prstClr val="black"/>
                 </a:solidFill>
-                <a:latin typeface="Calibri" panose="020F0502020204030204" pitchFamily="34" charset="0"/>
                 <a:cs typeface="Calibri" panose="020F0502020204030204" pitchFamily="34" charset="0"/>
               </a:rPr>
               <a:t>Habilite a visualização da extensão dos arquivos e pastas ocultas</a:t>
@@ -5932,7 +5545,6 @@
                 <a:solidFill>
                   <a:prstClr val="black"/>
                 </a:solidFill>
-                <a:latin typeface="Calibri" panose="020F0502020204030204" pitchFamily="34" charset="0"/>
                 <a:cs typeface="Calibri" panose="020F0502020204030204" pitchFamily="34" charset="0"/>
               </a:rPr>
               <a:t>Crie os arquivos de programação</a:t>
@@ -5951,7 +5563,6 @@
                 <a:solidFill>
                   <a:prstClr val="black"/>
                 </a:solidFill>
-                <a:latin typeface="Calibri" panose="020F0502020204030204" pitchFamily="34" charset="0"/>
                 <a:cs typeface="Calibri" panose="020F0502020204030204" pitchFamily="34" charset="0"/>
               </a:rPr>
               <a:t>Abra algum terminal no caminho do diretório</a:t>
@@ -5970,7 +5581,6 @@
                 <a:solidFill>
                   <a:prstClr val="black"/>
                 </a:solidFill>
-                <a:latin typeface="Calibri" panose="020F0502020204030204" pitchFamily="34" charset="0"/>
                 <a:cs typeface="Calibri" panose="020F0502020204030204" pitchFamily="34" charset="0"/>
               </a:rPr>
               <a:t>Execute os comandos do Git</a:t>
@@ -5983,7 +5593,7 @@
           <p:cNvPr id="9" name="Picture 8">
             <a:extLst>
               <a:ext uri="{FF2B5EF4-FFF2-40B4-BE49-F238E27FC236}">
-                <a16:creationId xmlns:a16="http://schemas.microsoft.com/office/drawing/2014/main" id="{74153A5F-96D8-668C-FE34-C5586FE94955}"/>
+                <a16:creationId xmlns:a16="http://schemas.microsoft.com/office/drawing/2014/main" id="{4C8E96DE-EFD4-32C5-400A-DEB894E6542F}"/>
               </a:ext>
             </a:extLst>
           </p:cNvPr>
@@ -5993,7 +5603,7 @@
           <p:nvPr/>
         </p:nvPicPr>
         <p:blipFill>
-          <a:blip r:embed="rId3"/>
+          <a:blip r:embed="rId2"/>
           <a:srcRect l="3333" t="52340" r="50000" b="23681"/>
           <a:stretch/>
         </p:blipFill>
@@ -6010,7 +5620,7 @@
     </p:spTree>
     <p:extLst>
       <p:ext uri="{BB962C8B-B14F-4D97-AF65-F5344CB8AC3E}">
-        <p14:creationId xmlns:p14="http://schemas.microsoft.com/office/powerpoint/2010/main" val="472038227"/>
+        <p14:creationId xmlns:p14="http://schemas.microsoft.com/office/powerpoint/2010/main" val="428747076"/>
       </p:ext>
     </p:extLst>
   </p:cSld>
@@ -6028,7 +5638,7 @@
         <p:cNvPr id="1" name="">
           <a:extLst>
             <a:ext uri="{FF2B5EF4-FFF2-40B4-BE49-F238E27FC236}">
-              <a16:creationId xmlns:a16="http://schemas.microsoft.com/office/drawing/2014/main" id="{0BC38F90-D70B-D30A-3139-EBEA33D8B41C}"/>
+              <a16:creationId xmlns:a16="http://schemas.microsoft.com/office/drawing/2014/main" id="{ECADB2FB-5250-9D80-BB3F-F6954223D066}"/>
             </a:ext>
           </a:extLst>
         </p:cNvPr>
@@ -6043,59 +5653,12 @@
           <a:chExt cx="0" cy="0"/>
         </a:xfrm>
       </p:grpSpPr>
-      <p:pic>
-        <p:nvPicPr>
-          <p:cNvPr id="1026" name="Picture 2">
-            <a:extLst>
-              <a:ext uri="{FF2B5EF4-FFF2-40B4-BE49-F238E27FC236}">
-                <a16:creationId xmlns:a16="http://schemas.microsoft.com/office/drawing/2014/main" id="{65453EA6-DEE1-11B7-06C9-D3E4AA6C8DCD}"/>
-              </a:ext>
-            </a:extLst>
-          </p:cNvPr>
-          <p:cNvPicPr>
-            <a:picLocks noChangeAspect="1" noChangeArrowheads="1"/>
-          </p:cNvPicPr>
-          <p:nvPr/>
-        </p:nvPicPr>
-        <p:blipFill>
-          <a:blip r:embed="rId2">
-            <a:extLst>
-              <a:ext uri="{28A0092B-C50C-407E-A947-70E740481C1C}">
-                <a14:useLocalDpi xmlns:a14="http://schemas.microsoft.com/office/drawing/2010/main" val="0"/>
-              </a:ext>
-            </a:extLst>
-          </a:blip>
-          <a:srcRect/>
-          <a:stretch>
-            <a:fillRect/>
-          </a:stretch>
-        </p:blipFill>
-        <p:spPr bwMode="auto">
-          <a:xfrm>
-            <a:off x="10899648" y="6374980"/>
-            <a:ext cx="1149447" cy="295025"/>
-          </a:xfrm>
-          <a:prstGeom prst="rect">
-            <a:avLst/>
-          </a:prstGeom>
-          <a:noFill/>
-          <a:extLst>
-            <a:ext uri="{909E8E84-426E-40DD-AFC4-6F175D3DCCD1}">
-              <a14:hiddenFill xmlns:a14="http://schemas.microsoft.com/office/drawing/2010/main">
-                <a:solidFill>
-                  <a:srgbClr val="FFFFFF"/>
-                </a:solidFill>
-              </a14:hiddenFill>
-            </a:ext>
-          </a:extLst>
-        </p:spPr>
-      </p:pic>
       <p:sp>
         <p:nvSpPr>
           <p:cNvPr id="6" name="Título 1">
             <a:extLst>
               <a:ext uri="{FF2B5EF4-FFF2-40B4-BE49-F238E27FC236}">
-                <a16:creationId xmlns:a16="http://schemas.microsoft.com/office/drawing/2014/main" id="{40A2CBB0-A7EC-D832-BB90-BDFF46B25977}"/>
+                <a16:creationId xmlns:a16="http://schemas.microsoft.com/office/drawing/2014/main" id="{9B22B78B-7F6E-3BB3-876B-F7D7A3F238F8}"/>
               </a:ext>
             </a:extLst>
           </p:cNvPr>
@@ -6153,7 +5716,7 @@
           <p:cNvPr id="7" name="Título 1">
             <a:extLst>
               <a:ext uri="{FF2B5EF4-FFF2-40B4-BE49-F238E27FC236}">
-                <a16:creationId xmlns:a16="http://schemas.microsoft.com/office/drawing/2014/main" id="{A08FBD78-B79C-8194-9A26-ED04E258BA52}"/>
+                <a16:creationId xmlns:a16="http://schemas.microsoft.com/office/drawing/2014/main" id="{7E01DC86-C2E8-2541-29B0-CF5D152B0798}"/>
               </a:ext>
             </a:extLst>
           </p:cNvPr>
@@ -6211,7 +5774,7 @@
           <p:cNvPr id="8" name="TextBox 7">
             <a:extLst>
               <a:ext uri="{FF2B5EF4-FFF2-40B4-BE49-F238E27FC236}">
-                <a16:creationId xmlns:a16="http://schemas.microsoft.com/office/drawing/2014/main" id="{CC065D21-E1CE-B5D9-AE94-43BD10D9DA74}"/>
+                <a16:creationId xmlns:a16="http://schemas.microsoft.com/office/drawing/2014/main" id="{56BFC3BB-884A-CF6E-D28B-FA5A3FF7C2C5}"/>
               </a:ext>
             </a:extLst>
           </p:cNvPr>
@@ -6246,7 +5809,6 @@
                 <a:solidFill>
                   <a:prstClr val="black"/>
                 </a:solidFill>
-                <a:latin typeface="Calibri" panose="020F0502020204030204" pitchFamily="34" charset="0"/>
                 <a:cs typeface="Calibri" panose="020F0502020204030204" pitchFamily="34" charset="0"/>
               </a:rPr>
               <a:t>echo</a:t>
@@ -6256,7 +5818,6 @@
                 <a:solidFill>
                   <a:prstClr val="black"/>
                 </a:solidFill>
-                <a:latin typeface="Calibri" panose="020F0502020204030204" pitchFamily="34" charset="0"/>
                 <a:cs typeface="Calibri" panose="020F0502020204030204" pitchFamily="34" charset="0"/>
               </a:rPr>
               <a:t> "# tutorial" &gt;&gt; README.md</a:t>
@@ -6266,7 +5827,6 @@
                 <a:solidFill>
                   <a:prstClr val="black"/>
                 </a:solidFill>
-                <a:latin typeface="Calibri" panose="020F0502020204030204" pitchFamily="34" charset="0"/>
                 <a:cs typeface="Calibri" panose="020F0502020204030204" pitchFamily="34" charset="0"/>
               </a:rPr>
               <a:t> Escreve no arquivo README.md</a:t>
@@ -6285,7 +5845,6 @@
                 <a:solidFill>
                   <a:prstClr val="black"/>
                 </a:solidFill>
-                <a:latin typeface="Calibri" panose="020F0502020204030204" pitchFamily="34" charset="0"/>
                 <a:cs typeface="Calibri" panose="020F0502020204030204" pitchFamily="34" charset="0"/>
               </a:rPr>
               <a:t>git </a:t>
@@ -6295,7 +5854,6 @@
                 <a:solidFill>
                   <a:prstClr val="black"/>
                 </a:solidFill>
-                <a:latin typeface="Calibri" panose="020F0502020204030204" pitchFamily="34" charset="0"/>
                 <a:cs typeface="Calibri" panose="020F0502020204030204" pitchFamily="34" charset="0"/>
               </a:rPr>
               <a:t>init</a:t>
@@ -6305,7 +5863,6 @@
                 <a:solidFill>
                   <a:prstClr val="black"/>
                 </a:solidFill>
-                <a:latin typeface="Calibri" panose="020F0502020204030204" pitchFamily="34" charset="0"/>
                 <a:cs typeface="Calibri" panose="020F0502020204030204" pitchFamily="34" charset="0"/>
               </a:rPr>
               <a:t> </a:t>
@@ -6315,7 +5872,6 @@
                 <a:solidFill>
                   <a:prstClr val="black"/>
                 </a:solidFill>
-                <a:latin typeface="Calibri" panose="020F0502020204030204" pitchFamily="34" charset="0"/>
                 <a:cs typeface="Calibri" panose="020F0502020204030204" pitchFamily="34" charset="0"/>
               </a:rPr>
               <a:t>Inicializa um repositório na pasta</a:t>
@@ -6334,7 +5890,6 @@
                 <a:solidFill>
                   <a:prstClr val="black"/>
                 </a:solidFill>
-                <a:latin typeface="Calibri" panose="020F0502020204030204" pitchFamily="34" charset="0"/>
                 <a:cs typeface="Calibri" panose="020F0502020204030204" pitchFamily="34" charset="0"/>
               </a:rPr>
               <a:t>git add . </a:t>
@@ -6344,7 +5899,6 @@
                 <a:solidFill>
                   <a:prstClr val="black"/>
                 </a:solidFill>
-                <a:latin typeface="Calibri" panose="020F0502020204030204" pitchFamily="34" charset="0"/>
                 <a:cs typeface="Calibri" panose="020F0502020204030204" pitchFamily="34" charset="0"/>
               </a:rPr>
               <a:t>Adiciona todos os arquivos na Staging Area</a:t>
@@ -6363,7 +5917,6 @@
                 <a:solidFill>
                   <a:prstClr val="black"/>
                 </a:solidFill>
-                <a:latin typeface="Calibri" panose="020F0502020204030204" pitchFamily="34" charset="0"/>
                 <a:cs typeface="Calibri" panose="020F0502020204030204" pitchFamily="34" charset="0"/>
               </a:rPr>
               <a:t>git commit –m “first commit” </a:t>
@@ -6373,7 +5926,6 @@
                 <a:solidFill>
                   <a:prstClr val="black"/>
                 </a:solidFill>
-                <a:latin typeface="Calibri" panose="020F0502020204030204" pitchFamily="34" charset="0"/>
                 <a:cs typeface="Calibri" panose="020F0502020204030204" pitchFamily="34" charset="0"/>
               </a:rPr>
               <a:t>Faz o commit dos arquivos com uma mensagem</a:t>
@@ -6392,7 +5944,6 @@
                 <a:solidFill>
                   <a:prstClr val="black"/>
                 </a:solidFill>
-                <a:latin typeface="Calibri" panose="020F0502020204030204" pitchFamily="34" charset="0"/>
                 <a:cs typeface="Calibri" panose="020F0502020204030204" pitchFamily="34" charset="0"/>
               </a:rPr>
               <a:t>git branch –M main </a:t>
@@ -6402,7 +5953,6 @@
                 <a:solidFill>
                   <a:prstClr val="black"/>
                 </a:solidFill>
-                <a:latin typeface="Calibri" panose="020F0502020204030204" pitchFamily="34" charset="0"/>
                 <a:cs typeface="Calibri" panose="020F0502020204030204" pitchFamily="34" charset="0"/>
               </a:rPr>
               <a:t>Renomeia a branch principal para main (nomenclatura moderna)</a:t>
@@ -6421,7 +5971,6 @@
                 <a:solidFill>
                   <a:prstClr val="black"/>
                 </a:solidFill>
-                <a:latin typeface="Calibri" panose="020F0502020204030204" pitchFamily="34" charset="0"/>
                 <a:cs typeface="Calibri" panose="020F0502020204030204" pitchFamily="34" charset="0"/>
               </a:rPr>
               <a:t>git remote add...  </a:t>
@@ -6431,7 +5980,6 @@
                 <a:solidFill>
                   <a:prstClr val="black"/>
                 </a:solidFill>
-                <a:latin typeface="Calibri" panose="020F0502020204030204" pitchFamily="34" charset="0"/>
                 <a:cs typeface="Calibri" panose="020F0502020204030204" pitchFamily="34" charset="0"/>
               </a:rPr>
               <a:t>Conecta o repositório local ao seu repositório no GitHub</a:t>
@@ -6450,7 +5998,6 @@
                 <a:solidFill>
                   <a:prstClr val="black"/>
                 </a:solidFill>
-                <a:latin typeface="Calibri" panose="020F0502020204030204" pitchFamily="34" charset="0"/>
                 <a:cs typeface="Calibri" panose="020F0502020204030204" pitchFamily="34" charset="0"/>
               </a:rPr>
               <a:t>git push –u origin main </a:t>
@@ -6460,7 +6007,6 @@
                 <a:solidFill>
                   <a:prstClr val="black"/>
                 </a:solidFill>
-                <a:latin typeface="Calibri" panose="020F0502020204030204" pitchFamily="34" charset="0"/>
                 <a:cs typeface="Calibri" panose="020F0502020204030204" pitchFamily="34" charset="0"/>
               </a:rPr>
               <a:t>Faz o push do commit para o GitHub</a:t>
@@ -6473,7 +6019,7 @@
           <p:cNvPr id="9" name="Picture 8">
             <a:extLst>
               <a:ext uri="{FF2B5EF4-FFF2-40B4-BE49-F238E27FC236}">
-                <a16:creationId xmlns:a16="http://schemas.microsoft.com/office/drawing/2014/main" id="{DF5260CE-0B09-DA3F-2773-BEF36C5B7651}"/>
+                <a16:creationId xmlns:a16="http://schemas.microsoft.com/office/drawing/2014/main" id="{3BEF294B-CCBD-F4C5-2A93-E5343D964626}"/>
               </a:ext>
             </a:extLst>
           </p:cNvPr>
@@ -6483,7 +6029,7 @@
           <p:nvPr/>
         </p:nvPicPr>
         <p:blipFill>
-          <a:blip r:embed="rId3"/>
+          <a:blip r:embed="rId2"/>
           <a:srcRect l="3333" t="52340" r="50000" b="23681"/>
           <a:stretch/>
         </p:blipFill>
@@ -6500,7 +6046,7 @@
     </p:spTree>
     <p:extLst>
       <p:ext uri="{BB962C8B-B14F-4D97-AF65-F5344CB8AC3E}">
-        <p14:creationId xmlns:p14="http://schemas.microsoft.com/office/powerpoint/2010/main" val="1118384164"/>
+        <p14:creationId xmlns:p14="http://schemas.microsoft.com/office/powerpoint/2010/main" val="994907625"/>
       </p:ext>
     </p:extLst>
   </p:cSld>
@@ -6891,7 +6437,7 @@
         <p:cNvPr id="1" name="">
           <a:extLst>
             <a:ext uri="{FF2B5EF4-FFF2-40B4-BE49-F238E27FC236}">
-              <a16:creationId xmlns:a16="http://schemas.microsoft.com/office/drawing/2014/main" id="{9E503A14-1BC8-6D9E-265D-8A7BE27EDADF}"/>
+              <a16:creationId xmlns:a16="http://schemas.microsoft.com/office/drawing/2014/main" id="{126847C9-754B-348F-F434-EF77E07BDDE9}"/>
             </a:ext>
           </a:extLst>
         </p:cNvPr>
@@ -6906,59 +6452,12 @@
           <a:chExt cx="0" cy="0"/>
         </a:xfrm>
       </p:grpSpPr>
-      <p:pic>
-        <p:nvPicPr>
-          <p:cNvPr id="1026" name="Picture 2">
-            <a:extLst>
-              <a:ext uri="{FF2B5EF4-FFF2-40B4-BE49-F238E27FC236}">
-                <a16:creationId xmlns:a16="http://schemas.microsoft.com/office/drawing/2014/main" id="{4024C006-FBAD-3504-32A9-0051CEA3697E}"/>
-              </a:ext>
-            </a:extLst>
-          </p:cNvPr>
-          <p:cNvPicPr>
-            <a:picLocks noChangeAspect="1" noChangeArrowheads="1"/>
-          </p:cNvPicPr>
-          <p:nvPr/>
-        </p:nvPicPr>
-        <p:blipFill>
-          <a:blip r:embed="rId2">
-            <a:extLst>
-              <a:ext uri="{28A0092B-C50C-407E-A947-70E740481C1C}">
-                <a14:useLocalDpi xmlns:a14="http://schemas.microsoft.com/office/drawing/2010/main" val="0"/>
-              </a:ext>
-            </a:extLst>
-          </a:blip>
-          <a:srcRect/>
-          <a:stretch>
-            <a:fillRect/>
-          </a:stretch>
-        </p:blipFill>
-        <p:spPr bwMode="auto">
-          <a:xfrm>
-            <a:off x="10899648" y="6374980"/>
-            <a:ext cx="1149447" cy="295025"/>
-          </a:xfrm>
-          <a:prstGeom prst="rect">
-            <a:avLst/>
-          </a:prstGeom>
-          <a:noFill/>
-          <a:extLst>
-            <a:ext uri="{909E8E84-426E-40DD-AFC4-6F175D3DCCD1}">
-              <a14:hiddenFill xmlns:a14="http://schemas.microsoft.com/office/drawing/2010/main">
-                <a:solidFill>
-                  <a:srgbClr val="FFFFFF"/>
-                </a:solidFill>
-              </a14:hiddenFill>
-            </a:ext>
-          </a:extLst>
-        </p:spPr>
-      </p:pic>
       <p:sp>
         <p:nvSpPr>
           <p:cNvPr id="8" name="Título 1">
             <a:extLst>
               <a:ext uri="{FF2B5EF4-FFF2-40B4-BE49-F238E27FC236}">
-                <a16:creationId xmlns:a16="http://schemas.microsoft.com/office/drawing/2014/main" id="{58FFB7E0-A138-D348-4C41-5DD2A0C767A2}"/>
+                <a16:creationId xmlns:a16="http://schemas.microsoft.com/office/drawing/2014/main" id="{DFEE263A-19F3-B006-BF14-F6270D6B674A}"/>
               </a:ext>
             </a:extLst>
           </p:cNvPr>
@@ -7016,7 +6515,7 @@
           <p:cNvPr id="9" name="Título 1">
             <a:extLst>
               <a:ext uri="{FF2B5EF4-FFF2-40B4-BE49-F238E27FC236}">
-                <a16:creationId xmlns:a16="http://schemas.microsoft.com/office/drawing/2014/main" id="{D55F50EB-06FD-4093-1C2C-BB7BDF70007F}"/>
+                <a16:creationId xmlns:a16="http://schemas.microsoft.com/office/drawing/2014/main" id="{502AC884-71C8-17CC-3029-9B4ABF8DB949}"/>
               </a:ext>
             </a:extLst>
           </p:cNvPr>
@@ -7095,7 +6594,7 @@
           <p:cNvPr id="10" name="TextBox 9">
             <a:extLst>
               <a:ext uri="{FF2B5EF4-FFF2-40B4-BE49-F238E27FC236}">
-                <a16:creationId xmlns:a16="http://schemas.microsoft.com/office/drawing/2014/main" id="{77A8616B-F8FB-CB9E-4A55-3E990057E38A}"/>
+                <a16:creationId xmlns:a16="http://schemas.microsoft.com/office/drawing/2014/main" id="{3077E275-9868-6A03-C0A1-111B6E1DA978}"/>
               </a:ext>
             </a:extLst>
           </p:cNvPr>
@@ -7130,7 +6629,6 @@
                 <a:solidFill>
                   <a:prstClr val="black"/>
                 </a:solidFill>
-                <a:latin typeface="Calibri" panose="020F0502020204030204" pitchFamily="34" charset="0"/>
                 <a:cs typeface="Calibri" panose="020F0502020204030204" pitchFamily="34" charset="0"/>
               </a:rPr>
               <a:t>Para fazer um </a:t>
@@ -7140,7 +6638,6 @@
                 <a:solidFill>
                   <a:prstClr val="black"/>
                 </a:solidFill>
-                <a:latin typeface="Calibri" panose="020F0502020204030204" pitchFamily="34" charset="0"/>
                 <a:cs typeface="Calibri" panose="020F0502020204030204" pitchFamily="34" charset="0"/>
               </a:rPr>
               <a:t>push</a:t>
@@ -7150,7 +6647,6 @@
                 <a:solidFill>
                   <a:prstClr val="black"/>
                 </a:solidFill>
-                <a:latin typeface="Calibri" panose="020F0502020204030204" pitchFamily="34" charset="0"/>
                 <a:cs typeface="Calibri" panose="020F0502020204030204" pitchFamily="34" charset="0"/>
               </a:rPr>
               <a:t> em um repositório do GitHub</a:t>
@@ -7169,7 +6665,6 @@
                 <a:solidFill>
                   <a:prstClr val="black"/>
                 </a:solidFill>
-                <a:latin typeface="Calibri" panose="020F0502020204030204" pitchFamily="34" charset="0"/>
                 <a:cs typeface="Calibri" panose="020F0502020204030204" pitchFamily="34" charset="0"/>
               </a:rPr>
               <a:t>git add . </a:t>
@@ -7188,7 +6683,6 @@
                 <a:solidFill>
                   <a:prstClr val="black"/>
                 </a:solidFill>
-                <a:latin typeface="Calibri" panose="020F0502020204030204" pitchFamily="34" charset="0"/>
                 <a:cs typeface="Calibri" panose="020F0502020204030204" pitchFamily="34" charset="0"/>
               </a:rPr>
               <a:t>git commit –m “mensagem de commit”</a:t>
@@ -7207,7 +6701,6 @@
                 <a:solidFill>
                   <a:prstClr val="black"/>
                 </a:solidFill>
-                <a:latin typeface="Calibri" panose="020F0502020204030204" pitchFamily="34" charset="0"/>
                 <a:cs typeface="Calibri" panose="020F0502020204030204" pitchFamily="34" charset="0"/>
               </a:rPr>
               <a:t>git push –u origin main</a:t>
@@ -7220,7 +6713,7 @@
           <p:cNvPr id="11" name="Picture 10">
             <a:extLst>
               <a:ext uri="{FF2B5EF4-FFF2-40B4-BE49-F238E27FC236}">
-                <a16:creationId xmlns:a16="http://schemas.microsoft.com/office/drawing/2014/main" id="{3E0F1FDF-7516-B3AC-DB2A-17DCDB35A333}"/>
+                <a16:creationId xmlns:a16="http://schemas.microsoft.com/office/drawing/2014/main" id="{3BC7E985-6E09-C585-9431-92812276B760}"/>
               </a:ext>
             </a:extLst>
           </p:cNvPr>
@@ -7230,7 +6723,7 @@
           <p:nvPr/>
         </p:nvPicPr>
         <p:blipFill>
-          <a:blip r:embed="rId3"/>
+          <a:blip r:embed="rId2"/>
           <a:srcRect t="10345" r="33232" b="14263"/>
           <a:stretch/>
         </p:blipFill>
@@ -7249,7 +6742,7 @@
           <p:cNvPr id="12" name="TextBox 11">
             <a:extLst>
               <a:ext uri="{FF2B5EF4-FFF2-40B4-BE49-F238E27FC236}">
-                <a16:creationId xmlns:a16="http://schemas.microsoft.com/office/drawing/2014/main" id="{AA636DEC-0459-721F-4AEF-58D2DF9A4593}"/>
+                <a16:creationId xmlns:a16="http://schemas.microsoft.com/office/drawing/2014/main" id="{53E0CEAE-6A51-C320-5F90-DDAA71B11009}"/>
               </a:ext>
             </a:extLst>
           </p:cNvPr>
@@ -7284,7 +6777,6 @@
                 <a:solidFill>
                   <a:prstClr val="black"/>
                 </a:solidFill>
-                <a:latin typeface="Calibri" panose="020F0502020204030204" pitchFamily="34" charset="0"/>
                 <a:cs typeface="Calibri" panose="020F0502020204030204" pitchFamily="34" charset="0"/>
               </a:rPr>
               <a:t>Para fazer um </a:t>
@@ -7294,7 +6786,6 @@
                 <a:solidFill>
                   <a:prstClr val="black"/>
                 </a:solidFill>
-                <a:latin typeface="Calibri" panose="020F0502020204030204" pitchFamily="34" charset="0"/>
                 <a:cs typeface="Calibri" panose="020F0502020204030204" pitchFamily="34" charset="0"/>
               </a:rPr>
               <a:t>pull</a:t>
@@ -7304,7 +6795,6 @@
                 <a:solidFill>
                   <a:prstClr val="black"/>
                 </a:solidFill>
-                <a:latin typeface="Calibri" panose="020F0502020204030204" pitchFamily="34" charset="0"/>
                 <a:cs typeface="Calibri" panose="020F0502020204030204" pitchFamily="34" charset="0"/>
               </a:rPr>
               <a:t> de um repositório do GitHub</a:t>
@@ -7323,7 +6813,6 @@
                 <a:solidFill>
                   <a:prstClr val="black"/>
                 </a:solidFill>
-                <a:latin typeface="Calibri" panose="020F0502020204030204" pitchFamily="34" charset="0"/>
                 <a:cs typeface="Calibri" panose="020F0502020204030204" pitchFamily="34" charset="0"/>
               </a:rPr>
               <a:t>git </a:t>
@@ -7333,7 +6822,6 @@
                 <a:solidFill>
                   <a:prstClr val="black"/>
                 </a:solidFill>
-                <a:latin typeface="Calibri" panose="020F0502020204030204" pitchFamily="34" charset="0"/>
                 <a:cs typeface="Calibri" panose="020F0502020204030204" pitchFamily="34" charset="0"/>
               </a:rPr>
               <a:t>pull</a:t>
@@ -7342,7 +6830,6 @@
               <a:solidFill>
                 <a:prstClr val="black"/>
               </a:solidFill>
-              <a:latin typeface="Calibri" panose="020F0502020204030204" pitchFamily="34" charset="0"/>
               <a:cs typeface="Calibri" panose="020F0502020204030204" pitchFamily="34" charset="0"/>
             </a:endParaRPr>
           </a:p>
@@ -7353,7 +6840,7 @@
           <p:cNvPr id="13" name="Picture 12">
             <a:extLst>
               <a:ext uri="{FF2B5EF4-FFF2-40B4-BE49-F238E27FC236}">
-                <a16:creationId xmlns:a16="http://schemas.microsoft.com/office/drawing/2014/main" id="{5C178381-4BE9-5E57-A888-7ACBF54AF911}"/>
+                <a16:creationId xmlns:a16="http://schemas.microsoft.com/office/drawing/2014/main" id="{ACE5956E-0F10-9BDA-D3A1-3F30D8657DD9}"/>
               </a:ext>
             </a:extLst>
           </p:cNvPr>
@@ -7363,7 +6850,7 @@
           <p:nvPr/>
         </p:nvPicPr>
         <p:blipFill>
-          <a:blip r:embed="rId4"/>
+          <a:blip r:embed="rId3"/>
           <a:srcRect t="13664" r="2903" b="14936"/>
           <a:stretch/>
         </p:blipFill>
@@ -7380,7 +6867,7 @@
     </p:spTree>
     <p:extLst>
       <p:ext uri="{BB962C8B-B14F-4D97-AF65-F5344CB8AC3E}">
-        <p14:creationId xmlns:p14="http://schemas.microsoft.com/office/powerpoint/2010/main" val="2011258979"/>
+        <p14:creationId xmlns:p14="http://schemas.microsoft.com/office/powerpoint/2010/main" val="396299932"/>
       </p:ext>
     </p:extLst>
   </p:cSld>
@@ -7503,7 +6990,7 @@
         <p:cNvPr id="1" name="">
           <a:extLst>
             <a:ext uri="{FF2B5EF4-FFF2-40B4-BE49-F238E27FC236}">
-              <a16:creationId xmlns:a16="http://schemas.microsoft.com/office/drawing/2014/main" id="{C01424B0-694A-DDD6-4892-BBF0C1D10FFA}"/>
+              <a16:creationId xmlns:a16="http://schemas.microsoft.com/office/drawing/2014/main" id="{B416AF16-EE51-DF35-721A-6D1C8381102A}"/>
             </a:ext>
           </a:extLst>
         </p:cNvPr>
@@ -7518,59 +7005,12 @@
           <a:chExt cx="0" cy="0"/>
         </a:xfrm>
       </p:grpSpPr>
-      <p:pic>
-        <p:nvPicPr>
-          <p:cNvPr id="1026" name="Picture 2">
-            <a:extLst>
-              <a:ext uri="{FF2B5EF4-FFF2-40B4-BE49-F238E27FC236}">
-                <a16:creationId xmlns:a16="http://schemas.microsoft.com/office/drawing/2014/main" id="{7D1AB42F-EF10-A2E7-FD56-C46D4A5D6139}"/>
-              </a:ext>
-            </a:extLst>
-          </p:cNvPr>
-          <p:cNvPicPr>
-            <a:picLocks noChangeAspect="1" noChangeArrowheads="1"/>
-          </p:cNvPicPr>
-          <p:nvPr/>
-        </p:nvPicPr>
-        <p:blipFill>
-          <a:blip r:embed="rId2">
-            <a:extLst>
-              <a:ext uri="{28A0092B-C50C-407E-A947-70E740481C1C}">
-                <a14:useLocalDpi xmlns:a14="http://schemas.microsoft.com/office/drawing/2010/main" val="0"/>
-              </a:ext>
-            </a:extLst>
-          </a:blip>
-          <a:srcRect/>
-          <a:stretch>
-            <a:fillRect/>
-          </a:stretch>
-        </p:blipFill>
-        <p:spPr bwMode="auto">
-          <a:xfrm>
-            <a:off x="10899648" y="6374980"/>
-            <a:ext cx="1149447" cy="295025"/>
-          </a:xfrm>
-          <a:prstGeom prst="rect">
-            <a:avLst/>
-          </a:prstGeom>
-          <a:noFill/>
-          <a:extLst>
-            <a:ext uri="{909E8E84-426E-40DD-AFC4-6F175D3DCCD1}">
-              <a14:hiddenFill xmlns:a14="http://schemas.microsoft.com/office/drawing/2010/main">
-                <a:solidFill>
-                  <a:srgbClr val="FFFFFF"/>
-                </a:solidFill>
-              </a14:hiddenFill>
-            </a:ext>
-          </a:extLst>
-        </p:spPr>
-      </p:pic>
       <p:sp>
         <p:nvSpPr>
           <p:cNvPr id="6" name="Título 1">
             <a:extLst>
               <a:ext uri="{FF2B5EF4-FFF2-40B4-BE49-F238E27FC236}">
-                <a16:creationId xmlns:a16="http://schemas.microsoft.com/office/drawing/2014/main" id="{035F8110-C780-0592-B01E-889AA7ED6AAA}"/>
+                <a16:creationId xmlns:a16="http://schemas.microsoft.com/office/drawing/2014/main" id="{29A09259-3018-1FEF-04E6-CB69DFF79DBC}"/>
               </a:ext>
             </a:extLst>
           </p:cNvPr>
@@ -7628,7 +7068,7 @@
           <p:cNvPr id="7" name="Título 1">
             <a:extLst>
               <a:ext uri="{FF2B5EF4-FFF2-40B4-BE49-F238E27FC236}">
-                <a16:creationId xmlns:a16="http://schemas.microsoft.com/office/drawing/2014/main" id="{5EEDD9F6-C331-14B2-5C6F-8479B5275AFA}"/>
+                <a16:creationId xmlns:a16="http://schemas.microsoft.com/office/drawing/2014/main" id="{410120B0-7D7C-2545-A0C9-47F05157FDDB}"/>
               </a:ext>
             </a:extLst>
           </p:cNvPr>
@@ -7686,7 +7126,7 @@
           <p:cNvPr id="8" name="TextBox 7">
             <a:extLst>
               <a:ext uri="{FF2B5EF4-FFF2-40B4-BE49-F238E27FC236}">
-                <a16:creationId xmlns:a16="http://schemas.microsoft.com/office/drawing/2014/main" id="{850414CA-A080-F2DA-E02A-1EC94F3D510A}"/>
+                <a16:creationId xmlns:a16="http://schemas.microsoft.com/office/drawing/2014/main" id="{BDE1C895-A2B3-9EE3-8DF5-B5C6C6F30B03}"/>
               </a:ext>
             </a:extLst>
           </p:cNvPr>
@@ -7721,7 +7161,6 @@
                 <a:solidFill>
                   <a:prstClr val="black"/>
                 </a:solidFill>
-                <a:latin typeface="Calibri" panose="020F0502020204030204" pitchFamily="34" charset="0"/>
                 <a:cs typeface="Calibri" panose="020F0502020204030204" pitchFamily="34" charset="0"/>
               </a:rPr>
               <a:t>Cria uma cópia local de um repositório existente, permitindo que você trabalhe e faça alterações no projeto</a:t>
@@ -7740,7 +7179,6 @@
                 <a:solidFill>
                   <a:prstClr val="black"/>
                 </a:solidFill>
-                <a:latin typeface="Calibri" panose="020F0502020204030204" pitchFamily="34" charset="0"/>
                 <a:cs typeface="Calibri" panose="020F0502020204030204" pitchFamily="34" charset="0"/>
               </a:rPr>
               <a:t>A cópia local é totalmente funcional, o que significa que você pode editar arquivos e fazer </a:t>
@@ -7750,7 +7188,6 @@
                 <a:solidFill>
                   <a:prstClr val="black"/>
                 </a:solidFill>
-                <a:latin typeface="Calibri" panose="020F0502020204030204" pitchFamily="34" charset="0"/>
                 <a:cs typeface="Calibri" panose="020F0502020204030204" pitchFamily="34" charset="0"/>
               </a:rPr>
               <a:t>commits</a:t>
@@ -7759,7 +7196,6 @@
               <a:solidFill>
                 <a:prstClr val="black"/>
               </a:solidFill>
-              <a:latin typeface="Calibri" panose="020F0502020204030204" pitchFamily="34" charset="0"/>
               <a:cs typeface="Calibri" panose="020F0502020204030204" pitchFamily="34" charset="0"/>
             </a:endParaRPr>
           </a:p>
@@ -7770,7 +7206,7 @@
           <p:cNvPr id="9" name="Picture 8">
             <a:extLst>
               <a:ext uri="{FF2B5EF4-FFF2-40B4-BE49-F238E27FC236}">
-                <a16:creationId xmlns:a16="http://schemas.microsoft.com/office/drawing/2014/main" id="{480E1269-272A-601C-3D25-18A0ADE678CB}"/>
+                <a16:creationId xmlns:a16="http://schemas.microsoft.com/office/drawing/2014/main" id="{397A5C64-7D34-16D9-50F2-13F976B970FF}"/>
               </a:ext>
             </a:extLst>
           </p:cNvPr>
@@ -7780,7 +7216,7 @@
           <p:nvPr/>
         </p:nvPicPr>
         <p:blipFill>
-          <a:blip r:embed="rId3"/>
+          <a:blip r:embed="rId2"/>
           <a:srcRect l="4414" r="3061"/>
           <a:stretch/>
         </p:blipFill>
@@ -7797,7 +7233,7 @@
     </p:spTree>
     <p:extLst>
       <p:ext uri="{BB962C8B-B14F-4D97-AF65-F5344CB8AC3E}">
-        <p14:creationId xmlns:p14="http://schemas.microsoft.com/office/powerpoint/2010/main" val="131075324"/>
+        <p14:creationId xmlns:p14="http://schemas.microsoft.com/office/powerpoint/2010/main" val="863097915"/>
       </p:ext>
     </p:extLst>
   </p:cSld>
@@ -7815,7 +7251,7 @@
         <p:cNvPr id="1" name="">
           <a:extLst>
             <a:ext uri="{FF2B5EF4-FFF2-40B4-BE49-F238E27FC236}">
-              <a16:creationId xmlns:a16="http://schemas.microsoft.com/office/drawing/2014/main" id="{BE3D0684-CE9D-1D68-6483-D58052EA0363}"/>
+              <a16:creationId xmlns:a16="http://schemas.microsoft.com/office/drawing/2014/main" id="{5F922709-C5B8-FE44-0E1F-0ED6C43B7066}"/>
             </a:ext>
           </a:extLst>
         </p:cNvPr>
@@ -7830,59 +7266,12 @@
           <a:chExt cx="0" cy="0"/>
         </a:xfrm>
       </p:grpSpPr>
-      <p:pic>
-        <p:nvPicPr>
-          <p:cNvPr id="1026" name="Picture 2">
-            <a:extLst>
-              <a:ext uri="{FF2B5EF4-FFF2-40B4-BE49-F238E27FC236}">
-                <a16:creationId xmlns:a16="http://schemas.microsoft.com/office/drawing/2014/main" id="{DFB6DD20-EA37-CDEE-D1AD-F2E518E523CC}"/>
-              </a:ext>
-            </a:extLst>
-          </p:cNvPr>
-          <p:cNvPicPr>
-            <a:picLocks noChangeAspect="1" noChangeArrowheads="1"/>
-          </p:cNvPicPr>
-          <p:nvPr/>
-        </p:nvPicPr>
-        <p:blipFill>
-          <a:blip r:embed="rId2">
-            <a:extLst>
-              <a:ext uri="{28A0092B-C50C-407E-A947-70E740481C1C}">
-                <a14:useLocalDpi xmlns:a14="http://schemas.microsoft.com/office/drawing/2010/main" val="0"/>
-              </a:ext>
-            </a:extLst>
-          </a:blip>
-          <a:srcRect/>
-          <a:stretch>
-            <a:fillRect/>
-          </a:stretch>
-        </p:blipFill>
-        <p:spPr bwMode="auto">
-          <a:xfrm>
-            <a:off x="10899648" y="6374980"/>
-            <a:ext cx="1149447" cy="295025"/>
-          </a:xfrm>
-          <a:prstGeom prst="rect">
-            <a:avLst/>
-          </a:prstGeom>
-          <a:noFill/>
-          <a:extLst>
-            <a:ext uri="{909E8E84-426E-40DD-AFC4-6F175D3DCCD1}">
-              <a14:hiddenFill xmlns:a14="http://schemas.microsoft.com/office/drawing/2010/main">
-                <a:solidFill>
-                  <a:srgbClr val="FFFFFF"/>
-                </a:solidFill>
-              </a14:hiddenFill>
-            </a:ext>
-          </a:extLst>
-        </p:spPr>
-      </p:pic>
       <p:sp>
         <p:nvSpPr>
           <p:cNvPr id="7" name="Título 1">
             <a:extLst>
               <a:ext uri="{FF2B5EF4-FFF2-40B4-BE49-F238E27FC236}">
-                <a16:creationId xmlns:a16="http://schemas.microsoft.com/office/drawing/2014/main" id="{12F9F82B-5771-B0DD-3DAF-E487D88F10D5}"/>
+                <a16:creationId xmlns:a16="http://schemas.microsoft.com/office/drawing/2014/main" id="{28D312AC-2ABD-C3DA-B8E8-60FD673A2CBB}"/>
               </a:ext>
             </a:extLst>
           </p:cNvPr>
@@ -7940,7 +7329,7 @@
           <p:cNvPr id="8" name="Título 1">
             <a:extLst>
               <a:ext uri="{FF2B5EF4-FFF2-40B4-BE49-F238E27FC236}">
-                <a16:creationId xmlns:a16="http://schemas.microsoft.com/office/drawing/2014/main" id="{D1886CB6-FE87-9EAA-EEEF-0048A585457A}"/>
+                <a16:creationId xmlns:a16="http://schemas.microsoft.com/office/drawing/2014/main" id="{24FC3FA5-15FB-A916-8F68-4551048A12F4}"/>
               </a:ext>
             </a:extLst>
           </p:cNvPr>
@@ -7998,7 +7387,7 @@
           <p:cNvPr id="9" name="TextBox 8">
             <a:extLst>
               <a:ext uri="{FF2B5EF4-FFF2-40B4-BE49-F238E27FC236}">
-                <a16:creationId xmlns:a16="http://schemas.microsoft.com/office/drawing/2014/main" id="{BA681E01-53E7-B96F-A686-06824CE733D0}"/>
+                <a16:creationId xmlns:a16="http://schemas.microsoft.com/office/drawing/2014/main" id="{EEF300E6-9F77-7241-BA57-21AA2CE02A50}"/>
               </a:ext>
             </a:extLst>
           </p:cNvPr>
@@ -8033,7 +7422,6 @@
                 <a:solidFill>
                   <a:prstClr val="black"/>
                 </a:solidFill>
-                <a:latin typeface="Calibri" panose="020F0502020204030204" pitchFamily="34" charset="0"/>
                 <a:cs typeface="Calibri" panose="020F0502020204030204" pitchFamily="34" charset="0"/>
               </a:rPr>
               <a:t>Para clonar um repositório do GitHub em um repositório local</a:t>
@@ -8052,7 +7440,6 @@
                 <a:solidFill>
                   <a:prstClr val="black"/>
                 </a:solidFill>
-                <a:latin typeface="Calibri" panose="020F0502020204030204" pitchFamily="34" charset="0"/>
                 <a:cs typeface="Calibri" panose="020F0502020204030204" pitchFamily="34" charset="0"/>
               </a:rPr>
               <a:t>Vá no repositório do GitHub e pegue o link dele</a:t>
@@ -8071,7 +7458,6 @@
                 <a:solidFill>
                   <a:prstClr val="black"/>
                 </a:solidFill>
-                <a:latin typeface="Calibri" panose="020F0502020204030204" pitchFamily="34" charset="0"/>
                 <a:cs typeface="Calibri" panose="020F0502020204030204" pitchFamily="34" charset="0"/>
               </a:rPr>
               <a:t>Digite no terminal dentro da pasta do repositório: git clone &lt;link&gt;</a:t>
@@ -8090,7 +7476,6 @@
                 <a:solidFill>
                   <a:prstClr val="black"/>
                 </a:solidFill>
-                <a:latin typeface="Calibri" panose="020F0502020204030204" pitchFamily="34" charset="0"/>
                 <a:cs typeface="Calibri" panose="020F0502020204030204" pitchFamily="34" charset="0"/>
               </a:rPr>
               <a:t>Ex</a:t>
@@ -8100,7 +7485,6 @@
                 <a:solidFill>
                   <a:prstClr val="black"/>
                 </a:solidFill>
-                <a:latin typeface="Calibri" panose="020F0502020204030204" pitchFamily="34" charset="0"/>
                 <a:cs typeface="Calibri" panose="020F0502020204030204" pitchFamily="34" charset="0"/>
               </a:rPr>
               <a:t>: </a:t>
@@ -8110,7 +7494,6 @@
                 <a:solidFill>
                   <a:prstClr val="black"/>
                 </a:solidFill>
-                <a:latin typeface="Calibri" panose="020F0502020204030204" pitchFamily="34" charset="0"/>
                 <a:cs typeface="Calibri" panose="020F0502020204030204" pitchFamily="34" charset="0"/>
               </a:rPr>
               <a:t>git clone https://github.com/HenriqueDelegrego/tutorial.git</a:t>
@@ -8129,7 +7512,6 @@
                 <a:solidFill>
                   <a:prstClr val="black"/>
                 </a:solidFill>
-                <a:latin typeface="Calibri" panose="020F0502020204030204" pitchFamily="34" charset="0"/>
                 <a:cs typeface="Calibri" panose="020F0502020204030204" pitchFamily="34" charset="0"/>
               </a:rPr>
               <a:t>Isso vai fazer com que o repositório do GitHub se conecte ao seu repositório local</a:t>
@@ -8142,7 +7524,7 @@
           <p:cNvPr id="10" name="Picture 9">
             <a:extLst>
               <a:ext uri="{FF2B5EF4-FFF2-40B4-BE49-F238E27FC236}">
-                <a16:creationId xmlns:a16="http://schemas.microsoft.com/office/drawing/2014/main" id="{40EBDDFC-23FE-D95C-955D-59F16C4A6FD1}"/>
+                <a16:creationId xmlns:a16="http://schemas.microsoft.com/office/drawing/2014/main" id="{917FD531-E4DE-4013-5C3B-1E6B94D9C3F1}"/>
               </a:ext>
             </a:extLst>
           </p:cNvPr>
@@ -8152,7 +7534,7 @@
           <p:nvPr/>
         </p:nvPicPr>
         <p:blipFill>
-          <a:blip r:embed="rId3"/>
+          <a:blip r:embed="rId2"/>
           <a:srcRect t="-1" b="18607"/>
           <a:stretch/>
         </p:blipFill>
@@ -8171,7 +7553,7 @@
           <p:cNvPr id="11" name="TextBox 10">
             <a:extLst>
               <a:ext uri="{FF2B5EF4-FFF2-40B4-BE49-F238E27FC236}">
-                <a16:creationId xmlns:a16="http://schemas.microsoft.com/office/drawing/2014/main" id="{744CC8C8-252F-B3B7-B4BC-87EEDE477BAD}"/>
+                <a16:creationId xmlns:a16="http://schemas.microsoft.com/office/drawing/2014/main" id="{A699A946-F19C-9620-35BD-172D3036C629}"/>
               </a:ext>
             </a:extLst>
           </p:cNvPr>
@@ -8204,7 +7586,6 @@
                 <a:solidFill>
                   <a:prstClr val="black"/>
                 </a:solidFill>
-                <a:latin typeface="Calibri" panose="020F0502020204030204" pitchFamily="34" charset="0"/>
                 <a:cs typeface="Calibri" panose="020F0502020204030204" pitchFamily="34" charset="0"/>
               </a:rPr>
               <a:t>Agora:</a:t>
@@ -8223,10 +7604,9 @@
                 <a:solidFill>
                   <a:prstClr val="black"/>
                 </a:solidFill>
-                <a:latin typeface="Calibri" panose="020F0502020204030204" pitchFamily="34" charset="0"/>
-                <a:cs typeface="Calibri" panose="020F0502020204030204" pitchFamily="34" charset="0"/>
-              </a:rPr>
-              <a:t>Vamos fazer clone de um repositório</a:t>
+                <a:cs typeface="Calibri" panose="020F0502020204030204" pitchFamily="34" charset="0"/>
+              </a:rPr>
+              <a:t>Vamos fazer o clone de um repositório</a:t>
             </a:r>
           </a:p>
           <a:p>
@@ -8242,7 +7622,6 @@
                 <a:solidFill>
                   <a:prstClr val="black"/>
                 </a:solidFill>
-                <a:latin typeface="Calibri" panose="020F0502020204030204" pitchFamily="34" charset="0"/>
                 <a:cs typeface="Calibri" panose="020F0502020204030204" pitchFamily="34" charset="0"/>
               </a:rPr>
               <a:t>Fazer exercícios 1 e 2</a:t>
@@ -8253,7 +7632,7 @@
     </p:spTree>
     <p:extLst>
       <p:ext uri="{BB962C8B-B14F-4D97-AF65-F5344CB8AC3E}">
-        <p14:creationId xmlns:p14="http://schemas.microsoft.com/office/powerpoint/2010/main" val="4278027669"/>
+        <p14:creationId xmlns:p14="http://schemas.microsoft.com/office/powerpoint/2010/main" val="3250429831"/>
       </p:ext>
     </p:extLst>
   </p:cSld>
@@ -8346,13 +7725,7 @@
   <p:cSld>
     <p:spTree>
       <p:nvGrpSpPr>
-        <p:cNvPr id="1" name="">
-          <a:extLst>
-            <a:ext uri="{FF2B5EF4-FFF2-40B4-BE49-F238E27FC236}">
-              <a16:creationId xmlns:a16="http://schemas.microsoft.com/office/drawing/2014/main" id="{C6551D24-2543-078A-531F-69D6ED7932CD}"/>
-            </a:ext>
-          </a:extLst>
-        </p:cNvPr>
+        <p:cNvPr id="1" name=""/>
         <p:cNvGrpSpPr/>
         <p:nvPr/>
       </p:nvGrpSpPr>
@@ -8366,57 +7739,10 @@
       </p:grpSpPr>
       <p:pic>
         <p:nvPicPr>
-          <p:cNvPr id="1026" name="Picture 2">
-            <a:extLst>
-              <a:ext uri="{FF2B5EF4-FFF2-40B4-BE49-F238E27FC236}">
-                <a16:creationId xmlns:a16="http://schemas.microsoft.com/office/drawing/2014/main" id="{5DBA718C-548F-5410-11C2-4E2548E9394E}"/>
-              </a:ext>
-            </a:extLst>
-          </p:cNvPr>
-          <p:cNvPicPr>
-            <a:picLocks noChangeAspect="1" noChangeArrowheads="1"/>
-          </p:cNvPicPr>
-          <p:nvPr/>
-        </p:nvPicPr>
-        <p:blipFill>
-          <a:blip r:embed="rId2">
-            <a:extLst>
-              <a:ext uri="{28A0092B-C50C-407E-A947-70E740481C1C}">
-                <a14:useLocalDpi xmlns:a14="http://schemas.microsoft.com/office/drawing/2010/main" val="0"/>
-              </a:ext>
-            </a:extLst>
-          </a:blip>
-          <a:srcRect/>
-          <a:stretch>
-            <a:fillRect/>
-          </a:stretch>
-        </p:blipFill>
-        <p:spPr bwMode="auto">
-          <a:xfrm>
-            <a:off x="10899648" y="6374980"/>
-            <a:ext cx="1149447" cy="295025"/>
-          </a:xfrm>
-          <a:prstGeom prst="rect">
-            <a:avLst/>
-          </a:prstGeom>
-          <a:noFill/>
-          <a:extLst>
-            <a:ext uri="{909E8E84-426E-40DD-AFC4-6F175D3DCCD1}">
-              <a14:hiddenFill xmlns:a14="http://schemas.microsoft.com/office/drawing/2010/main">
-                <a:solidFill>
-                  <a:srgbClr val="FFFFFF"/>
-                </a:solidFill>
-              </a14:hiddenFill>
-            </a:ext>
-          </a:extLst>
-        </p:spPr>
-      </p:pic>
-      <p:pic>
-        <p:nvPicPr>
-          <p:cNvPr id="2" name="Picture 1" descr="The SIX Basic Steps of Software Development by KitelyTech">
-            <a:extLst>
-              <a:ext uri="{FF2B5EF4-FFF2-40B4-BE49-F238E27FC236}">
-                <a16:creationId xmlns:a16="http://schemas.microsoft.com/office/drawing/2014/main" id="{20E2969B-AB1F-2653-1D4A-7A13E399434A}"/>
+          <p:cNvPr id="49" name="Picture 48" descr="The SIX Basic Steps of Software Development by KitelyTech">
+            <a:extLst>
+              <a:ext uri="{FF2B5EF4-FFF2-40B4-BE49-F238E27FC236}">
+                <a16:creationId xmlns:a16="http://schemas.microsoft.com/office/drawing/2014/main" id="{6068540A-B428-C5F2-01A0-337F56798BB7}"/>
               </a:ext>
             </a:extLst>
           </p:cNvPr>
@@ -8426,7 +7752,7 @@
           <p:nvPr/>
         </p:nvPicPr>
         <p:blipFill rotWithShape="1">
-          <a:blip r:embed="rId3">
+          <a:blip r:embed="rId2">
             <a:extLst>
               <a:ext uri="{28A0092B-C50C-407E-A947-70E740481C1C}">
                 <a14:useLocalDpi xmlns:a14="http://schemas.microsoft.com/office/drawing/2010/main" val="0"/>
@@ -8458,10 +7784,10 @@
       </p:pic>
       <p:sp>
         <p:nvSpPr>
-          <p:cNvPr id="3" name="TextBox 2">
-            <a:extLst>
-              <a:ext uri="{FF2B5EF4-FFF2-40B4-BE49-F238E27FC236}">
-                <a16:creationId xmlns:a16="http://schemas.microsoft.com/office/drawing/2014/main" id="{B0CADBD1-8A5E-ABA0-E7DD-5577AE57E3BC}"/>
+          <p:cNvPr id="50" name="TextBox 49">
+            <a:extLst>
+              <a:ext uri="{FF2B5EF4-FFF2-40B4-BE49-F238E27FC236}">
+                <a16:creationId xmlns:a16="http://schemas.microsoft.com/office/drawing/2014/main" id="{8261C60F-A92B-8D8A-4410-E8C187BF03DE}"/>
               </a:ext>
             </a:extLst>
           </p:cNvPr>
@@ -8486,7 +7812,9 @@
           <a:p>
             <a:r>
               <a:rPr lang="pt-BR" sz="2000">
-                <a:latin typeface="Calibri" panose="020F0502020204030204" pitchFamily="34" charset="0"/>
+                <a:solidFill>
+                  <a:prstClr val="black"/>
+                </a:solidFill>
                 <a:cs typeface="Calibri" panose="020F0502020204030204" pitchFamily="34" charset="0"/>
               </a:rPr>
               <a:t>Esse projeto:</a:t>
@@ -8495,7 +7823,9 @@
           <a:p>
             <a:r>
               <a:rPr lang="pt-BR" sz="2000">
-                <a:latin typeface="Calibri" panose="020F0502020204030204" pitchFamily="34" charset="0"/>
+                <a:solidFill>
+                  <a:prstClr val="black"/>
+                </a:solidFill>
                 <a:cs typeface="Calibri" panose="020F0502020204030204" pitchFamily="34" charset="0"/>
               </a:rPr>
               <a:t>É possível ser feito a tempo?</a:t>
@@ -8504,7 +7834,9 @@
           <a:p>
             <a:r>
               <a:rPr lang="pt-BR" sz="2000">
-                <a:latin typeface="Calibri" panose="020F0502020204030204" pitchFamily="34" charset="0"/>
+                <a:solidFill>
+                  <a:prstClr val="black"/>
+                </a:solidFill>
                 <a:cs typeface="Calibri" panose="020F0502020204030204" pitchFamily="34" charset="0"/>
               </a:rPr>
               <a:t>Está dentro do orçamento?</a:t>
@@ -8513,7 +7845,9 @@
           <a:p>
             <a:r>
               <a:rPr lang="pt-BR" sz="2000">
-                <a:latin typeface="Calibri" panose="020F0502020204030204" pitchFamily="34" charset="0"/>
+                <a:solidFill>
+                  <a:prstClr val="black"/>
+                </a:solidFill>
                 <a:cs typeface="Calibri" panose="020F0502020204030204" pitchFamily="34" charset="0"/>
               </a:rPr>
               <a:t>Faz do zero ou compra uma solução?</a:t>
@@ -8522,7 +7856,9 @@
           <a:p>
             <a:r>
               <a:rPr lang="pt-BR" sz="2000">
-                <a:latin typeface="Calibri" panose="020F0502020204030204" pitchFamily="34" charset="0"/>
+                <a:solidFill>
+                  <a:prstClr val="black"/>
+                </a:solidFill>
                 <a:cs typeface="Calibri" panose="020F0502020204030204" pitchFamily="34" charset="0"/>
               </a:rPr>
               <a:t>Quais são os objetivos?</a:t>
@@ -8532,10 +7868,10 @@
       </p:sp>
       <p:sp>
         <p:nvSpPr>
-          <p:cNvPr id="6" name="TextBox 5">
-            <a:extLst>
-              <a:ext uri="{FF2B5EF4-FFF2-40B4-BE49-F238E27FC236}">
-                <a16:creationId xmlns:a16="http://schemas.microsoft.com/office/drawing/2014/main" id="{BFAACA55-932A-2C75-263E-A0F589296D6C}"/>
+          <p:cNvPr id="51" name="TextBox 50">
+            <a:extLst>
+              <a:ext uri="{FF2B5EF4-FFF2-40B4-BE49-F238E27FC236}">
+                <a16:creationId xmlns:a16="http://schemas.microsoft.com/office/drawing/2014/main" id="{7359234D-A6C3-0C29-62F3-35B17D772F8E}"/>
               </a:ext>
             </a:extLst>
           </p:cNvPr>
@@ -8560,7 +7896,9 @@
           <a:p>
             <a:r>
               <a:rPr lang="pt-BR" sz="2000">
-                <a:latin typeface="Calibri" panose="020F0502020204030204" pitchFamily="34" charset="0"/>
+                <a:solidFill>
+                  <a:prstClr val="black"/>
+                </a:solidFill>
                 <a:cs typeface="Calibri" panose="020F0502020204030204" pitchFamily="34" charset="0"/>
               </a:rPr>
               <a:t>Casos de uso</a:t>
@@ -8569,7 +7907,9 @@
           <a:p>
             <a:r>
               <a:rPr lang="pt-BR" sz="2000">
-                <a:latin typeface="Calibri" panose="020F0502020204030204" pitchFamily="34" charset="0"/>
+                <a:solidFill>
+                  <a:prstClr val="black"/>
+                </a:solidFill>
                 <a:cs typeface="Calibri" panose="020F0502020204030204" pitchFamily="34" charset="0"/>
               </a:rPr>
               <a:t>Personas</a:t>
@@ -8578,7 +7918,9 @@
           <a:p>
             <a:r>
               <a:rPr lang="pt-BR" sz="2000">
-                <a:latin typeface="Calibri" panose="020F0502020204030204" pitchFamily="34" charset="0"/>
+                <a:solidFill>
+                  <a:prstClr val="black"/>
+                </a:solidFill>
                 <a:cs typeface="Calibri" panose="020F0502020204030204" pitchFamily="34" charset="0"/>
               </a:rPr>
               <a:t>Estórias</a:t>
@@ -8588,10 +7930,10 @@
       </p:sp>
       <p:sp>
         <p:nvSpPr>
-          <p:cNvPr id="7" name="Arrow: Right 6">
-            <a:extLst>
-              <a:ext uri="{FF2B5EF4-FFF2-40B4-BE49-F238E27FC236}">
-                <a16:creationId xmlns:a16="http://schemas.microsoft.com/office/drawing/2014/main" id="{B2A9A488-4934-45C7-3888-E5A1061EDB14}"/>
+          <p:cNvPr id="52" name="Arrow: Right 51">
+            <a:extLst>
+              <a:ext uri="{FF2B5EF4-FFF2-40B4-BE49-F238E27FC236}">
+                <a16:creationId xmlns:a16="http://schemas.microsoft.com/office/drawing/2014/main" id="{0BBD0701-A63B-D27D-5FC3-A2736C8B98BC}"/>
               </a:ext>
             </a:extLst>
           </p:cNvPr>
@@ -8609,38 +7951,61 @@
           <a:solidFill>
             <a:srgbClr val="293E6B"/>
           </a:solidFill>
+          <a:ln w="12700" cap="flat" cmpd="sng" algn="ctr">
+            <a:solidFill>
+              <a:sysClr val="windowText" lastClr="000000">
+                <a:shade val="50000"/>
+              </a:sysClr>
+            </a:solidFill>
+            <a:prstDash val="solid"/>
+            <a:miter lim="800000"/>
+          </a:ln>
+          <a:effectLst/>
         </p:spPr>
-        <p:style>
-          <a:lnRef idx="2">
-            <a:schemeClr val="dk1">
-              <a:shade val="50000"/>
-            </a:schemeClr>
-          </a:lnRef>
-          <a:fillRef idx="1">
-            <a:schemeClr val="dk1"/>
-          </a:fillRef>
-          <a:effectRef idx="0">
-            <a:schemeClr val="dk1"/>
-          </a:effectRef>
-          <a:fontRef idx="minor">
-            <a:schemeClr val="lt1"/>
-          </a:fontRef>
-        </p:style>
         <p:txBody>
           <a:bodyPr rtlCol="0" anchor="ctr"/>
           <a:lstStyle/>
           <a:p>
-            <a:pPr algn="ctr"/>
-            <a:endParaRPr lang="pt-BR"/>
-          </a:p>
-        </p:txBody>
-      </p:sp>
-      <p:sp>
-        <p:nvSpPr>
-          <p:cNvPr id="8" name="Arrow: Right 7">
-            <a:extLst>
-              <a:ext uri="{FF2B5EF4-FFF2-40B4-BE49-F238E27FC236}">
-                <a16:creationId xmlns:a16="http://schemas.microsoft.com/office/drawing/2014/main" id="{056A5492-EEA5-07DC-088F-BDCD214F4E9D}"/>
+            <a:pPr marL="0" marR="0" lvl="0" indent="0" algn="ctr" defTabSz="914400" eaLnBrk="1" fontAlgn="auto" latinLnBrk="0" hangingPunct="1">
+              <a:lnSpc>
+                <a:spcPct val="100000"/>
+              </a:lnSpc>
+              <a:spcBef>
+                <a:spcPts val="0"/>
+              </a:spcBef>
+              <a:spcAft>
+                <a:spcPts val="0"/>
+              </a:spcAft>
+              <a:buClrTx/>
+              <a:buSzTx/>
+              <a:buFontTx/>
+              <a:buNone/>
+              <a:tabLst/>
+              <a:defRPr/>
+            </a:pPr>
+            <a:endParaRPr kumimoji="0" lang="pt-BR" sz="1800" b="0" i="0" u="none" strike="noStrike" kern="0" cap="none" spc="0" normalizeH="0" baseline="0" noProof="0">
+              <a:ln>
+                <a:noFill/>
+              </a:ln>
+              <a:solidFill>
+                <a:prstClr val="white"/>
+              </a:solidFill>
+              <a:effectLst/>
+              <a:uLnTx/>
+              <a:uFillTx/>
+              <a:latin typeface="Century Gothic" panose="020F0302020204030204"/>
+              <a:ea typeface="+mn-ea"/>
+              <a:cs typeface="+mn-cs"/>
+            </a:endParaRPr>
+          </a:p>
+        </p:txBody>
+      </p:sp>
+      <p:sp>
+        <p:nvSpPr>
+          <p:cNvPr id="53" name="Arrow: Right 52">
+            <a:extLst>
+              <a:ext uri="{FF2B5EF4-FFF2-40B4-BE49-F238E27FC236}">
+                <a16:creationId xmlns:a16="http://schemas.microsoft.com/office/drawing/2014/main" id="{BC6149DE-5D8C-9FCA-B195-41DBC6EFA2E7}"/>
               </a:ext>
             </a:extLst>
           </p:cNvPr>
@@ -8658,38 +8023,61 @@
           <a:solidFill>
             <a:srgbClr val="B1292F"/>
           </a:solidFill>
+          <a:ln w="12700" cap="flat" cmpd="sng" algn="ctr">
+            <a:solidFill>
+              <a:sysClr val="windowText" lastClr="000000">
+                <a:shade val="50000"/>
+              </a:sysClr>
+            </a:solidFill>
+            <a:prstDash val="solid"/>
+            <a:miter lim="800000"/>
+          </a:ln>
+          <a:effectLst/>
         </p:spPr>
-        <p:style>
-          <a:lnRef idx="2">
-            <a:schemeClr val="dk1">
-              <a:shade val="50000"/>
-            </a:schemeClr>
-          </a:lnRef>
-          <a:fillRef idx="1">
-            <a:schemeClr val="dk1"/>
-          </a:fillRef>
-          <a:effectRef idx="0">
-            <a:schemeClr val="dk1"/>
-          </a:effectRef>
-          <a:fontRef idx="minor">
-            <a:schemeClr val="lt1"/>
-          </a:fontRef>
-        </p:style>
         <p:txBody>
           <a:bodyPr rtlCol="0" anchor="ctr"/>
           <a:lstStyle/>
           <a:p>
-            <a:pPr algn="ctr"/>
-            <a:endParaRPr lang="pt-BR"/>
-          </a:p>
-        </p:txBody>
-      </p:sp>
-      <p:sp>
-        <p:nvSpPr>
-          <p:cNvPr id="9" name="Arrow: Right 8">
-            <a:extLst>
-              <a:ext uri="{FF2B5EF4-FFF2-40B4-BE49-F238E27FC236}">
-                <a16:creationId xmlns:a16="http://schemas.microsoft.com/office/drawing/2014/main" id="{46DC7E87-7839-EEC6-2965-E4063A413C95}"/>
+            <a:pPr marL="0" marR="0" lvl="0" indent="0" algn="ctr" defTabSz="914400" eaLnBrk="1" fontAlgn="auto" latinLnBrk="0" hangingPunct="1">
+              <a:lnSpc>
+                <a:spcPct val="100000"/>
+              </a:lnSpc>
+              <a:spcBef>
+                <a:spcPts val="0"/>
+              </a:spcBef>
+              <a:spcAft>
+                <a:spcPts val="0"/>
+              </a:spcAft>
+              <a:buClrTx/>
+              <a:buSzTx/>
+              <a:buFontTx/>
+              <a:buNone/>
+              <a:tabLst/>
+              <a:defRPr/>
+            </a:pPr>
+            <a:endParaRPr kumimoji="0" lang="pt-BR" sz="1800" b="0" i="0" u="none" strike="noStrike" kern="0" cap="none" spc="0" normalizeH="0" baseline="0" noProof="0">
+              <a:ln>
+                <a:noFill/>
+              </a:ln>
+              <a:solidFill>
+                <a:prstClr val="white"/>
+              </a:solidFill>
+              <a:effectLst/>
+              <a:uLnTx/>
+              <a:uFillTx/>
+              <a:latin typeface="Century Gothic" panose="020F0302020204030204"/>
+              <a:ea typeface="+mn-ea"/>
+              <a:cs typeface="+mn-cs"/>
+            </a:endParaRPr>
+          </a:p>
+        </p:txBody>
+      </p:sp>
+      <p:sp>
+        <p:nvSpPr>
+          <p:cNvPr id="54" name="Arrow: Right 53">
+            <a:extLst>
+              <a:ext uri="{FF2B5EF4-FFF2-40B4-BE49-F238E27FC236}">
+                <a16:creationId xmlns:a16="http://schemas.microsoft.com/office/drawing/2014/main" id="{67B7D001-8EF4-5E43-4E8F-CE36325320C6}"/>
               </a:ext>
             </a:extLst>
           </p:cNvPr>
@@ -8707,38 +8095,61 @@
           <a:solidFill>
             <a:srgbClr val="0093DA"/>
           </a:solidFill>
+          <a:ln w="12700" cap="flat" cmpd="sng" algn="ctr">
+            <a:solidFill>
+              <a:sysClr val="windowText" lastClr="000000">
+                <a:shade val="50000"/>
+              </a:sysClr>
+            </a:solidFill>
+            <a:prstDash val="solid"/>
+            <a:miter lim="800000"/>
+          </a:ln>
+          <a:effectLst/>
         </p:spPr>
-        <p:style>
-          <a:lnRef idx="2">
-            <a:schemeClr val="dk1">
-              <a:shade val="50000"/>
-            </a:schemeClr>
-          </a:lnRef>
-          <a:fillRef idx="1">
-            <a:schemeClr val="dk1"/>
-          </a:fillRef>
-          <a:effectRef idx="0">
-            <a:schemeClr val="dk1"/>
-          </a:effectRef>
-          <a:fontRef idx="minor">
-            <a:schemeClr val="lt1"/>
-          </a:fontRef>
-        </p:style>
         <p:txBody>
           <a:bodyPr rtlCol="0" anchor="ctr"/>
           <a:lstStyle/>
           <a:p>
-            <a:pPr algn="ctr"/>
-            <a:endParaRPr lang="pt-BR"/>
-          </a:p>
-        </p:txBody>
-      </p:sp>
-      <p:sp>
-        <p:nvSpPr>
-          <p:cNvPr id="10" name="TextBox 9">
-            <a:extLst>
-              <a:ext uri="{FF2B5EF4-FFF2-40B4-BE49-F238E27FC236}">
-                <a16:creationId xmlns:a16="http://schemas.microsoft.com/office/drawing/2014/main" id="{9C1DD136-CEF7-D841-FF4F-006BBF955421}"/>
+            <a:pPr marL="0" marR="0" lvl="0" indent="0" algn="ctr" defTabSz="914400" eaLnBrk="1" fontAlgn="auto" latinLnBrk="0" hangingPunct="1">
+              <a:lnSpc>
+                <a:spcPct val="100000"/>
+              </a:lnSpc>
+              <a:spcBef>
+                <a:spcPts val="0"/>
+              </a:spcBef>
+              <a:spcAft>
+                <a:spcPts val="0"/>
+              </a:spcAft>
+              <a:buClrTx/>
+              <a:buSzTx/>
+              <a:buFontTx/>
+              <a:buNone/>
+              <a:tabLst/>
+              <a:defRPr/>
+            </a:pPr>
+            <a:endParaRPr kumimoji="0" lang="pt-BR" sz="1800" b="0" i="0" u="none" strike="noStrike" kern="0" cap="none" spc="0" normalizeH="0" baseline="0" noProof="0">
+              <a:ln>
+                <a:noFill/>
+              </a:ln>
+              <a:solidFill>
+                <a:prstClr val="white"/>
+              </a:solidFill>
+              <a:effectLst/>
+              <a:uLnTx/>
+              <a:uFillTx/>
+              <a:latin typeface="Century Gothic" panose="020F0302020204030204"/>
+              <a:ea typeface="+mn-ea"/>
+              <a:cs typeface="+mn-cs"/>
+            </a:endParaRPr>
+          </a:p>
+        </p:txBody>
+      </p:sp>
+      <p:sp>
+        <p:nvSpPr>
+          <p:cNvPr id="55" name="TextBox 54">
+            <a:extLst>
+              <a:ext uri="{FF2B5EF4-FFF2-40B4-BE49-F238E27FC236}">
+                <a16:creationId xmlns:a16="http://schemas.microsoft.com/office/drawing/2014/main" id="{1F1F1870-785C-EDD8-96AE-CD34C1AE3E6D}"/>
               </a:ext>
             </a:extLst>
           </p:cNvPr>
@@ -8763,7 +8174,9 @@
           <a:p>
             <a:r>
               <a:rPr lang="pt-BR" sz="2000">
-                <a:latin typeface="Calibri" panose="020F0502020204030204" pitchFamily="34" charset="0"/>
+                <a:solidFill>
+                  <a:prstClr val="black"/>
+                </a:solidFill>
                 <a:cs typeface="Calibri" panose="020F0502020204030204" pitchFamily="34" charset="0"/>
               </a:rPr>
               <a:t>É feito o fluxograma, diagrama de classes e</a:t>
@@ -8772,7 +8185,9 @@
           <a:p>
             <a:r>
               <a:rPr lang="pt-BR" sz="2000">
-                <a:latin typeface="Calibri" panose="020F0502020204030204" pitchFamily="34" charset="0"/>
+                <a:solidFill>
+                  <a:prstClr val="black"/>
+                </a:solidFill>
                 <a:cs typeface="Calibri" panose="020F0502020204030204" pitchFamily="34" charset="0"/>
               </a:rPr>
               <a:t>Mockups das interfaces</a:t>
@@ -8782,10 +8197,10 @@
       </p:sp>
       <p:sp>
         <p:nvSpPr>
-          <p:cNvPr id="11" name="Arrow: Right 10">
-            <a:extLst>
-              <a:ext uri="{FF2B5EF4-FFF2-40B4-BE49-F238E27FC236}">
-                <a16:creationId xmlns:a16="http://schemas.microsoft.com/office/drawing/2014/main" id="{E97FF94A-E527-4ECB-6129-5DA15F33F8C6}"/>
+          <p:cNvPr id="56" name="Arrow: Right 55">
+            <a:extLst>
+              <a:ext uri="{FF2B5EF4-FFF2-40B4-BE49-F238E27FC236}">
+                <a16:creationId xmlns:a16="http://schemas.microsoft.com/office/drawing/2014/main" id="{6C106A9C-FB57-EE64-E3A8-65F16C46E62F}"/>
               </a:ext>
             </a:extLst>
           </p:cNvPr>
@@ -8803,38 +8218,61 @@
           <a:solidFill>
             <a:srgbClr val="0C9D8B"/>
           </a:solidFill>
+          <a:ln w="12700" cap="flat" cmpd="sng" algn="ctr">
+            <a:solidFill>
+              <a:sysClr val="windowText" lastClr="000000">
+                <a:shade val="50000"/>
+              </a:sysClr>
+            </a:solidFill>
+            <a:prstDash val="solid"/>
+            <a:miter lim="800000"/>
+          </a:ln>
+          <a:effectLst/>
         </p:spPr>
-        <p:style>
-          <a:lnRef idx="2">
-            <a:schemeClr val="dk1">
-              <a:shade val="50000"/>
-            </a:schemeClr>
-          </a:lnRef>
-          <a:fillRef idx="1">
-            <a:schemeClr val="dk1"/>
-          </a:fillRef>
-          <a:effectRef idx="0">
-            <a:schemeClr val="dk1"/>
-          </a:effectRef>
-          <a:fontRef idx="minor">
-            <a:schemeClr val="lt1"/>
-          </a:fontRef>
-        </p:style>
         <p:txBody>
           <a:bodyPr rtlCol="0" anchor="ctr"/>
           <a:lstStyle/>
           <a:p>
-            <a:pPr algn="ctr"/>
-            <a:endParaRPr lang="pt-BR"/>
-          </a:p>
-        </p:txBody>
-      </p:sp>
-      <p:sp>
-        <p:nvSpPr>
-          <p:cNvPr id="12" name="TextBox 11">
-            <a:extLst>
-              <a:ext uri="{FF2B5EF4-FFF2-40B4-BE49-F238E27FC236}">
-                <a16:creationId xmlns:a16="http://schemas.microsoft.com/office/drawing/2014/main" id="{04E05089-68CB-2476-8BE5-21860F1A5D94}"/>
+            <a:pPr marL="0" marR="0" lvl="0" indent="0" algn="ctr" defTabSz="914400" eaLnBrk="1" fontAlgn="auto" latinLnBrk="0" hangingPunct="1">
+              <a:lnSpc>
+                <a:spcPct val="100000"/>
+              </a:lnSpc>
+              <a:spcBef>
+                <a:spcPts val="0"/>
+              </a:spcBef>
+              <a:spcAft>
+                <a:spcPts val="0"/>
+              </a:spcAft>
+              <a:buClrTx/>
+              <a:buSzTx/>
+              <a:buFontTx/>
+              <a:buNone/>
+              <a:tabLst/>
+              <a:defRPr/>
+            </a:pPr>
+            <a:endParaRPr kumimoji="0" lang="pt-BR" sz="1800" b="0" i="0" u="none" strike="noStrike" kern="0" cap="none" spc="0" normalizeH="0" baseline="0" noProof="0">
+              <a:ln>
+                <a:noFill/>
+              </a:ln>
+              <a:solidFill>
+                <a:prstClr val="white"/>
+              </a:solidFill>
+              <a:effectLst/>
+              <a:uLnTx/>
+              <a:uFillTx/>
+              <a:latin typeface="Century Gothic" panose="020F0302020204030204"/>
+              <a:ea typeface="+mn-ea"/>
+              <a:cs typeface="+mn-cs"/>
+            </a:endParaRPr>
+          </a:p>
+        </p:txBody>
+      </p:sp>
+      <p:sp>
+        <p:nvSpPr>
+          <p:cNvPr id="57" name="TextBox 56">
+            <a:extLst>
+              <a:ext uri="{FF2B5EF4-FFF2-40B4-BE49-F238E27FC236}">
+                <a16:creationId xmlns:a16="http://schemas.microsoft.com/office/drawing/2014/main" id="{CF6FD5CE-70D3-D7DD-A6DD-34451C8BA220}"/>
               </a:ext>
             </a:extLst>
           </p:cNvPr>
@@ -8864,7 +8302,9 @@
             </a:pPr>
             <a:r>
               <a:rPr lang="pt-BR" sz="2000">
-                <a:latin typeface="Calibri" panose="020F0502020204030204" pitchFamily="34" charset="0"/>
+                <a:solidFill>
+                  <a:prstClr val="black"/>
+                </a:solidFill>
                 <a:cs typeface="Calibri" panose="020F0502020204030204" pitchFamily="34" charset="0"/>
               </a:rPr>
               <a:t>É iniciada a programação do software</a:t>
@@ -8874,10 +8314,10 @@
       </p:sp>
       <p:sp>
         <p:nvSpPr>
-          <p:cNvPr id="13" name="Arrow: Right 12">
-            <a:extLst>
-              <a:ext uri="{FF2B5EF4-FFF2-40B4-BE49-F238E27FC236}">
-                <a16:creationId xmlns:a16="http://schemas.microsoft.com/office/drawing/2014/main" id="{12E49E30-DC93-940D-D3AF-64A1EF9F3FE0}"/>
+          <p:cNvPr id="58" name="Arrow: Right 57">
+            <a:extLst>
+              <a:ext uri="{FF2B5EF4-FFF2-40B4-BE49-F238E27FC236}">
+                <a16:creationId xmlns:a16="http://schemas.microsoft.com/office/drawing/2014/main" id="{A194E1A4-2CE8-70E9-6F2C-0F0C0EDBFEA7}"/>
               </a:ext>
             </a:extLst>
           </p:cNvPr>
@@ -8895,38 +8335,61 @@
           <a:solidFill>
             <a:srgbClr val="EDB717"/>
           </a:solidFill>
+          <a:ln w="12700" cap="flat" cmpd="sng" algn="ctr">
+            <a:solidFill>
+              <a:sysClr val="windowText" lastClr="000000">
+                <a:shade val="50000"/>
+              </a:sysClr>
+            </a:solidFill>
+            <a:prstDash val="solid"/>
+            <a:miter lim="800000"/>
+          </a:ln>
+          <a:effectLst/>
         </p:spPr>
-        <p:style>
-          <a:lnRef idx="2">
-            <a:schemeClr val="dk1">
-              <a:shade val="50000"/>
-            </a:schemeClr>
-          </a:lnRef>
-          <a:fillRef idx="1">
-            <a:schemeClr val="dk1"/>
-          </a:fillRef>
-          <a:effectRef idx="0">
-            <a:schemeClr val="dk1"/>
-          </a:effectRef>
-          <a:fontRef idx="minor">
-            <a:schemeClr val="lt1"/>
-          </a:fontRef>
-        </p:style>
         <p:txBody>
           <a:bodyPr rtlCol="0" anchor="ctr"/>
           <a:lstStyle/>
           <a:p>
-            <a:pPr algn="ctr"/>
-            <a:endParaRPr lang="pt-BR"/>
-          </a:p>
-        </p:txBody>
-      </p:sp>
-      <p:sp>
-        <p:nvSpPr>
-          <p:cNvPr id="14" name="TextBox 13">
-            <a:extLst>
-              <a:ext uri="{FF2B5EF4-FFF2-40B4-BE49-F238E27FC236}">
-                <a16:creationId xmlns:a16="http://schemas.microsoft.com/office/drawing/2014/main" id="{17273673-2273-3429-DF64-3FBAB9FF2149}"/>
+            <a:pPr marL="0" marR="0" lvl="0" indent="0" algn="ctr" defTabSz="914400" eaLnBrk="1" fontAlgn="auto" latinLnBrk="0" hangingPunct="1">
+              <a:lnSpc>
+                <a:spcPct val="100000"/>
+              </a:lnSpc>
+              <a:spcBef>
+                <a:spcPts val="0"/>
+              </a:spcBef>
+              <a:spcAft>
+                <a:spcPts val="0"/>
+              </a:spcAft>
+              <a:buClrTx/>
+              <a:buSzTx/>
+              <a:buFontTx/>
+              <a:buNone/>
+              <a:tabLst/>
+              <a:defRPr/>
+            </a:pPr>
+            <a:endParaRPr kumimoji="0" lang="pt-BR" sz="1800" b="0" i="0" u="none" strike="noStrike" kern="0" cap="none" spc="0" normalizeH="0" baseline="0" noProof="0">
+              <a:ln>
+                <a:noFill/>
+              </a:ln>
+              <a:solidFill>
+                <a:prstClr val="white"/>
+              </a:solidFill>
+              <a:effectLst/>
+              <a:uLnTx/>
+              <a:uFillTx/>
+              <a:latin typeface="Century Gothic" panose="020F0302020204030204"/>
+              <a:ea typeface="+mn-ea"/>
+              <a:cs typeface="+mn-cs"/>
+            </a:endParaRPr>
+          </a:p>
+        </p:txBody>
+      </p:sp>
+      <p:sp>
+        <p:nvSpPr>
+          <p:cNvPr id="59" name="TextBox 58">
+            <a:extLst>
+              <a:ext uri="{FF2B5EF4-FFF2-40B4-BE49-F238E27FC236}">
+                <a16:creationId xmlns:a16="http://schemas.microsoft.com/office/drawing/2014/main" id="{1D0BF125-7150-FDB0-EEE8-8E1D1705D4A4}"/>
               </a:ext>
             </a:extLst>
           </p:cNvPr>
@@ -8951,7 +8414,9 @@
           <a:p>
             <a:r>
               <a:rPr lang="pt-BR" sz="2000">
-                <a:latin typeface="Calibri" panose="020F0502020204030204" pitchFamily="34" charset="0"/>
+                <a:solidFill>
+                  <a:prstClr val="black"/>
+                </a:solidFill>
                 <a:cs typeface="Calibri" panose="020F0502020204030204" pitchFamily="34" charset="0"/>
               </a:rPr>
               <a:t>São feitos os testes:</a:t>
@@ -8960,7 +8425,9 @@
           <a:p>
             <a:r>
               <a:rPr lang="pt-BR" sz="2000">
-                <a:latin typeface="Calibri" panose="020F0502020204030204" pitchFamily="34" charset="0"/>
+                <a:solidFill>
+                  <a:prstClr val="black"/>
+                </a:solidFill>
                 <a:cs typeface="Calibri" panose="020F0502020204030204" pitchFamily="34" charset="0"/>
               </a:rPr>
               <a:t>Integridade</a:t>
@@ -8969,7 +8436,9 @@
           <a:p>
             <a:r>
               <a:rPr lang="pt-BR" sz="2000">
-                <a:latin typeface="Calibri" panose="020F0502020204030204" pitchFamily="34" charset="0"/>
+                <a:solidFill>
+                  <a:prstClr val="black"/>
+                </a:solidFill>
                 <a:cs typeface="Calibri" panose="020F0502020204030204" pitchFamily="34" charset="0"/>
               </a:rPr>
               <a:t>Disponibilidade</a:t>
@@ -8978,7 +8447,9 @@
           <a:p>
             <a:r>
               <a:rPr lang="pt-BR" sz="2000">
-                <a:latin typeface="Calibri" panose="020F0502020204030204" pitchFamily="34" charset="0"/>
+                <a:solidFill>
+                  <a:prstClr val="black"/>
+                </a:solidFill>
                 <a:cs typeface="Calibri" panose="020F0502020204030204" pitchFamily="34" charset="0"/>
               </a:rPr>
               <a:t>Performance</a:t>
@@ -8987,7 +8458,9 @@
           <a:p>
             <a:r>
               <a:rPr lang="pt-BR" sz="2000">
-                <a:latin typeface="Calibri" panose="020F0502020204030204" pitchFamily="34" charset="0"/>
+                <a:solidFill>
+                  <a:prstClr val="black"/>
+                </a:solidFill>
                 <a:cs typeface="Calibri" panose="020F0502020204030204" pitchFamily="34" charset="0"/>
               </a:rPr>
               <a:t>Compatibilidade e facilidade de uso</a:t>
@@ -8996,7 +8469,9 @@
           <a:p>
             <a:r>
               <a:rPr lang="pt-BR" sz="2000">
-                <a:latin typeface="Calibri" panose="020F0502020204030204" pitchFamily="34" charset="0"/>
+                <a:solidFill>
+                  <a:prstClr val="black"/>
+                </a:solidFill>
                 <a:cs typeface="Calibri" panose="020F0502020204030204" pitchFamily="34" charset="0"/>
               </a:rPr>
               <a:t>Integração de módulos</a:t>
@@ -9006,10 +8481,10 @@
       </p:sp>
       <p:sp>
         <p:nvSpPr>
-          <p:cNvPr id="15" name="Arrow: Right 14">
-            <a:extLst>
-              <a:ext uri="{FF2B5EF4-FFF2-40B4-BE49-F238E27FC236}">
-                <a16:creationId xmlns:a16="http://schemas.microsoft.com/office/drawing/2014/main" id="{6703CFD3-1134-4FD9-3CAD-E0F0E23D5B7E}"/>
+          <p:cNvPr id="60" name="Arrow: Right 59">
+            <a:extLst>
+              <a:ext uri="{FF2B5EF4-FFF2-40B4-BE49-F238E27FC236}">
+                <a16:creationId xmlns:a16="http://schemas.microsoft.com/office/drawing/2014/main" id="{901753EE-31F3-C4D9-BA89-4704DB6C1A5C}"/>
               </a:ext>
             </a:extLst>
           </p:cNvPr>
@@ -9027,38 +8502,61 @@
           <a:solidFill>
             <a:srgbClr val="EF8101"/>
           </a:solidFill>
+          <a:ln w="12700" cap="flat" cmpd="sng" algn="ctr">
+            <a:solidFill>
+              <a:sysClr val="windowText" lastClr="000000">
+                <a:shade val="50000"/>
+              </a:sysClr>
+            </a:solidFill>
+            <a:prstDash val="solid"/>
+            <a:miter lim="800000"/>
+          </a:ln>
+          <a:effectLst/>
         </p:spPr>
-        <p:style>
-          <a:lnRef idx="2">
-            <a:schemeClr val="dk1">
-              <a:shade val="50000"/>
-            </a:schemeClr>
-          </a:lnRef>
-          <a:fillRef idx="1">
-            <a:schemeClr val="dk1"/>
-          </a:fillRef>
-          <a:effectRef idx="0">
-            <a:schemeClr val="dk1"/>
-          </a:effectRef>
-          <a:fontRef idx="minor">
-            <a:schemeClr val="lt1"/>
-          </a:fontRef>
-        </p:style>
         <p:txBody>
           <a:bodyPr rtlCol="0" anchor="ctr"/>
           <a:lstStyle/>
           <a:p>
-            <a:pPr algn="ctr"/>
-            <a:endParaRPr lang="pt-BR"/>
-          </a:p>
-        </p:txBody>
-      </p:sp>
-      <p:sp>
-        <p:nvSpPr>
-          <p:cNvPr id="16" name="TextBox 15">
-            <a:extLst>
-              <a:ext uri="{FF2B5EF4-FFF2-40B4-BE49-F238E27FC236}">
-                <a16:creationId xmlns:a16="http://schemas.microsoft.com/office/drawing/2014/main" id="{58C5ECE4-45B3-BC20-7B38-E93460121382}"/>
+            <a:pPr marL="0" marR="0" lvl="0" indent="0" algn="ctr" defTabSz="914400" eaLnBrk="1" fontAlgn="auto" latinLnBrk="0" hangingPunct="1">
+              <a:lnSpc>
+                <a:spcPct val="100000"/>
+              </a:lnSpc>
+              <a:spcBef>
+                <a:spcPts val="0"/>
+              </a:spcBef>
+              <a:spcAft>
+                <a:spcPts val="0"/>
+              </a:spcAft>
+              <a:buClrTx/>
+              <a:buSzTx/>
+              <a:buFontTx/>
+              <a:buNone/>
+              <a:tabLst/>
+              <a:defRPr/>
+            </a:pPr>
+            <a:endParaRPr kumimoji="0" lang="pt-BR" sz="1800" b="0" i="0" u="none" strike="noStrike" kern="0" cap="none" spc="0" normalizeH="0" baseline="0" noProof="0">
+              <a:ln>
+                <a:noFill/>
+              </a:ln>
+              <a:solidFill>
+                <a:prstClr val="white"/>
+              </a:solidFill>
+              <a:effectLst/>
+              <a:uLnTx/>
+              <a:uFillTx/>
+              <a:latin typeface="Century Gothic" panose="020F0302020204030204"/>
+              <a:ea typeface="+mn-ea"/>
+              <a:cs typeface="+mn-cs"/>
+            </a:endParaRPr>
+          </a:p>
+        </p:txBody>
+      </p:sp>
+      <p:sp>
+        <p:nvSpPr>
+          <p:cNvPr id="61" name="TextBox 60">
+            <a:extLst>
+              <a:ext uri="{FF2B5EF4-FFF2-40B4-BE49-F238E27FC236}">
+                <a16:creationId xmlns:a16="http://schemas.microsoft.com/office/drawing/2014/main" id="{707247A5-8792-5656-781D-8B7A2B47AC55}"/>
               </a:ext>
             </a:extLst>
           </p:cNvPr>
@@ -9083,7 +8581,9 @@
           <a:p>
             <a:r>
               <a:rPr lang="pt-BR" sz="2000">
-                <a:latin typeface="Calibri" panose="020F0502020204030204" pitchFamily="34" charset="0"/>
+                <a:solidFill>
+                  <a:prstClr val="black"/>
+                </a:solidFill>
                 <a:cs typeface="Calibri" panose="020F0502020204030204" pitchFamily="34" charset="0"/>
               </a:rPr>
               <a:t>Processo de configurar e disponibilizar um software para os usuários</a:t>
@@ -9092,7 +8592,9 @@
           <a:p>
             <a:r>
               <a:rPr lang="pt-BR" sz="2000">
-                <a:latin typeface="Calibri" panose="020F0502020204030204" pitchFamily="34" charset="0"/>
+                <a:solidFill>
+                  <a:prstClr val="black"/>
+                </a:solidFill>
                 <a:cs typeface="Calibri" panose="020F0502020204030204" pitchFamily="34" charset="0"/>
               </a:rPr>
               <a:t>É feita a comercialização do software</a:t>
@@ -9101,7 +8603,9 @@
           <a:p>
             <a:r>
               <a:rPr lang="pt-BR" sz="2000">
-                <a:latin typeface="Calibri" panose="020F0502020204030204" pitchFamily="34" charset="0"/>
+                <a:solidFill>
+                  <a:prstClr val="black"/>
+                </a:solidFill>
                 <a:cs typeface="Calibri" panose="020F0502020204030204" pitchFamily="34" charset="0"/>
               </a:rPr>
               <a:t>Correções de bugs menores são feitas nessa etapa</a:t>
@@ -9111,10 +8615,10 @@
       </p:sp>
       <p:pic>
         <p:nvPicPr>
-          <p:cNvPr id="17" name="Picture 16">
-            <a:extLst>
-              <a:ext uri="{FF2B5EF4-FFF2-40B4-BE49-F238E27FC236}">
-                <a16:creationId xmlns:a16="http://schemas.microsoft.com/office/drawing/2014/main" id="{B3E11831-8F72-FAFE-BF15-A7E7FA45115A}"/>
+          <p:cNvPr id="62" name="Picture 61">
+            <a:extLst>
+              <a:ext uri="{FF2B5EF4-FFF2-40B4-BE49-F238E27FC236}">
+                <a16:creationId xmlns:a16="http://schemas.microsoft.com/office/drawing/2014/main" id="{822CDEB1-8D69-A855-33FC-42B4EEE53BDF}"/>
               </a:ext>
             </a:extLst>
           </p:cNvPr>
@@ -9124,11 +8628,11 @@
           <p:nvPr/>
         </p:nvPicPr>
         <p:blipFill>
-          <a:blip r:embed="rId4">
+          <a:blip r:embed="rId3">
             <a:extLst>
               <a:ext uri="{BEBA8EAE-BF5A-486C-A8C5-ECC9F3942E4B}">
                 <a14:imgProps xmlns:a14="http://schemas.microsoft.com/office/drawing/2010/main">
-                  <a14:imgLayer r:embed="rId5">
+                  <a14:imgLayer r:embed="rId4">
                     <a14:imgEffect>
                       <a14:backgroundRemoval t="1031" b="94639" l="1017" r="91864">
                         <a14:foregroundMark x1="20678" y1="52577" x2="20000" y2="50928"/>
@@ -9184,10 +8688,10 @@
       </p:pic>
       <p:pic>
         <p:nvPicPr>
-          <p:cNvPr id="18" name="Picture 17">
-            <a:extLst>
-              <a:ext uri="{FF2B5EF4-FFF2-40B4-BE49-F238E27FC236}">
-                <a16:creationId xmlns:a16="http://schemas.microsoft.com/office/drawing/2014/main" id="{C4B167B2-E34D-5C7E-3C48-7EFFFA2A5FF1}"/>
+          <p:cNvPr id="63" name="Picture 62">
+            <a:extLst>
+              <a:ext uri="{FF2B5EF4-FFF2-40B4-BE49-F238E27FC236}">
+                <a16:creationId xmlns:a16="http://schemas.microsoft.com/office/drawing/2014/main" id="{F64EDAD4-2B93-EF6D-455C-BF100B84935F}"/>
               </a:ext>
             </a:extLst>
           </p:cNvPr>
@@ -9197,7 +8701,7 @@
           <p:nvPr/>
         </p:nvPicPr>
         <p:blipFill>
-          <a:blip r:embed="rId6"/>
+          <a:blip r:embed="rId5"/>
           <a:stretch>
             <a:fillRect/>
           </a:stretch>
@@ -9215,7 +8719,7 @@
     </p:spTree>
     <p:extLst>
       <p:ext uri="{BB962C8B-B14F-4D97-AF65-F5344CB8AC3E}">
-        <p14:creationId xmlns:p14="http://schemas.microsoft.com/office/powerpoint/2010/main" val="3125511854"/>
+        <p14:creationId xmlns:p14="http://schemas.microsoft.com/office/powerpoint/2010/main" val="1067640863"/>
       </p:ext>
     </p:extLst>
   </p:cSld>
@@ -9256,7 +8760,7 @@
                                           </p:stCondLst>
                                         </p:cTn>
                                         <p:tgtEl>
-                                          <p:spTgt spid="8"/>
+                                          <p:spTgt spid="53"/>
                                         </p:tgtEl>
                                         <p:attrNameLst>
                                           <p:attrName>style.visibility</p:attrName>
@@ -9283,7 +8787,7 @@
                                           </p:stCondLst>
                                         </p:cTn>
                                         <p:tgtEl>
-                                          <p:spTgt spid="3"/>
+                                          <p:spTgt spid="50"/>
                                         </p:tgtEl>
                                         <p:attrNameLst>
                                           <p:attrName>style.visibility</p:attrName>
@@ -9328,7 +8832,7 @@
                                           </p:stCondLst>
                                         </p:cTn>
                                         <p:tgtEl>
-                                          <p:spTgt spid="7"/>
+                                          <p:spTgt spid="52"/>
                                         </p:tgtEl>
                                         <p:attrNameLst>
                                           <p:attrName>style.visibility</p:attrName>
@@ -9355,7 +8859,7 @@
                                           </p:stCondLst>
                                         </p:cTn>
                                         <p:tgtEl>
-                                          <p:spTgt spid="6"/>
+                                          <p:spTgt spid="51"/>
                                         </p:tgtEl>
                                         <p:attrNameLst>
                                           <p:attrName>style.visibility</p:attrName>
@@ -9400,7 +8904,7 @@
                                           </p:stCondLst>
                                         </p:cTn>
                                         <p:tgtEl>
-                                          <p:spTgt spid="9"/>
+                                          <p:spTgt spid="54"/>
                                         </p:tgtEl>
                                         <p:attrNameLst>
                                           <p:attrName>style.visibility</p:attrName>
@@ -9427,7 +8931,7 @@
                                           </p:stCondLst>
                                         </p:cTn>
                                         <p:tgtEl>
-                                          <p:spTgt spid="10"/>
+                                          <p:spTgt spid="55"/>
                                         </p:tgtEl>
                                         <p:attrNameLst>
                                           <p:attrName>style.visibility</p:attrName>
@@ -9472,7 +8976,7 @@
                                           </p:stCondLst>
                                         </p:cTn>
                                         <p:tgtEl>
-                                          <p:spTgt spid="11"/>
+                                          <p:spTgt spid="56"/>
                                         </p:tgtEl>
                                         <p:attrNameLst>
                                           <p:attrName>style.visibility</p:attrName>
@@ -9499,7 +9003,7 @@
                                           </p:stCondLst>
                                         </p:cTn>
                                         <p:tgtEl>
-                                          <p:spTgt spid="12"/>
+                                          <p:spTgt spid="57"/>
                                         </p:tgtEl>
                                         <p:attrNameLst>
                                           <p:attrName>style.visibility</p:attrName>
@@ -9544,7 +9048,7 @@
                                           </p:stCondLst>
                                         </p:cTn>
                                         <p:tgtEl>
-                                          <p:spTgt spid="13"/>
+                                          <p:spTgt spid="58"/>
                                         </p:tgtEl>
                                         <p:attrNameLst>
                                           <p:attrName>style.visibility</p:attrName>
@@ -9571,7 +9075,7 @@
                                           </p:stCondLst>
                                         </p:cTn>
                                         <p:tgtEl>
-                                          <p:spTgt spid="14"/>
+                                          <p:spTgt spid="59"/>
                                         </p:tgtEl>
                                         <p:attrNameLst>
                                           <p:attrName>style.visibility</p:attrName>
@@ -9616,7 +9120,7 @@
                                           </p:stCondLst>
                                         </p:cTn>
                                         <p:tgtEl>
-                                          <p:spTgt spid="15"/>
+                                          <p:spTgt spid="60"/>
                                         </p:tgtEl>
                                         <p:attrNameLst>
                                           <p:attrName>style.visibility</p:attrName>
@@ -9643,7 +9147,7 @@
                                           </p:stCondLst>
                                         </p:cTn>
                                         <p:tgtEl>
-                                          <p:spTgt spid="16"/>
+                                          <p:spTgt spid="61"/>
                                         </p:tgtEl>
                                         <p:attrNameLst>
                                           <p:attrName>style.visibility</p:attrName>
@@ -9684,18 +9188,18 @@
       </p:par>
     </p:tnLst>
     <p:bldLst>
-      <p:bldP spid="3" grpId="0" uiExpand="1"/>
-      <p:bldP spid="6" grpId="0"/>
-      <p:bldP spid="7" grpId="0" animBg="1"/>
-      <p:bldP spid="8" grpId="0" animBg="1"/>
-      <p:bldP spid="9" grpId="0" animBg="1"/>
-      <p:bldP spid="10" grpId="0"/>
-      <p:bldP spid="11" grpId="0" animBg="1"/>
-      <p:bldP spid="12" grpId="0"/>
-      <p:bldP spid="13" grpId="0" animBg="1"/>
-      <p:bldP spid="14" grpId="0" uiExpand="1"/>
-      <p:bldP spid="15" grpId="0" animBg="1"/>
-      <p:bldP spid="16" grpId="0" uiExpand="1"/>
+      <p:bldP spid="50" grpId="0" uiExpand="1"/>
+      <p:bldP spid="51" grpId="0"/>
+      <p:bldP spid="52" grpId="0" animBg="1"/>
+      <p:bldP spid="53" grpId="0" animBg="1"/>
+      <p:bldP spid="54" grpId="0" animBg="1"/>
+      <p:bldP spid="55" grpId="0"/>
+      <p:bldP spid="56" grpId="0" animBg="1"/>
+      <p:bldP spid="57" grpId="0"/>
+      <p:bldP spid="58" grpId="0" animBg="1"/>
+      <p:bldP spid="59" grpId="0" uiExpand="1"/>
+      <p:bldP spid="60" grpId="0" animBg="1"/>
+      <p:bldP spid="61" grpId="0" uiExpand="1"/>
     </p:bldLst>
   </p:timing>
 </p:sld>
@@ -9709,7 +9213,7 @@
         <p:cNvPr id="1" name="">
           <a:extLst>
             <a:ext uri="{FF2B5EF4-FFF2-40B4-BE49-F238E27FC236}">
-              <a16:creationId xmlns:a16="http://schemas.microsoft.com/office/drawing/2014/main" id="{C5E401AE-4D6F-43F5-08D2-A17A153BABCB}"/>
+              <a16:creationId xmlns:a16="http://schemas.microsoft.com/office/drawing/2014/main" id="{4FAF2333-65B4-B6C1-EC96-FE479358562F}"/>
             </a:ext>
           </a:extLst>
         </p:cNvPr>
@@ -9724,59 +9228,12 @@
           <a:chExt cx="0" cy="0"/>
         </a:xfrm>
       </p:grpSpPr>
-      <p:pic>
-        <p:nvPicPr>
-          <p:cNvPr id="1026" name="Picture 2">
-            <a:extLst>
-              <a:ext uri="{FF2B5EF4-FFF2-40B4-BE49-F238E27FC236}">
-                <a16:creationId xmlns:a16="http://schemas.microsoft.com/office/drawing/2014/main" id="{8C093869-27F6-3C30-A892-A7864AEFBEA0}"/>
-              </a:ext>
-            </a:extLst>
-          </p:cNvPr>
-          <p:cNvPicPr>
-            <a:picLocks noChangeAspect="1" noChangeArrowheads="1"/>
-          </p:cNvPicPr>
-          <p:nvPr/>
-        </p:nvPicPr>
-        <p:blipFill>
-          <a:blip r:embed="rId2">
-            <a:extLst>
-              <a:ext uri="{28A0092B-C50C-407E-A947-70E740481C1C}">
-                <a14:useLocalDpi xmlns:a14="http://schemas.microsoft.com/office/drawing/2010/main" val="0"/>
-              </a:ext>
-            </a:extLst>
-          </a:blip>
-          <a:srcRect/>
-          <a:stretch>
-            <a:fillRect/>
-          </a:stretch>
-        </p:blipFill>
-        <p:spPr bwMode="auto">
-          <a:xfrm>
-            <a:off x="10899648" y="6374980"/>
-            <a:ext cx="1149447" cy="295025"/>
-          </a:xfrm>
-          <a:prstGeom prst="rect">
-            <a:avLst/>
-          </a:prstGeom>
-          <a:noFill/>
-          <a:extLst>
-            <a:ext uri="{909E8E84-426E-40DD-AFC4-6F175D3DCCD1}">
-              <a14:hiddenFill xmlns:a14="http://schemas.microsoft.com/office/drawing/2010/main">
-                <a:solidFill>
-                  <a:srgbClr val="FFFFFF"/>
-                </a:solidFill>
-              </a14:hiddenFill>
-            </a:ext>
-          </a:extLst>
-        </p:spPr>
-      </p:pic>
       <p:sp>
         <p:nvSpPr>
           <p:cNvPr id="7" name="Título 1">
             <a:extLst>
               <a:ext uri="{FF2B5EF4-FFF2-40B4-BE49-F238E27FC236}">
-                <a16:creationId xmlns:a16="http://schemas.microsoft.com/office/drawing/2014/main" id="{F563C3D7-6550-6956-572B-C0274B43F5C9}"/>
+                <a16:creationId xmlns:a16="http://schemas.microsoft.com/office/drawing/2014/main" id="{DB39E4CD-FAE6-C0DB-48E2-B5B174DBF6B5}"/>
               </a:ext>
             </a:extLst>
           </p:cNvPr>
@@ -9834,7 +9291,7 @@
           <p:cNvPr id="8" name="Título 1">
             <a:extLst>
               <a:ext uri="{FF2B5EF4-FFF2-40B4-BE49-F238E27FC236}">
-                <a16:creationId xmlns:a16="http://schemas.microsoft.com/office/drawing/2014/main" id="{422D6F15-DD89-CFAA-B3F0-EF353F4206A6}"/>
+                <a16:creationId xmlns:a16="http://schemas.microsoft.com/office/drawing/2014/main" id="{8B978023-50E9-ADAF-1F73-09BF266CE054}"/>
               </a:ext>
             </a:extLst>
           </p:cNvPr>
@@ -9892,7 +9349,7 @@
           <p:cNvPr id="9" name="TextBox 8">
             <a:extLst>
               <a:ext uri="{FF2B5EF4-FFF2-40B4-BE49-F238E27FC236}">
-                <a16:creationId xmlns:a16="http://schemas.microsoft.com/office/drawing/2014/main" id="{3708A097-7419-ED2D-7C10-38877FACAF83}"/>
+                <a16:creationId xmlns:a16="http://schemas.microsoft.com/office/drawing/2014/main" id="{792AF326-162A-46C5-FB9B-E795A9987D62}"/>
               </a:ext>
             </a:extLst>
           </p:cNvPr>
@@ -9927,7 +9384,6 @@
                 <a:solidFill>
                   <a:prstClr val="black"/>
                 </a:solidFill>
-                <a:latin typeface="Calibri" panose="020F0502020204030204" pitchFamily="34" charset="0"/>
                 <a:cs typeface="Calibri" panose="020F0502020204030204" pitchFamily="34" charset="0"/>
               </a:rPr>
               <a:t>Linha de desenvolvimento separada</a:t>
@@ -9946,7 +9402,6 @@
                 <a:solidFill>
                   <a:prstClr val="black"/>
                 </a:solidFill>
-                <a:latin typeface="Calibri" panose="020F0502020204030204" pitchFamily="34" charset="0"/>
                 <a:cs typeface="Calibri" panose="020F0502020204030204" pitchFamily="34" charset="0"/>
               </a:rPr>
               <a:t>Utilizado para organizar, isolar e controlar mudanças no código sem afetar diretamente o código principal</a:t>
@@ -9959,7 +9414,7 @@
           <p:cNvPr id="10" name="Picture 9">
             <a:extLst>
               <a:ext uri="{FF2B5EF4-FFF2-40B4-BE49-F238E27FC236}">
-                <a16:creationId xmlns:a16="http://schemas.microsoft.com/office/drawing/2014/main" id="{F05DA17A-C2F7-A951-A7D0-AA7E0A7364DE}"/>
+                <a16:creationId xmlns:a16="http://schemas.microsoft.com/office/drawing/2014/main" id="{F06A85C1-6153-884A-69DD-1B7D5C1C1815}"/>
               </a:ext>
             </a:extLst>
           </p:cNvPr>
@@ -9969,7 +9424,7 @@
           <p:nvPr/>
         </p:nvPicPr>
         <p:blipFill rotWithShape="1">
-          <a:blip r:embed="rId3"/>
+          <a:blip r:embed="rId2"/>
           <a:srcRect l="2104" t="6020" r="2792" b="27770"/>
           <a:stretch/>
         </p:blipFill>
@@ -9988,7 +9443,7 @@
           <p:cNvPr id="11" name="TextBox 10">
             <a:extLst>
               <a:ext uri="{FF2B5EF4-FFF2-40B4-BE49-F238E27FC236}">
-                <a16:creationId xmlns:a16="http://schemas.microsoft.com/office/drawing/2014/main" id="{24F21050-A9E9-7CCE-BFB3-31918EE71978}"/>
+                <a16:creationId xmlns:a16="http://schemas.microsoft.com/office/drawing/2014/main" id="{59F34832-A756-BCA6-D6E1-12A9AFDB9B09}"/>
               </a:ext>
             </a:extLst>
           </p:cNvPr>
@@ -10023,7 +9478,6 @@
                 <a:solidFill>
                   <a:prstClr val="black"/>
                 </a:solidFill>
-                <a:latin typeface="Calibri" panose="020F0502020204030204" pitchFamily="34" charset="0"/>
                 <a:cs typeface="Calibri" panose="020F0502020204030204" pitchFamily="34" charset="0"/>
               </a:rPr>
               <a:t>Possibilita desenvolver duas ou mais versões do software simultaneamente. Por exemplo, uma versão que tem o código funcionando, mas não possui novas funcionalidades e outra versão onde novas funcionalidades estão sendo trabalhadas</a:t>
@@ -10034,7 +9488,7 @@
     </p:spTree>
     <p:extLst>
       <p:ext uri="{BB962C8B-B14F-4D97-AF65-F5344CB8AC3E}">
-        <p14:creationId xmlns:p14="http://schemas.microsoft.com/office/powerpoint/2010/main" val="1164319548"/>
+        <p14:creationId xmlns:p14="http://schemas.microsoft.com/office/powerpoint/2010/main" val="71941836"/>
       </p:ext>
     </p:extLst>
   </p:cSld>
@@ -10052,7 +9506,7 @@
         <p:cNvPr id="1" name="">
           <a:extLst>
             <a:ext uri="{FF2B5EF4-FFF2-40B4-BE49-F238E27FC236}">
-              <a16:creationId xmlns:a16="http://schemas.microsoft.com/office/drawing/2014/main" id="{4BC411AC-6C8E-A6CE-C1D1-911AF3653CB8}"/>
+              <a16:creationId xmlns:a16="http://schemas.microsoft.com/office/drawing/2014/main" id="{BED21626-8511-9C92-999D-9B4CE7FEC0EF}"/>
             </a:ext>
           </a:extLst>
         </p:cNvPr>
@@ -10067,59 +9521,12 @@
           <a:chExt cx="0" cy="0"/>
         </a:xfrm>
       </p:grpSpPr>
-      <p:pic>
-        <p:nvPicPr>
-          <p:cNvPr id="1026" name="Picture 2">
-            <a:extLst>
-              <a:ext uri="{FF2B5EF4-FFF2-40B4-BE49-F238E27FC236}">
-                <a16:creationId xmlns:a16="http://schemas.microsoft.com/office/drawing/2014/main" id="{B3AF53A3-2891-656D-4E95-06CC837E4B44}"/>
-              </a:ext>
-            </a:extLst>
-          </p:cNvPr>
-          <p:cNvPicPr>
-            <a:picLocks noChangeAspect="1" noChangeArrowheads="1"/>
-          </p:cNvPicPr>
-          <p:nvPr/>
-        </p:nvPicPr>
-        <p:blipFill>
-          <a:blip r:embed="rId2">
-            <a:extLst>
-              <a:ext uri="{28A0092B-C50C-407E-A947-70E740481C1C}">
-                <a14:useLocalDpi xmlns:a14="http://schemas.microsoft.com/office/drawing/2010/main" val="0"/>
-              </a:ext>
-            </a:extLst>
-          </a:blip>
-          <a:srcRect/>
-          <a:stretch>
-            <a:fillRect/>
-          </a:stretch>
-        </p:blipFill>
-        <p:spPr bwMode="auto">
-          <a:xfrm>
-            <a:off x="10899648" y="6374980"/>
-            <a:ext cx="1149447" cy="295025"/>
-          </a:xfrm>
-          <a:prstGeom prst="rect">
-            <a:avLst/>
-          </a:prstGeom>
-          <a:noFill/>
-          <a:extLst>
-            <a:ext uri="{909E8E84-426E-40DD-AFC4-6F175D3DCCD1}">
-              <a14:hiddenFill xmlns:a14="http://schemas.microsoft.com/office/drawing/2010/main">
-                <a:solidFill>
-                  <a:srgbClr val="FFFFFF"/>
-                </a:solidFill>
-              </a14:hiddenFill>
-            </a:ext>
-          </a:extLst>
-        </p:spPr>
-      </p:pic>
       <p:sp>
         <p:nvSpPr>
           <p:cNvPr id="7" name="Título 1">
             <a:extLst>
               <a:ext uri="{FF2B5EF4-FFF2-40B4-BE49-F238E27FC236}">
-                <a16:creationId xmlns:a16="http://schemas.microsoft.com/office/drawing/2014/main" id="{EAC6ABE5-5C1D-8FCD-584C-13E12E38DCA4}"/>
+                <a16:creationId xmlns:a16="http://schemas.microsoft.com/office/drawing/2014/main" id="{D69AAE8C-E8C7-EEF4-A5BC-A1C66B9D54E1}"/>
               </a:ext>
             </a:extLst>
           </p:cNvPr>
@@ -10177,7 +9584,7 @@
           <p:cNvPr id="8" name="Título 1">
             <a:extLst>
               <a:ext uri="{FF2B5EF4-FFF2-40B4-BE49-F238E27FC236}">
-                <a16:creationId xmlns:a16="http://schemas.microsoft.com/office/drawing/2014/main" id="{468DB460-F61B-6D4E-9606-AAA4C07C78EA}"/>
+                <a16:creationId xmlns:a16="http://schemas.microsoft.com/office/drawing/2014/main" id="{323622D9-842C-7A41-86EC-BFBA38650862}"/>
               </a:ext>
             </a:extLst>
           </p:cNvPr>
@@ -10270,7 +9677,7 @@
           <p:cNvPr id="9" name="TextBox 8">
             <a:extLst>
               <a:ext uri="{FF2B5EF4-FFF2-40B4-BE49-F238E27FC236}">
-                <a16:creationId xmlns:a16="http://schemas.microsoft.com/office/drawing/2014/main" id="{C04A4313-2D17-A6BA-DBF8-BE186C92832E}"/>
+                <a16:creationId xmlns:a16="http://schemas.microsoft.com/office/drawing/2014/main" id="{1C0E6A54-6A44-EDD5-AB8C-B266B0FECB94}"/>
               </a:ext>
             </a:extLst>
           </p:cNvPr>
@@ -10305,7 +9712,6 @@
                 <a:solidFill>
                   <a:prstClr val="black"/>
                 </a:solidFill>
-                <a:latin typeface="Calibri" panose="020F0502020204030204" pitchFamily="34" charset="0"/>
                 <a:cs typeface="Calibri" panose="020F0502020204030204" pitchFamily="34" charset="0"/>
               </a:rPr>
               <a:t>Permite um desenvolvedor propor alterações em um código para revisão antes que elas sejam incorporadas na branch principal do projeto</a:t>
@@ -10318,7 +9724,7 @@
           <p:cNvPr id="10" name="TextBox 9">
             <a:extLst>
               <a:ext uri="{FF2B5EF4-FFF2-40B4-BE49-F238E27FC236}">
-                <a16:creationId xmlns:a16="http://schemas.microsoft.com/office/drawing/2014/main" id="{BC07642F-FD85-D67C-DCAD-3B50B59B2A64}"/>
+                <a16:creationId xmlns:a16="http://schemas.microsoft.com/office/drawing/2014/main" id="{FD5B925C-2D9B-105D-1227-CE35A59AA509}"/>
               </a:ext>
             </a:extLst>
           </p:cNvPr>
@@ -10353,7 +9759,6 @@
                 <a:solidFill>
                   <a:prstClr val="black"/>
                 </a:solidFill>
-                <a:latin typeface="Calibri" panose="020F0502020204030204" pitchFamily="34" charset="0"/>
                 <a:cs typeface="Calibri" panose="020F0502020204030204" pitchFamily="34" charset="0"/>
               </a:rPr>
               <a:t>É aberto um espaço para que outros desenvolvedores revisem, discutam e sugiram modificações antes de as alterações serem mescladas</a:t>
@@ -10372,7 +9777,6 @@
                 <a:solidFill>
                   <a:prstClr val="black"/>
                 </a:solidFill>
-                <a:latin typeface="Calibri" panose="020F0502020204030204" pitchFamily="34" charset="0"/>
                 <a:cs typeface="Calibri" panose="020F0502020204030204" pitchFamily="34" charset="0"/>
               </a:rPr>
               <a:t>Uma vez que o PR foi revisado e aprovado pelos membros necessários da equipe, pode ser feito o </a:t>
@@ -10382,7 +9786,6 @@
                 <a:solidFill>
                   <a:prstClr val="black"/>
                 </a:solidFill>
-                <a:latin typeface="Calibri" panose="020F0502020204030204" pitchFamily="34" charset="0"/>
                 <a:cs typeface="Calibri" panose="020F0502020204030204" pitchFamily="34" charset="0"/>
               </a:rPr>
               <a:t>merge</a:t>
@@ -10401,7 +9804,6 @@
                 <a:solidFill>
                   <a:prstClr val="black"/>
                 </a:solidFill>
-                <a:latin typeface="Calibri" panose="020F0502020204030204" pitchFamily="34" charset="0"/>
                 <a:cs typeface="Calibri" panose="020F0502020204030204" pitchFamily="34" charset="0"/>
               </a:rPr>
               <a:t>Caso as mudanças não forem necessárias ou soluções melhores terem sido encontradas, um PR pode não ser aceito e fechado sem ser feito o merge</a:t>
@@ -10414,7 +9816,7 @@
           <p:cNvPr id="11" name="Picture 10" descr="Pull/Merge Requests: seguindo boas práticas | by Henrique Braga | luizalabs  | Medium">
             <a:extLst>
               <a:ext uri="{FF2B5EF4-FFF2-40B4-BE49-F238E27FC236}">
-                <a16:creationId xmlns:a16="http://schemas.microsoft.com/office/drawing/2014/main" id="{5792287F-58BA-9D53-A978-31C74327D634}"/>
+                <a16:creationId xmlns:a16="http://schemas.microsoft.com/office/drawing/2014/main" id="{EAD86722-1B92-DD35-AFA7-5DD9343F560A}"/>
               </a:ext>
             </a:extLst>
           </p:cNvPr>
@@ -10424,7 +9826,7 @@
           <p:nvPr/>
         </p:nvPicPr>
         <p:blipFill rotWithShape="1">
-          <a:blip r:embed="rId3">
+          <a:blip r:embed="rId2">
             <a:extLst>
               <a:ext uri="{28A0092B-C50C-407E-A947-70E740481C1C}">
                 <a14:useLocalDpi xmlns:a14="http://schemas.microsoft.com/office/drawing/2010/main" val="0"/>
@@ -10457,7 +9859,7 @@
     </p:spTree>
     <p:extLst>
       <p:ext uri="{BB962C8B-B14F-4D97-AF65-F5344CB8AC3E}">
-        <p14:creationId xmlns:p14="http://schemas.microsoft.com/office/powerpoint/2010/main" val="4073755003"/>
+        <p14:creationId xmlns:p14="http://schemas.microsoft.com/office/powerpoint/2010/main" val="207145273"/>
       </p:ext>
     </p:extLst>
   </p:cSld>
@@ -10475,7 +9877,7 @@
         <p:cNvPr id="1" name="">
           <a:extLst>
             <a:ext uri="{FF2B5EF4-FFF2-40B4-BE49-F238E27FC236}">
-              <a16:creationId xmlns:a16="http://schemas.microsoft.com/office/drawing/2014/main" id="{80064343-8062-FEB3-7D00-996F94DB831C}"/>
+              <a16:creationId xmlns:a16="http://schemas.microsoft.com/office/drawing/2014/main" id="{69979517-0578-4238-0F2E-6A69492B7686}"/>
             </a:ext>
           </a:extLst>
         </p:cNvPr>
@@ -10490,59 +9892,12 @@
           <a:chExt cx="0" cy="0"/>
         </a:xfrm>
       </p:grpSpPr>
-      <p:pic>
-        <p:nvPicPr>
-          <p:cNvPr id="1026" name="Picture 2">
-            <a:extLst>
-              <a:ext uri="{FF2B5EF4-FFF2-40B4-BE49-F238E27FC236}">
-                <a16:creationId xmlns:a16="http://schemas.microsoft.com/office/drawing/2014/main" id="{999E8D23-7A89-C84C-FD82-8425E8756696}"/>
-              </a:ext>
-            </a:extLst>
-          </p:cNvPr>
-          <p:cNvPicPr>
-            <a:picLocks noChangeAspect="1" noChangeArrowheads="1"/>
-          </p:cNvPicPr>
-          <p:nvPr/>
-        </p:nvPicPr>
-        <p:blipFill>
-          <a:blip r:embed="rId2">
-            <a:extLst>
-              <a:ext uri="{28A0092B-C50C-407E-A947-70E740481C1C}">
-                <a14:useLocalDpi xmlns:a14="http://schemas.microsoft.com/office/drawing/2010/main" val="0"/>
-              </a:ext>
-            </a:extLst>
-          </a:blip>
-          <a:srcRect/>
-          <a:stretch>
-            <a:fillRect/>
-          </a:stretch>
-        </p:blipFill>
-        <p:spPr bwMode="auto">
-          <a:xfrm>
-            <a:off x="10899648" y="6374980"/>
-            <a:ext cx="1149447" cy="295025"/>
-          </a:xfrm>
-          <a:prstGeom prst="rect">
-            <a:avLst/>
-          </a:prstGeom>
-          <a:noFill/>
-          <a:extLst>
-            <a:ext uri="{909E8E84-426E-40DD-AFC4-6F175D3DCCD1}">
-              <a14:hiddenFill xmlns:a14="http://schemas.microsoft.com/office/drawing/2010/main">
-                <a:solidFill>
-                  <a:srgbClr val="FFFFFF"/>
-                </a:solidFill>
-              </a14:hiddenFill>
-            </a:ext>
-          </a:extLst>
-        </p:spPr>
-      </p:pic>
       <p:sp>
         <p:nvSpPr>
           <p:cNvPr id="7" name="Título 1">
             <a:extLst>
               <a:ext uri="{FF2B5EF4-FFF2-40B4-BE49-F238E27FC236}">
-                <a16:creationId xmlns:a16="http://schemas.microsoft.com/office/drawing/2014/main" id="{5DAFFF8A-872B-B697-FF13-CC251F4C5802}"/>
+                <a16:creationId xmlns:a16="http://schemas.microsoft.com/office/drawing/2014/main" id="{CF7BDF3B-EF83-F695-9FD3-D99DD581FDC6}"/>
               </a:ext>
             </a:extLst>
           </p:cNvPr>
@@ -10600,7 +9955,7 @@
           <p:cNvPr id="8" name="Título 1">
             <a:extLst>
               <a:ext uri="{FF2B5EF4-FFF2-40B4-BE49-F238E27FC236}">
-                <a16:creationId xmlns:a16="http://schemas.microsoft.com/office/drawing/2014/main" id="{D563AFF8-9762-618F-66AD-8817366BFDB1}"/>
+                <a16:creationId xmlns:a16="http://schemas.microsoft.com/office/drawing/2014/main" id="{DD7626A6-53E0-E338-0712-F4E45522F6EC}"/>
               </a:ext>
             </a:extLst>
           </p:cNvPr>
@@ -10658,7 +10013,7 @@
           <p:cNvPr id="9" name="TextBox 8">
             <a:extLst>
               <a:ext uri="{FF2B5EF4-FFF2-40B4-BE49-F238E27FC236}">
-                <a16:creationId xmlns:a16="http://schemas.microsoft.com/office/drawing/2014/main" id="{71B9E470-8A64-F273-5442-09A855E993AB}"/>
+                <a16:creationId xmlns:a16="http://schemas.microsoft.com/office/drawing/2014/main" id="{2ED2E36F-58EA-2E60-486E-BA2A527FA1AB}"/>
               </a:ext>
             </a:extLst>
           </p:cNvPr>
@@ -10693,7 +10048,6 @@
                 <a:solidFill>
                   <a:prstClr val="black"/>
                 </a:solidFill>
-                <a:latin typeface="Calibri" panose="020F0502020204030204" pitchFamily="34" charset="0"/>
                 <a:cs typeface="Calibri" panose="020F0502020204030204" pitchFamily="34" charset="0"/>
               </a:rPr>
               <a:t>Processo de combinar as alterações de uma branch em outro</a:t>
@@ -10712,7 +10066,6 @@
                 <a:solidFill>
                   <a:prstClr val="black"/>
                 </a:solidFill>
-                <a:latin typeface="Calibri" panose="020F0502020204030204" pitchFamily="34" charset="0"/>
                 <a:cs typeface="Calibri" panose="020F0502020204030204" pitchFamily="34" charset="0"/>
               </a:rPr>
               <a:t>Um </a:t>
@@ -10722,7 +10075,6 @@
                 <a:solidFill>
                   <a:prstClr val="black"/>
                 </a:solidFill>
-                <a:latin typeface="Calibri" panose="020F0502020204030204" pitchFamily="34" charset="0"/>
                 <a:cs typeface="Calibri" panose="020F0502020204030204" pitchFamily="34" charset="0"/>
               </a:rPr>
               <a:t>conflito de merge (merge conflict) </a:t>
@@ -10732,7 +10084,6 @@
                 <a:solidFill>
                   <a:prstClr val="black"/>
                 </a:solidFill>
-                <a:latin typeface="Calibri" panose="020F0502020204030204" pitchFamily="34" charset="0"/>
                 <a:cs typeface="Calibri" panose="020F0502020204030204" pitchFamily="34" charset="0"/>
               </a:rPr>
               <a:t>acontece quando o Git não consegue mesclar automaticamente as alterações porque a mesma parte do código foi editada de maneiras diferentes em duas branches</a:t>
@@ -10745,7 +10096,7 @@
           <p:cNvPr id="10" name="Picture 2" descr="Git - Merge - GeeksforGeeks">
             <a:extLst>
               <a:ext uri="{FF2B5EF4-FFF2-40B4-BE49-F238E27FC236}">
-                <a16:creationId xmlns:a16="http://schemas.microsoft.com/office/drawing/2014/main" id="{1F6F4B60-D37A-1C70-9CDA-A82E14203F3A}"/>
+                <a16:creationId xmlns:a16="http://schemas.microsoft.com/office/drawing/2014/main" id="{6FC07A14-7ED6-2DAE-2AE2-6D901A1CB5F4}"/>
               </a:ext>
             </a:extLst>
           </p:cNvPr>
@@ -10755,7 +10106,7 @@
           <p:nvPr/>
         </p:nvPicPr>
         <p:blipFill rotWithShape="1">
-          <a:blip r:embed="rId3">
+          <a:blip r:embed="rId2">
             <a:extLst>
               <a:ext uri="{28A0092B-C50C-407E-A947-70E740481C1C}">
                 <a14:useLocalDpi xmlns:a14="http://schemas.microsoft.com/office/drawing/2010/main" val="0"/>
@@ -10790,7 +10141,7 @@
           <p:cNvPr id="11" name="TextBox 10">
             <a:extLst>
               <a:ext uri="{FF2B5EF4-FFF2-40B4-BE49-F238E27FC236}">
-                <a16:creationId xmlns:a16="http://schemas.microsoft.com/office/drawing/2014/main" id="{A45BB9AA-2269-622E-5C3A-852CC9BF7157}"/>
+                <a16:creationId xmlns:a16="http://schemas.microsoft.com/office/drawing/2014/main" id="{B6A5C8CA-3EAC-EE8C-3430-F73CBC8654B8}"/>
               </a:ext>
             </a:extLst>
           </p:cNvPr>
@@ -10825,7 +10176,6 @@
                 <a:solidFill>
                   <a:prstClr val="black"/>
                 </a:solidFill>
-                <a:latin typeface="Calibri" panose="020F0502020204030204" pitchFamily="34" charset="0"/>
                 <a:cs typeface="Calibri" panose="020F0502020204030204" pitchFamily="34" charset="0"/>
               </a:rPr>
               <a:t>A dica é sempre ter coordenação com a sua equipe sobre quais arquivos serão modificados e trabalhar com a versão atualizada dos arquivos</a:t>
@@ -10844,7 +10194,6 @@
                 <a:solidFill>
                   <a:prstClr val="black"/>
                 </a:solidFill>
-                <a:latin typeface="Calibri" panose="020F0502020204030204" pitchFamily="34" charset="0"/>
                 <a:cs typeface="Calibri" panose="020F0502020204030204" pitchFamily="34" charset="0"/>
               </a:rPr>
               <a:t>Merge conflicts podem ocorrer por:</a:t>
@@ -10863,7 +10212,6 @@
                 <a:solidFill>
                   <a:prstClr val="black"/>
                 </a:solidFill>
-                <a:latin typeface="Calibri" panose="020F0502020204030204" pitchFamily="34" charset="0"/>
                 <a:cs typeface="Calibri" panose="020F0502020204030204" pitchFamily="34" charset="0"/>
               </a:rPr>
               <a:t>Edições simultâneas: </a:t>
@@ -10873,7 +10221,6 @@
                 <a:solidFill>
                   <a:prstClr val="black"/>
                 </a:solidFill>
-                <a:latin typeface="Calibri" panose="020F0502020204030204" pitchFamily="34" charset="0"/>
                 <a:cs typeface="Calibri" panose="020F0502020204030204" pitchFamily="34" charset="0"/>
               </a:rPr>
               <a:t>Duas pessoas modificam as mesmas linhas em um arquivo</a:t>
@@ -10892,7 +10239,6 @@
                 <a:solidFill>
                   <a:prstClr val="black"/>
                 </a:solidFill>
-                <a:latin typeface="Calibri" panose="020F0502020204030204" pitchFamily="34" charset="0"/>
                 <a:cs typeface="Calibri" panose="020F0502020204030204" pitchFamily="34" charset="0"/>
               </a:rPr>
               <a:t>Exclusão vs. Modificação: </a:t>
@@ -10902,7 +10248,6 @@
                 <a:solidFill>
                   <a:prstClr val="black"/>
                 </a:solidFill>
-                <a:latin typeface="Calibri" panose="020F0502020204030204" pitchFamily="34" charset="0"/>
                 <a:cs typeface="Calibri" panose="020F0502020204030204" pitchFamily="34" charset="0"/>
               </a:rPr>
               <a:t>Uma pessoa exclui um arquivo enquanto outra o edita</a:t>
@@ -10913,7 +10258,7 @@
     </p:spTree>
     <p:extLst>
       <p:ext uri="{BB962C8B-B14F-4D97-AF65-F5344CB8AC3E}">
-        <p14:creationId xmlns:p14="http://schemas.microsoft.com/office/powerpoint/2010/main" val="3393241205"/>
+        <p14:creationId xmlns:p14="http://schemas.microsoft.com/office/powerpoint/2010/main" val="809657136"/>
       </p:ext>
     </p:extLst>
   </p:cSld>
@@ -10931,7 +10276,7 @@
         <p:cNvPr id="1" name="">
           <a:extLst>
             <a:ext uri="{FF2B5EF4-FFF2-40B4-BE49-F238E27FC236}">
-              <a16:creationId xmlns:a16="http://schemas.microsoft.com/office/drawing/2014/main" id="{A40E1FB5-ECD7-2175-3512-7D9A801AA0D7}"/>
+              <a16:creationId xmlns:a16="http://schemas.microsoft.com/office/drawing/2014/main" id="{42E034E6-15F0-FCE0-7AF9-06A103D0945A}"/>
             </a:ext>
           </a:extLst>
         </p:cNvPr>
@@ -10946,59 +10291,12 @@
           <a:chExt cx="0" cy="0"/>
         </a:xfrm>
       </p:grpSpPr>
-      <p:pic>
-        <p:nvPicPr>
-          <p:cNvPr id="1026" name="Picture 2">
-            <a:extLst>
-              <a:ext uri="{FF2B5EF4-FFF2-40B4-BE49-F238E27FC236}">
-                <a16:creationId xmlns:a16="http://schemas.microsoft.com/office/drawing/2014/main" id="{3FCEA684-C4A7-80F0-8377-C20AA97BDC43}"/>
-              </a:ext>
-            </a:extLst>
-          </p:cNvPr>
-          <p:cNvPicPr>
-            <a:picLocks noChangeAspect="1" noChangeArrowheads="1"/>
-          </p:cNvPicPr>
-          <p:nvPr/>
-        </p:nvPicPr>
-        <p:blipFill>
-          <a:blip r:embed="rId2">
-            <a:extLst>
-              <a:ext uri="{28A0092B-C50C-407E-A947-70E740481C1C}">
-                <a14:useLocalDpi xmlns:a14="http://schemas.microsoft.com/office/drawing/2010/main" val="0"/>
-              </a:ext>
-            </a:extLst>
-          </a:blip>
-          <a:srcRect/>
-          <a:stretch>
-            <a:fillRect/>
-          </a:stretch>
-        </p:blipFill>
-        <p:spPr bwMode="auto">
-          <a:xfrm>
-            <a:off x="10899648" y="6374980"/>
-            <a:ext cx="1149447" cy="295025"/>
-          </a:xfrm>
-          <a:prstGeom prst="rect">
-            <a:avLst/>
-          </a:prstGeom>
-          <a:noFill/>
-          <a:extLst>
-            <a:ext uri="{909E8E84-426E-40DD-AFC4-6F175D3DCCD1}">
-              <a14:hiddenFill xmlns:a14="http://schemas.microsoft.com/office/drawing/2010/main">
-                <a:solidFill>
-                  <a:srgbClr val="FFFFFF"/>
-                </a:solidFill>
-              </a14:hiddenFill>
-            </a:ext>
-          </a:extLst>
-        </p:spPr>
-      </p:pic>
       <p:sp>
         <p:nvSpPr>
           <p:cNvPr id="7" name="Título 1">
             <a:extLst>
               <a:ext uri="{FF2B5EF4-FFF2-40B4-BE49-F238E27FC236}">
-                <a16:creationId xmlns:a16="http://schemas.microsoft.com/office/drawing/2014/main" id="{C0317B5C-B8D2-964A-0399-9228F6C65377}"/>
+                <a16:creationId xmlns:a16="http://schemas.microsoft.com/office/drawing/2014/main" id="{0897C5A2-CB1D-BCF9-05A7-9B59454C0412}"/>
               </a:ext>
             </a:extLst>
           </p:cNvPr>
@@ -11060,7 +10358,7 @@
           <p:cNvPr id="8" name="Título 1">
             <a:extLst>
               <a:ext uri="{FF2B5EF4-FFF2-40B4-BE49-F238E27FC236}">
-                <a16:creationId xmlns:a16="http://schemas.microsoft.com/office/drawing/2014/main" id="{D4F89C35-DB6A-A2FD-E635-A0C1892B8EB6}"/>
+                <a16:creationId xmlns:a16="http://schemas.microsoft.com/office/drawing/2014/main" id="{AF793EAF-7014-4C1B-2D3C-EA9E3B00D6FB}"/>
               </a:ext>
             </a:extLst>
           </p:cNvPr>
@@ -11118,7 +10416,7 @@
           <p:cNvPr id="9" name="TextBox 8">
             <a:extLst>
               <a:ext uri="{FF2B5EF4-FFF2-40B4-BE49-F238E27FC236}">
-                <a16:creationId xmlns:a16="http://schemas.microsoft.com/office/drawing/2014/main" id="{E71749BC-1F33-F66E-B2EB-568BA416A051}"/>
+                <a16:creationId xmlns:a16="http://schemas.microsoft.com/office/drawing/2014/main" id="{F449FA2B-8C09-D2F8-D902-62CAD3647138}"/>
               </a:ext>
             </a:extLst>
           </p:cNvPr>
@@ -11153,7 +10451,6 @@
                 <a:solidFill>
                   <a:prstClr val="black"/>
                 </a:solidFill>
-                <a:latin typeface="Calibri" panose="020F0502020204030204" pitchFamily="34" charset="0"/>
                 <a:cs typeface="Calibri" panose="020F0502020204030204" pitchFamily="34" charset="0"/>
               </a:rPr>
               <a:t>Para criar uma outra branch:</a:t>
@@ -11172,7 +10469,6 @@
                 <a:solidFill>
                   <a:prstClr val="black"/>
                 </a:solidFill>
-                <a:latin typeface="Calibri" panose="020F0502020204030204" pitchFamily="34" charset="0"/>
                 <a:cs typeface="Calibri" panose="020F0502020204030204" pitchFamily="34" charset="0"/>
               </a:rPr>
               <a:t>Digite no terminal dentro da pasta do repositório: </a:t>
@@ -11182,10 +10478,9 @@
                 <a:solidFill>
                   <a:prstClr val="black"/>
                 </a:solidFill>
-                <a:latin typeface="Calibri" panose="020F0502020204030204" pitchFamily="34" charset="0"/>
-                <a:cs typeface="Calibri" panose="020F0502020204030204" pitchFamily="34" charset="0"/>
-              </a:rPr>
-              <a:t>git checkout -b &lt;nome da branch&gt;</a:t>
+                <a:cs typeface="Calibri" panose="020F0502020204030204" pitchFamily="34" charset="0"/>
+              </a:rPr>
+              <a:t>git checkout -b &lt;nome-branch&gt;</a:t>
             </a:r>
           </a:p>
           <a:p>
@@ -11201,7 +10496,6 @@
                 <a:solidFill>
                   <a:prstClr val="black"/>
                 </a:solidFill>
-                <a:latin typeface="Calibri" panose="020F0502020204030204" pitchFamily="34" charset="0"/>
                 <a:cs typeface="Calibri" panose="020F0502020204030204" pitchFamily="34" charset="0"/>
               </a:rPr>
               <a:t>Para se locomover entre branches já existentes, repita o código omitindo o </a:t>
@@ -11211,10 +10505,9 @@
                 <a:solidFill>
                   <a:prstClr val="black"/>
                 </a:solidFill>
-                <a:latin typeface="Calibri" panose="020F0502020204030204" pitchFamily="34" charset="0"/>
-                <a:cs typeface="Calibri" panose="020F0502020204030204" pitchFamily="34" charset="0"/>
-              </a:rPr>
-              <a:t>&lt;-b&gt;</a:t>
+                <a:cs typeface="Calibri" panose="020F0502020204030204" pitchFamily="34" charset="0"/>
+              </a:rPr>
+              <a:t>-b</a:t>
             </a:r>
           </a:p>
           <a:p>
@@ -11230,7 +10523,6 @@
                 <a:solidFill>
                   <a:prstClr val="black"/>
                 </a:solidFill>
-                <a:latin typeface="Calibri" panose="020F0502020204030204" pitchFamily="34" charset="0"/>
                 <a:cs typeface="Calibri" panose="020F0502020204030204" pitchFamily="34" charset="0"/>
               </a:rPr>
               <a:t>Mencione o nome da branch no push: </a:t>
@@ -11240,7 +10532,6 @@
                 <a:solidFill>
                   <a:prstClr val="black"/>
                 </a:solidFill>
-                <a:latin typeface="Calibri" panose="020F0502020204030204" pitchFamily="34" charset="0"/>
                 <a:cs typeface="Calibri" panose="020F0502020204030204" pitchFamily="34" charset="0"/>
               </a:rPr>
               <a:t>git push -u origin nova-branch</a:t>
@@ -11259,7 +10550,6 @@
                 <a:solidFill>
                   <a:prstClr val="black"/>
                 </a:solidFill>
-                <a:latin typeface="Calibri" panose="020F0502020204030204" pitchFamily="34" charset="0"/>
                 <a:cs typeface="Calibri" panose="020F0502020204030204" pitchFamily="34" charset="0"/>
               </a:rPr>
               <a:t>Abra o </a:t>
@@ -11269,7 +10559,6 @@
                 <a:solidFill>
                   <a:prstClr val="black"/>
                 </a:solidFill>
-                <a:latin typeface="Calibri" panose="020F0502020204030204" pitchFamily="34" charset="0"/>
                 <a:cs typeface="Calibri" panose="020F0502020204030204" pitchFamily="34" charset="0"/>
               </a:rPr>
               <a:t>pull</a:t>
@@ -11279,7 +10568,6 @@
                 <a:solidFill>
                   <a:prstClr val="black"/>
                 </a:solidFill>
-                <a:latin typeface="Calibri" panose="020F0502020204030204" pitchFamily="34" charset="0"/>
                 <a:cs typeface="Calibri" panose="020F0502020204030204" pitchFamily="34" charset="0"/>
               </a:rPr>
               <a:t> </a:t>
@@ -11289,7 +10577,6 @@
                 <a:solidFill>
                   <a:prstClr val="black"/>
                 </a:solidFill>
-                <a:latin typeface="Calibri" panose="020F0502020204030204" pitchFamily="34" charset="0"/>
                 <a:cs typeface="Calibri" panose="020F0502020204030204" pitchFamily="34" charset="0"/>
               </a:rPr>
               <a:t>request</a:t>
@@ -11299,7 +10586,6 @@
                 <a:solidFill>
                   <a:prstClr val="black"/>
                 </a:solidFill>
-                <a:latin typeface="Calibri" panose="020F0502020204030204" pitchFamily="34" charset="0"/>
                 <a:cs typeface="Calibri" panose="020F0502020204030204" pitchFamily="34" charset="0"/>
               </a:rPr>
               <a:t> no GitHub</a:t>
@@ -11312,7 +10598,7 @@
           <p:cNvPr id="10" name="TextBox 9">
             <a:extLst>
               <a:ext uri="{FF2B5EF4-FFF2-40B4-BE49-F238E27FC236}">
-                <a16:creationId xmlns:a16="http://schemas.microsoft.com/office/drawing/2014/main" id="{2B866266-1F54-475E-8820-4D1EA2775D47}"/>
+                <a16:creationId xmlns:a16="http://schemas.microsoft.com/office/drawing/2014/main" id="{B5FC89CF-99AE-0F2E-44DA-9DFB72F7595F}"/>
               </a:ext>
             </a:extLst>
           </p:cNvPr>
@@ -11345,7 +10631,6 @@
                 <a:solidFill>
                   <a:prstClr val="black"/>
                 </a:solidFill>
-                <a:latin typeface="Calibri" panose="020F0502020204030204" pitchFamily="34" charset="0"/>
                 <a:cs typeface="Calibri" panose="020F0502020204030204" pitchFamily="34" charset="0"/>
               </a:rPr>
               <a:t>Agora:</a:t>
@@ -11364,7 +10649,6 @@
                 <a:solidFill>
                   <a:prstClr val="black"/>
                 </a:solidFill>
-                <a:latin typeface="Calibri" panose="020F0502020204030204" pitchFamily="34" charset="0"/>
                 <a:cs typeface="Calibri" panose="020F0502020204030204" pitchFamily="34" charset="0"/>
               </a:rPr>
               <a:t>Vamos criar um </a:t>
@@ -11374,7 +10658,6 @@
                 <a:solidFill>
                   <a:prstClr val="black"/>
                 </a:solidFill>
-                <a:latin typeface="Calibri" panose="020F0502020204030204" pitchFamily="34" charset="0"/>
                 <a:cs typeface="Calibri" panose="020F0502020204030204" pitchFamily="34" charset="0"/>
               </a:rPr>
               <a:t>Pull</a:t>
@@ -11384,7 +10667,6 @@
                 <a:solidFill>
                   <a:prstClr val="black"/>
                 </a:solidFill>
-                <a:latin typeface="Calibri" panose="020F0502020204030204" pitchFamily="34" charset="0"/>
                 <a:cs typeface="Calibri" panose="020F0502020204030204" pitchFamily="34" charset="0"/>
               </a:rPr>
               <a:t> </a:t>
@@ -11394,7 +10676,6 @@
                 <a:solidFill>
                   <a:prstClr val="black"/>
                 </a:solidFill>
-                <a:latin typeface="Calibri" panose="020F0502020204030204" pitchFamily="34" charset="0"/>
                 <a:cs typeface="Calibri" panose="020F0502020204030204" pitchFamily="34" charset="0"/>
               </a:rPr>
               <a:t>Request</a:t>
@@ -11403,7 +10684,6 @@
               <a:solidFill>
                 <a:prstClr val="black"/>
               </a:solidFill>
-              <a:latin typeface="Calibri" panose="020F0502020204030204" pitchFamily="34" charset="0"/>
               <a:cs typeface="Calibri" panose="020F0502020204030204" pitchFamily="34" charset="0"/>
             </a:endParaRPr>
           </a:p>
@@ -11420,7 +10700,6 @@
                 <a:solidFill>
                   <a:prstClr val="black"/>
                 </a:solidFill>
-                <a:latin typeface="Calibri" panose="020F0502020204030204" pitchFamily="34" charset="0"/>
                 <a:cs typeface="Calibri" panose="020F0502020204030204" pitchFamily="34" charset="0"/>
               </a:rPr>
               <a:t>Fazer exercício 3 e 4</a:t>
@@ -11433,7 +10712,7 @@
           <p:cNvPr id="11" name="Picture 10">
             <a:extLst>
               <a:ext uri="{FF2B5EF4-FFF2-40B4-BE49-F238E27FC236}">
-                <a16:creationId xmlns:a16="http://schemas.microsoft.com/office/drawing/2014/main" id="{B4AB0B84-A59E-ECD9-546B-B2550F1CC535}"/>
+                <a16:creationId xmlns:a16="http://schemas.microsoft.com/office/drawing/2014/main" id="{772C2333-7E51-2666-5F0D-F697FA2E555A}"/>
               </a:ext>
             </a:extLst>
           </p:cNvPr>
@@ -11443,7 +10722,7 @@
           <p:nvPr/>
         </p:nvPicPr>
         <p:blipFill>
-          <a:blip r:embed="rId3"/>
+          <a:blip r:embed="rId2"/>
           <a:stretch>
             <a:fillRect/>
           </a:stretch>
@@ -11461,7 +10740,7 @@
     </p:spTree>
     <p:extLst>
       <p:ext uri="{BB962C8B-B14F-4D97-AF65-F5344CB8AC3E}">
-        <p14:creationId xmlns:p14="http://schemas.microsoft.com/office/powerpoint/2010/main" val="2273360355"/>
+        <p14:creationId xmlns:p14="http://schemas.microsoft.com/office/powerpoint/2010/main" val="1209135767"/>
       </p:ext>
     </p:extLst>
   </p:cSld>
@@ -11557,7 +10836,7 @@
         <p:cNvPr id="1" name="">
           <a:extLst>
             <a:ext uri="{FF2B5EF4-FFF2-40B4-BE49-F238E27FC236}">
-              <a16:creationId xmlns:a16="http://schemas.microsoft.com/office/drawing/2014/main" id="{643D5A24-9036-72DB-7BA9-DF78090C884E}"/>
+              <a16:creationId xmlns:a16="http://schemas.microsoft.com/office/drawing/2014/main" id="{5938FBF9-20DB-6B30-33A9-9DF16A8DFBEC}"/>
             </a:ext>
           </a:extLst>
         </p:cNvPr>
@@ -11572,59 +10851,12 @@
           <a:chExt cx="0" cy="0"/>
         </a:xfrm>
       </p:grpSpPr>
-      <p:pic>
-        <p:nvPicPr>
-          <p:cNvPr id="1026" name="Picture 2">
-            <a:extLst>
-              <a:ext uri="{FF2B5EF4-FFF2-40B4-BE49-F238E27FC236}">
-                <a16:creationId xmlns:a16="http://schemas.microsoft.com/office/drawing/2014/main" id="{B026B813-4716-E305-FFB9-753FA3E5B3D3}"/>
-              </a:ext>
-            </a:extLst>
-          </p:cNvPr>
-          <p:cNvPicPr>
-            <a:picLocks noChangeAspect="1" noChangeArrowheads="1"/>
-          </p:cNvPicPr>
-          <p:nvPr/>
-        </p:nvPicPr>
-        <p:blipFill>
-          <a:blip r:embed="rId2">
-            <a:extLst>
-              <a:ext uri="{28A0092B-C50C-407E-A947-70E740481C1C}">
-                <a14:useLocalDpi xmlns:a14="http://schemas.microsoft.com/office/drawing/2010/main" val="0"/>
-              </a:ext>
-            </a:extLst>
-          </a:blip>
-          <a:srcRect/>
-          <a:stretch>
-            <a:fillRect/>
-          </a:stretch>
-        </p:blipFill>
-        <p:spPr bwMode="auto">
-          <a:xfrm>
-            <a:off x="10899648" y="6374980"/>
-            <a:ext cx="1149447" cy="295025"/>
-          </a:xfrm>
-          <a:prstGeom prst="rect">
-            <a:avLst/>
-          </a:prstGeom>
-          <a:noFill/>
-          <a:extLst>
-            <a:ext uri="{909E8E84-426E-40DD-AFC4-6F175D3DCCD1}">
-              <a14:hiddenFill xmlns:a14="http://schemas.microsoft.com/office/drawing/2010/main">
-                <a:solidFill>
-                  <a:srgbClr val="FFFFFF"/>
-                </a:solidFill>
-              </a14:hiddenFill>
-            </a:ext>
-          </a:extLst>
-        </p:spPr>
-      </p:pic>
       <p:sp>
         <p:nvSpPr>
           <p:cNvPr id="6" name="Título 1">
             <a:extLst>
               <a:ext uri="{FF2B5EF4-FFF2-40B4-BE49-F238E27FC236}">
-                <a16:creationId xmlns:a16="http://schemas.microsoft.com/office/drawing/2014/main" id="{6177C101-DEBB-B5ED-2547-20634D658155}"/>
+                <a16:creationId xmlns:a16="http://schemas.microsoft.com/office/drawing/2014/main" id="{9BBE531E-2B02-5AE6-864C-2DE9A336B56D}"/>
               </a:ext>
             </a:extLst>
           </p:cNvPr>
@@ -11682,7 +10914,7 @@
           <p:cNvPr id="7" name="Título 1">
             <a:extLst>
               <a:ext uri="{FF2B5EF4-FFF2-40B4-BE49-F238E27FC236}">
-                <a16:creationId xmlns:a16="http://schemas.microsoft.com/office/drawing/2014/main" id="{8A4CB269-7791-8EC3-415B-81E856480BA6}"/>
+                <a16:creationId xmlns:a16="http://schemas.microsoft.com/office/drawing/2014/main" id="{3F3B98B8-CF87-542B-9DD7-511D8D2EED4A}"/>
               </a:ext>
             </a:extLst>
           </p:cNvPr>
@@ -11740,7 +10972,7 @@
           <p:cNvPr id="8" name="TextBox 7">
             <a:extLst>
               <a:ext uri="{FF2B5EF4-FFF2-40B4-BE49-F238E27FC236}">
-                <a16:creationId xmlns:a16="http://schemas.microsoft.com/office/drawing/2014/main" id="{0E9A3A33-7F1B-8199-9EAE-19E2001E016D}"/>
+                <a16:creationId xmlns:a16="http://schemas.microsoft.com/office/drawing/2014/main" id="{9ECE6564-A7B0-DDB0-95BD-99AD11832D7B}"/>
               </a:ext>
             </a:extLst>
           </p:cNvPr>
@@ -11775,7 +11007,6 @@
                 <a:solidFill>
                   <a:prstClr val="black"/>
                 </a:solidFill>
-                <a:latin typeface="Calibri" panose="020F0502020204030204" pitchFamily="34" charset="0"/>
                 <a:cs typeface="Calibri" panose="020F0502020204030204" pitchFamily="34" charset="0"/>
               </a:rPr>
               <a:t>Processo de criar uma cópia pessoal de um repositório, tipicamente de projetos </a:t>
@@ -11785,7 +11016,6 @@
                 <a:solidFill>
                   <a:prstClr val="black"/>
                 </a:solidFill>
-                <a:latin typeface="Calibri" panose="020F0502020204030204" pitchFamily="34" charset="0"/>
                 <a:cs typeface="Calibri" panose="020F0502020204030204" pitchFamily="34" charset="0"/>
               </a:rPr>
               <a:t>Open </a:t>
@@ -11795,7 +11025,6 @@
                 <a:solidFill>
                   <a:prstClr val="black"/>
                 </a:solidFill>
-                <a:latin typeface="Calibri" panose="020F0502020204030204" pitchFamily="34" charset="0"/>
                 <a:cs typeface="Calibri" panose="020F0502020204030204" pitchFamily="34" charset="0"/>
               </a:rPr>
               <a:t>Source</a:t>
@@ -11804,7 +11033,6 @@
               <a:solidFill>
                 <a:prstClr val="black"/>
               </a:solidFill>
-              <a:latin typeface="Calibri" panose="020F0502020204030204" pitchFamily="34" charset="0"/>
               <a:cs typeface="Calibri" panose="020F0502020204030204" pitchFamily="34" charset="0"/>
             </a:endParaRPr>
           </a:p>
@@ -11821,7 +11049,6 @@
                 <a:solidFill>
                   <a:prstClr val="black"/>
                 </a:solidFill>
-                <a:latin typeface="Calibri" panose="020F0502020204030204" pitchFamily="34" charset="0"/>
                 <a:cs typeface="Calibri" panose="020F0502020204030204" pitchFamily="34" charset="0"/>
               </a:rPr>
               <a:t>Feito para implementar novas funcionalidades ou consertar bugs</a:t>
@@ -11840,7 +11067,6 @@
                 <a:solidFill>
                   <a:prstClr val="black"/>
                 </a:solidFill>
-                <a:latin typeface="Calibri" panose="020F0502020204030204" pitchFamily="34" charset="0"/>
                 <a:cs typeface="Calibri" panose="020F0502020204030204" pitchFamily="34" charset="0"/>
               </a:rPr>
               <a:t>Tem a opção de contribuir com o projeto original a partir de um </a:t>
@@ -11850,7 +11076,6 @@
                 <a:solidFill>
                   <a:prstClr val="black"/>
                 </a:solidFill>
-                <a:latin typeface="Calibri" panose="020F0502020204030204" pitchFamily="34" charset="0"/>
                 <a:cs typeface="Calibri" panose="020F0502020204030204" pitchFamily="34" charset="0"/>
               </a:rPr>
               <a:t>Pull</a:t>
@@ -11860,7 +11085,6 @@
                 <a:solidFill>
                   <a:prstClr val="black"/>
                 </a:solidFill>
-                <a:latin typeface="Calibri" panose="020F0502020204030204" pitchFamily="34" charset="0"/>
                 <a:cs typeface="Calibri" panose="020F0502020204030204" pitchFamily="34" charset="0"/>
               </a:rPr>
               <a:t> </a:t>
@@ -11870,7 +11094,6 @@
                 <a:solidFill>
                   <a:prstClr val="black"/>
                 </a:solidFill>
-                <a:latin typeface="Calibri" panose="020F0502020204030204" pitchFamily="34" charset="0"/>
                 <a:cs typeface="Calibri" panose="020F0502020204030204" pitchFamily="34" charset="0"/>
               </a:rPr>
               <a:t>Request</a:t>
@@ -11879,7 +11102,6 @@
               <a:solidFill>
                 <a:prstClr val="black"/>
               </a:solidFill>
-              <a:latin typeface="Calibri" panose="020F0502020204030204" pitchFamily="34" charset="0"/>
               <a:cs typeface="Calibri" panose="020F0502020204030204" pitchFamily="34" charset="0"/>
             </a:endParaRPr>
           </a:p>
@@ -11890,7 +11112,7 @@
           <p:cNvPr id="9" name="Picture 2">
             <a:extLst>
               <a:ext uri="{FF2B5EF4-FFF2-40B4-BE49-F238E27FC236}">
-                <a16:creationId xmlns:a16="http://schemas.microsoft.com/office/drawing/2014/main" id="{A08158F5-22A0-C013-000E-4D1B0DE87C76}"/>
+                <a16:creationId xmlns:a16="http://schemas.microsoft.com/office/drawing/2014/main" id="{5BCAB28A-0878-33A9-CC20-57D54CDE6281}"/>
               </a:ext>
             </a:extLst>
           </p:cNvPr>
@@ -11900,7 +11122,7 @@
           <p:nvPr/>
         </p:nvPicPr>
         <p:blipFill rotWithShape="1">
-          <a:blip r:embed="rId3">
+          <a:blip r:embed="rId2">
             <a:extLst>
               <a:ext uri="{28A0092B-C50C-407E-A947-70E740481C1C}">
                 <a14:useLocalDpi xmlns:a14="http://schemas.microsoft.com/office/drawing/2010/main" val="0"/>
@@ -11935,7 +11157,7 @@
     </p:spTree>
     <p:extLst>
       <p:ext uri="{BB962C8B-B14F-4D97-AF65-F5344CB8AC3E}">
-        <p14:creationId xmlns:p14="http://schemas.microsoft.com/office/powerpoint/2010/main" val="3649831290"/>
+        <p14:creationId xmlns:p14="http://schemas.microsoft.com/office/powerpoint/2010/main" val="3163240893"/>
       </p:ext>
     </p:extLst>
   </p:cSld>
@@ -11953,7 +11175,7 @@
         <p:cNvPr id="1" name="">
           <a:extLst>
             <a:ext uri="{FF2B5EF4-FFF2-40B4-BE49-F238E27FC236}">
-              <a16:creationId xmlns:a16="http://schemas.microsoft.com/office/drawing/2014/main" id="{4E462436-CB2F-7CAF-FF17-21A72145DC57}"/>
+              <a16:creationId xmlns:a16="http://schemas.microsoft.com/office/drawing/2014/main" id="{75A2695E-7862-4FFF-F29C-C92EBB95796B}"/>
             </a:ext>
           </a:extLst>
         </p:cNvPr>
@@ -11968,59 +11190,12 @@
           <a:chExt cx="0" cy="0"/>
         </a:xfrm>
       </p:grpSpPr>
-      <p:pic>
-        <p:nvPicPr>
-          <p:cNvPr id="1026" name="Picture 2">
-            <a:extLst>
-              <a:ext uri="{FF2B5EF4-FFF2-40B4-BE49-F238E27FC236}">
-                <a16:creationId xmlns:a16="http://schemas.microsoft.com/office/drawing/2014/main" id="{92C0F44C-A568-2EF5-F5A1-C529BC50C792}"/>
-              </a:ext>
-            </a:extLst>
-          </p:cNvPr>
-          <p:cNvPicPr>
-            <a:picLocks noChangeAspect="1" noChangeArrowheads="1"/>
-          </p:cNvPicPr>
-          <p:nvPr/>
-        </p:nvPicPr>
-        <p:blipFill>
-          <a:blip r:embed="rId2">
-            <a:extLst>
-              <a:ext uri="{28A0092B-C50C-407E-A947-70E740481C1C}">
-                <a14:useLocalDpi xmlns:a14="http://schemas.microsoft.com/office/drawing/2010/main" val="0"/>
-              </a:ext>
-            </a:extLst>
-          </a:blip>
-          <a:srcRect/>
-          <a:stretch>
-            <a:fillRect/>
-          </a:stretch>
-        </p:blipFill>
-        <p:spPr bwMode="auto">
-          <a:xfrm>
-            <a:off x="10899648" y="6374980"/>
-            <a:ext cx="1149447" cy="295025"/>
-          </a:xfrm>
-          <a:prstGeom prst="rect">
-            <a:avLst/>
-          </a:prstGeom>
-          <a:noFill/>
-          <a:extLst>
-            <a:ext uri="{909E8E84-426E-40DD-AFC4-6F175D3DCCD1}">
-              <a14:hiddenFill xmlns:a14="http://schemas.microsoft.com/office/drawing/2010/main">
-                <a:solidFill>
-                  <a:srgbClr val="FFFFFF"/>
-                </a:solidFill>
-              </a14:hiddenFill>
-            </a:ext>
-          </a:extLst>
-        </p:spPr>
-      </p:pic>
       <p:sp>
         <p:nvSpPr>
           <p:cNvPr id="6" name="Título 1">
             <a:extLst>
               <a:ext uri="{FF2B5EF4-FFF2-40B4-BE49-F238E27FC236}">
-                <a16:creationId xmlns:a16="http://schemas.microsoft.com/office/drawing/2014/main" id="{7DA0DB51-7715-C293-225F-5FEBDBDC4E96}"/>
+                <a16:creationId xmlns:a16="http://schemas.microsoft.com/office/drawing/2014/main" id="{607FB750-1B32-7633-C50A-D7EFDC34FD3A}"/>
               </a:ext>
             </a:extLst>
           </p:cNvPr>
@@ -12070,6 +11245,10 @@
               </a:rPr>
               <a:t>Ciclo do Software e Versionamento</a:t>
             </a:r>
+            <a:endParaRPr lang="pt-BR" sz="3200" dirty="0">
+              <a:latin typeface="Calibri" panose="020F0502020204030204" pitchFamily="34" charset="0"/>
+              <a:cs typeface="Calibri" panose="020F0502020204030204" pitchFamily="34" charset="0"/>
+            </a:endParaRPr>
           </a:p>
         </p:txBody>
       </p:sp>
@@ -12078,7 +11257,7 @@
           <p:cNvPr id="7" name="Título 1">
             <a:extLst>
               <a:ext uri="{FF2B5EF4-FFF2-40B4-BE49-F238E27FC236}">
-                <a16:creationId xmlns:a16="http://schemas.microsoft.com/office/drawing/2014/main" id="{F8ACA71F-A423-99B5-A8BF-643CCDCE405D}"/>
+                <a16:creationId xmlns:a16="http://schemas.microsoft.com/office/drawing/2014/main" id="{49EE9201-F60A-B4FB-CD37-A4E7F8C0DEE9}"/>
               </a:ext>
             </a:extLst>
           </p:cNvPr>
@@ -12089,8 +11268,8 @@
         </p:nvSpPr>
         <p:spPr>
           <a:xfrm>
-            <a:off x="742951" y="984726"/>
-            <a:ext cx="2196963" cy="424732"/>
+            <a:off x="739792" y="920579"/>
+            <a:ext cx="843202" cy="424732"/>
           </a:xfrm>
           <a:prstGeom prst="rect">
             <a:avLst/>
@@ -12122,12 +11301,16 @@
           <a:p>
             <a:pPr algn="ctr"/>
             <a:r>
-              <a:rPr lang="pt-BR" sz="2400">
+              <a:rPr lang="pt-BR" sz="2400" dirty="0" err="1">
                 <a:latin typeface="Calibri" panose="020F0502020204030204" pitchFamily="34" charset="0"/>
                 <a:cs typeface="Calibri" panose="020F0502020204030204" pitchFamily="34" charset="0"/>
               </a:rPr>
-              <a:t>GitHub Desktop</a:t>
-            </a:r>
+              <a:t>Issue</a:t>
+            </a:r>
+            <a:endParaRPr lang="pt-BR" sz="2400" dirty="0">
+              <a:latin typeface="Calibri" panose="020F0502020204030204" pitchFamily="34" charset="0"/>
+              <a:cs typeface="Calibri" panose="020F0502020204030204" pitchFamily="34" charset="0"/>
+            </a:endParaRPr>
           </a:p>
         </p:txBody>
       </p:sp>
@@ -12136,7 +11319,7 @@
           <p:cNvPr id="8" name="TextBox 7">
             <a:extLst>
               <a:ext uri="{FF2B5EF4-FFF2-40B4-BE49-F238E27FC236}">
-                <a16:creationId xmlns:a16="http://schemas.microsoft.com/office/drawing/2014/main" id="{BF151EA3-E0AA-9C4F-58F5-8F10441560FE}"/>
+                <a16:creationId xmlns:a16="http://schemas.microsoft.com/office/drawing/2014/main" id="{C6B5FF2F-4DA8-A609-0D61-4283A5D37622}"/>
               </a:ext>
             </a:extLst>
           </p:cNvPr>
@@ -12145,8 +11328,8 @@
         </p:nvSpPr>
         <p:spPr>
           <a:xfrm>
-            <a:off x="20905" y="1614143"/>
-            <a:ext cx="11303876" cy="461665"/>
+            <a:off x="0" y="1447471"/>
+            <a:ext cx="11729885" cy="3585597"/>
           </a:xfrm>
           <a:prstGeom prst="rect">
             <a:avLst/>
@@ -12167,309 +11350,249 @@
               <a:buChar char="•"/>
             </a:pPr>
             <a:r>
-              <a:rPr lang="pt-BR" sz="2400">
-                <a:solidFill>
-                  <a:prstClr val="black"/>
-                </a:solidFill>
-                <a:latin typeface="Calibri" panose="020F0502020204030204" pitchFamily="34" charset="0"/>
-                <a:cs typeface="Calibri" panose="020F0502020204030204" pitchFamily="34" charset="0"/>
-              </a:rPr>
-              <a:t>Aplicativo de interface gráfica (GUI) para interação com repositórios do GitHub</a:t>
-            </a:r>
-          </a:p>
-        </p:txBody>
-      </p:sp>
-      <p:pic>
-        <p:nvPicPr>
-          <p:cNvPr id="9" name="Picture 4" descr="Getting started with Git and GitHub is easier than ever with GitHub Desktop  2.2 - The GitHub Blog">
-            <a:extLst>
-              <a:ext uri="{FF2B5EF4-FFF2-40B4-BE49-F238E27FC236}">
-                <a16:creationId xmlns:a16="http://schemas.microsoft.com/office/drawing/2014/main" id="{ABB68CA7-8235-82BD-7427-468F1056BCF0}"/>
-              </a:ext>
-            </a:extLst>
-          </p:cNvPr>
-          <p:cNvPicPr>
-            <a:picLocks noChangeAspect="1" noChangeArrowheads="1"/>
-          </p:cNvPicPr>
-          <p:nvPr/>
-        </p:nvPicPr>
-        <p:blipFill>
-          <a:blip r:embed="rId3">
-            <a:extLst>
-              <a:ext uri="{28A0092B-C50C-407E-A947-70E740481C1C}">
-                <a14:useLocalDpi xmlns:a14="http://schemas.microsoft.com/office/drawing/2010/main" val="0"/>
-              </a:ext>
-            </a:extLst>
-          </a:blip>
-          <a:srcRect/>
-          <a:stretch>
-            <a:fillRect/>
-          </a:stretch>
-        </p:blipFill>
-        <p:spPr bwMode="auto">
-          <a:xfrm>
-            <a:off x="3209639" y="2511591"/>
-            <a:ext cx="5772722" cy="3741098"/>
-          </a:xfrm>
-          <a:prstGeom prst="rect">
-            <a:avLst/>
-          </a:prstGeom>
-          <a:noFill/>
-          <a:extLst>
-            <a:ext uri="{909E8E84-426E-40DD-AFC4-6F175D3DCCD1}">
-              <a14:hiddenFill xmlns:a14="http://schemas.microsoft.com/office/drawing/2010/main">
-                <a:solidFill>
-                  <a:srgbClr val="FFFFFF"/>
-                </a:solidFill>
-              </a14:hiddenFill>
-            </a:ext>
-          </a:extLst>
-        </p:spPr>
-      </p:pic>
-    </p:spTree>
-    <p:extLst>
-      <p:ext uri="{BB962C8B-B14F-4D97-AF65-F5344CB8AC3E}">
-        <p14:creationId xmlns:p14="http://schemas.microsoft.com/office/powerpoint/2010/main" val="3520189970"/>
-      </p:ext>
-    </p:extLst>
-  </p:cSld>
-  <p:clrMapOvr>
-    <a:masterClrMapping/>
-  </p:clrMapOvr>
-</p:sld>
-</file>
-
-<file path=ppt/slides/slide3.xml><?xml version="1.0" encoding="utf-8"?>
-<p:sld xmlns:a="http://schemas.openxmlformats.org/drawingml/2006/main" xmlns:r="http://schemas.openxmlformats.org/officeDocument/2006/relationships" xmlns:p="http://schemas.openxmlformats.org/presentationml/2006/main">
-  <p:cSld>
-    <p:spTree>
-      <p:nvGrpSpPr>
-        <p:cNvPr id="1" name="">
-          <a:extLst>
-            <a:ext uri="{FF2B5EF4-FFF2-40B4-BE49-F238E27FC236}">
-              <a16:creationId xmlns:a16="http://schemas.microsoft.com/office/drawing/2014/main" id="{38668F14-6AA4-0DA3-8A70-47B95CDC3777}"/>
-            </a:ext>
-          </a:extLst>
-        </p:cNvPr>
-        <p:cNvGrpSpPr/>
-        <p:nvPr/>
-      </p:nvGrpSpPr>
-      <p:grpSpPr>
-        <a:xfrm>
-          <a:off x="0" y="0"/>
-          <a:ext cx="0" cy="0"/>
-          <a:chOff x="0" y="0"/>
-          <a:chExt cx="0" cy="0"/>
-        </a:xfrm>
-      </p:grpSpPr>
-      <p:pic>
-        <p:nvPicPr>
-          <p:cNvPr id="1026" name="Picture 2">
-            <a:extLst>
-              <a:ext uri="{FF2B5EF4-FFF2-40B4-BE49-F238E27FC236}">
-                <a16:creationId xmlns:a16="http://schemas.microsoft.com/office/drawing/2014/main" id="{7D3B0613-4653-597B-5CE8-C5F00A1C682F}"/>
-              </a:ext>
-            </a:extLst>
-          </p:cNvPr>
-          <p:cNvPicPr>
-            <a:picLocks noChangeAspect="1" noChangeArrowheads="1"/>
-          </p:cNvPicPr>
-          <p:nvPr/>
-        </p:nvPicPr>
-        <p:blipFill>
-          <a:blip r:embed="rId2">
-            <a:extLst>
-              <a:ext uri="{28A0092B-C50C-407E-A947-70E740481C1C}">
-                <a14:useLocalDpi xmlns:a14="http://schemas.microsoft.com/office/drawing/2010/main" val="0"/>
-              </a:ext>
-            </a:extLst>
-          </a:blip>
-          <a:srcRect/>
-          <a:stretch>
-            <a:fillRect/>
-          </a:stretch>
-        </p:blipFill>
-        <p:spPr bwMode="auto">
-          <a:xfrm>
-            <a:off x="10899648" y="6374980"/>
-            <a:ext cx="1149447" cy="295025"/>
-          </a:xfrm>
-          <a:prstGeom prst="rect">
-            <a:avLst/>
-          </a:prstGeom>
-          <a:noFill/>
-          <a:extLst>
-            <a:ext uri="{909E8E84-426E-40DD-AFC4-6F175D3DCCD1}">
-              <a14:hiddenFill xmlns:a14="http://schemas.microsoft.com/office/drawing/2010/main">
-                <a:solidFill>
-                  <a:srgbClr val="FFFFFF"/>
-                </a:solidFill>
-              </a14:hiddenFill>
-            </a:ext>
-          </a:extLst>
-        </p:spPr>
-      </p:pic>
-      <p:sp>
-        <p:nvSpPr>
-          <p:cNvPr id="16" name="Título 1">
-            <a:extLst>
-              <a:ext uri="{FF2B5EF4-FFF2-40B4-BE49-F238E27FC236}">
-                <a16:creationId xmlns:a16="http://schemas.microsoft.com/office/drawing/2014/main" id="{E06EEDE2-1984-AF8D-F629-152DA10ACDDB}"/>
-              </a:ext>
-            </a:extLst>
-          </p:cNvPr>
-          <p:cNvSpPr txBox="1">
-            <a:spLocks/>
-          </p:cNvSpPr>
+              <a:rPr lang="pt-BR" sz="2400" dirty="0">
+                <a:solidFill>
+                  <a:prstClr val="black"/>
+                </a:solidFill>
+                <a:cs typeface="Calibri" panose="020F0502020204030204" pitchFamily="34" charset="0"/>
+              </a:rPr>
+              <a:t>Sistema de rastreamento integrado a repositórios</a:t>
+            </a:r>
+          </a:p>
+          <a:p>
+            <a:pPr marL="720000" indent="-571500">
+              <a:spcBef>
+                <a:spcPts val="600"/>
+              </a:spcBef>
+              <a:buFont typeface="Arial" panose="020B0604020202020204" pitchFamily="34" charset="0"/>
+              <a:buChar char="•"/>
+            </a:pPr>
+            <a:r>
+              <a:rPr lang="pt-BR" sz="2400" dirty="0">
+                <a:solidFill>
+                  <a:prstClr val="black"/>
+                </a:solidFill>
+                <a:cs typeface="Calibri" panose="020F0502020204030204" pitchFamily="34" charset="0"/>
+              </a:rPr>
+              <a:t>Utilizado para rastrear bugs, discussões, dívida técnica, entre outros em um projeto</a:t>
+            </a:r>
+          </a:p>
+          <a:p>
+            <a:pPr marL="720000" indent="-571500">
+              <a:spcBef>
+                <a:spcPts val="600"/>
+              </a:spcBef>
+              <a:buFont typeface="Arial" panose="020B0604020202020204" pitchFamily="34" charset="0"/>
+              <a:buChar char="•"/>
+            </a:pPr>
+            <a:r>
+              <a:rPr lang="pt-BR" sz="2400" dirty="0">
+                <a:solidFill>
+                  <a:prstClr val="black"/>
+                </a:solidFill>
+                <a:cs typeface="Calibri" panose="020F0502020204030204" pitchFamily="34" charset="0"/>
+              </a:rPr>
+              <a:t>Possuem dois estados principais: </a:t>
+            </a:r>
+            <a:r>
+              <a:rPr lang="pt-BR" sz="2400" b="1" dirty="0">
+                <a:solidFill>
+                  <a:prstClr val="black"/>
+                </a:solidFill>
+                <a:cs typeface="Calibri" panose="020F0502020204030204" pitchFamily="34" charset="0"/>
+              </a:rPr>
+              <a:t>aberto</a:t>
+            </a:r>
+            <a:r>
+              <a:rPr lang="pt-BR" sz="2400" dirty="0">
+                <a:solidFill>
+                  <a:prstClr val="black"/>
+                </a:solidFill>
+                <a:cs typeface="Calibri" panose="020F0502020204030204" pitchFamily="34" charset="0"/>
+              </a:rPr>
+              <a:t> (pendente) e </a:t>
+            </a:r>
+            <a:r>
+              <a:rPr lang="pt-BR" sz="2400" b="1" dirty="0">
+                <a:solidFill>
+                  <a:prstClr val="black"/>
+                </a:solidFill>
+                <a:cs typeface="Calibri" panose="020F0502020204030204" pitchFamily="34" charset="0"/>
+              </a:rPr>
+              <a:t>fechado</a:t>
+            </a:r>
+            <a:r>
+              <a:rPr lang="pt-BR" sz="2400" dirty="0">
+                <a:solidFill>
+                  <a:prstClr val="black"/>
+                </a:solidFill>
+                <a:cs typeface="Calibri" panose="020F0502020204030204" pitchFamily="34" charset="0"/>
+              </a:rPr>
+              <a:t> (concluído)</a:t>
+            </a:r>
+          </a:p>
+          <a:p>
+            <a:pPr marL="720000" indent="-571500">
+              <a:spcBef>
+                <a:spcPts val="600"/>
+              </a:spcBef>
+              <a:buFont typeface="Arial" panose="020B0604020202020204" pitchFamily="34" charset="0"/>
+              <a:buChar char="•"/>
+            </a:pPr>
+            <a:r>
+              <a:rPr lang="pt-BR" sz="2400" dirty="0">
+                <a:solidFill>
+                  <a:prstClr val="black"/>
+                </a:solidFill>
+                <a:cs typeface="Calibri" panose="020F0502020204030204" pitchFamily="34" charset="0"/>
+              </a:rPr>
+              <a:t>Anatomia básica de um </a:t>
+            </a:r>
+            <a:r>
+              <a:rPr lang="pt-BR" sz="2400" dirty="0" err="1">
+                <a:solidFill>
+                  <a:prstClr val="black"/>
+                </a:solidFill>
+                <a:cs typeface="Calibri" panose="020F0502020204030204" pitchFamily="34" charset="0"/>
+              </a:rPr>
+              <a:t>Issue</a:t>
+            </a:r>
+            <a:r>
+              <a:rPr lang="pt-BR" sz="2400" dirty="0">
+                <a:solidFill>
+                  <a:prstClr val="black"/>
+                </a:solidFill>
+                <a:cs typeface="Calibri" panose="020F0502020204030204" pitchFamily="34" charset="0"/>
+              </a:rPr>
+              <a:t>:</a:t>
+            </a:r>
+          </a:p>
+          <a:p>
+            <a:pPr marL="1177200" lvl="1" indent="-571500">
+              <a:spcBef>
+                <a:spcPts val="600"/>
+              </a:spcBef>
+              <a:buFont typeface="Wingdings" panose="05000000000000000000" pitchFamily="2" charset="2"/>
+              <a:buChar char="§"/>
+            </a:pPr>
+            <a:r>
+              <a:rPr lang="pt-BR" sz="2400" b="1" dirty="0">
+                <a:solidFill>
+                  <a:prstClr val="black"/>
+                </a:solidFill>
+                <a:cs typeface="Calibri" panose="020F0502020204030204" pitchFamily="34" charset="0"/>
+              </a:rPr>
+              <a:t>Título</a:t>
+            </a:r>
+            <a:r>
+              <a:rPr lang="pt-BR" sz="2400" dirty="0">
+                <a:solidFill>
+                  <a:prstClr val="black"/>
+                </a:solidFill>
+                <a:cs typeface="Calibri" panose="020F0502020204030204" pitchFamily="34" charset="0"/>
+              </a:rPr>
+              <a:t>: Página de login trava com uma senha que contêm caractere especial</a:t>
+            </a:r>
+          </a:p>
+          <a:p>
+            <a:pPr marL="1177200" lvl="1" indent="-571500">
+              <a:spcBef>
+                <a:spcPts val="600"/>
+              </a:spcBef>
+              <a:buFont typeface="Wingdings" panose="05000000000000000000" pitchFamily="2" charset="2"/>
+              <a:buChar char="§"/>
+            </a:pPr>
+            <a:r>
+              <a:rPr lang="pt-BR" sz="2400" b="1" dirty="0">
+                <a:solidFill>
+                  <a:prstClr val="black"/>
+                </a:solidFill>
+                <a:cs typeface="Calibri" panose="020F0502020204030204" pitchFamily="34" charset="0"/>
+              </a:rPr>
+              <a:t>Passos para reproduzir</a:t>
+            </a:r>
+            <a:r>
+              <a:rPr lang="pt-BR" sz="2400" dirty="0">
+                <a:solidFill>
+                  <a:prstClr val="black"/>
+                </a:solidFill>
+                <a:cs typeface="Calibri" panose="020F0502020204030204" pitchFamily="34" charset="0"/>
+              </a:rPr>
+              <a:t>: Faça login com uma senha que contenha caractere especial</a:t>
+            </a:r>
+          </a:p>
+          <a:p>
+            <a:pPr marL="1177200" lvl="1" indent="-571500">
+              <a:spcBef>
+                <a:spcPts val="600"/>
+              </a:spcBef>
+              <a:buFont typeface="Wingdings" panose="05000000000000000000" pitchFamily="2" charset="2"/>
+              <a:buChar char="§"/>
+            </a:pPr>
+            <a:r>
+              <a:rPr lang="pt-BR" sz="2400" b="1" dirty="0">
+                <a:solidFill>
+                  <a:prstClr val="black"/>
+                </a:solidFill>
+                <a:cs typeface="Calibri" panose="020F0502020204030204" pitchFamily="34" charset="0"/>
+              </a:rPr>
+              <a:t>Esperado</a:t>
+            </a:r>
+            <a:r>
+              <a:rPr lang="pt-BR" sz="2400" dirty="0">
+                <a:solidFill>
+                  <a:prstClr val="black"/>
+                </a:solidFill>
+                <a:cs typeface="Calibri" panose="020F0502020204030204" pitchFamily="34" charset="0"/>
+              </a:rPr>
+              <a:t>: O usuário deveria ser logado</a:t>
+            </a:r>
+          </a:p>
+          <a:p>
+            <a:pPr marL="1177200" lvl="1" indent="-571500">
+              <a:spcBef>
+                <a:spcPts val="600"/>
+              </a:spcBef>
+              <a:buFont typeface="Wingdings" panose="05000000000000000000" pitchFamily="2" charset="2"/>
+              <a:buChar char="§"/>
+            </a:pPr>
+            <a:r>
+              <a:rPr lang="pt-BR" sz="2400" b="1" dirty="0">
+                <a:solidFill>
+                  <a:prstClr val="black"/>
+                </a:solidFill>
+                <a:cs typeface="Calibri" panose="020F0502020204030204" pitchFamily="34" charset="0"/>
+              </a:rPr>
+              <a:t>Ocorreu</a:t>
+            </a:r>
+            <a:r>
+              <a:rPr lang="pt-BR" sz="2400" dirty="0">
+                <a:solidFill>
+                  <a:prstClr val="black"/>
+                </a:solidFill>
+                <a:cs typeface="Calibri" panose="020F0502020204030204" pitchFamily="34" charset="0"/>
+              </a:rPr>
+              <a:t>: Uma exceção não tratada</a:t>
+            </a:r>
+          </a:p>
+        </p:txBody>
+      </p:sp>
+      <p:sp>
+        <p:nvSpPr>
+          <p:cNvPr id="9" name="TextBox 8">
+            <a:extLst>
+              <a:ext uri="{FF2B5EF4-FFF2-40B4-BE49-F238E27FC236}">
+                <a16:creationId xmlns:a16="http://schemas.microsoft.com/office/drawing/2014/main" id="{B9A1B774-E2B9-16E6-BE6D-834DEBE536C5}"/>
+              </a:ext>
+            </a:extLst>
+          </p:cNvPr>
+          <p:cNvSpPr txBox="1"/>
           <p:nvPr/>
         </p:nvSpPr>
         <p:spPr>
           <a:xfrm>
-            <a:off x="3048000" y="209913"/>
-            <a:ext cx="6096000" cy="535531"/>
-          </a:xfrm>
-          <a:prstGeom prst="rect">
-            <a:avLst/>
-          </a:prstGeom>
-        </p:spPr>
-        <p:txBody>
-          <a:bodyPr vert="horz" wrap="square" lIns="91440" tIns="45720" rIns="91440" bIns="45720" rtlCol="0" anchor="ctr">
-            <a:spAutoFit/>
-          </a:bodyPr>
-          <a:lstStyle>
-            <a:lvl1pPr algn="l" defTabSz="914400" rtl="0" eaLnBrk="1" latinLnBrk="0" hangingPunct="1">
-              <a:lnSpc>
-                <a:spcPct val="90000"/>
-              </a:lnSpc>
-              <a:spcBef>
-                <a:spcPct val="0"/>
-              </a:spcBef>
-              <a:buNone/>
-              <a:defRPr sz="4400" b="1" kern="1200">
-                <a:solidFill>
-                  <a:srgbClr val="0070C0"/>
-                </a:solidFill>
-                <a:latin typeface="Century Gothic" panose="020B0502020202020204" pitchFamily="34" charset="0"/>
-                <a:ea typeface="+mj-ea"/>
-                <a:cs typeface="+mj-cs"/>
-              </a:defRPr>
-            </a:lvl1pPr>
-          </a:lstStyle>
-          <a:p>
-            <a:pPr algn="ctr"/>
-            <a:r>
-              <a:rPr lang="pt-BR" sz="3200">
-                <a:latin typeface="Calibri" panose="020F0502020204030204" pitchFamily="34" charset="0"/>
-                <a:cs typeface="Calibri" panose="020F0502020204030204" pitchFamily="34" charset="0"/>
-              </a:rPr>
-              <a:t>Ciclo do Software e Versionamento</a:t>
-            </a:r>
-          </a:p>
-        </p:txBody>
-      </p:sp>
-      <p:sp>
-        <p:nvSpPr>
-          <p:cNvPr id="17" name="Título 1">
-            <a:extLst>
-              <a:ext uri="{FF2B5EF4-FFF2-40B4-BE49-F238E27FC236}">
-                <a16:creationId xmlns:a16="http://schemas.microsoft.com/office/drawing/2014/main" id="{3A9B7AFC-6B77-0860-032A-5B88DF4B7A0D}"/>
-              </a:ext>
-            </a:extLst>
-          </p:cNvPr>
-          <p:cNvSpPr txBox="1">
-            <a:spLocks/>
-          </p:cNvSpPr>
-          <p:nvPr/>
-        </p:nvSpPr>
-        <p:spPr>
-          <a:xfrm>
-            <a:off x="723890" y="4515483"/>
-            <a:ext cx="592163" cy="424732"/>
-          </a:xfrm>
-          <a:prstGeom prst="rect">
-            <a:avLst/>
-          </a:prstGeom>
-        </p:spPr>
-        <p:txBody>
-          <a:bodyPr vert="horz" wrap="square" lIns="91440" tIns="45720" rIns="91440" bIns="45720" rtlCol="0" anchor="ctr">
-            <a:spAutoFit/>
-          </a:bodyPr>
-          <a:lstStyle>
-            <a:lvl1pPr algn="l" defTabSz="914400" rtl="0" eaLnBrk="1" latinLnBrk="0" hangingPunct="1">
-              <a:lnSpc>
-                <a:spcPct val="90000"/>
-              </a:lnSpc>
-              <a:spcBef>
-                <a:spcPct val="0"/>
-              </a:spcBef>
-              <a:buNone/>
-              <a:defRPr sz="4400" b="1" kern="1200">
-                <a:solidFill>
-                  <a:srgbClr val="0070C0"/>
-                </a:solidFill>
-                <a:latin typeface="Century Gothic" panose="020B0502020202020204" pitchFamily="34" charset="0"/>
-                <a:ea typeface="+mj-ea"/>
-                <a:cs typeface="+mj-cs"/>
-              </a:defRPr>
-            </a:lvl1pPr>
-          </a:lstStyle>
-          <a:p>
-            <a:pPr algn="ctr"/>
-            <a:r>
-              <a:rPr lang="pt-BR" sz="2400">
-                <a:latin typeface="Calibri" panose="020F0502020204030204" pitchFamily="34" charset="0"/>
-                <a:cs typeface="Calibri" panose="020F0502020204030204" pitchFamily="34" charset="0"/>
-              </a:rPr>
-              <a:t>Git</a:t>
-            </a:r>
-          </a:p>
-        </p:txBody>
-      </p:sp>
-      <p:pic>
-        <p:nvPicPr>
-          <p:cNvPr id="18" name="Picture 17">
-            <a:extLst>
-              <a:ext uri="{FF2B5EF4-FFF2-40B4-BE49-F238E27FC236}">
-                <a16:creationId xmlns:a16="http://schemas.microsoft.com/office/drawing/2014/main" id="{C1BAB338-1FA7-F4FE-8598-B156B475E5F1}"/>
-              </a:ext>
-            </a:extLst>
-          </p:cNvPr>
-          <p:cNvPicPr>
-            <a:picLocks noChangeAspect="1"/>
-          </p:cNvPicPr>
-          <p:nvPr/>
-        </p:nvPicPr>
-        <p:blipFill>
-          <a:blip r:embed="rId3"/>
-          <a:srcRect l="4031" t="25748" r="51881" b="21745"/>
-          <a:stretch/>
-        </p:blipFill>
-        <p:spPr>
-          <a:xfrm>
-            <a:off x="1607619" y="4466239"/>
-            <a:ext cx="1033272" cy="523220"/>
-          </a:xfrm>
-          <a:prstGeom prst="rect">
-            <a:avLst/>
-          </a:prstGeom>
-        </p:spPr>
-      </p:pic>
-      <p:sp>
-        <p:nvSpPr>
-          <p:cNvPr id="19" name="TextBox 18">
-            <a:extLst>
-              <a:ext uri="{FF2B5EF4-FFF2-40B4-BE49-F238E27FC236}">
-                <a16:creationId xmlns:a16="http://schemas.microsoft.com/office/drawing/2014/main" id="{D81F2F7D-81DB-7D25-5566-4903C3F2FCD4}"/>
-              </a:ext>
-            </a:extLst>
-          </p:cNvPr>
-          <p:cNvSpPr txBox="1"/>
-          <p:nvPr/>
-        </p:nvSpPr>
-        <p:spPr>
-          <a:xfrm>
-            <a:off x="0" y="5137683"/>
-            <a:ext cx="7357929" cy="461665"/>
+            <a:off x="0" y="5410529"/>
+            <a:ext cx="4488024" cy="907941"/>
           </a:xfrm>
           <a:prstGeom prst="rect">
             <a:avLst/>
@@ -12482,7 +11605,23 @@
           </a:bodyPr>
           <a:lstStyle/>
           <a:p>
-            <a:pPr marL="720000" indent="-571500">
+            <a:pPr marL="147600">
+              <a:spcBef>
+                <a:spcPts val="600"/>
+              </a:spcBef>
+            </a:pPr>
+            <a:r>
+              <a:rPr lang="pt-BR" sz="2400" b="1" dirty="0">
+                <a:solidFill>
+                  <a:prstClr val="black"/>
+                </a:solidFill>
+                <a:cs typeface="Calibri" panose="020F0502020204030204" pitchFamily="34" charset="0"/>
+              </a:rPr>
+              <a:t>Agora:</a:t>
+            </a:r>
+          </a:p>
+          <a:p>
+            <a:pPr marL="720000" lvl="1" indent="-571500">
               <a:spcBef>
                 <a:spcPts val="600"/>
               </a:spcBef>
@@ -12490,740 +11629,36 @@
               <a:buChar char="•"/>
             </a:pPr>
             <a:r>
-              <a:rPr lang="pt-BR" sz="2400">
-                <a:solidFill>
-                  <a:prstClr val="black"/>
-                </a:solidFill>
-                <a:latin typeface="Calibri" panose="020F0502020204030204" pitchFamily="34" charset="0"/>
-                <a:cs typeface="Calibri" panose="020F0502020204030204" pitchFamily="34" charset="0"/>
-              </a:rPr>
-              <a:t>É uma ferramenta de versionamento</a:t>
-            </a:r>
-          </a:p>
-        </p:txBody>
-      </p:sp>
-      <p:sp>
-        <p:nvSpPr>
-          <p:cNvPr id="20" name="Título 1">
-            <a:extLst>
-              <a:ext uri="{FF2B5EF4-FFF2-40B4-BE49-F238E27FC236}">
-                <a16:creationId xmlns:a16="http://schemas.microsoft.com/office/drawing/2014/main" id="{43B2B770-3FF9-8959-8825-00C41154D3CA}"/>
-              </a:ext>
-            </a:extLst>
-          </p:cNvPr>
-          <p:cNvSpPr txBox="1">
-            <a:spLocks/>
-          </p:cNvSpPr>
-          <p:nvPr/>
-        </p:nvSpPr>
-        <p:spPr>
-          <a:xfrm>
-            <a:off x="667386" y="1182668"/>
-            <a:ext cx="2214917" cy="424732"/>
-          </a:xfrm>
-          <a:prstGeom prst="rect">
-            <a:avLst/>
-          </a:prstGeom>
-        </p:spPr>
-        <p:txBody>
-          <a:bodyPr vert="horz" wrap="square" lIns="91440" tIns="45720" rIns="91440" bIns="45720" rtlCol="0" anchor="ctr">
-            <a:spAutoFit/>
-          </a:bodyPr>
-          <a:lstStyle>
-            <a:lvl1pPr algn="l" defTabSz="914400" rtl="0" eaLnBrk="1" latinLnBrk="0" hangingPunct="1">
-              <a:lnSpc>
-                <a:spcPct val="90000"/>
-              </a:lnSpc>
-              <a:spcBef>
-                <a:spcPct val="0"/>
-              </a:spcBef>
-              <a:buNone/>
-              <a:defRPr sz="4400" b="1" kern="1200">
-                <a:solidFill>
-                  <a:srgbClr val="0070C0"/>
-                </a:solidFill>
-                <a:latin typeface="Century Gothic" panose="020B0502020202020204" pitchFamily="34" charset="0"/>
-                <a:ea typeface="+mj-ea"/>
-                <a:cs typeface="+mj-cs"/>
-              </a:defRPr>
-            </a:lvl1pPr>
-          </a:lstStyle>
-          <a:p>
-            <a:pPr algn="ctr"/>
-            <a:r>
-              <a:rPr lang="pt-BR" sz="2400">
-                <a:latin typeface="Calibri" panose="020F0502020204030204" pitchFamily="34" charset="0"/>
-                <a:cs typeface="Calibri" panose="020F0502020204030204" pitchFamily="34" charset="0"/>
-              </a:rPr>
-              <a:t>Versionamento</a:t>
-            </a:r>
-          </a:p>
-        </p:txBody>
-      </p:sp>
-      <p:pic>
-        <p:nvPicPr>
-          <p:cNvPr id="21" name="Picture 2" descr="Top 5 Open Source Version Control Tools for System Admins">
-            <a:extLst>
-              <a:ext uri="{FF2B5EF4-FFF2-40B4-BE49-F238E27FC236}">
-                <a16:creationId xmlns:a16="http://schemas.microsoft.com/office/drawing/2014/main" id="{32A6C78E-1066-1D47-613C-C8317C6736FA}"/>
-              </a:ext>
-            </a:extLst>
-          </p:cNvPr>
-          <p:cNvPicPr>
-            <a:picLocks noChangeAspect="1" noChangeArrowheads="1"/>
-          </p:cNvPicPr>
-          <p:nvPr/>
-        </p:nvPicPr>
-        <p:blipFill rotWithShape="1">
-          <a:blip r:embed="rId4">
-            <a:extLst>
-              <a:ext uri="{28A0092B-C50C-407E-A947-70E740481C1C}">
-                <a14:useLocalDpi xmlns:a14="http://schemas.microsoft.com/office/drawing/2010/main" val="0"/>
-              </a:ext>
-            </a:extLst>
-          </a:blip>
-          <a:srcRect l="1466" t="31339" r="1414" b="21200"/>
-          <a:stretch/>
-        </p:blipFill>
-        <p:spPr bwMode="auto">
-          <a:xfrm>
-            <a:off x="3237921" y="1124438"/>
-            <a:ext cx="2214917" cy="541191"/>
-          </a:xfrm>
-          <a:prstGeom prst="rect">
-            <a:avLst/>
-          </a:prstGeom>
-          <a:noFill/>
-          <a:extLst>
-            <a:ext uri="{909E8E84-426E-40DD-AFC4-6F175D3DCCD1}">
-              <a14:hiddenFill xmlns:a14="http://schemas.microsoft.com/office/drawing/2010/main">
-                <a:solidFill>
-                  <a:srgbClr val="FFFFFF"/>
-                </a:solidFill>
-              </a14:hiddenFill>
-            </a:ext>
-          </a:extLst>
-        </p:spPr>
-      </p:pic>
-      <p:sp>
-        <p:nvSpPr>
-          <p:cNvPr id="22" name="TextBox 21">
-            <a:extLst>
-              <a:ext uri="{FF2B5EF4-FFF2-40B4-BE49-F238E27FC236}">
-                <a16:creationId xmlns:a16="http://schemas.microsoft.com/office/drawing/2014/main" id="{E7168D61-50AC-9915-EE2F-E360D180F7D1}"/>
-              </a:ext>
-            </a:extLst>
-          </p:cNvPr>
-          <p:cNvSpPr txBox="1"/>
-          <p:nvPr/>
-        </p:nvSpPr>
-        <p:spPr>
-          <a:xfrm>
-            <a:off x="0" y="1943257"/>
-            <a:ext cx="10123715" cy="1723549"/>
-          </a:xfrm>
-          <a:prstGeom prst="rect">
-            <a:avLst/>
-          </a:prstGeom>
-          <a:noFill/>
-        </p:spPr>
-        <p:txBody>
-          <a:bodyPr wrap="square" rtlCol="0">
-            <a:spAutoFit/>
-          </a:bodyPr>
-          <a:lstStyle/>
-          <a:p>
-            <a:pPr marL="720000" indent="-571500">
-              <a:spcBef>
-                <a:spcPts val="600"/>
-              </a:spcBef>
-              <a:buFont typeface="Arial" panose="020B0604020202020204" pitchFamily="34" charset="0"/>
-              <a:buChar char="•"/>
-            </a:pPr>
-            <a:r>
-              <a:rPr lang="pt-BR" sz="2400">
-                <a:solidFill>
-                  <a:prstClr val="black"/>
-                </a:solidFill>
-                <a:latin typeface="Calibri" panose="020F0502020204030204" pitchFamily="34" charset="0"/>
-                <a:cs typeface="Calibri" panose="020F0502020204030204" pitchFamily="34" charset="0"/>
-              </a:rPr>
-              <a:t>Responsável por gerenciar alterações em programas</a:t>
-            </a:r>
-          </a:p>
-          <a:p>
-            <a:pPr marL="720000" indent="-571500">
-              <a:spcBef>
-                <a:spcPts val="600"/>
-              </a:spcBef>
-              <a:buFont typeface="Arial" panose="020B0604020202020204" pitchFamily="34" charset="0"/>
-              <a:buChar char="•"/>
-            </a:pPr>
-            <a:r>
-              <a:rPr lang="pt-BR" sz="2400">
-                <a:solidFill>
-                  <a:prstClr val="black"/>
-                </a:solidFill>
-                <a:latin typeface="Calibri" panose="020F0502020204030204" pitchFamily="34" charset="0"/>
-                <a:cs typeface="Calibri" panose="020F0502020204030204" pitchFamily="34" charset="0"/>
-              </a:rPr>
-              <a:t>À medida que as equipes desenvolvem, é comum que várias versões do mesmo software sejam implementadas em locais diferentes</a:t>
-            </a:r>
-          </a:p>
-          <a:p>
-            <a:pPr marL="720000" indent="-571500">
-              <a:spcBef>
-                <a:spcPts val="600"/>
-              </a:spcBef>
-              <a:buFont typeface="Arial" panose="020B0604020202020204" pitchFamily="34" charset="0"/>
-              <a:buChar char="•"/>
-            </a:pPr>
-            <a:r>
-              <a:rPr lang="pt-BR" sz="2400">
-                <a:solidFill>
-                  <a:prstClr val="black"/>
-                </a:solidFill>
-                <a:latin typeface="Calibri" panose="020F0502020204030204" pitchFamily="34" charset="0"/>
-                <a:cs typeface="Calibri" panose="020F0502020204030204" pitchFamily="34" charset="0"/>
-              </a:rPr>
-              <a:t>Permite que várias pessoas trabalhem em um mesmo projeto</a:t>
-            </a:r>
+              <a:rPr lang="pt-BR" sz="2400" dirty="0">
+                <a:solidFill>
+                  <a:prstClr val="black"/>
+                </a:solidFill>
+                <a:cs typeface="Calibri" panose="020F0502020204030204" pitchFamily="34" charset="0"/>
+              </a:rPr>
+              <a:t>Fazer exercício de </a:t>
+            </a:r>
+            <a:r>
+              <a:rPr lang="pt-BR" sz="2400" dirty="0" err="1">
+                <a:solidFill>
+                  <a:prstClr val="black"/>
+                </a:solidFill>
+                <a:cs typeface="Calibri" panose="020F0502020204030204" pitchFamily="34" charset="0"/>
+              </a:rPr>
+              <a:t>Issues</a:t>
+            </a:r>
+            <a:endParaRPr lang="pt-BR" sz="2400" dirty="0">
+              <a:solidFill>
+                <a:prstClr val="black"/>
+              </a:solidFill>
+              <a:cs typeface="Calibri" panose="020F0502020204030204" pitchFamily="34" charset="0"/>
+            </a:endParaRPr>
           </a:p>
         </p:txBody>
       </p:sp>
     </p:spTree>
     <p:extLst>
       <p:ext uri="{BB962C8B-B14F-4D97-AF65-F5344CB8AC3E}">
-        <p14:creationId xmlns:p14="http://schemas.microsoft.com/office/powerpoint/2010/main" val="3809777018"/>
-      </p:ext>
-    </p:extLst>
-  </p:cSld>
-  <p:clrMapOvr>
-    <a:masterClrMapping/>
-  </p:clrMapOvr>
-</p:sld>
-</file>
-
-<file path=ppt/slides/slide4.xml><?xml version="1.0" encoding="utf-8"?>
-<p:sld xmlns:a="http://schemas.openxmlformats.org/drawingml/2006/main" xmlns:r="http://schemas.openxmlformats.org/officeDocument/2006/relationships" xmlns:p="http://schemas.openxmlformats.org/presentationml/2006/main">
-  <p:cSld>
-    <p:spTree>
-      <p:nvGrpSpPr>
-        <p:cNvPr id="1" name="">
-          <a:extLst>
-            <a:ext uri="{FF2B5EF4-FFF2-40B4-BE49-F238E27FC236}">
-              <a16:creationId xmlns:a16="http://schemas.microsoft.com/office/drawing/2014/main" id="{186FE31B-C08D-B884-4FE6-BFB49383F33E}"/>
-            </a:ext>
-          </a:extLst>
-        </p:cNvPr>
-        <p:cNvGrpSpPr/>
-        <p:nvPr/>
-      </p:nvGrpSpPr>
-      <p:grpSpPr>
-        <a:xfrm>
-          <a:off x="0" y="0"/>
-          <a:ext cx="0" cy="0"/>
-          <a:chOff x="0" y="0"/>
-          <a:chExt cx="0" cy="0"/>
-        </a:xfrm>
-      </p:grpSpPr>
-      <p:pic>
-        <p:nvPicPr>
-          <p:cNvPr id="1026" name="Picture 2">
-            <a:extLst>
-              <a:ext uri="{FF2B5EF4-FFF2-40B4-BE49-F238E27FC236}">
-                <a16:creationId xmlns:a16="http://schemas.microsoft.com/office/drawing/2014/main" id="{4A253806-0C9F-ADF3-3576-D5D7923E05F6}"/>
-              </a:ext>
-            </a:extLst>
-          </p:cNvPr>
-          <p:cNvPicPr>
-            <a:picLocks noChangeAspect="1" noChangeArrowheads="1"/>
-          </p:cNvPicPr>
-          <p:nvPr/>
-        </p:nvPicPr>
-        <p:blipFill>
-          <a:blip r:embed="rId3">
-            <a:extLst>
-              <a:ext uri="{28A0092B-C50C-407E-A947-70E740481C1C}">
-                <a14:useLocalDpi xmlns:a14="http://schemas.microsoft.com/office/drawing/2010/main" val="0"/>
-              </a:ext>
-            </a:extLst>
-          </a:blip>
-          <a:srcRect/>
-          <a:stretch>
-            <a:fillRect/>
-          </a:stretch>
-        </p:blipFill>
-        <p:spPr bwMode="auto">
-          <a:xfrm>
-            <a:off x="10899648" y="6374980"/>
-            <a:ext cx="1149447" cy="295025"/>
-          </a:xfrm>
-          <a:prstGeom prst="rect">
-            <a:avLst/>
-          </a:prstGeom>
-          <a:noFill/>
-          <a:extLst>
-            <a:ext uri="{909E8E84-426E-40DD-AFC4-6F175D3DCCD1}">
-              <a14:hiddenFill xmlns:a14="http://schemas.microsoft.com/office/drawing/2010/main">
-                <a:solidFill>
-                  <a:srgbClr val="FFFFFF"/>
-                </a:solidFill>
-              </a14:hiddenFill>
-            </a:ext>
-          </a:extLst>
-        </p:spPr>
-      </p:pic>
-      <p:sp>
-        <p:nvSpPr>
-          <p:cNvPr id="16" name="Título 1">
-            <a:extLst>
-              <a:ext uri="{FF2B5EF4-FFF2-40B4-BE49-F238E27FC236}">
-                <a16:creationId xmlns:a16="http://schemas.microsoft.com/office/drawing/2014/main" id="{F786CF17-2D55-B372-071E-1D803EB0D37E}"/>
-              </a:ext>
-            </a:extLst>
-          </p:cNvPr>
-          <p:cNvSpPr txBox="1">
-            <a:spLocks/>
-          </p:cNvSpPr>
-          <p:nvPr/>
-        </p:nvSpPr>
-        <p:spPr>
-          <a:xfrm>
-            <a:off x="3048000" y="209913"/>
-            <a:ext cx="6096000" cy="535531"/>
-          </a:xfrm>
-          <a:prstGeom prst="rect">
-            <a:avLst/>
-          </a:prstGeom>
-        </p:spPr>
-        <p:txBody>
-          <a:bodyPr vert="horz" wrap="square" lIns="91440" tIns="45720" rIns="91440" bIns="45720" rtlCol="0" anchor="ctr">
-            <a:spAutoFit/>
-          </a:bodyPr>
-          <a:lstStyle>
-            <a:lvl1pPr algn="l" defTabSz="914400" rtl="0" eaLnBrk="1" latinLnBrk="0" hangingPunct="1">
-              <a:lnSpc>
-                <a:spcPct val="90000"/>
-              </a:lnSpc>
-              <a:spcBef>
-                <a:spcPct val="0"/>
-              </a:spcBef>
-              <a:buNone/>
-              <a:defRPr sz="4400" b="1" kern="1200">
-                <a:solidFill>
-                  <a:srgbClr val="0070C0"/>
-                </a:solidFill>
-                <a:latin typeface="Century Gothic" panose="020B0502020202020204" pitchFamily="34" charset="0"/>
-                <a:ea typeface="+mj-ea"/>
-                <a:cs typeface="+mj-cs"/>
-              </a:defRPr>
-            </a:lvl1pPr>
-          </a:lstStyle>
-          <a:p>
-            <a:pPr algn="ctr"/>
-            <a:r>
-              <a:rPr lang="pt-BR" sz="3200">
-                <a:latin typeface="Calibri" panose="020F0502020204030204" pitchFamily="34" charset="0"/>
-                <a:cs typeface="Calibri" panose="020F0502020204030204" pitchFamily="34" charset="0"/>
-              </a:rPr>
-              <a:t>Ciclo do Software e Versionamento</a:t>
-            </a:r>
-          </a:p>
-        </p:txBody>
-      </p:sp>
-      <p:sp>
-        <p:nvSpPr>
-          <p:cNvPr id="17" name="Título 1">
-            <a:extLst>
-              <a:ext uri="{FF2B5EF4-FFF2-40B4-BE49-F238E27FC236}">
-                <a16:creationId xmlns:a16="http://schemas.microsoft.com/office/drawing/2014/main" id="{65B07833-2107-126E-E44B-33CC4E44411F}"/>
-              </a:ext>
-            </a:extLst>
-          </p:cNvPr>
-          <p:cNvSpPr txBox="1">
-            <a:spLocks/>
-          </p:cNvSpPr>
-          <p:nvPr/>
-        </p:nvSpPr>
-        <p:spPr>
-          <a:xfrm>
-            <a:off x="691708" y="1309091"/>
-            <a:ext cx="1118431" cy="424732"/>
-          </a:xfrm>
-          <a:prstGeom prst="rect">
-            <a:avLst/>
-          </a:prstGeom>
-        </p:spPr>
-        <p:txBody>
-          <a:bodyPr vert="horz" wrap="square" lIns="91440" tIns="45720" rIns="91440" bIns="45720" rtlCol="0" anchor="ctr">
-            <a:spAutoFit/>
-          </a:bodyPr>
-          <a:lstStyle>
-            <a:lvl1pPr algn="l" defTabSz="914400" rtl="0" eaLnBrk="1" latinLnBrk="0" hangingPunct="1">
-              <a:lnSpc>
-                <a:spcPct val="90000"/>
-              </a:lnSpc>
-              <a:spcBef>
-                <a:spcPct val="0"/>
-              </a:spcBef>
-              <a:buNone/>
-              <a:defRPr sz="4400" b="1" kern="1200">
-                <a:solidFill>
-                  <a:srgbClr val="0070C0"/>
-                </a:solidFill>
-                <a:latin typeface="Century Gothic" panose="020B0502020202020204" pitchFamily="34" charset="0"/>
-                <a:ea typeface="+mj-ea"/>
-                <a:cs typeface="+mj-cs"/>
-              </a:defRPr>
-            </a:lvl1pPr>
-          </a:lstStyle>
-          <a:p>
-            <a:pPr algn="ctr"/>
-            <a:r>
-              <a:rPr lang="pt-BR" sz="2400">
-                <a:latin typeface="Calibri" panose="020F0502020204030204" pitchFamily="34" charset="0"/>
-                <a:cs typeface="Calibri" panose="020F0502020204030204" pitchFamily="34" charset="0"/>
-              </a:rPr>
-              <a:t>GitHub</a:t>
-            </a:r>
-          </a:p>
-        </p:txBody>
-      </p:sp>
-      <p:sp>
-        <p:nvSpPr>
-          <p:cNvPr id="18" name="TextBox 17">
-            <a:extLst>
-              <a:ext uri="{FF2B5EF4-FFF2-40B4-BE49-F238E27FC236}">
-                <a16:creationId xmlns:a16="http://schemas.microsoft.com/office/drawing/2014/main" id="{037055AC-FE16-853C-698A-B5D8D1B9FFBC}"/>
-              </a:ext>
-            </a:extLst>
-          </p:cNvPr>
-          <p:cNvSpPr txBox="1"/>
-          <p:nvPr/>
-        </p:nvSpPr>
-        <p:spPr>
-          <a:xfrm>
-            <a:off x="-1" y="2055426"/>
-            <a:ext cx="10618237" cy="907941"/>
-          </a:xfrm>
-          <a:prstGeom prst="rect">
-            <a:avLst/>
-          </a:prstGeom>
-          <a:noFill/>
-        </p:spPr>
-        <p:txBody>
-          <a:bodyPr wrap="square" rtlCol="0">
-            <a:spAutoFit/>
-          </a:bodyPr>
-          <a:lstStyle/>
-          <a:p>
-            <a:pPr marL="720000" indent="-571500">
-              <a:spcBef>
-                <a:spcPts val="600"/>
-              </a:spcBef>
-              <a:buFont typeface="Arial" panose="020B0604020202020204" pitchFamily="34" charset="0"/>
-              <a:buChar char="•"/>
-            </a:pPr>
-            <a:r>
-              <a:rPr lang="pt-BR" sz="2400">
-                <a:solidFill>
-                  <a:prstClr val="black"/>
-                </a:solidFill>
-                <a:latin typeface="Calibri" panose="020F0502020204030204" pitchFamily="34" charset="0"/>
-                <a:cs typeface="Calibri" panose="020F0502020204030204" pitchFamily="34" charset="0"/>
-              </a:rPr>
-              <a:t>É a ferramenta de versionamento mais usada no mundo</a:t>
-            </a:r>
-          </a:p>
-          <a:p>
-            <a:pPr marL="720000" indent="-571500">
-              <a:spcBef>
-                <a:spcPts val="600"/>
-              </a:spcBef>
-              <a:buFont typeface="Arial" panose="020B0604020202020204" pitchFamily="34" charset="0"/>
-              <a:buChar char="•"/>
-            </a:pPr>
-            <a:r>
-              <a:rPr lang="pt-BR" sz="2400">
-                <a:solidFill>
-                  <a:prstClr val="black"/>
-                </a:solidFill>
-                <a:latin typeface="Calibri" panose="020F0502020204030204" pitchFamily="34" charset="0"/>
-                <a:cs typeface="Calibri" panose="020F0502020204030204" pitchFamily="34" charset="0"/>
-              </a:rPr>
-              <a:t>Tem concorrentes como o </a:t>
-            </a:r>
-            <a:r>
-              <a:rPr lang="pt-BR" sz="2400" err="1">
-                <a:solidFill>
-                  <a:prstClr val="black"/>
-                </a:solidFill>
-                <a:latin typeface="Calibri" panose="020F0502020204030204" pitchFamily="34" charset="0"/>
-                <a:cs typeface="Calibri" panose="020F0502020204030204" pitchFamily="34" charset="0"/>
-              </a:rPr>
-              <a:t>GitLab</a:t>
-            </a:r>
-            <a:r>
-              <a:rPr lang="pt-BR" sz="2400">
-                <a:solidFill>
-                  <a:prstClr val="black"/>
-                </a:solidFill>
-                <a:latin typeface="Calibri" panose="020F0502020204030204" pitchFamily="34" charset="0"/>
-                <a:cs typeface="Calibri" panose="020F0502020204030204" pitchFamily="34" charset="0"/>
-              </a:rPr>
-              <a:t>, </a:t>
-            </a:r>
-            <a:r>
-              <a:rPr lang="pt-BR" sz="2400" err="1">
-                <a:solidFill>
-                  <a:prstClr val="black"/>
-                </a:solidFill>
-                <a:latin typeface="Calibri" panose="020F0502020204030204" pitchFamily="34" charset="0"/>
-                <a:cs typeface="Calibri" panose="020F0502020204030204" pitchFamily="34" charset="0"/>
-              </a:rPr>
-              <a:t>Atlassian</a:t>
-            </a:r>
-            <a:r>
-              <a:rPr lang="pt-BR" sz="2400">
-                <a:solidFill>
-                  <a:prstClr val="black"/>
-                </a:solidFill>
-                <a:latin typeface="Calibri" panose="020F0502020204030204" pitchFamily="34" charset="0"/>
-                <a:cs typeface="Calibri" panose="020F0502020204030204" pitchFamily="34" charset="0"/>
-              </a:rPr>
-              <a:t>, </a:t>
-            </a:r>
-            <a:r>
-              <a:rPr lang="pt-BR" sz="2400" err="1">
-                <a:solidFill>
-                  <a:prstClr val="black"/>
-                </a:solidFill>
-                <a:latin typeface="Calibri" panose="020F0502020204030204" pitchFamily="34" charset="0"/>
-                <a:cs typeface="Calibri" panose="020F0502020204030204" pitchFamily="34" charset="0"/>
-              </a:rPr>
-              <a:t>BitBucket</a:t>
-            </a:r>
-            <a:r>
-              <a:rPr lang="pt-BR" sz="2400">
-                <a:solidFill>
-                  <a:prstClr val="black"/>
-                </a:solidFill>
-                <a:latin typeface="Calibri" panose="020F0502020204030204" pitchFamily="34" charset="0"/>
-                <a:cs typeface="Calibri" panose="020F0502020204030204" pitchFamily="34" charset="0"/>
-              </a:rPr>
-              <a:t> e vários outros</a:t>
-            </a:r>
-          </a:p>
-        </p:txBody>
-      </p:sp>
-      <p:pic>
-        <p:nvPicPr>
-          <p:cNvPr id="19" name="Picture 18">
-            <a:extLst>
-              <a:ext uri="{FF2B5EF4-FFF2-40B4-BE49-F238E27FC236}">
-                <a16:creationId xmlns:a16="http://schemas.microsoft.com/office/drawing/2014/main" id="{E320E9D9-28F9-F950-CD6C-9B35A69EDB1D}"/>
-              </a:ext>
-            </a:extLst>
-          </p:cNvPr>
-          <p:cNvPicPr>
-            <a:picLocks noChangeAspect="1"/>
-          </p:cNvPicPr>
-          <p:nvPr/>
-        </p:nvPicPr>
-        <p:blipFill>
-          <a:blip r:embed="rId4"/>
-          <a:srcRect l="58789" t="5133" r="4976" b="9396"/>
-          <a:stretch/>
-        </p:blipFill>
-        <p:spPr>
-          <a:xfrm>
-            <a:off x="1943612" y="1168334"/>
-            <a:ext cx="675529" cy="677533"/>
-          </a:xfrm>
-          <a:prstGeom prst="rect">
-            <a:avLst/>
-          </a:prstGeom>
-        </p:spPr>
-      </p:pic>
-      <p:pic>
-        <p:nvPicPr>
-          <p:cNvPr id="20" name="Online Media 3" title="Como personalizar o seu perfil no Github (Readme)">
-            <a:hlinkClick r:id="" action="ppaction://media"/>
-            <a:extLst>
-              <a:ext uri="{FF2B5EF4-FFF2-40B4-BE49-F238E27FC236}">
-                <a16:creationId xmlns:a16="http://schemas.microsoft.com/office/drawing/2014/main" id="{ACF5F2FE-9972-03D6-AC3E-9AB3544E8751}"/>
-              </a:ext>
-            </a:extLst>
-          </p:cNvPr>
-          <p:cNvPicPr>
-            <a:picLocks noRot="1" noChangeAspect="1"/>
-          </p:cNvPicPr>
-          <p:nvPr>
-            <a:videoFile r:link="rId1"/>
-          </p:nvPr>
-        </p:nvPicPr>
-        <p:blipFill>
-          <a:blip r:embed="rId5"/>
-          <a:stretch>
-            <a:fillRect/>
-          </a:stretch>
-        </p:blipFill>
-        <p:spPr>
-          <a:xfrm>
-            <a:off x="7520429" y="4066767"/>
-            <a:ext cx="3402650" cy="1913991"/>
-          </a:xfrm>
-          <a:prstGeom prst="rect">
-            <a:avLst/>
-          </a:prstGeom>
-        </p:spPr>
-      </p:pic>
-      <p:sp>
-        <p:nvSpPr>
-          <p:cNvPr id="21" name="TextBox 20">
-            <a:extLst>
-              <a:ext uri="{FF2B5EF4-FFF2-40B4-BE49-F238E27FC236}">
-                <a16:creationId xmlns:a16="http://schemas.microsoft.com/office/drawing/2014/main" id="{FB39A80D-339A-CCE4-C467-4330325D8C18}"/>
-              </a:ext>
-            </a:extLst>
-          </p:cNvPr>
-          <p:cNvSpPr txBox="1"/>
-          <p:nvPr/>
-        </p:nvSpPr>
-        <p:spPr>
-          <a:xfrm>
-            <a:off x="7563281" y="3530353"/>
-            <a:ext cx="3316946" cy="461665"/>
-          </a:xfrm>
-          <a:prstGeom prst="rect">
-            <a:avLst/>
-          </a:prstGeom>
-          <a:noFill/>
-        </p:spPr>
-        <p:txBody>
-          <a:bodyPr wrap="square" rtlCol="0">
-            <a:spAutoFit/>
-          </a:bodyPr>
-          <a:lstStyle/>
-          <a:p>
-            <a:pPr>
-              <a:spcBef>
-                <a:spcPts val="600"/>
-              </a:spcBef>
-            </a:pPr>
-            <a:r>
-              <a:rPr lang="pt-BR" sz="2400" dirty="0">
-                <a:solidFill>
-                  <a:prstClr val="black"/>
-                </a:solidFill>
-                <a:latin typeface="Calibri" panose="020F0502020204030204" pitchFamily="34" charset="0"/>
-                <a:cs typeface="Calibri" panose="020F0502020204030204" pitchFamily="34" charset="0"/>
-                <a:hlinkClick r:id="rId6"/>
-              </a:rPr>
-              <a:t>Vídeo</a:t>
-            </a:r>
-            <a:r>
-              <a:rPr lang="pt-BR" sz="2400" dirty="0">
-                <a:solidFill>
-                  <a:prstClr val="black"/>
-                </a:solidFill>
-                <a:latin typeface="Calibri" panose="020F0502020204030204" pitchFamily="34" charset="0"/>
-                <a:cs typeface="Calibri" panose="020F0502020204030204" pitchFamily="34" charset="0"/>
-              </a:rPr>
-              <a:t> que eu recomendo</a:t>
-            </a:r>
-          </a:p>
-        </p:txBody>
-      </p:sp>
-      <p:sp>
-        <p:nvSpPr>
-          <p:cNvPr id="22" name="TextBox 21">
-            <a:extLst>
-              <a:ext uri="{FF2B5EF4-FFF2-40B4-BE49-F238E27FC236}">
-                <a16:creationId xmlns:a16="http://schemas.microsoft.com/office/drawing/2014/main" id="{29B73E45-560D-F546-0DEC-2413ED344C5E}"/>
-              </a:ext>
-            </a:extLst>
-          </p:cNvPr>
-          <p:cNvSpPr txBox="1"/>
-          <p:nvPr/>
-        </p:nvSpPr>
-        <p:spPr>
-          <a:xfrm>
-            <a:off x="1" y="3686483"/>
-            <a:ext cx="5094514" cy="1354217"/>
-          </a:xfrm>
-          <a:prstGeom prst="rect">
-            <a:avLst/>
-          </a:prstGeom>
-          <a:noFill/>
-        </p:spPr>
-        <p:txBody>
-          <a:bodyPr wrap="square" rtlCol="0">
-            <a:spAutoFit/>
-          </a:bodyPr>
-          <a:lstStyle/>
-          <a:p>
-            <a:pPr marL="148500">
-              <a:spcBef>
-                <a:spcPts val="600"/>
-              </a:spcBef>
-            </a:pPr>
-            <a:r>
-              <a:rPr lang="pt-BR" sz="2400" b="1" dirty="0">
-                <a:solidFill>
-                  <a:prstClr val="black"/>
-                </a:solidFill>
-                <a:latin typeface="Calibri" panose="020F0502020204030204" pitchFamily="34" charset="0"/>
-                <a:cs typeface="Calibri" panose="020F0502020204030204" pitchFamily="34" charset="0"/>
-              </a:rPr>
-              <a:t>Agora:</a:t>
-            </a:r>
-          </a:p>
-          <a:p>
-            <a:pPr marL="720000" indent="-571500">
-              <a:spcBef>
-                <a:spcPts val="600"/>
-              </a:spcBef>
-              <a:buFont typeface="Arial" panose="020B0604020202020204" pitchFamily="34" charset="0"/>
-              <a:buChar char="•"/>
-            </a:pPr>
-            <a:r>
-              <a:rPr lang="pt-BR" sz="2400" dirty="0">
-                <a:solidFill>
-                  <a:prstClr val="black"/>
-                </a:solidFill>
-                <a:latin typeface="Calibri" panose="020F0502020204030204" pitchFamily="34" charset="0"/>
-                <a:cs typeface="Calibri" panose="020F0502020204030204" pitchFamily="34" charset="0"/>
-              </a:rPr>
-              <a:t>Vamos criar uma conta no GitHub</a:t>
-            </a:r>
-          </a:p>
-          <a:p>
-            <a:pPr marL="720000" indent="-571500">
-              <a:spcBef>
-                <a:spcPts val="600"/>
-              </a:spcBef>
-              <a:buFont typeface="Arial" panose="020B0604020202020204" pitchFamily="34" charset="0"/>
-              <a:buChar char="•"/>
-            </a:pPr>
-            <a:r>
-              <a:rPr lang="pt-BR" sz="2400" dirty="0">
-                <a:solidFill>
-                  <a:prstClr val="black"/>
-                </a:solidFill>
-                <a:latin typeface="Calibri" panose="020F0502020204030204" pitchFamily="34" charset="0"/>
-                <a:cs typeface="Calibri" panose="020F0502020204030204" pitchFamily="34" charset="0"/>
-              </a:rPr>
-              <a:t>Personalizar o nosso perfil</a:t>
-            </a:r>
-          </a:p>
-        </p:txBody>
-      </p:sp>
-    </p:spTree>
-    <p:extLst>
-      <p:ext uri="{BB962C8B-B14F-4D97-AF65-F5344CB8AC3E}">
-        <p14:creationId xmlns:p14="http://schemas.microsoft.com/office/powerpoint/2010/main" val="1748922258"/>
+        <p14:creationId xmlns:p14="http://schemas.microsoft.com/office/powerpoint/2010/main" val="2288497439"/>
       </p:ext>
     </p:extLst>
   </p:cSld>
@@ -13264,7 +11699,1223 @@
                                           </p:stCondLst>
                                         </p:cTn>
                                         <p:tgtEl>
-                                          <p:spTgt spid="22"/>
+                                          <p:spTgt spid="9"/>
+                                        </p:tgtEl>
+                                        <p:attrNameLst>
+                                          <p:attrName>style.visibility</p:attrName>
+                                        </p:attrNameLst>
+                                      </p:cBhvr>
+                                      <p:to>
+                                        <p:strVal val="visible"/>
+                                      </p:to>
+                                    </p:set>
+                                  </p:childTnLst>
+                                </p:cTn>
+                              </p:par>
+                            </p:childTnLst>
+                          </p:cTn>
+                        </p:par>
+                      </p:childTnLst>
+                    </p:cTn>
+                  </p:par>
+                </p:childTnLst>
+              </p:cTn>
+              <p:prevCondLst>
+                <p:cond evt="onPrev" delay="0">
+                  <p:tgtEl>
+                    <p:sldTgt/>
+                  </p:tgtEl>
+                </p:cond>
+              </p:prevCondLst>
+              <p:nextCondLst>
+                <p:cond evt="onNext" delay="0">
+                  <p:tgtEl>
+                    <p:sldTgt/>
+                  </p:tgtEl>
+                </p:cond>
+              </p:nextCondLst>
+            </p:seq>
+          </p:childTnLst>
+        </p:cTn>
+      </p:par>
+    </p:tnLst>
+    <p:bldLst>
+      <p:bldP spid="9" grpId="0"/>
+    </p:bldLst>
+  </p:timing>
+</p:sld>
+</file>
+
+<file path=ppt/slides/slide26.xml><?xml version="1.0" encoding="utf-8"?>
+<p:sld xmlns:a="http://schemas.openxmlformats.org/drawingml/2006/main" xmlns:r="http://schemas.openxmlformats.org/officeDocument/2006/relationships" xmlns:p="http://schemas.openxmlformats.org/presentationml/2006/main">
+  <p:cSld>
+    <p:spTree>
+      <p:nvGrpSpPr>
+        <p:cNvPr id="1" name="">
+          <a:extLst>
+            <a:ext uri="{FF2B5EF4-FFF2-40B4-BE49-F238E27FC236}">
+              <a16:creationId xmlns:a16="http://schemas.microsoft.com/office/drawing/2014/main" id="{96F63974-E022-7211-98F9-7049F0599C02}"/>
+            </a:ext>
+          </a:extLst>
+        </p:cNvPr>
+        <p:cNvGrpSpPr/>
+        <p:nvPr/>
+      </p:nvGrpSpPr>
+      <p:grpSpPr>
+        <a:xfrm>
+          <a:off x="0" y="0"/>
+          <a:ext cx="0" cy="0"/>
+          <a:chOff x="0" y="0"/>
+          <a:chExt cx="0" cy="0"/>
+        </a:xfrm>
+      </p:grpSpPr>
+      <p:sp>
+        <p:nvSpPr>
+          <p:cNvPr id="6" name="Título 1">
+            <a:extLst>
+              <a:ext uri="{FF2B5EF4-FFF2-40B4-BE49-F238E27FC236}">
+                <a16:creationId xmlns:a16="http://schemas.microsoft.com/office/drawing/2014/main" id="{111CB6AC-EC7C-D879-67AF-082002383C1E}"/>
+              </a:ext>
+            </a:extLst>
+          </p:cNvPr>
+          <p:cNvSpPr txBox="1">
+            <a:spLocks/>
+          </p:cNvSpPr>
+          <p:nvPr/>
+        </p:nvSpPr>
+        <p:spPr>
+          <a:xfrm>
+            <a:off x="3048000" y="209913"/>
+            <a:ext cx="6096000" cy="535531"/>
+          </a:xfrm>
+          <a:prstGeom prst="rect">
+            <a:avLst/>
+          </a:prstGeom>
+        </p:spPr>
+        <p:txBody>
+          <a:bodyPr vert="horz" wrap="square" lIns="91440" tIns="45720" rIns="91440" bIns="45720" rtlCol="0" anchor="ctr">
+            <a:spAutoFit/>
+          </a:bodyPr>
+          <a:lstStyle>
+            <a:lvl1pPr algn="l" defTabSz="914400" rtl="0" eaLnBrk="1" latinLnBrk="0" hangingPunct="1">
+              <a:lnSpc>
+                <a:spcPct val="90000"/>
+              </a:lnSpc>
+              <a:spcBef>
+                <a:spcPct val="0"/>
+              </a:spcBef>
+              <a:buNone/>
+              <a:defRPr sz="4400" b="1" kern="1200">
+                <a:solidFill>
+                  <a:srgbClr val="0070C0"/>
+                </a:solidFill>
+                <a:latin typeface="Century Gothic" panose="020B0502020202020204" pitchFamily="34" charset="0"/>
+                <a:ea typeface="+mj-ea"/>
+                <a:cs typeface="+mj-cs"/>
+              </a:defRPr>
+            </a:lvl1pPr>
+          </a:lstStyle>
+          <a:p>
+            <a:pPr algn="ctr"/>
+            <a:r>
+              <a:rPr lang="pt-BR" sz="3200">
+                <a:latin typeface="Calibri" panose="020F0502020204030204" pitchFamily="34" charset="0"/>
+                <a:cs typeface="Calibri" panose="020F0502020204030204" pitchFamily="34" charset="0"/>
+              </a:rPr>
+              <a:t>Ciclo do Software e Versionamento</a:t>
+            </a:r>
+          </a:p>
+        </p:txBody>
+      </p:sp>
+      <p:sp>
+        <p:nvSpPr>
+          <p:cNvPr id="7" name="Título 1">
+            <a:extLst>
+              <a:ext uri="{FF2B5EF4-FFF2-40B4-BE49-F238E27FC236}">
+                <a16:creationId xmlns:a16="http://schemas.microsoft.com/office/drawing/2014/main" id="{A13685EA-384C-B5F5-31A3-B463A6A409C3}"/>
+              </a:ext>
+            </a:extLst>
+          </p:cNvPr>
+          <p:cNvSpPr txBox="1">
+            <a:spLocks/>
+          </p:cNvSpPr>
+          <p:nvPr/>
+        </p:nvSpPr>
+        <p:spPr>
+          <a:xfrm>
+            <a:off x="742951" y="984726"/>
+            <a:ext cx="2196963" cy="424732"/>
+          </a:xfrm>
+          <a:prstGeom prst="rect">
+            <a:avLst/>
+          </a:prstGeom>
+        </p:spPr>
+        <p:txBody>
+          <a:bodyPr vert="horz" wrap="square" lIns="91440" tIns="45720" rIns="91440" bIns="45720" rtlCol="0" anchor="ctr">
+            <a:spAutoFit/>
+          </a:bodyPr>
+          <a:lstStyle>
+            <a:lvl1pPr algn="l" defTabSz="914400" rtl="0" eaLnBrk="1" latinLnBrk="0" hangingPunct="1">
+              <a:lnSpc>
+                <a:spcPct val="90000"/>
+              </a:lnSpc>
+              <a:spcBef>
+                <a:spcPct val="0"/>
+              </a:spcBef>
+              <a:buNone/>
+              <a:defRPr sz="4400" b="1" kern="1200">
+                <a:solidFill>
+                  <a:srgbClr val="0070C0"/>
+                </a:solidFill>
+                <a:latin typeface="Century Gothic" panose="020B0502020202020204" pitchFamily="34" charset="0"/>
+                <a:ea typeface="+mj-ea"/>
+                <a:cs typeface="+mj-cs"/>
+              </a:defRPr>
+            </a:lvl1pPr>
+          </a:lstStyle>
+          <a:p>
+            <a:pPr algn="ctr"/>
+            <a:r>
+              <a:rPr lang="pt-BR" sz="2400">
+                <a:latin typeface="Calibri" panose="020F0502020204030204" pitchFamily="34" charset="0"/>
+                <a:cs typeface="Calibri" panose="020F0502020204030204" pitchFamily="34" charset="0"/>
+              </a:rPr>
+              <a:t>GitHub Desktop</a:t>
+            </a:r>
+          </a:p>
+        </p:txBody>
+      </p:sp>
+      <p:sp>
+        <p:nvSpPr>
+          <p:cNvPr id="8" name="TextBox 7">
+            <a:extLst>
+              <a:ext uri="{FF2B5EF4-FFF2-40B4-BE49-F238E27FC236}">
+                <a16:creationId xmlns:a16="http://schemas.microsoft.com/office/drawing/2014/main" id="{4807BD6D-13E9-957C-6ECC-A1BB581AE0E7}"/>
+              </a:ext>
+            </a:extLst>
+          </p:cNvPr>
+          <p:cNvSpPr txBox="1"/>
+          <p:nvPr/>
+        </p:nvSpPr>
+        <p:spPr>
+          <a:xfrm>
+            <a:off x="20905" y="1614143"/>
+            <a:ext cx="11303876" cy="461665"/>
+          </a:xfrm>
+          <a:prstGeom prst="rect">
+            <a:avLst/>
+          </a:prstGeom>
+          <a:noFill/>
+        </p:spPr>
+        <p:txBody>
+          <a:bodyPr wrap="square" rtlCol="0">
+            <a:spAutoFit/>
+          </a:bodyPr>
+          <a:lstStyle/>
+          <a:p>
+            <a:pPr marL="720000" indent="-571500">
+              <a:spcBef>
+                <a:spcPts val="600"/>
+              </a:spcBef>
+              <a:buFont typeface="Arial" panose="020B0604020202020204" pitchFamily="34" charset="0"/>
+              <a:buChar char="•"/>
+            </a:pPr>
+            <a:r>
+              <a:rPr lang="pt-BR" sz="2400">
+                <a:solidFill>
+                  <a:prstClr val="black"/>
+                </a:solidFill>
+                <a:cs typeface="Calibri" panose="020F0502020204030204" pitchFamily="34" charset="0"/>
+              </a:rPr>
+              <a:t>Aplicativo de interface gráfica (GUI) para interação com repositórios do GitHub</a:t>
+            </a:r>
+          </a:p>
+        </p:txBody>
+      </p:sp>
+      <p:pic>
+        <p:nvPicPr>
+          <p:cNvPr id="9" name="Picture 4" descr="Getting started with Git and GitHub is easier than ever with GitHub Desktop  2.2 - The GitHub Blog">
+            <a:extLst>
+              <a:ext uri="{FF2B5EF4-FFF2-40B4-BE49-F238E27FC236}">
+                <a16:creationId xmlns:a16="http://schemas.microsoft.com/office/drawing/2014/main" id="{E53BA306-008B-35C2-3D9B-07E95F7EA460}"/>
+              </a:ext>
+            </a:extLst>
+          </p:cNvPr>
+          <p:cNvPicPr>
+            <a:picLocks noChangeAspect="1" noChangeArrowheads="1"/>
+          </p:cNvPicPr>
+          <p:nvPr/>
+        </p:nvPicPr>
+        <p:blipFill>
+          <a:blip r:embed="rId2">
+            <a:extLst>
+              <a:ext uri="{28A0092B-C50C-407E-A947-70E740481C1C}">
+                <a14:useLocalDpi xmlns:a14="http://schemas.microsoft.com/office/drawing/2010/main" val="0"/>
+              </a:ext>
+            </a:extLst>
+          </a:blip>
+          <a:srcRect/>
+          <a:stretch>
+            <a:fillRect/>
+          </a:stretch>
+        </p:blipFill>
+        <p:spPr bwMode="auto">
+          <a:xfrm>
+            <a:off x="3209639" y="2511591"/>
+            <a:ext cx="5772722" cy="3741098"/>
+          </a:xfrm>
+          <a:prstGeom prst="rect">
+            <a:avLst/>
+          </a:prstGeom>
+          <a:noFill/>
+          <a:extLst>
+            <a:ext uri="{909E8E84-426E-40DD-AFC4-6F175D3DCCD1}">
+              <a14:hiddenFill xmlns:a14="http://schemas.microsoft.com/office/drawing/2010/main">
+                <a:solidFill>
+                  <a:srgbClr val="FFFFFF"/>
+                </a:solidFill>
+              </a14:hiddenFill>
+            </a:ext>
+          </a:extLst>
+        </p:spPr>
+      </p:pic>
+    </p:spTree>
+    <p:extLst>
+      <p:ext uri="{BB962C8B-B14F-4D97-AF65-F5344CB8AC3E}">
+        <p14:creationId xmlns:p14="http://schemas.microsoft.com/office/powerpoint/2010/main" val="757793080"/>
+      </p:ext>
+    </p:extLst>
+  </p:cSld>
+  <p:clrMapOvr>
+    <a:masterClrMapping/>
+  </p:clrMapOvr>
+</p:sld>
+</file>
+
+<file path=ppt/slides/slide3.xml><?xml version="1.0" encoding="utf-8"?>
+<p:sld xmlns:a="http://schemas.openxmlformats.org/drawingml/2006/main" xmlns:r="http://schemas.openxmlformats.org/officeDocument/2006/relationships" xmlns:p="http://schemas.openxmlformats.org/presentationml/2006/main">
+  <p:cSld>
+    <p:spTree>
+      <p:nvGrpSpPr>
+        <p:cNvPr id="1" name="">
+          <a:extLst>
+            <a:ext uri="{FF2B5EF4-FFF2-40B4-BE49-F238E27FC236}">
+              <a16:creationId xmlns:a16="http://schemas.microsoft.com/office/drawing/2014/main" id="{6762BFFB-20CB-5014-F875-1B4904410F92}"/>
+            </a:ext>
+          </a:extLst>
+        </p:cNvPr>
+        <p:cNvGrpSpPr/>
+        <p:nvPr/>
+      </p:nvGrpSpPr>
+      <p:grpSpPr>
+        <a:xfrm>
+          <a:off x="0" y="0"/>
+          <a:ext cx="0" cy="0"/>
+          <a:chOff x="0" y="0"/>
+          <a:chExt cx="0" cy="0"/>
+        </a:xfrm>
+      </p:grpSpPr>
+      <p:sp>
+        <p:nvSpPr>
+          <p:cNvPr id="9" name="Título 1">
+            <a:extLst>
+              <a:ext uri="{FF2B5EF4-FFF2-40B4-BE49-F238E27FC236}">
+                <a16:creationId xmlns:a16="http://schemas.microsoft.com/office/drawing/2014/main" id="{303C8617-7FFA-56C3-ECBC-BDDBADB84361}"/>
+              </a:ext>
+            </a:extLst>
+          </p:cNvPr>
+          <p:cNvSpPr txBox="1">
+            <a:spLocks/>
+          </p:cNvSpPr>
+          <p:nvPr/>
+        </p:nvSpPr>
+        <p:spPr>
+          <a:xfrm>
+            <a:off x="3048000" y="209913"/>
+            <a:ext cx="6096000" cy="535531"/>
+          </a:xfrm>
+          <a:prstGeom prst="rect">
+            <a:avLst/>
+          </a:prstGeom>
+        </p:spPr>
+        <p:txBody>
+          <a:bodyPr vert="horz" wrap="square" lIns="91440" tIns="45720" rIns="91440" bIns="45720" rtlCol="0" anchor="ctr">
+            <a:spAutoFit/>
+          </a:bodyPr>
+          <a:lstStyle>
+            <a:lvl1pPr algn="l" defTabSz="914400" rtl="0" eaLnBrk="1" latinLnBrk="0" hangingPunct="1">
+              <a:lnSpc>
+                <a:spcPct val="90000"/>
+              </a:lnSpc>
+              <a:spcBef>
+                <a:spcPct val="0"/>
+              </a:spcBef>
+              <a:buNone/>
+              <a:defRPr sz="4400" b="1" kern="1200">
+                <a:solidFill>
+                  <a:srgbClr val="0070C0"/>
+                </a:solidFill>
+                <a:latin typeface="Century Gothic" panose="020B0502020202020204" pitchFamily="34" charset="0"/>
+                <a:ea typeface="+mj-ea"/>
+                <a:cs typeface="+mj-cs"/>
+              </a:defRPr>
+            </a:lvl1pPr>
+          </a:lstStyle>
+          <a:p>
+            <a:pPr algn="ctr"/>
+            <a:r>
+              <a:rPr lang="pt-BR" sz="3200">
+                <a:latin typeface="Calibri" panose="020F0502020204030204" pitchFamily="34" charset="0"/>
+                <a:cs typeface="Calibri" panose="020F0502020204030204" pitchFamily="34" charset="0"/>
+              </a:rPr>
+              <a:t>Ciclo do Software e Versionamento</a:t>
+            </a:r>
+          </a:p>
+        </p:txBody>
+      </p:sp>
+      <p:sp>
+        <p:nvSpPr>
+          <p:cNvPr id="10" name="Título 1">
+            <a:extLst>
+              <a:ext uri="{FF2B5EF4-FFF2-40B4-BE49-F238E27FC236}">
+                <a16:creationId xmlns:a16="http://schemas.microsoft.com/office/drawing/2014/main" id="{9D4935FE-0FD2-598A-C300-1E286916E8C9}"/>
+              </a:ext>
+            </a:extLst>
+          </p:cNvPr>
+          <p:cNvSpPr txBox="1">
+            <a:spLocks/>
+          </p:cNvSpPr>
+          <p:nvPr/>
+        </p:nvSpPr>
+        <p:spPr>
+          <a:xfrm>
+            <a:off x="723890" y="4515483"/>
+            <a:ext cx="592163" cy="424732"/>
+          </a:xfrm>
+          <a:prstGeom prst="rect">
+            <a:avLst/>
+          </a:prstGeom>
+        </p:spPr>
+        <p:txBody>
+          <a:bodyPr vert="horz" wrap="square" lIns="91440" tIns="45720" rIns="91440" bIns="45720" rtlCol="0" anchor="ctr">
+            <a:spAutoFit/>
+          </a:bodyPr>
+          <a:lstStyle>
+            <a:lvl1pPr algn="l" defTabSz="914400" rtl="0" eaLnBrk="1" latinLnBrk="0" hangingPunct="1">
+              <a:lnSpc>
+                <a:spcPct val="90000"/>
+              </a:lnSpc>
+              <a:spcBef>
+                <a:spcPct val="0"/>
+              </a:spcBef>
+              <a:buNone/>
+              <a:defRPr sz="4400" b="1" kern="1200">
+                <a:solidFill>
+                  <a:srgbClr val="0070C0"/>
+                </a:solidFill>
+                <a:latin typeface="Century Gothic" panose="020B0502020202020204" pitchFamily="34" charset="0"/>
+                <a:ea typeface="+mj-ea"/>
+                <a:cs typeface="+mj-cs"/>
+              </a:defRPr>
+            </a:lvl1pPr>
+          </a:lstStyle>
+          <a:p>
+            <a:pPr algn="ctr"/>
+            <a:r>
+              <a:rPr lang="pt-BR" sz="2400">
+                <a:latin typeface="Calibri" panose="020F0502020204030204" pitchFamily="34" charset="0"/>
+                <a:cs typeface="Calibri" panose="020F0502020204030204" pitchFamily="34" charset="0"/>
+              </a:rPr>
+              <a:t>Git</a:t>
+            </a:r>
+          </a:p>
+        </p:txBody>
+      </p:sp>
+      <p:pic>
+        <p:nvPicPr>
+          <p:cNvPr id="11" name="Picture 10">
+            <a:extLst>
+              <a:ext uri="{FF2B5EF4-FFF2-40B4-BE49-F238E27FC236}">
+                <a16:creationId xmlns:a16="http://schemas.microsoft.com/office/drawing/2014/main" id="{0B4645C2-8D23-5C9C-B4B9-8E2A1DE19CF3}"/>
+              </a:ext>
+            </a:extLst>
+          </p:cNvPr>
+          <p:cNvPicPr>
+            <a:picLocks noChangeAspect="1"/>
+          </p:cNvPicPr>
+          <p:nvPr/>
+        </p:nvPicPr>
+        <p:blipFill>
+          <a:blip r:embed="rId2"/>
+          <a:srcRect l="4031" t="25748" r="51881" b="21745"/>
+          <a:stretch/>
+        </p:blipFill>
+        <p:spPr>
+          <a:xfrm>
+            <a:off x="1607619" y="4466239"/>
+            <a:ext cx="1033272" cy="523220"/>
+          </a:xfrm>
+          <a:prstGeom prst="rect">
+            <a:avLst/>
+          </a:prstGeom>
+        </p:spPr>
+      </p:pic>
+      <p:sp>
+        <p:nvSpPr>
+          <p:cNvPr id="12" name="TextBox 11">
+            <a:extLst>
+              <a:ext uri="{FF2B5EF4-FFF2-40B4-BE49-F238E27FC236}">
+                <a16:creationId xmlns:a16="http://schemas.microsoft.com/office/drawing/2014/main" id="{DD1F7273-DCC0-1F84-DFEE-FA4077C346F5}"/>
+              </a:ext>
+            </a:extLst>
+          </p:cNvPr>
+          <p:cNvSpPr txBox="1"/>
+          <p:nvPr/>
+        </p:nvSpPr>
+        <p:spPr>
+          <a:xfrm>
+            <a:off x="0" y="5137683"/>
+            <a:ext cx="7357929" cy="461665"/>
+          </a:xfrm>
+          <a:prstGeom prst="rect">
+            <a:avLst/>
+          </a:prstGeom>
+          <a:noFill/>
+        </p:spPr>
+        <p:txBody>
+          <a:bodyPr wrap="square" rtlCol="0">
+            <a:spAutoFit/>
+          </a:bodyPr>
+          <a:lstStyle/>
+          <a:p>
+            <a:pPr marL="720000" indent="-571500">
+              <a:spcBef>
+                <a:spcPts val="600"/>
+              </a:spcBef>
+              <a:buFont typeface="Arial" panose="020B0604020202020204" pitchFamily="34" charset="0"/>
+              <a:buChar char="•"/>
+            </a:pPr>
+            <a:r>
+              <a:rPr lang="pt-BR" sz="2400">
+                <a:solidFill>
+                  <a:prstClr val="black"/>
+                </a:solidFill>
+                <a:cs typeface="Calibri" panose="020F0502020204030204" pitchFamily="34" charset="0"/>
+              </a:rPr>
+              <a:t>É uma ferramenta de versionamento</a:t>
+            </a:r>
+          </a:p>
+        </p:txBody>
+      </p:sp>
+      <p:sp>
+        <p:nvSpPr>
+          <p:cNvPr id="13" name="Título 1">
+            <a:extLst>
+              <a:ext uri="{FF2B5EF4-FFF2-40B4-BE49-F238E27FC236}">
+                <a16:creationId xmlns:a16="http://schemas.microsoft.com/office/drawing/2014/main" id="{DF1FF4AD-BBE5-E8B1-BA62-08D64615BE6C}"/>
+              </a:ext>
+            </a:extLst>
+          </p:cNvPr>
+          <p:cNvSpPr txBox="1">
+            <a:spLocks/>
+          </p:cNvSpPr>
+          <p:nvPr/>
+        </p:nvSpPr>
+        <p:spPr>
+          <a:xfrm>
+            <a:off x="667386" y="1182668"/>
+            <a:ext cx="2214917" cy="424732"/>
+          </a:xfrm>
+          <a:prstGeom prst="rect">
+            <a:avLst/>
+          </a:prstGeom>
+        </p:spPr>
+        <p:txBody>
+          <a:bodyPr vert="horz" wrap="square" lIns="91440" tIns="45720" rIns="91440" bIns="45720" rtlCol="0" anchor="ctr">
+            <a:spAutoFit/>
+          </a:bodyPr>
+          <a:lstStyle>
+            <a:lvl1pPr algn="l" defTabSz="914400" rtl="0" eaLnBrk="1" latinLnBrk="0" hangingPunct="1">
+              <a:lnSpc>
+                <a:spcPct val="90000"/>
+              </a:lnSpc>
+              <a:spcBef>
+                <a:spcPct val="0"/>
+              </a:spcBef>
+              <a:buNone/>
+              <a:defRPr sz="4400" b="1" kern="1200">
+                <a:solidFill>
+                  <a:srgbClr val="0070C0"/>
+                </a:solidFill>
+                <a:latin typeface="Century Gothic" panose="020B0502020202020204" pitchFamily="34" charset="0"/>
+                <a:ea typeface="+mj-ea"/>
+                <a:cs typeface="+mj-cs"/>
+              </a:defRPr>
+            </a:lvl1pPr>
+          </a:lstStyle>
+          <a:p>
+            <a:pPr algn="ctr"/>
+            <a:r>
+              <a:rPr lang="pt-BR" sz="2400">
+                <a:latin typeface="Calibri" panose="020F0502020204030204" pitchFamily="34" charset="0"/>
+                <a:cs typeface="Calibri" panose="020F0502020204030204" pitchFamily="34" charset="0"/>
+              </a:rPr>
+              <a:t>Versionamento</a:t>
+            </a:r>
+          </a:p>
+        </p:txBody>
+      </p:sp>
+      <p:pic>
+        <p:nvPicPr>
+          <p:cNvPr id="14" name="Picture 2" descr="Top 5 Open Source Version Control Tools for System Admins">
+            <a:extLst>
+              <a:ext uri="{FF2B5EF4-FFF2-40B4-BE49-F238E27FC236}">
+                <a16:creationId xmlns:a16="http://schemas.microsoft.com/office/drawing/2014/main" id="{B76C98CA-EB0F-8B13-5C37-556269DA5751}"/>
+              </a:ext>
+            </a:extLst>
+          </p:cNvPr>
+          <p:cNvPicPr>
+            <a:picLocks noChangeAspect="1" noChangeArrowheads="1"/>
+          </p:cNvPicPr>
+          <p:nvPr/>
+        </p:nvPicPr>
+        <p:blipFill rotWithShape="1">
+          <a:blip r:embed="rId3">
+            <a:extLst>
+              <a:ext uri="{28A0092B-C50C-407E-A947-70E740481C1C}">
+                <a14:useLocalDpi xmlns:a14="http://schemas.microsoft.com/office/drawing/2010/main" val="0"/>
+              </a:ext>
+            </a:extLst>
+          </a:blip>
+          <a:srcRect l="1466" t="31339" r="1414" b="21200"/>
+          <a:stretch/>
+        </p:blipFill>
+        <p:spPr bwMode="auto">
+          <a:xfrm>
+            <a:off x="3237921" y="1124438"/>
+            <a:ext cx="2214917" cy="541191"/>
+          </a:xfrm>
+          <a:prstGeom prst="rect">
+            <a:avLst/>
+          </a:prstGeom>
+          <a:noFill/>
+          <a:extLst>
+            <a:ext uri="{909E8E84-426E-40DD-AFC4-6F175D3DCCD1}">
+              <a14:hiddenFill xmlns:a14="http://schemas.microsoft.com/office/drawing/2010/main">
+                <a:solidFill>
+                  <a:srgbClr val="FFFFFF"/>
+                </a:solidFill>
+              </a14:hiddenFill>
+            </a:ext>
+          </a:extLst>
+        </p:spPr>
+      </p:pic>
+      <p:sp>
+        <p:nvSpPr>
+          <p:cNvPr id="15" name="TextBox 14">
+            <a:extLst>
+              <a:ext uri="{FF2B5EF4-FFF2-40B4-BE49-F238E27FC236}">
+                <a16:creationId xmlns:a16="http://schemas.microsoft.com/office/drawing/2014/main" id="{F8E81FC7-FEB7-5674-DD6F-C8C4D63A0582}"/>
+              </a:ext>
+            </a:extLst>
+          </p:cNvPr>
+          <p:cNvSpPr txBox="1"/>
+          <p:nvPr/>
+        </p:nvSpPr>
+        <p:spPr>
+          <a:xfrm>
+            <a:off x="0" y="1943257"/>
+            <a:ext cx="10123715" cy="1723549"/>
+          </a:xfrm>
+          <a:prstGeom prst="rect">
+            <a:avLst/>
+          </a:prstGeom>
+          <a:noFill/>
+        </p:spPr>
+        <p:txBody>
+          <a:bodyPr wrap="square" rtlCol="0">
+            <a:spAutoFit/>
+          </a:bodyPr>
+          <a:lstStyle/>
+          <a:p>
+            <a:pPr marL="720000" indent="-571500">
+              <a:spcBef>
+                <a:spcPts val="600"/>
+              </a:spcBef>
+              <a:buFont typeface="Arial" panose="020B0604020202020204" pitchFamily="34" charset="0"/>
+              <a:buChar char="•"/>
+            </a:pPr>
+            <a:r>
+              <a:rPr lang="pt-BR" sz="2400">
+                <a:solidFill>
+                  <a:prstClr val="black"/>
+                </a:solidFill>
+                <a:cs typeface="Calibri" panose="020F0502020204030204" pitchFamily="34" charset="0"/>
+              </a:rPr>
+              <a:t>Responsável por gerenciar alterações em programas</a:t>
+            </a:r>
+          </a:p>
+          <a:p>
+            <a:pPr marL="720000" indent="-571500">
+              <a:spcBef>
+                <a:spcPts val="600"/>
+              </a:spcBef>
+              <a:buFont typeface="Arial" panose="020B0604020202020204" pitchFamily="34" charset="0"/>
+              <a:buChar char="•"/>
+            </a:pPr>
+            <a:r>
+              <a:rPr lang="pt-BR" sz="2400">
+                <a:solidFill>
+                  <a:prstClr val="black"/>
+                </a:solidFill>
+                <a:cs typeface="Calibri" panose="020F0502020204030204" pitchFamily="34" charset="0"/>
+              </a:rPr>
+              <a:t>À medida que as equipes desenvolvem, é comum que várias versões do mesmo software sejam implementadas em locais diferentes</a:t>
+            </a:r>
+          </a:p>
+          <a:p>
+            <a:pPr marL="720000" indent="-571500">
+              <a:spcBef>
+                <a:spcPts val="600"/>
+              </a:spcBef>
+              <a:buFont typeface="Arial" panose="020B0604020202020204" pitchFamily="34" charset="0"/>
+              <a:buChar char="•"/>
+            </a:pPr>
+            <a:r>
+              <a:rPr lang="pt-BR" sz="2400">
+                <a:solidFill>
+                  <a:prstClr val="black"/>
+                </a:solidFill>
+                <a:cs typeface="Calibri" panose="020F0502020204030204" pitchFamily="34" charset="0"/>
+              </a:rPr>
+              <a:t>Permite que várias pessoas trabalhem em um mesmo projeto</a:t>
+            </a:r>
+          </a:p>
+        </p:txBody>
+      </p:sp>
+    </p:spTree>
+    <p:extLst>
+      <p:ext uri="{BB962C8B-B14F-4D97-AF65-F5344CB8AC3E}">
+        <p14:creationId xmlns:p14="http://schemas.microsoft.com/office/powerpoint/2010/main" val="2936546589"/>
+      </p:ext>
+    </p:extLst>
+  </p:cSld>
+  <p:clrMapOvr>
+    <a:masterClrMapping/>
+  </p:clrMapOvr>
+</p:sld>
+</file>
+
+<file path=ppt/slides/slide4.xml><?xml version="1.0" encoding="utf-8"?>
+<p:sld xmlns:a="http://schemas.openxmlformats.org/drawingml/2006/main" xmlns:r="http://schemas.openxmlformats.org/officeDocument/2006/relationships" xmlns:p="http://schemas.openxmlformats.org/presentationml/2006/main">
+  <p:cSld>
+    <p:spTree>
+      <p:nvGrpSpPr>
+        <p:cNvPr id="1" name="">
+          <a:extLst>
+            <a:ext uri="{FF2B5EF4-FFF2-40B4-BE49-F238E27FC236}">
+              <a16:creationId xmlns:a16="http://schemas.microsoft.com/office/drawing/2014/main" id="{980926DB-21BD-3FEC-D1FF-B242CC4DC959}"/>
+            </a:ext>
+          </a:extLst>
+        </p:cNvPr>
+        <p:cNvGrpSpPr/>
+        <p:nvPr/>
+      </p:nvGrpSpPr>
+      <p:grpSpPr>
+        <a:xfrm>
+          <a:off x="0" y="0"/>
+          <a:ext cx="0" cy="0"/>
+          <a:chOff x="0" y="0"/>
+          <a:chExt cx="0" cy="0"/>
+        </a:xfrm>
+      </p:grpSpPr>
+      <p:sp>
+        <p:nvSpPr>
+          <p:cNvPr id="9" name="Título 1">
+            <a:extLst>
+              <a:ext uri="{FF2B5EF4-FFF2-40B4-BE49-F238E27FC236}">
+                <a16:creationId xmlns:a16="http://schemas.microsoft.com/office/drawing/2014/main" id="{0587370A-7777-D730-ED41-CD5B95B79D9F}"/>
+              </a:ext>
+            </a:extLst>
+          </p:cNvPr>
+          <p:cNvSpPr txBox="1">
+            <a:spLocks/>
+          </p:cNvSpPr>
+          <p:nvPr/>
+        </p:nvSpPr>
+        <p:spPr>
+          <a:xfrm>
+            <a:off x="3048000" y="209913"/>
+            <a:ext cx="6096000" cy="535531"/>
+          </a:xfrm>
+          <a:prstGeom prst="rect">
+            <a:avLst/>
+          </a:prstGeom>
+        </p:spPr>
+        <p:txBody>
+          <a:bodyPr vert="horz" wrap="square" lIns="91440" tIns="45720" rIns="91440" bIns="45720" rtlCol="0" anchor="ctr">
+            <a:spAutoFit/>
+          </a:bodyPr>
+          <a:lstStyle>
+            <a:lvl1pPr algn="l" defTabSz="914400" rtl="0" eaLnBrk="1" latinLnBrk="0" hangingPunct="1">
+              <a:lnSpc>
+                <a:spcPct val="90000"/>
+              </a:lnSpc>
+              <a:spcBef>
+                <a:spcPct val="0"/>
+              </a:spcBef>
+              <a:buNone/>
+              <a:defRPr sz="4400" b="1" kern="1200">
+                <a:solidFill>
+                  <a:srgbClr val="0070C0"/>
+                </a:solidFill>
+                <a:latin typeface="Century Gothic" panose="020B0502020202020204" pitchFamily="34" charset="0"/>
+                <a:ea typeface="+mj-ea"/>
+                <a:cs typeface="+mj-cs"/>
+              </a:defRPr>
+            </a:lvl1pPr>
+          </a:lstStyle>
+          <a:p>
+            <a:pPr algn="ctr"/>
+            <a:r>
+              <a:rPr lang="pt-BR" sz="3200">
+                <a:latin typeface="Calibri" panose="020F0502020204030204" pitchFamily="34" charset="0"/>
+                <a:cs typeface="Calibri" panose="020F0502020204030204" pitchFamily="34" charset="0"/>
+              </a:rPr>
+              <a:t>Ciclo do Software e Versionamento</a:t>
+            </a:r>
+          </a:p>
+        </p:txBody>
+      </p:sp>
+      <p:sp>
+        <p:nvSpPr>
+          <p:cNvPr id="10" name="Título 1">
+            <a:extLst>
+              <a:ext uri="{FF2B5EF4-FFF2-40B4-BE49-F238E27FC236}">
+                <a16:creationId xmlns:a16="http://schemas.microsoft.com/office/drawing/2014/main" id="{D897D655-5EFE-CE4E-50CB-CF8B1230AF52}"/>
+              </a:ext>
+            </a:extLst>
+          </p:cNvPr>
+          <p:cNvSpPr txBox="1">
+            <a:spLocks/>
+          </p:cNvSpPr>
+          <p:nvPr/>
+        </p:nvSpPr>
+        <p:spPr>
+          <a:xfrm>
+            <a:off x="691708" y="1309091"/>
+            <a:ext cx="1118431" cy="424732"/>
+          </a:xfrm>
+          <a:prstGeom prst="rect">
+            <a:avLst/>
+          </a:prstGeom>
+        </p:spPr>
+        <p:txBody>
+          <a:bodyPr vert="horz" wrap="square" lIns="91440" tIns="45720" rIns="91440" bIns="45720" rtlCol="0" anchor="ctr">
+            <a:spAutoFit/>
+          </a:bodyPr>
+          <a:lstStyle>
+            <a:lvl1pPr algn="l" defTabSz="914400" rtl="0" eaLnBrk="1" latinLnBrk="0" hangingPunct="1">
+              <a:lnSpc>
+                <a:spcPct val="90000"/>
+              </a:lnSpc>
+              <a:spcBef>
+                <a:spcPct val="0"/>
+              </a:spcBef>
+              <a:buNone/>
+              <a:defRPr sz="4400" b="1" kern="1200">
+                <a:solidFill>
+                  <a:srgbClr val="0070C0"/>
+                </a:solidFill>
+                <a:latin typeface="Century Gothic" panose="020B0502020202020204" pitchFamily="34" charset="0"/>
+                <a:ea typeface="+mj-ea"/>
+                <a:cs typeface="+mj-cs"/>
+              </a:defRPr>
+            </a:lvl1pPr>
+          </a:lstStyle>
+          <a:p>
+            <a:pPr algn="ctr"/>
+            <a:r>
+              <a:rPr lang="pt-BR" sz="2400">
+                <a:latin typeface="Calibri" panose="020F0502020204030204" pitchFamily="34" charset="0"/>
+                <a:cs typeface="Calibri" panose="020F0502020204030204" pitchFamily="34" charset="0"/>
+              </a:rPr>
+              <a:t>GitHub</a:t>
+            </a:r>
+          </a:p>
+        </p:txBody>
+      </p:sp>
+      <p:sp>
+        <p:nvSpPr>
+          <p:cNvPr id="11" name="TextBox 10">
+            <a:extLst>
+              <a:ext uri="{FF2B5EF4-FFF2-40B4-BE49-F238E27FC236}">
+                <a16:creationId xmlns:a16="http://schemas.microsoft.com/office/drawing/2014/main" id="{A2394A74-927F-7CA2-4764-E14E6D07A04F}"/>
+              </a:ext>
+            </a:extLst>
+          </p:cNvPr>
+          <p:cNvSpPr txBox="1"/>
+          <p:nvPr/>
+        </p:nvSpPr>
+        <p:spPr>
+          <a:xfrm>
+            <a:off x="-1" y="2055426"/>
+            <a:ext cx="9615949" cy="907941"/>
+          </a:xfrm>
+          <a:prstGeom prst="rect">
+            <a:avLst/>
+          </a:prstGeom>
+          <a:noFill/>
+        </p:spPr>
+        <p:txBody>
+          <a:bodyPr wrap="square" rtlCol="0">
+            <a:spAutoFit/>
+          </a:bodyPr>
+          <a:lstStyle/>
+          <a:p>
+            <a:pPr marL="720000" indent="-571500">
+              <a:spcBef>
+                <a:spcPts val="600"/>
+              </a:spcBef>
+              <a:buFont typeface="Arial" panose="020B0604020202020204" pitchFamily="34" charset="0"/>
+              <a:buChar char="•"/>
+            </a:pPr>
+            <a:r>
+              <a:rPr lang="pt-BR" sz="2400" dirty="0">
+                <a:solidFill>
+                  <a:prstClr val="black"/>
+                </a:solidFill>
+                <a:cs typeface="Calibri" panose="020F0502020204030204" pitchFamily="34" charset="0"/>
+              </a:rPr>
+              <a:t>Ferramenta</a:t>
+            </a:r>
+            <a:r>
+              <a:rPr lang="pt-BR" sz="2400">
+                <a:solidFill>
+                  <a:prstClr val="black"/>
+                </a:solidFill>
+                <a:cs typeface="Calibri" panose="020F0502020204030204" pitchFamily="34" charset="0"/>
+              </a:rPr>
+              <a:t> de versionamento mais usada no mundo</a:t>
+            </a:r>
+          </a:p>
+          <a:p>
+            <a:pPr marL="720000" indent="-571500">
+              <a:spcBef>
+                <a:spcPts val="600"/>
+              </a:spcBef>
+              <a:buFont typeface="Arial" panose="020B0604020202020204" pitchFamily="34" charset="0"/>
+              <a:buChar char="•"/>
+            </a:pPr>
+            <a:r>
+              <a:rPr lang="pt-BR" sz="2400">
+                <a:solidFill>
+                  <a:prstClr val="black"/>
+                </a:solidFill>
+                <a:cs typeface="Calibri" panose="020F0502020204030204" pitchFamily="34" charset="0"/>
+              </a:rPr>
+              <a:t>Tem concorrentes como o </a:t>
+            </a:r>
+            <a:r>
+              <a:rPr lang="pt-BR" sz="2400" err="1">
+                <a:solidFill>
+                  <a:prstClr val="black"/>
+                </a:solidFill>
+                <a:cs typeface="Calibri" panose="020F0502020204030204" pitchFamily="34" charset="0"/>
+              </a:rPr>
+              <a:t>GitLab</a:t>
+            </a:r>
+            <a:r>
+              <a:rPr lang="pt-BR" sz="2400">
+                <a:solidFill>
+                  <a:prstClr val="black"/>
+                </a:solidFill>
+                <a:cs typeface="Calibri" panose="020F0502020204030204" pitchFamily="34" charset="0"/>
+              </a:rPr>
+              <a:t>, </a:t>
+            </a:r>
+            <a:r>
+              <a:rPr lang="pt-BR" sz="2400" err="1">
+                <a:solidFill>
+                  <a:prstClr val="black"/>
+                </a:solidFill>
+                <a:cs typeface="Calibri" panose="020F0502020204030204" pitchFamily="34" charset="0"/>
+              </a:rPr>
+              <a:t>Atlassian</a:t>
+            </a:r>
+            <a:r>
+              <a:rPr lang="pt-BR" sz="2400">
+                <a:solidFill>
+                  <a:prstClr val="black"/>
+                </a:solidFill>
+                <a:cs typeface="Calibri" panose="020F0502020204030204" pitchFamily="34" charset="0"/>
+              </a:rPr>
+              <a:t>, </a:t>
+            </a:r>
+            <a:r>
+              <a:rPr lang="pt-BR" sz="2400" err="1">
+                <a:solidFill>
+                  <a:prstClr val="black"/>
+                </a:solidFill>
+                <a:cs typeface="Calibri" panose="020F0502020204030204" pitchFamily="34" charset="0"/>
+              </a:rPr>
+              <a:t>BitBucket</a:t>
+            </a:r>
+            <a:r>
+              <a:rPr lang="pt-BR" sz="2400">
+                <a:solidFill>
+                  <a:prstClr val="black"/>
+                </a:solidFill>
+                <a:cs typeface="Calibri" panose="020F0502020204030204" pitchFamily="34" charset="0"/>
+              </a:rPr>
+              <a:t> e vários outros</a:t>
+            </a:r>
+          </a:p>
+        </p:txBody>
+      </p:sp>
+      <p:pic>
+        <p:nvPicPr>
+          <p:cNvPr id="12" name="Picture 11">
+            <a:extLst>
+              <a:ext uri="{FF2B5EF4-FFF2-40B4-BE49-F238E27FC236}">
+                <a16:creationId xmlns:a16="http://schemas.microsoft.com/office/drawing/2014/main" id="{6FBFBD75-4E43-67C6-D046-6673BDD8F3F9}"/>
+              </a:ext>
+            </a:extLst>
+          </p:cNvPr>
+          <p:cNvPicPr>
+            <a:picLocks noChangeAspect="1"/>
+          </p:cNvPicPr>
+          <p:nvPr/>
+        </p:nvPicPr>
+        <p:blipFill>
+          <a:blip r:embed="rId3"/>
+          <a:srcRect l="58789" t="5133" r="4976" b="9396"/>
+          <a:stretch/>
+        </p:blipFill>
+        <p:spPr>
+          <a:xfrm>
+            <a:off x="1943612" y="1168334"/>
+            <a:ext cx="675529" cy="677533"/>
+          </a:xfrm>
+          <a:prstGeom prst="rect">
+            <a:avLst/>
+          </a:prstGeom>
+        </p:spPr>
+      </p:pic>
+      <p:pic>
+        <p:nvPicPr>
+          <p:cNvPr id="13" name="Online Media 3" title="Como personalizar o seu perfil no Github (Readme)">
+            <a:hlinkClick r:id="" action="ppaction://media"/>
+            <a:extLst>
+              <a:ext uri="{FF2B5EF4-FFF2-40B4-BE49-F238E27FC236}">
+                <a16:creationId xmlns:a16="http://schemas.microsoft.com/office/drawing/2014/main" id="{6FA9B91D-D0DC-5851-2BC2-A9482CB1776B}"/>
+              </a:ext>
+            </a:extLst>
+          </p:cNvPr>
+          <p:cNvPicPr>
+            <a:picLocks noRot="1" noChangeAspect="1"/>
+          </p:cNvPicPr>
+          <p:nvPr>
+            <a:videoFile r:link="rId1"/>
+          </p:nvPr>
+        </p:nvPicPr>
+        <p:blipFill>
+          <a:blip r:embed="rId4"/>
+          <a:stretch>
+            <a:fillRect/>
+          </a:stretch>
+        </p:blipFill>
+        <p:spPr>
+          <a:xfrm>
+            <a:off x="7520429" y="4066767"/>
+            <a:ext cx="3402650" cy="1913991"/>
+          </a:xfrm>
+          <a:prstGeom prst="rect">
+            <a:avLst/>
+          </a:prstGeom>
+        </p:spPr>
+      </p:pic>
+      <p:sp>
+        <p:nvSpPr>
+          <p:cNvPr id="14" name="TextBox 13">
+            <a:extLst>
+              <a:ext uri="{FF2B5EF4-FFF2-40B4-BE49-F238E27FC236}">
+                <a16:creationId xmlns:a16="http://schemas.microsoft.com/office/drawing/2014/main" id="{0F96A1CD-AD77-526C-9FDD-4CAD85313BA2}"/>
+              </a:ext>
+            </a:extLst>
+          </p:cNvPr>
+          <p:cNvSpPr txBox="1"/>
+          <p:nvPr/>
+        </p:nvSpPr>
+        <p:spPr>
+          <a:xfrm>
+            <a:off x="1" y="3686483"/>
+            <a:ext cx="5094514" cy="1354217"/>
+          </a:xfrm>
+          <a:prstGeom prst="rect">
+            <a:avLst/>
+          </a:prstGeom>
+          <a:noFill/>
+        </p:spPr>
+        <p:txBody>
+          <a:bodyPr wrap="square" rtlCol="0">
+            <a:spAutoFit/>
+          </a:bodyPr>
+          <a:lstStyle/>
+          <a:p>
+            <a:pPr marL="148500">
+              <a:spcBef>
+                <a:spcPts val="600"/>
+              </a:spcBef>
+            </a:pPr>
+            <a:r>
+              <a:rPr lang="pt-BR" sz="2400" b="1" dirty="0">
+                <a:solidFill>
+                  <a:prstClr val="black"/>
+                </a:solidFill>
+                <a:cs typeface="Calibri" panose="020F0502020204030204" pitchFamily="34" charset="0"/>
+              </a:rPr>
+              <a:t>Agora:</a:t>
+            </a:r>
+          </a:p>
+          <a:p>
+            <a:pPr marL="720000" indent="-571500">
+              <a:spcBef>
+                <a:spcPts val="600"/>
+              </a:spcBef>
+              <a:buFont typeface="Arial" panose="020B0604020202020204" pitchFamily="34" charset="0"/>
+              <a:buChar char="•"/>
+            </a:pPr>
+            <a:r>
+              <a:rPr lang="pt-BR" sz="2400" dirty="0">
+                <a:solidFill>
+                  <a:prstClr val="black"/>
+                </a:solidFill>
+                <a:cs typeface="Calibri" panose="020F0502020204030204" pitchFamily="34" charset="0"/>
+              </a:rPr>
+              <a:t>Vamos criar uma conta no GitHub</a:t>
+            </a:r>
+          </a:p>
+          <a:p>
+            <a:pPr marL="720000" indent="-571500">
+              <a:spcBef>
+                <a:spcPts val="600"/>
+              </a:spcBef>
+              <a:buFont typeface="Arial" panose="020B0604020202020204" pitchFamily="34" charset="0"/>
+              <a:buChar char="•"/>
+            </a:pPr>
+            <a:r>
+              <a:rPr lang="pt-BR" sz="2400" dirty="0">
+                <a:solidFill>
+                  <a:prstClr val="black"/>
+                </a:solidFill>
+                <a:cs typeface="Calibri" panose="020F0502020204030204" pitchFamily="34" charset="0"/>
+              </a:rPr>
+              <a:t>Personalizar o nosso perfil</a:t>
+            </a:r>
+          </a:p>
+        </p:txBody>
+      </p:sp>
+      <p:sp>
+        <p:nvSpPr>
+          <p:cNvPr id="15" name="TextBox 14">
+            <a:extLst>
+              <a:ext uri="{FF2B5EF4-FFF2-40B4-BE49-F238E27FC236}">
+                <a16:creationId xmlns:a16="http://schemas.microsoft.com/office/drawing/2014/main" id="{04BDCF19-3891-EED9-FAF0-151455C27EFE}"/>
+              </a:ext>
+            </a:extLst>
+          </p:cNvPr>
+          <p:cNvSpPr txBox="1"/>
+          <p:nvPr/>
+        </p:nvSpPr>
+        <p:spPr>
+          <a:xfrm>
+            <a:off x="7563281" y="3530353"/>
+            <a:ext cx="3316946" cy="461665"/>
+          </a:xfrm>
+          <a:prstGeom prst="rect">
+            <a:avLst/>
+          </a:prstGeom>
+          <a:noFill/>
+        </p:spPr>
+        <p:txBody>
+          <a:bodyPr wrap="square" rtlCol="0">
+            <a:spAutoFit/>
+          </a:bodyPr>
+          <a:lstStyle/>
+          <a:p>
+            <a:pPr>
+              <a:spcBef>
+                <a:spcPts val="600"/>
+              </a:spcBef>
+            </a:pPr>
+            <a:r>
+              <a:rPr lang="pt-BR" sz="2400" dirty="0">
+                <a:solidFill>
+                  <a:prstClr val="black"/>
+                </a:solidFill>
+                <a:cs typeface="Calibri" panose="020F0502020204030204" pitchFamily="34" charset="0"/>
+                <a:hlinkClick r:id="rId5"/>
+              </a:rPr>
+              <a:t>Vídeo</a:t>
+            </a:r>
+            <a:r>
+              <a:rPr lang="pt-BR" sz="2400" dirty="0">
+                <a:solidFill>
+                  <a:prstClr val="black"/>
+                </a:solidFill>
+                <a:cs typeface="Calibri" panose="020F0502020204030204" pitchFamily="34" charset="0"/>
+              </a:rPr>
+              <a:t> que eu recomendo</a:t>
+            </a:r>
+          </a:p>
+        </p:txBody>
+      </p:sp>
+    </p:spTree>
+    <p:extLst>
+      <p:ext uri="{BB962C8B-B14F-4D97-AF65-F5344CB8AC3E}">
+        <p14:creationId xmlns:p14="http://schemas.microsoft.com/office/powerpoint/2010/main" val="539353476"/>
+      </p:ext>
+    </p:extLst>
+  </p:cSld>
+  <p:clrMapOvr>
+    <a:masterClrMapping/>
+  </p:clrMapOvr>
+  <p:timing>
+    <p:tnLst>
+      <p:par>
+        <p:cTn id="1" dur="indefinite" restart="never" nodeType="tmRoot">
+          <p:childTnLst>
+            <p:seq concurrent="1" nextAc="seek">
+              <p:cTn id="2" dur="indefinite" nodeType="mainSeq">
+                <p:childTnLst>
+                  <p:par>
+                    <p:cTn id="3" fill="hold">
+                      <p:stCondLst>
+                        <p:cond delay="indefinite"/>
+                      </p:stCondLst>
+                      <p:childTnLst>
+                        <p:par>
+                          <p:cTn id="4" fill="hold">
+                            <p:stCondLst>
+                              <p:cond delay="0"/>
+                            </p:stCondLst>
+                            <p:childTnLst>
+                              <p:par>
+                                <p:cTn id="5" presetID="1" presetClass="entr" presetSubtype="0" fill="hold" grpId="0" nodeType="clickEffect">
+                                  <p:stCondLst>
+                                    <p:cond delay="0"/>
+                                  </p:stCondLst>
+                                  <p:childTnLst>
+                                    <p:set>
+                                      <p:cBhvr>
+                                        <p:cTn id="6" dur="1" fill="hold">
+                                          <p:stCondLst>
+                                            <p:cond delay="0"/>
+                                          </p:stCondLst>
+                                        </p:cTn>
+                                        <p:tgtEl>
+                                          <p:spTgt spid="14"/>
                                         </p:tgtEl>
                                         <p:attrNameLst>
                                           <p:attrName>style.visibility</p:attrName>
@@ -13278,7 +12929,7 @@
                                 </p:cTn>
                               </p:par>
                               <p:par>
-                                <p:cTn id="7" presetID="1" presetClass="entr" presetSubtype="0" fill="hold" grpId="0" nodeType="withEffect">
+                                <p:cTn id="7" presetID="1" presetClass="entr" presetSubtype="0" fill="hold" nodeType="withEffect">
                                   <p:stCondLst>
                                     <p:cond delay="0"/>
                                   </p:stCondLst>
@@ -13291,7 +12942,7 @@
                                           </p:stCondLst>
                                         </p:cTn>
                                         <p:tgtEl>
-                                          <p:spTgt spid="21"/>
+                                          <p:spTgt spid="13"/>
                                         </p:tgtEl>
                                         <p:attrNameLst>
                                           <p:attrName>style.visibility</p:attrName>
@@ -13305,7 +12956,7 @@
                                 </p:cTn>
                               </p:par>
                               <p:par>
-                                <p:cTn id="9" presetID="1" presetClass="entr" presetSubtype="0" fill="hold" nodeType="withEffect">
+                                <p:cTn id="9" presetID="1" presetClass="entr" presetSubtype="0" fill="hold" grpId="0" nodeType="withEffect">
                                   <p:stCondLst>
                                     <p:cond delay="0"/>
                                   </p:stCondLst>
@@ -13318,7 +12969,7 @@
                                           </p:stCondLst>
                                         </p:cTn>
                                         <p:tgtEl>
-                                          <p:spTgt spid="20"/>
+                                          <p:spTgt spid="15"/>
                                         </p:tgtEl>
                                         <p:attrNameLst>
                                           <p:attrName>style.visibility</p:attrName>
@@ -13362,7 +13013,7 @@
                   </p:stCondLst>
                 </p:cTn>
                 <p:tgtEl>
-                  <p:spTgt spid="20"/>
+                  <p:spTgt spid="13"/>
                 </p:tgtEl>
               </p:cMediaNode>
             </p:video>
@@ -13371,8 +13022,8 @@
       </p:par>
     </p:tnLst>
     <p:bldLst>
-      <p:bldP spid="21" grpId="0"/>
-      <p:bldP spid="22" grpId="0"/>
+      <p:bldP spid="14" grpId="0"/>
+      <p:bldP spid="15" grpId="0"/>
     </p:bldLst>
   </p:timing>
 </p:sld>
@@ -13386,7 +13037,7 @@
         <p:cNvPr id="1" name="">
           <a:extLst>
             <a:ext uri="{FF2B5EF4-FFF2-40B4-BE49-F238E27FC236}">
-              <a16:creationId xmlns:a16="http://schemas.microsoft.com/office/drawing/2014/main" id="{979A0708-B08B-E77B-C8C9-E5E48D527D10}"/>
+              <a16:creationId xmlns:a16="http://schemas.microsoft.com/office/drawing/2014/main" id="{D699F3B2-23D2-C351-9826-ACCB68637CF0}"/>
             </a:ext>
           </a:extLst>
         </p:cNvPr>
@@ -13401,59 +13052,12 @@
           <a:chExt cx="0" cy="0"/>
         </a:xfrm>
       </p:grpSpPr>
-      <p:pic>
-        <p:nvPicPr>
-          <p:cNvPr id="1026" name="Picture 2">
-            <a:extLst>
-              <a:ext uri="{FF2B5EF4-FFF2-40B4-BE49-F238E27FC236}">
-                <a16:creationId xmlns:a16="http://schemas.microsoft.com/office/drawing/2014/main" id="{6FB6A1CB-3CFD-AD15-76F8-4068AF491368}"/>
-              </a:ext>
-            </a:extLst>
-          </p:cNvPr>
-          <p:cNvPicPr>
-            <a:picLocks noChangeAspect="1" noChangeArrowheads="1"/>
-          </p:cNvPicPr>
-          <p:nvPr/>
-        </p:nvPicPr>
-        <p:blipFill>
-          <a:blip r:embed="rId2">
-            <a:extLst>
-              <a:ext uri="{28A0092B-C50C-407E-A947-70E740481C1C}">
-                <a14:useLocalDpi xmlns:a14="http://schemas.microsoft.com/office/drawing/2010/main" val="0"/>
-              </a:ext>
-            </a:extLst>
-          </a:blip>
-          <a:srcRect/>
-          <a:stretch>
-            <a:fillRect/>
-          </a:stretch>
-        </p:blipFill>
-        <p:spPr bwMode="auto">
-          <a:xfrm>
-            <a:off x="10899648" y="6374980"/>
-            <a:ext cx="1149447" cy="295025"/>
-          </a:xfrm>
-          <a:prstGeom prst="rect">
-            <a:avLst/>
-          </a:prstGeom>
-          <a:noFill/>
-          <a:extLst>
-            <a:ext uri="{909E8E84-426E-40DD-AFC4-6F175D3DCCD1}">
-              <a14:hiddenFill xmlns:a14="http://schemas.microsoft.com/office/drawing/2010/main">
-                <a:solidFill>
-                  <a:srgbClr val="FFFFFF"/>
-                </a:solidFill>
-              </a14:hiddenFill>
-            </a:ext>
-          </a:extLst>
-        </p:spPr>
-      </p:pic>
-      <p:sp>
-        <p:nvSpPr>
-          <p:cNvPr id="10" name="Título 1">
-            <a:extLst>
-              <a:ext uri="{FF2B5EF4-FFF2-40B4-BE49-F238E27FC236}">
-                <a16:creationId xmlns:a16="http://schemas.microsoft.com/office/drawing/2014/main" id="{0284337A-9227-D4E7-CEEC-24871DEA2B16}"/>
+      <p:sp>
+        <p:nvSpPr>
+          <p:cNvPr id="6" name="Título 1">
+            <a:extLst>
+              <a:ext uri="{FF2B5EF4-FFF2-40B4-BE49-F238E27FC236}">
+                <a16:creationId xmlns:a16="http://schemas.microsoft.com/office/drawing/2014/main" id="{4C4104D0-A505-DA5C-48C3-90B28C56F4CC}"/>
               </a:ext>
             </a:extLst>
           </p:cNvPr>
@@ -13508,10 +13112,10 @@
       </p:sp>
       <p:sp>
         <p:nvSpPr>
-          <p:cNvPr id="11" name="Título 1">
-            <a:extLst>
-              <a:ext uri="{FF2B5EF4-FFF2-40B4-BE49-F238E27FC236}">
-                <a16:creationId xmlns:a16="http://schemas.microsoft.com/office/drawing/2014/main" id="{F4EC3748-9402-2550-AF57-FEB4C23F1239}"/>
+          <p:cNvPr id="7" name="Título 1">
+            <a:extLst>
+              <a:ext uri="{FF2B5EF4-FFF2-40B4-BE49-F238E27FC236}">
+                <a16:creationId xmlns:a16="http://schemas.microsoft.com/office/drawing/2014/main" id="{81E847A4-5E7D-9CF6-6D3C-8C989AE9BED1}"/>
               </a:ext>
             </a:extLst>
           </p:cNvPr>
@@ -13580,10 +13184,10 @@
       </p:sp>
       <p:sp>
         <p:nvSpPr>
-          <p:cNvPr id="12" name="TextBox 11">
-            <a:extLst>
-              <a:ext uri="{FF2B5EF4-FFF2-40B4-BE49-F238E27FC236}">
-                <a16:creationId xmlns:a16="http://schemas.microsoft.com/office/drawing/2014/main" id="{D59DF63B-BED6-0366-6005-EEBDC948AB77}"/>
+          <p:cNvPr id="8" name="TextBox 7">
+            <a:extLst>
+              <a:ext uri="{FF2B5EF4-FFF2-40B4-BE49-F238E27FC236}">
+                <a16:creationId xmlns:a16="http://schemas.microsoft.com/office/drawing/2014/main" id="{EB749E73-51B2-4B8D-9AEB-4EDE195D0BA9}"/>
               </a:ext>
             </a:extLst>
           </p:cNvPr>
@@ -13618,7 +13222,6 @@
                 <a:solidFill>
                   <a:prstClr val="black"/>
                 </a:solidFill>
-                <a:latin typeface="Calibri" panose="020F0502020204030204" pitchFamily="34" charset="0"/>
                 <a:cs typeface="Calibri" panose="020F0502020204030204" pitchFamily="34" charset="0"/>
               </a:rPr>
               <a:t>Local onde são armazenados arquivos e pastas relacionados a um projeto específico</a:t>
@@ -13637,7 +13240,6 @@
                 <a:solidFill>
                   <a:prstClr val="black"/>
                 </a:solidFill>
-                <a:latin typeface="Calibri" panose="020F0502020204030204" pitchFamily="34" charset="0"/>
                 <a:cs typeface="Calibri" panose="020F0502020204030204" pitchFamily="34" charset="0"/>
               </a:rPr>
               <a:t>Armazena o histórico completo do projeto, incluindo </a:t>
@@ -13647,7 +13249,6 @@
                 <a:solidFill>
                   <a:prstClr val="black"/>
                 </a:solidFill>
-                <a:latin typeface="Calibri" panose="020F0502020204030204" pitchFamily="34" charset="0"/>
                 <a:cs typeface="Calibri" panose="020F0502020204030204" pitchFamily="34" charset="0"/>
               </a:rPr>
               <a:t>commits</a:t>
@@ -13657,7 +13258,6 @@
                 <a:solidFill>
                   <a:prstClr val="black"/>
                 </a:solidFill>
-                <a:latin typeface="Calibri" panose="020F0502020204030204" pitchFamily="34" charset="0"/>
                 <a:cs typeface="Calibri" panose="020F0502020204030204" pitchFamily="34" charset="0"/>
               </a:rPr>
               <a:t>, </a:t>
@@ -13667,7 +13267,6 @@
                 <a:solidFill>
                   <a:prstClr val="black"/>
                 </a:solidFill>
-                <a:latin typeface="Calibri" panose="020F0502020204030204" pitchFamily="34" charset="0"/>
                 <a:cs typeface="Calibri" panose="020F0502020204030204" pitchFamily="34" charset="0"/>
               </a:rPr>
               <a:t>branches</a:t>
@@ -13677,7 +13276,6 @@
                 <a:solidFill>
                   <a:prstClr val="black"/>
                 </a:solidFill>
-                <a:latin typeface="Calibri" panose="020F0502020204030204" pitchFamily="34" charset="0"/>
                 <a:cs typeface="Calibri" panose="020F0502020204030204" pitchFamily="34" charset="0"/>
               </a:rPr>
               <a:t>,</a:t>
@@ -13687,7 +13285,6 @@
                 <a:solidFill>
                   <a:prstClr val="black"/>
                 </a:solidFill>
-                <a:latin typeface="Calibri" panose="020F0502020204030204" pitchFamily="34" charset="0"/>
                 <a:cs typeface="Calibri" panose="020F0502020204030204" pitchFamily="34" charset="0"/>
               </a:rPr>
               <a:t> </a:t>
@@ -13697,7 +13294,6 @@
                 <a:solidFill>
                   <a:prstClr val="black"/>
                 </a:solidFill>
-                <a:latin typeface="Calibri" panose="020F0502020204030204" pitchFamily="34" charset="0"/>
                 <a:cs typeface="Calibri" panose="020F0502020204030204" pitchFamily="34" charset="0"/>
               </a:rPr>
               <a:t>pull</a:t>
@@ -13707,7 +13303,6 @@
                 <a:solidFill>
                   <a:prstClr val="black"/>
                 </a:solidFill>
-                <a:latin typeface="Calibri" panose="020F0502020204030204" pitchFamily="34" charset="0"/>
                 <a:cs typeface="Calibri" panose="020F0502020204030204" pitchFamily="34" charset="0"/>
               </a:rPr>
               <a:t> </a:t>
@@ -13717,7 +13312,6 @@
                 <a:solidFill>
                   <a:prstClr val="black"/>
                 </a:solidFill>
-                <a:latin typeface="Calibri" panose="020F0502020204030204" pitchFamily="34" charset="0"/>
                 <a:cs typeface="Calibri" panose="020F0502020204030204" pitchFamily="34" charset="0"/>
               </a:rPr>
               <a:t>requests</a:t>
@@ -13727,7 +13321,6 @@
                 <a:solidFill>
                   <a:prstClr val="black"/>
                 </a:solidFill>
-                <a:latin typeface="Calibri" panose="020F0502020204030204" pitchFamily="34" charset="0"/>
                 <a:cs typeface="Calibri" panose="020F0502020204030204" pitchFamily="34" charset="0"/>
               </a:rPr>
               <a:t> </a:t>
@@ -13737,7 +13330,6 @@
                 <a:solidFill>
                   <a:prstClr val="black"/>
                 </a:solidFill>
-                <a:latin typeface="Calibri" panose="020F0502020204030204" pitchFamily="34" charset="0"/>
                 <a:cs typeface="Calibri" panose="020F0502020204030204" pitchFamily="34" charset="0"/>
               </a:rPr>
               <a:t>e</a:t>
@@ -13747,7 +13339,6 @@
                 <a:solidFill>
                   <a:prstClr val="black"/>
                 </a:solidFill>
-                <a:latin typeface="Calibri" panose="020F0502020204030204" pitchFamily="34" charset="0"/>
                 <a:cs typeface="Calibri" panose="020F0502020204030204" pitchFamily="34" charset="0"/>
               </a:rPr>
               <a:t> merges</a:t>
@@ -13766,7 +13357,6 @@
                 <a:solidFill>
                   <a:prstClr val="black"/>
                 </a:solidFill>
-                <a:latin typeface="Calibri" panose="020F0502020204030204" pitchFamily="34" charset="0"/>
                 <a:cs typeface="Calibri" panose="020F0502020204030204" pitchFamily="34" charset="0"/>
               </a:rPr>
               <a:t>Permite reverter para versões anteriores</a:t>
@@ -13785,7 +13375,6 @@
                 <a:solidFill>
                   <a:prstClr val="black"/>
                 </a:solidFill>
-                <a:latin typeface="Calibri" panose="020F0502020204030204" pitchFamily="34" charset="0"/>
                 <a:cs typeface="Calibri" panose="020F0502020204030204" pitchFamily="34" charset="0"/>
               </a:rPr>
               <a:t>Não deve ser salvo arquivos de build (módulos, </a:t>
@@ -13795,7 +13384,6 @@
                 <a:solidFill>
                   <a:prstClr val="black"/>
                 </a:solidFill>
-                <a:latin typeface="Calibri" panose="020F0502020204030204" pitchFamily="34" charset="0"/>
                 <a:cs typeface="Calibri" panose="020F0502020204030204" pitchFamily="34" charset="0"/>
               </a:rPr>
               <a:t>classfiles</a:t>
@@ -13805,7 +13393,6 @@
                 <a:solidFill>
                   <a:prstClr val="black"/>
                 </a:solidFill>
-                <a:latin typeface="Calibri" panose="020F0502020204030204" pitchFamily="34" charset="0"/>
                 <a:cs typeface="Calibri" panose="020F0502020204030204" pitchFamily="34" charset="0"/>
               </a:rPr>
               <a:t>, </a:t>
@@ -13815,7 +13402,6 @@
                 <a:solidFill>
                   <a:prstClr val="black"/>
                 </a:solidFill>
-                <a:latin typeface="Calibri" panose="020F0502020204030204" pitchFamily="34" charset="0"/>
                 <a:cs typeface="Calibri" panose="020F0502020204030204" pitchFamily="34" charset="0"/>
               </a:rPr>
               <a:t>jars</a:t>
@@ -13825,7 +13411,6 @@
                 <a:solidFill>
                   <a:prstClr val="black"/>
                 </a:solidFill>
-                <a:latin typeface="Calibri" panose="020F0502020204030204" pitchFamily="34" charset="0"/>
                 <a:cs typeface="Calibri" panose="020F0502020204030204" pitchFamily="34" charset="0"/>
               </a:rPr>
               <a:t>), esses arquivos deverão ser mencionados no </a:t>
@@ -13835,7 +13420,6 @@
                 <a:solidFill>
                   <a:prstClr val="black"/>
                 </a:solidFill>
-                <a:latin typeface="Calibri" panose="020F0502020204030204" pitchFamily="34" charset="0"/>
                 <a:cs typeface="Calibri" panose="020F0502020204030204" pitchFamily="34" charset="0"/>
               </a:rPr>
               <a:t>.</a:t>
@@ -13845,7 +13429,6 @@
                 <a:solidFill>
                   <a:prstClr val="black"/>
                 </a:solidFill>
-                <a:latin typeface="Calibri" panose="020F0502020204030204" pitchFamily="34" charset="0"/>
                 <a:cs typeface="Calibri" panose="020F0502020204030204" pitchFamily="34" charset="0"/>
               </a:rPr>
               <a:t>gitignore</a:t>
@@ -13854,7 +13437,6 @@
               <a:solidFill>
                 <a:prstClr val="black"/>
               </a:solidFill>
-              <a:latin typeface="Calibri" panose="020F0502020204030204" pitchFamily="34" charset="0"/>
               <a:cs typeface="Calibri" panose="020F0502020204030204" pitchFamily="34" charset="0"/>
             </a:endParaRPr>
           </a:p>
@@ -13871,7 +13453,6 @@
                 <a:solidFill>
                   <a:prstClr val="black"/>
                 </a:solidFill>
-                <a:latin typeface="Calibri" panose="020F0502020204030204" pitchFamily="34" charset="0"/>
                 <a:cs typeface="Calibri" panose="020F0502020204030204" pitchFamily="34" charset="0"/>
               </a:rPr>
               <a:t>Segue o padrão de nomenclatura</a:t>
@@ -13881,7 +13462,6 @@
                 <a:solidFill>
                   <a:prstClr val="black"/>
                 </a:solidFill>
-                <a:latin typeface="Calibri" panose="020F0502020204030204" pitchFamily="34" charset="0"/>
                 <a:cs typeface="Calibri" panose="020F0502020204030204" pitchFamily="34" charset="0"/>
               </a:rPr>
               <a:t> kebab-case</a:t>
@@ -13891,7 +13471,6 @@
                 <a:solidFill>
                   <a:prstClr val="black"/>
                 </a:solidFill>
-                <a:latin typeface="Calibri" panose="020F0502020204030204" pitchFamily="34" charset="0"/>
                 <a:cs typeface="Calibri" panose="020F0502020204030204" pitchFamily="34" charset="0"/>
               </a:rPr>
               <a:t>:</a:t>
@@ -13910,7 +13489,6 @@
                 <a:solidFill>
                   <a:prstClr val="black"/>
                 </a:solidFill>
-                <a:latin typeface="Calibri" panose="020F0502020204030204" pitchFamily="34" charset="0"/>
                 <a:cs typeface="Calibri" panose="020F0502020204030204" pitchFamily="34" charset="0"/>
               </a:rPr>
               <a:t>Separação de palavras com hífen</a:t>
@@ -13929,7 +13507,6 @@
                 <a:solidFill>
                   <a:prstClr val="black"/>
                 </a:solidFill>
-                <a:latin typeface="Calibri" panose="020F0502020204030204" pitchFamily="34" charset="0"/>
                 <a:cs typeface="Calibri" panose="020F0502020204030204" pitchFamily="34" charset="0"/>
               </a:rPr>
               <a:t>Caracteres em minúsculo</a:t>
@@ -13948,7 +13525,6 @@
                 <a:solidFill>
                   <a:prstClr val="black"/>
                 </a:solidFill>
-                <a:latin typeface="Calibri" panose="020F0502020204030204" pitchFamily="34" charset="0"/>
                 <a:cs typeface="Calibri" panose="020F0502020204030204" pitchFamily="34" charset="0"/>
               </a:rPr>
               <a:t>Evite caracteres especiais</a:t>
@@ -13967,7 +13543,6 @@
                 <a:solidFill>
                   <a:prstClr val="black"/>
                 </a:solidFill>
-                <a:latin typeface="Calibri" panose="020F0502020204030204" pitchFamily="34" charset="0"/>
                 <a:cs typeface="Calibri" panose="020F0502020204030204" pitchFamily="34" charset="0"/>
               </a:rPr>
               <a:t>Evite começar o nome do repositório com números</a:t>
@@ -13977,10 +13552,10 @@
       </p:sp>
       <p:pic>
         <p:nvPicPr>
-          <p:cNvPr id="13" name="Picture 12" descr="Git 101: What's a Git Repository and How to Create it? | by S.J. | An Idea  (by Ingenious Piece) | Medium">
-            <a:extLst>
-              <a:ext uri="{FF2B5EF4-FFF2-40B4-BE49-F238E27FC236}">
-                <a16:creationId xmlns:a16="http://schemas.microsoft.com/office/drawing/2014/main" id="{C00D0A64-E665-4C66-21F1-9C6B7D19146D}"/>
+          <p:cNvPr id="9" name="Picture 8" descr="Git 101: What's a Git Repository and How to Create it? | by S.J. | An Idea  (by Ingenious Piece) | Medium">
+            <a:extLst>
+              <a:ext uri="{FF2B5EF4-FFF2-40B4-BE49-F238E27FC236}">
+                <a16:creationId xmlns:a16="http://schemas.microsoft.com/office/drawing/2014/main" id="{450D5847-43B2-19E9-95B3-E06706074157}"/>
               </a:ext>
             </a:extLst>
           </p:cNvPr>
@@ -13990,7 +13565,7 @@
           <p:nvPr/>
         </p:nvPicPr>
         <p:blipFill rotWithShape="1">
-          <a:blip r:embed="rId3">
+          <a:blip r:embed="rId2">
             <a:extLst>
               <a:ext uri="{28A0092B-C50C-407E-A947-70E740481C1C}">
                 <a14:useLocalDpi xmlns:a14="http://schemas.microsoft.com/office/drawing/2010/main" val="0"/>
@@ -14025,7 +13600,7 @@
     </p:spTree>
     <p:extLst>
       <p:ext uri="{BB962C8B-B14F-4D97-AF65-F5344CB8AC3E}">
-        <p14:creationId xmlns:p14="http://schemas.microsoft.com/office/powerpoint/2010/main" val="851092004"/>
+        <p14:creationId xmlns:p14="http://schemas.microsoft.com/office/powerpoint/2010/main" val="1209677797"/>
       </p:ext>
     </p:extLst>
   </p:cSld>
@@ -14043,7 +13618,7 @@
         <p:cNvPr id="1" name="">
           <a:extLst>
             <a:ext uri="{FF2B5EF4-FFF2-40B4-BE49-F238E27FC236}">
-              <a16:creationId xmlns:a16="http://schemas.microsoft.com/office/drawing/2014/main" id="{E6F96D89-06D2-EA71-761C-1136FF8F0874}"/>
+              <a16:creationId xmlns:a16="http://schemas.microsoft.com/office/drawing/2014/main" id="{CDF95FA0-48AB-4AF3-229D-23C103445DBF}"/>
             </a:ext>
           </a:extLst>
         </p:cNvPr>
@@ -14058,59 +13633,12 @@
           <a:chExt cx="0" cy="0"/>
         </a:xfrm>
       </p:grpSpPr>
-      <p:pic>
-        <p:nvPicPr>
-          <p:cNvPr id="1026" name="Picture 2">
-            <a:extLst>
-              <a:ext uri="{FF2B5EF4-FFF2-40B4-BE49-F238E27FC236}">
-                <a16:creationId xmlns:a16="http://schemas.microsoft.com/office/drawing/2014/main" id="{280F55D7-3CE8-0F11-29A0-8FEDBB9C55EC}"/>
-              </a:ext>
-            </a:extLst>
-          </p:cNvPr>
-          <p:cNvPicPr>
-            <a:picLocks noChangeAspect="1" noChangeArrowheads="1"/>
-          </p:cNvPicPr>
-          <p:nvPr/>
-        </p:nvPicPr>
-        <p:blipFill>
-          <a:blip r:embed="rId2">
-            <a:extLst>
-              <a:ext uri="{28A0092B-C50C-407E-A947-70E740481C1C}">
-                <a14:useLocalDpi xmlns:a14="http://schemas.microsoft.com/office/drawing/2010/main" val="0"/>
-              </a:ext>
-            </a:extLst>
-          </a:blip>
-          <a:srcRect/>
-          <a:stretch>
-            <a:fillRect/>
-          </a:stretch>
-        </p:blipFill>
-        <p:spPr bwMode="auto">
-          <a:xfrm>
-            <a:off x="10899648" y="6374980"/>
-            <a:ext cx="1149447" cy="295025"/>
-          </a:xfrm>
-          <a:prstGeom prst="rect">
-            <a:avLst/>
-          </a:prstGeom>
-          <a:noFill/>
-          <a:extLst>
-            <a:ext uri="{909E8E84-426E-40DD-AFC4-6F175D3DCCD1}">
-              <a14:hiddenFill xmlns:a14="http://schemas.microsoft.com/office/drawing/2010/main">
-                <a:solidFill>
-                  <a:srgbClr val="FFFFFF"/>
-                </a:solidFill>
-              </a14:hiddenFill>
-            </a:ext>
-          </a:extLst>
-        </p:spPr>
-      </p:pic>
-      <p:sp>
-        <p:nvSpPr>
-          <p:cNvPr id="12" name="Título 1">
-            <a:extLst>
-              <a:ext uri="{FF2B5EF4-FFF2-40B4-BE49-F238E27FC236}">
-                <a16:creationId xmlns:a16="http://schemas.microsoft.com/office/drawing/2014/main" id="{09515AD4-6956-5E51-1588-A5B865F71FDF}"/>
+      <p:sp>
+        <p:nvSpPr>
+          <p:cNvPr id="7" name="Título 1">
+            <a:extLst>
+              <a:ext uri="{FF2B5EF4-FFF2-40B4-BE49-F238E27FC236}">
+                <a16:creationId xmlns:a16="http://schemas.microsoft.com/office/drawing/2014/main" id="{473CC2E6-9912-21AF-A6BA-503024E9A8B4}"/>
               </a:ext>
             </a:extLst>
           </p:cNvPr>
@@ -14165,10 +13693,10 @@
       </p:sp>
       <p:sp>
         <p:nvSpPr>
-          <p:cNvPr id="13" name="Título 1">
-            <a:extLst>
-              <a:ext uri="{FF2B5EF4-FFF2-40B4-BE49-F238E27FC236}">
-                <a16:creationId xmlns:a16="http://schemas.microsoft.com/office/drawing/2014/main" id="{55F54D2C-07EC-DCAC-F1A8-582B2555B4C6}"/>
+          <p:cNvPr id="8" name="Título 1">
+            <a:extLst>
+              <a:ext uri="{FF2B5EF4-FFF2-40B4-BE49-F238E27FC236}">
+                <a16:creationId xmlns:a16="http://schemas.microsoft.com/office/drawing/2014/main" id="{B217EDE1-9DD0-7186-7444-DA727AB20BE0}"/>
               </a:ext>
             </a:extLst>
           </p:cNvPr>
@@ -14234,10 +13762,10 @@
       </p:sp>
       <p:sp>
         <p:nvSpPr>
-          <p:cNvPr id="14" name="TextBox 13">
-            <a:extLst>
-              <a:ext uri="{FF2B5EF4-FFF2-40B4-BE49-F238E27FC236}">
-                <a16:creationId xmlns:a16="http://schemas.microsoft.com/office/drawing/2014/main" id="{E83409D4-8E35-B7A3-9093-9E2A98E37A46}"/>
+          <p:cNvPr id="9" name="TextBox 8">
+            <a:extLst>
+              <a:ext uri="{FF2B5EF4-FFF2-40B4-BE49-F238E27FC236}">
+                <a16:creationId xmlns:a16="http://schemas.microsoft.com/office/drawing/2014/main" id="{D58CFBAF-FD68-1E5A-DB47-3635A26281AA}"/>
               </a:ext>
             </a:extLst>
           </p:cNvPr>
@@ -14272,7 +13800,6 @@
                 <a:solidFill>
                   <a:prstClr val="black"/>
                 </a:solidFill>
-                <a:latin typeface="Calibri" panose="020F0502020204030204" pitchFamily="34" charset="0"/>
                 <a:cs typeface="Calibri" panose="020F0502020204030204" pitchFamily="34" charset="0"/>
               </a:rPr>
               <a:t>Arquivo de texto, que geralmente fica na raiz do projeto, que indica quais arquivos, pastas ou caminhos devem ser ignorados intencionalmente</a:t>
@@ -14282,10 +13809,10 @@
       </p:sp>
       <p:pic>
         <p:nvPicPr>
-          <p:cNvPr id="15" name="Picture 2" descr="gitignore: How Does it Work? - Designveloper">
-            <a:extLst>
-              <a:ext uri="{FF2B5EF4-FFF2-40B4-BE49-F238E27FC236}">
-                <a16:creationId xmlns:a16="http://schemas.microsoft.com/office/drawing/2014/main" id="{0C6BBC94-DA60-6BC6-F7EC-D560DDCFAC41}"/>
+          <p:cNvPr id="10" name="Picture 2" descr="gitignore: How Does it Work? - Designveloper">
+            <a:extLst>
+              <a:ext uri="{FF2B5EF4-FFF2-40B4-BE49-F238E27FC236}">
+                <a16:creationId xmlns:a16="http://schemas.microsoft.com/office/drawing/2014/main" id="{AFDB1E5E-D461-2D74-82F3-C716588D0EFE}"/>
               </a:ext>
             </a:extLst>
           </p:cNvPr>
@@ -14295,7 +13822,7 @@
           <p:nvPr/>
         </p:nvPicPr>
         <p:blipFill rotWithShape="1">
-          <a:blip r:embed="rId3">
+          <a:blip r:embed="rId2">
             <a:extLst>
               <a:ext uri="{28A0092B-C50C-407E-A947-70E740481C1C}">
                 <a14:useLocalDpi xmlns:a14="http://schemas.microsoft.com/office/drawing/2010/main" val="0"/>
@@ -14329,10 +13856,10 @@
       </p:pic>
       <p:sp>
         <p:nvSpPr>
-          <p:cNvPr id="16" name="TextBox 15">
-            <a:extLst>
-              <a:ext uri="{FF2B5EF4-FFF2-40B4-BE49-F238E27FC236}">
-                <a16:creationId xmlns:a16="http://schemas.microsoft.com/office/drawing/2014/main" id="{46956B05-DFDE-F960-3690-5298840C4417}"/>
+          <p:cNvPr id="11" name="TextBox 10">
+            <a:extLst>
+              <a:ext uri="{FF2B5EF4-FFF2-40B4-BE49-F238E27FC236}">
+                <a16:creationId xmlns:a16="http://schemas.microsoft.com/office/drawing/2014/main" id="{80979FE3-EC43-51E7-99AE-975206CB71AE}"/>
               </a:ext>
             </a:extLst>
           </p:cNvPr>
@@ -14367,7 +13894,6 @@
                 <a:solidFill>
                   <a:prstClr val="black"/>
                 </a:solidFill>
-                <a:latin typeface="Calibri" panose="020F0502020204030204" pitchFamily="34" charset="0"/>
                 <a:cs typeface="Calibri" panose="020F0502020204030204" pitchFamily="34" charset="0"/>
               </a:rPr>
               <a:t>Seu principal objetivo é manter artefatos de compilação, configurações do editor e outros ruídos fora do repositório, para que os </a:t>
@@ -14377,7 +13903,6 @@
                 <a:solidFill>
                   <a:prstClr val="black"/>
                 </a:solidFill>
-                <a:latin typeface="Calibri" panose="020F0502020204030204" pitchFamily="34" charset="0"/>
                 <a:cs typeface="Calibri" panose="020F0502020204030204" pitchFamily="34" charset="0"/>
               </a:rPr>
               <a:t>commits</a:t>
@@ -14387,7 +13912,6 @@
                 <a:solidFill>
                   <a:prstClr val="black"/>
                 </a:solidFill>
-                <a:latin typeface="Calibri" panose="020F0502020204030204" pitchFamily="34" charset="0"/>
                 <a:cs typeface="Calibri" panose="020F0502020204030204" pitchFamily="34" charset="0"/>
               </a:rPr>
               <a:t> permaneçam limpos</a:t>
@@ -14406,7 +13930,6 @@
                 <a:solidFill>
                   <a:prstClr val="black"/>
                 </a:solidFill>
-                <a:latin typeface="Calibri" panose="020F0502020204030204" pitchFamily="34" charset="0"/>
                 <a:cs typeface="Calibri" panose="020F0502020204030204" pitchFamily="34" charset="0"/>
               </a:rPr>
               <a:t>Para </a:t>
@@ -14416,7 +13939,6 @@
                 <a:solidFill>
                   <a:prstClr val="black"/>
                 </a:solidFill>
-                <a:latin typeface="Calibri" panose="020F0502020204030204" pitchFamily="34" charset="0"/>
                 <a:cs typeface="Calibri" panose="020F0502020204030204" pitchFamily="34" charset="0"/>
               </a:rPr>
               <a:t>ignorar um arquivo </a:t>
@@ -14426,7 +13948,6 @@
                 <a:solidFill>
                   <a:prstClr val="black"/>
                 </a:solidFill>
-                <a:latin typeface="Calibri" panose="020F0502020204030204" pitchFamily="34" charset="0"/>
                 <a:cs typeface="Calibri" panose="020F0502020204030204" pitchFamily="34" charset="0"/>
               </a:rPr>
               <a:t>específico, basta escrever o nome dele</a:t>
@@ -14445,7 +13966,6 @@
                 <a:solidFill>
                   <a:prstClr val="black"/>
                 </a:solidFill>
-                <a:latin typeface="Calibri" panose="020F0502020204030204" pitchFamily="34" charset="0"/>
                 <a:cs typeface="Calibri" panose="020F0502020204030204" pitchFamily="34" charset="0"/>
               </a:rPr>
               <a:t>Pastas são ignoradas </a:t>
@@ -14455,7 +13975,6 @@
                 <a:solidFill>
                   <a:prstClr val="black"/>
                 </a:solidFill>
-                <a:latin typeface="Calibri" panose="020F0502020204030204" pitchFamily="34" charset="0"/>
                 <a:cs typeface="Calibri" panose="020F0502020204030204" pitchFamily="34" charset="0"/>
               </a:rPr>
               <a:t>escrevendo o nome da pasta seguido por uma barra</a:t>
@@ -14474,7 +13993,6 @@
                 <a:solidFill>
                   <a:prstClr val="black"/>
                 </a:solidFill>
-                <a:latin typeface="Calibri" panose="020F0502020204030204" pitchFamily="34" charset="0"/>
                 <a:cs typeface="Calibri" panose="020F0502020204030204" pitchFamily="34" charset="0"/>
               </a:rPr>
               <a:t>Para ignorar extensões</a:t>
@@ -14484,7 +14002,6 @@
                 <a:solidFill>
                   <a:prstClr val="black"/>
                 </a:solidFill>
-                <a:latin typeface="Calibri" panose="020F0502020204030204" pitchFamily="34" charset="0"/>
                 <a:cs typeface="Calibri" panose="020F0502020204030204" pitchFamily="34" charset="0"/>
               </a:rPr>
               <a:t>, use, por exemplo: </a:t>
@@ -14494,7 +14011,6 @@
                 <a:solidFill>
                   <a:prstClr val="black"/>
                 </a:solidFill>
-                <a:latin typeface="Calibri" panose="020F0502020204030204" pitchFamily="34" charset="0"/>
                 <a:cs typeface="Calibri" panose="020F0502020204030204" pitchFamily="34" charset="0"/>
               </a:rPr>
               <a:t>*.log </a:t>
@@ -14504,7 +14020,6 @@
                 <a:solidFill>
                   <a:prstClr val="black"/>
                 </a:solidFill>
-                <a:latin typeface="Calibri" panose="020F0502020204030204" pitchFamily="34" charset="0"/>
                 <a:cs typeface="Calibri" panose="020F0502020204030204" pitchFamily="34" charset="0"/>
               </a:rPr>
               <a:t>que instrui o Git a ignorar todos os arquivos que terminam em </a:t>
@@ -14514,7 +14029,6 @@
                 <a:solidFill>
                   <a:prstClr val="black"/>
                 </a:solidFill>
-                <a:latin typeface="Calibri" panose="020F0502020204030204" pitchFamily="34" charset="0"/>
                 <a:cs typeface="Calibri" panose="020F0502020204030204" pitchFamily="34" charset="0"/>
               </a:rPr>
               <a:t>.log</a:t>
@@ -14524,7 +14038,6 @@
                 <a:solidFill>
                   <a:prstClr val="black"/>
                 </a:solidFill>
-                <a:latin typeface="Calibri" panose="020F0502020204030204" pitchFamily="34" charset="0"/>
                 <a:cs typeface="Calibri" panose="020F0502020204030204" pitchFamily="34" charset="0"/>
               </a:rPr>
               <a:t>, independentemente do nome</a:t>
@@ -14543,7 +14056,6 @@
                 <a:solidFill>
                   <a:prstClr val="black"/>
                 </a:solidFill>
-                <a:latin typeface="Calibri" panose="020F0502020204030204" pitchFamily="34" charset="0"/>
                 <a:cs typeface="Calibri" panose="020F0502020204030204" pitchFamily="34" charset="0"/>
               </a:rPr>
               <a:t>Linhas que começam com </a:t>
@@ -14553,7 +14065,6 @@
                 <a:solidFill>
                   <a:prstClr val="black"/>
                 </a:solidFill>
-                <a:latin typeface="Calibri" panose="020F0502020204030204" pitchFamily="34" charset="0"/>
                 <a:cs typeface="Calibri" panose="020F0502020204030204" pitchFamily="34" charset="0"/>
               </a:rPr>
               <a:t>#</a:t>
@@ -14563,7 +14074,6 @@
                 <a:solidFill>
                   <a:prstClr val="black"/>
                 </a:solidFill>
-                <a:latin typeface="Calibri" panose="020F0502020204030204" pitchFamily="34" charset="0"/>
                 <a:cs typeface="Calibri" panose="020F0502020204030204" pitchFamily="34" charset="0"/>
               </a:rPr>
               <a:t> são ignoradas (comentários)</a:t>
@@ -14574,7 +14084,7 @@
     </p:spTree>
     <p:extLst>
       <p:ext uri="{BB962C8B-B14F-4D97-AF65-F5344CB8AC3E}">
-        <p14:creationId xmlns:p14="http://schemas.microsoft.com/office/powerpoint/2010/main" val="1566847010"/>
+        <p14:creationId xmlns:p14="http://schemas.microsoft.com/office/powerpoint/2010/main" val="3282240913"/>
       </p:ext>
     </p:extLst>
   </p:cSld>
@@ -14592,7 +14102,7 @@
         <p:cNvPr id="1" name="">
           <a:extLst>
             <a:ext uri="{FF2B5EF4-FFF2-40B4-BE49-F238E27FC236}">
-              <a16:creationId xmlns:a16="http://schemas.microsoft.com/office/drawing/2014/main" id="{87024555-F845-8DF4-B447-558A34DF8B38}"/>
+              <a16:creationId xmlns:a16="http://schemas.microsoft.com/office/drawing/2014/main" id="{F74AE2A2-6D08-E490-BD15-BA69BB815087}"/>
             </a:ext>
           </a:extLst>
         </p:cNvPr>
@@ -14607,59 +14117,12 @@
           <a:chExt cx="0" cy="0"/>
         </a:xfrm>
       </p:grpSpPr>
-      <p:pic>
-        <p:nvPicPr>
-          <p:cNvPr id="1026" name="Picture 2">
-            <a:extLst>
-              <a:ext uri="{FF2B5EF4-FFF2-40B4-BE49-F238E27FC236}">
-                <a16:creationId xmlns:a16="http://schemas.microsoft.com/office/drawing/2014/main" id="{4BC884ED-A89D-8810-8992-F9626FF5D71C}"/>
-              </a:ext>
-            </a:extLst>
-          </p:cNvPr>
-          <p:cNvPicPr>
-            <a:picLocks noChangeAspect="1" noChangeArrowheads="1"/>
-          </p:cNvPicPr>
-          <p:nvPr/>
-        </p:nvPicPr>
-        <p:blipFill>
-          <a:blip r:embed="rId2">
-            <a:extLst>
-              <a:ext uri="{28A0092B-C50C-407E-A947-70E740481C1C}">
-                <a14:useLocalDpi xmlns:a14="http://schemas.microsoft.com/office/drawing/2010/main" val="0"/>
-              </a:ext>
-            </a:extLst>
-          </a:blip>
-          <a:srcRect/>
-          <a:stretch>
-            <a:fillRect/>
-          </a:stretch>
-        </p:blipFill>
-        <p:spPr bwMode="auto">
-          <a:xfrm>
-            <a:off x="10899648" y="6374980"/>
-            <a:ext cx="1149447" cy="295025"/>
-          </a:xfrm>
-          <a:prstGeom prst="rect">
-            <a:avLst/>
-          </a:prstGeom>
-          <a:noFill/>
-          <a:extLst>
-            <a:ext uri="{909E8E84-426E-40DD-AFC4-6F175D3DCCD1}">
-              <a14:hiddenFill xmlns:a14="http://schemas.microsoft.com/office/drawing/2010/main">
-                <a:solidFill>
-                  <a:srgbClr val="FFFFFF"/>
-                </a:solidFill>
-              </a14:hiddenFill>
-            </a:ext>
-          </a:extLst>
-        </p:spPr>
-      </p:pic>
-      <p:sp>
-        <p:nvSpPr>
-          <p:cNvPr id="12" name="Título 1">
-            <a:extLst>
-              <a:ext uri="{FF2B5EF4-FFF2-40B4-BE49-F238E27FC236}">
-                <a16:creationId xmlns:a16="http://schemas.microsoft.com/office/drawing/2014/main" id="{913EF4FD-3023-70FD-3432-94038E8CF2EF}"/>
+      <p:sp>
+        <p:nvSpPr>
+          <p:cNvPr id="7" name="Título 1">
+            <a:extLst>
+              <a:ext uri="{FF2B5EF4-FFF2-40B4-BE49-F238E27FC236}">
+                <a16:creationId xmlns:a16="http://schemas.microsoft.com/office/drawing/2014/main" id="{21D1AA5D-488C-F868-BA96-2DDA0B3E62B3}"/>
               </a:ext>
             </a:extLst>
           </p:cNvPr>
@@ -14714,10 +14177,10 @@
       </p:sp>
       <p:sp>
         <p:nvSpPr>
-          <p:cNvPr id="13" name="Título 1">
-            <a:extLst>
-              <a:ext uri="{FF2B5EF4-FFF2-40B4-BE49-F238E27FC236}">
-                <a16:creationId xmlns:a16="http://schemas.microsoft.com/office/drawing/2014/main" id="{E2AD8473-20F3-8DA2-80FF-B490EC62A5DC}"/>
+          <p:cNvPr id="8" name="Título 1">
+            <a:extLst>
+              <a:ext uri="{FF2B5EF4-FFF2-40B4-BE49-F238E27FC236}">
+                <a16:creationId xmlns:a16="http://schemas.microsoft.com/office/drawing/2014/main" id="{3AB0D5F4-67DE-A109-4F45-94FEF117B6CB}"/>
               </a:ext>
             </a:extLst>
           </p:cNvPr>
@@ -14772,10 +14235,10 @@
       </p:sp>
       <p:sp>
         <p:nvSpPr>
-          <p:cNvPr id="14" name="TextBox 13">
-            <a:extLst>
-              <a:ext uri="{FF2B5EF4-FFF2-40B4-BE49-F238E27FC236}">
-                <a16:creationId xmlns:a16="http://schemas.microsoft.com/office/drawing/2014/main" id="{A2E71246-6F9A-30F2-4E01-D3AD77366A78}"/>
+          <p:cNvPr id="9" name="TextBox 8">
+            <a:extLst>
+              <a:ext uri="{FF2B5EF4-FFF2-40B4-BE49-F238E27FC236}">
+                <a16:creationId xmlns:a16="http://schemas.microsoft.com/office/drawing/2014/main" id="{033DE838-2C56-41FC-6D65-E4C2ABD17BC1}"/>
               </a:ext>
             </a:extLst>
           </p:cNvPr>
@@ -14810,7 +14273,6 @@
                 <a:solidFill>
                   <a:prstClr val="black"/>
                 </a:solidFill>
-                <a:latin typeface="Calibri" panose="020F0502020204030204" pitchFamily="34" charset="0"/>
                 <a:cs typeface="Calibri" panose="020F0502020204030204" pitchFamily="34" charset="0"/>
               </a:rPr>
               <a:t>Arquivo de texto que fornece informações sobre o repositório</a:t>
@@ -14829,7 +14291,6 @@
                 <a:solidFill>
                   <a:prstClr val="black"/>
                 </a:solidFill>
-                <a:latin typeface="Calibri" panose="020F0502020204030204" pitchFamily="34" charset="0"/>
                 <a:cs typeface="Calibri" panose="020F0502020204030204" pitchFamily="34" charset="0"/>
               </a:rPr>
               <a:t>Serve como ponto de entrada principal para usuários e colaboradores, oferecendo uma visão geral do projeto, além de instruções sobre como utilizá-lo, contribuir ou configurá-lo</a:t>
@@ -14839,10 +14300,10 @@
       </p:sp>
       <p:pic>
         <p:nvPicPr>
-          <p:cNvPr id="15" name="Picture 14">
-            <a:extLst>
-              <a:ext uri="{FF2B5EF4-FFF2-40B4-BE49-F238E27FC236}">
-                <a16:creationId xmlns:a16="http://schemas.microsoft.com/office/drawing/2014/main" id="{593450B5-3F88-E07F-F74E-6BE27E6EAFCC}"/>
+          <p:cNvPr id="10" name="Picture 9">
+            <a:extLst>
+              <a:ext uri="{FF2B5EF4-FFF2-40B4-BE49-F238E27FC236}">
+                <a16:creationId xmlns:a16="http://schemas.microsoft.com/office/drawing/2014/main" id="{DD9AC23F-22B2-5CAD-E3BD-0F007E3AA5F5}"/>
               </a:ext>
             </a:extLst>
           </p:cNvPr>
@@ -14852,7 +14313,7 @@
           <p:nvPr/>
         </p:nvPicPr>
         <p:blipFill>
-          <a:blip r:embed="rId3"/>
+          <a:blip r:embed="rId2"/>
           <a:stretch>
             <a:fillRect/>
           </a:stretch>
@@ -14869,10 +14330,10 @@
       </p:pic>
       <p:sp>
         <p:nvSpPr>
-          <p:cNvPr id="16" name="TextBox 15">
-            <a:extLst>
-              <a:ext uri="{FF2B5EF4-FFF2-40B4-BE49-F238E27FC236}">
-                <a16:creationId xmlns:a16="http://schemas.microsoft.com/office/drawing/2014/main" id="{374DA980-F468-17D0-4D57-23476BF7E030}"/>
+          <p:cNvPr id="11" name="TextBox 10">
+            <a:extLst>
+              <a:ext uri="{FF2B5EF4-FFF2-40B4-BE49-F238E27FC236}">
+                <a16:creationId xmlns:a16="http://schemas.microsoft.com/office/drawing/2014/main" id="{FBD3127B-27BC-8DC6-9402-89DA531C4A23}"/>
               </a:ext>
             </a:extLst>
           </p:cNvPr>
@@ -14881,8 +14342,8 @@
         </p:nvSpPr>
         <p:spPr>
           <a:xfrm>
-            <a:off x="0" y="5031183"/>
-            <a:ext cx="5094514" cy="1277273"/>
+            <a:off x="0" y="5414641"/>
+            <a:ext cx="7905135" cy="907941"/>
           </a:xfrm>
           <a:prstGeom prst="rect">
             <a:avLst/>
@@ -14905,7 +14366,6 @@
                 <a:solidFill>
                   <a:prstClr val="black"/>
                 </a:solidFill>
-                <a:latin typeface="Calibri" panose="020F0502020204030204" pitchFamily="34" charset="0"/>
                 <a:cs typeface="Calibri" panose="020F0502020204030204" pitchFamily="34" charset="0"/>
               </a:rPr>
               <a:t>Agora:</a:t>
@@ -14924,7 +14384,6 @@
                 <a:solidFill>
                   <a:prstClr val="black"/>
                 </a:solidFill>
-                <a:latin typeface="Calibri" panose="020F0502020204030204" pitchFamily="34" charset="0"/>
                 <a:cs typeface="Calibri" panose="020F0502020204030204" pitchFamily="34" charset="0"/>
               </a:rPr>
               <a:t>Vamos criar um repositório e fazer o push de um arquivo</a:t>
@@ -14935,7 +14394,7 @@
     </p:spTree>
     <p:extLst>
       <p:ext uri="{BB962C8B-B14F-4D97-AF65-F5344CB8AC3E}">
-        <p14:creationId xmlns:p14="http://schemas.microsoft.com/office/powerpoint/2010/main" val="1723038385"/>
+        <p14:creationId xmlns:p14="http://schemas.microsoft.com/office/powerpoint/2010/main" val="319271784"/>
       </p:ext>
     </p:extLst>
   </p:cSld>
@@ -14976,7 +14435,7 @@
                                           </p:stCondLst>
                                         </p:cTn>
                                         <p:tgtEl>
-                                          <p:spTgt spid="16"/>
+                                          <p:spTgt spid="11"/>
                                         </p:tgtEl>
                                         <p:attrNameLst>
                                           <p:attrName>style.visibility</p:attrName>
@@ -15017,7 +14476,7 @@
       </p:par>
     </p:tnLst>
     <p:bldLst>
-      <p:bldP spid="16" grpId="0"/>
+      <p:bldP spid="11" grpId="0"/>
     </p:bldLst>
   </p:timing>
 </p:sld>
@@ -15031,7 +14490,7 @@
         <p:cNvPr id="1" name="">
           <a:extLst>
             <a:ext uri="{FF2B5EF4-FFF2-40B4-BE49-F238E27FC236}">
-              <a16:creationId xmlns:a16="http://schemas.microsoft.com/office/drawing/2014/main" id="{B00DE27F-E3CD-C692-EBB3-96E93F6ABB32}"/>
+              <a16:creationId xmlns:a16="http://schemas.microsoft.com/office/drawing/2014/main" id="{DD63CC84-F2CE-55AE-3BFA-3357D573500B}"/>
             </a:ext>
           </a:extLst>
         </p:cNvPr>
@@ -15046,59 +14505,12 @@
           <a:chExt cx="0" cy="0"/>
         </a:xfrm>
       </p:grpSpPr>
-      <p:pic>
-        <p:nvPicPr>
-          <p:cNvPr id="1026" name="Picture 2">
-            <a:extLst>
-              <a:ext uri="{FF2B5EF4-FFF2-40B4-BE49-F238E27FC236}">
-                <a16:creationId xmlns:a16="http://schemas.microsoft.com/office/drawing/2014/main" id="{C6FEDF57-012B-F2A2-9545-C934550EABA8}"/>
-              </a:ext>
-            </a:extLst>
-          </p:cNvPr>
-          <p:cNvPicPr>
-            <a:picLocks noChangeAspect="1" noChangeArrowheads="1"/>
-          </p:cNvPicPr>
-          <p:nvPr/>
-        </p:nvPicPr>
-        <p:blipFill>
-          <a:blip r:embed="rId2">
-            <a:extLst>
-              <a:ext uri="{28A0092B-C50C-407E-A947-70E740481C1C}">
-                <a14:useLocalDpi xmlns:a14="http://schemas.microsoft.com/office/drawing/2010/main" val="0"/>
-              </a:ext>
-            </a:extLst>
-          </a:blip>
-          <a:srcRect/>
-          <a:stretch>
-            <a:fillRect/>
-          </a:stretch>
-        </p:blipFill>
-        <p:spPr bwMode="auto">
-          <a:xfrm>
-            <a:off x="10899648" y="6374980"/>
-            <a:ext cx="1149447" cy="295025"/>
-          </a:xfrm>
-          <a:prstGeom prst="rect">
-            <a:avLst/>
-          </a:prstGeom>
-          <a:noFill/>
-          <a:extLst>
-            <a:ext uri="{909E8E84-426E-40DD-AFC4-6F175D3DCCD1}">
-              <a14:hiddenFill xmlns:a14="http://schemas.microsoft.com/office/drawing/2010/main">
-                <a:solidFill>
-                  <a:srgbClr val="FFFFFF"/>
-                </a:solidFill>
-              </a14:hiddenFill>
-            </a:ext>
-          </a:extLst>
-        </p:spPr>
-      </p:pic>
-      <p:sp>
-        <p:nvSpPr>
-          <p:cNvPr id="8" name="Título 1">
-            <a:extLst>
-              <a:ext uri="{FF2B5EF4-FFF2-40B4-BE49-F238E27FC236}">
-                <a16:creationId xmlns:a16="http://schemas.microsoft.com/office/drawing/2014/main" id="{54C306CE-EB21-2D50-B2B9-C1E18FACDA79}"/>
+      <p:sp>
+        <p:nvSpPr>
+          <p:cNvPr id="5" name="Título 1">
+            <a:extLst>
+              <a:ext uri="{FF2B5EF4-FFF2-40B4-BE49-F238E27FC236}">
+                <a16:creationId xmlns:a16="http://schemas.microsoft.com/office/drawing/2014/main" id="{574C6373-D91D-CB7E-2581-F77E1849EA83}"/>
               </a:ext>
             </a:extLst>
           </p:cNvPr>
@@ -15153,10 +14565,10 @@
       </p:sp>
       <p:sp>
         <p:nvSpPr>
-          <p:cNvPr id="9" name="Título 1">
-            <a:extLst>
-              <a:ext uri="{FF2B5EF4-FFF2-40B4-BE49-F238E27FC236}">
-                <a16:creationId xmlns:a16="http://schemas.microsoft.com/office/drawing/2014/main" id="{73C13A49-471B-3B18-F22A-4980CCEF299B}"/>
+          <p:cNvPr id="6" name="Título 1">
+            <a:extLst>
+              <a:ext uri="{FF2B5EF4-FFF2-40B4-BE49-F238E27FC236}">
+                <a16:creationId xmlns:a16="http://schemas.microsoft.com/office/drawing/2014/main" id="{92FCDF43-8725-1B11-B941-535B7918A949}"/>
               </a:ext>
             </a:extLst>
           </p:cNvPr>
@@ -15218,10 +14630,10 @@
       </p:sp>
       <p:sp>
         <p:nvSpPr>
-          <p:cNvPr id="10" name="TextBox 9">
-            <a:extLst>
-              <a:ext uri="{FF2B5EF4-FFF2-40B4-BE49-F238E27FC236}">
-                <a16:creationId xmlns:a16="http://schemas.microsoft.com/office/drawing/2014/main" id="{4C3AF851-1766-132D-45B3-9D363C96D4DB}"/>
+          <p:cNvPr id="7" name="TextBox 6">
+            <a:extLst>
+              <a:ext uri="{FF2B5EF4-FFF2-40B4-BE49-F238E27FC236}">
+                <a16:creationId xmlns:a16="http://schemas.microsoft.com/office/drawing/2014/main" id="{F79E58A3-2AA0-E134-0C72-2364C210D0D7}"/>
               </a:ext>
             </a:extLst>
           </p:cNvPr>
@@ -15256,7 +14668,6 @@
                 <a:solidFill>
                   <a:prstClr val="black"/>
                 </a:solidFill>
-                <a:latin typeface="Calibri" panose="020F0502020204030204" pitchFamily="34" charset="0"/>
                 <a:cs typeface="Calibri" panose="020F0502020204030204" pitchFamily="34" charset="0"/>
               </a:rPr>
               <a:t>Funciona como um espaço intermediário entre o diretório de trabalho e o repositório onde você escolhe as alterações que deseja incluir no próximo commit</a:t>
@@ -15275,7 +14686,6 @@
                 <a:solidFill>
                   <a:prstClr val="black"/>
                 </a:solidFill>
-                <a:latin typeface="Calibri" panose="020F0502020204030204" pitchFamily="34" charset="0"/>
                 <a:cs typeface="Calibri" panose="020F0502020204030204" pitchFamily="34" charset="0"/>
               </a:rPr>
               <a:t>Permite selecionar com precisão o que será incluído no próximo </a:t>
@@ -15285,7 +14695,6 @@
                 <a:solidFill>
                   <a:prstClr val="black"/>
                 </a:solidFill>
-                <a:latin typeface="Calibri" panose="020F0502020204030204" pitchFamily="34" charset="0"/>
                 <a:cs typeface="Calibri" panose="020F0502020204030204" pitchFamily="34" charset="0"/>
               </a:rPr>
               <a:t>commit</a:t>
@@ -15304,7 +14713,6 @@
                 <a:solidFill>
                   <a:prstClr val="black"/>
                 </a:solidFill>
-                <a:latin typeface="Calibri" panose="020F0502020204030204" pitchFamily="34" charset="0"/>
                 <a:cs typeface="Calibri" panose="020F0502020204030204" pitchFamily="34" charset="0"/>
               </a:rPr>
               <a:t>Facilita a organização das mudanças, especialmente em projetos grandes ou com muitas alterações simultâneas</a:t>
@@ -15315,7 +14723,7 @@
     </p:spTree>
     <p:extLst>
       <p:ext uri="{BB962C8B-B14F-4D97-AF65-F5344CB8AC3E}">
-        <p14:creationId xmlns:p14="http://schemas.microsoft.com/office/powerpoint/2010/main" val="3549835772"/>
+        <p14:creationId xmlns:p14="http://schemas.microsoft.com/office/powerpoint/2010/main" val="3871503825"/>
       </p:ext>
     </p:extLst>
   </p:cSld>
@@ -15333,7 +14741,7 @@
         <p:cNvPr id="1" name="">
           <a:extLst>
             <a:ext uri="{FF2B5EF4-FFF2-40B4-BE49-F238E27FC236}">
-              <a16:creationId xmlns:a16="http://schemas.microsoft.com/office/drawing/2014/main" id="{B72B79C7-0F22-1151-CEBE-1CCABA2FDBC3}"/>
+              <a16:creationId xmlns:a16="http://schemas.microsoft.com/office/drawing/2014/main" id="{61A1202E-2EDD-7E6D-65FF-227EAAF48CB3}"/>
             </a:ext>
           </a:extLst>
         </p:cNvPr>
@@ -15348,59 +14756,12 @@
           <a:chExt cx="0" cy="0"/>
         </a:xfrm>
       </p:grpSpPr>
-      <p:pic>
-        <p:nvPicPr>
-          <p:cNvPr id="1026" name="Picture 2">
-            <a:extLst>
-              <a:ext uri="{FF2B5EF4-FFF2-40B4-BE49-F238E27FC236}">
-                <a16:creationId xmlns:a16="http://schemas.microsoft.com/office/drawing/2014/main" id="{B6F16726-B10D-C256-72B2-2A8B06826146}"/>
-              </a:ext>
-            </a:extLst>
-          </p:cNvPr>
-          <p:cNvPicPr>
-            <a:picLocks noChangeAspect="1" noChangeArrowheads="1"/>
-          </p:cNvPicPr>
-          <p:nvPr/>
-        </p:nvPicPr>
-        <p:blipFill>
-          <a:blip r:embed="rId2">
-            <a:extLst>
-              <a:ext uri="{28A0092B-C50C-407E-A947-70E740481C1C}">
-                <a14:useLocalDpi xmlns:a14="http://schemas.microsoft.com/office/drawing/2010/main" val="0"/>
-              </a:ext>
-            </a:extLst>
-          </a:blip>
-          <a:srcRect/>
-          <a:stretch>
-            <a:fillRect/>
-          </a:stretch>
-        </p:blipFill>
-        <p:spPr bwMode="auto">
-          <a:xfrm>
-            <a:off x="10899648" y="6374980"/>
-            <a:ext cx="1149447" cy="295025"/>
-          </a:xfrm>
-          <a:prstGeom prst="rect">
-            <a:avLst/>
-          </a:prstGeom>
-          <a:noFill/>
-          <a:extLst>
-            <a:ext uri="{909E8E84-426E-40DD-AFC4-6F175D3DCCD1}">
-              <a14:hiddenFill xmlns:a14="http://schemas.microsoft.com/office/drawing/2010/main">
-                <a:solidFill>
-                  <a:srgbClr val="FFFFFF"/>
-                </a:solidFill>
-              </a14:hiddenFill>
-            </a:ext>
-          </a:extLst>
-        </p:spPr>
-      </p:pic>
-      <p:sp>
-        <p:nvSpPr>
-          <p:cNvPr id="8" name="Título 1">
-            <a:extLst>
-              <a:ext uri="{FF2B5EF4-FFF2-40B4-BE49-F238E27FC236}">
-                <a16:creationId xmlns:a16="http://schemas.microsoft.com/office/drawing/2014/main" id="{3E6355BB-AE0C-6585-32D7-9B7E09CB1002}"/>
+      <p:sp>
+        <p:nvSpPr>
+          <p:cNvPr id="13" name="Título 1">
+            <a:extLst>
+              <a:ext uri="{FF2B5EF4-FFF2-40B4-BE49-F238E27FC236}">
+                <a16:creationId xmlns:a16="http://schemas.microsoft.com/office/drawing/2014/main" id="{A485DD2B-1078-E80D-9C22-81EE8C735B88}"/>
               </a:ext>
             </a:extLst>
           </p:cNvPr>
@@ -15455,10 +14816,10 @@
       </p:sp>
       <p:sp>
         <p:nvSpPr>
-          <p:cNvPr id="9" name="Título 1">
-            <a:extLst>
-              <a:ext uri="{FF2B5EF4-FFF2-40B4-BE49-F238E27FC236}">
-                <a16:creationId xmlns:a16="http://schemas.microsoft.com/office/drawing/2014/main" id="{9045B56B-AA40-6C07-A8C3-F1681958D659}"/>
+          <p:cNvPr id="14" name="Título 1">
+            <a:extLst>
+              <a:ext uri="{FF2B5EF4-FFF2-40B4-BE49-F238E27FC236}">
+                <a16:creationId xmlns:a16="http://schemas.microsoft.com/office/drawing/2014/main" id="{14401027-4D82-90D2-EFF8-9FD83E2C81F6}"/>
               </a:ext>
             </a:extLst>
           </p:cNvPr>
@@ -15513,10 +14874,10 @@
       </p:sp>
       <p:sp>
         <p:nvSpPr>
-          <p:cNvPr id="10" name="TextBox 9">
-            <a:extLst>
-              <a:ext uri="{FF2B5EF4-FFF2-40B4-BE49-F238E27FC236}">
-                <a16:creationId xmlns:a16="http://schemas.microsoft.com/office/drawing/2014/main" id="{C5195E37-FA6A-3FA8-2D7E-BD4A7674AED5}"/>
+          <p:cNvPr id="15" name="TextBox 14">
+            <a:extLst>
+              <a:ext uri="{FF2B5EF4-FFF2-40B4-BE49-F238E27FC236}">
+                <a16:creationId xmlns:a16="http://schemas.microsoft.com/office/drawing/2014/main" id="{99D6881F-91DC-19C4-23F9-5FE5C89339DD}"/>
               </a:ext>
             </a:extLst>
           </p:cNvPr>
@@ -15551,7 +14912,6 @@
                 <a:solidFill>
                   <a:prstClr val="black"/>
                 </a:solidFill>
-                <a:latin typeface="Calibri" panose="020F0502020204030204" pitchFamily="34" charset="0"/>
                 <a:cs typeface="Calibri" panose="020F0502020204030204" pitchFamily="34" charset="0"/>
               </a:rPr>
               <a:t>Salva as mudanças feitas no projeto, seja adições, edições, exclusões ou movimentações de arquivos</a:t>
@@ -15570,7 +14930,6 @@
                 <a:solidFill>
                   <a:prstClr val="black"/>
                 </a:solidFill>
-                <a:latin typeface="Calibri" panose="020F0502020204030204" pitchFamily="34" charset="0"/>
                 <a:cs typeface="Calibri" panose="020F0502020204030204" pitchFamily="34" charset="0"/>
               </a:rPr>
               <a:t>Cada commit é acompanhado por uma mensagem que fornece uma descrição concisa do que foi alterado ou adicionado no commit</a:t>
@@ -15589,7 +14948,6 @@
                 <a:solidFill>
                   <a:prstClr val="black"/>
                 </a:solidFill>
-                <a:latin typeface="Calibri" panose="020F0502020204030204" pitchFamily="34" charset="0"/>
                 <a:cs typeface="Calibri" panose="020F0502020204030204" pitchFamily="34" charset="0"/>
               </a:rPr>
               <a:t>A convenção é usar:</a:t>
@@ -15608,7 +14966,6 @@
                 <a:solidFill>
                   <a:prstClr val="black"/>
                 </a:solidFill>
-                <a:latin typeface="Calibri" panose="020F0502020204030204" pitchFamily="34" charset="0"/>
                 <a:cs typeface="Calibri" panose="020F0502020204030204" pitchFamily="34" charset="0"/>
               </a:rPr>
               <a:t>Inglês</a:t>
@@ -15627,7 +14984,6 @@
                 <a:solidFill>
                   <a:prstClr val="black"/>
                 </a:solidFill>
-                <a:latin typeface="Calibri" panose="020F0502020204030204" pitchFamily="34" charset="0"/>
                 <a:cs typeface="Calibri" panose="020F0502020204030204" pitchFamily="34" charset="0"/>
               </a:rPr>
               <a:t>Imperativo</a:t>
@@ -15646,7 +15002,6 @@
                 <a:solidFill>
                   <a:prstClr val="black"/>
                 </a:solidFill>
-                <a:latin typeface="Calibri" panose="020F0502020204030204" pitchFamily="34" charset="0"/>
                 <a:cs typeface="Calibri" panose="020F0502020204030204" pitchFamily="34" charset="0"/>
               </a:rPr>
               <a:t>Ex</a:t>
@@ -15656,7 +15011,6 @@
                 <a:solidFill>
                   <a:prstClr val="black"/>
                 </a:solidFill>
-                <a:latin typeface="Calibri" panose="020F0502020204030204" pitchFamily="34" charset="0"/>
                 <a:cs typeface="Calibri" panose="020F0502020204030204" pitchFamily="34" charset="0"/>
               </a:rPr>
               <a:t>: “</a:t>
@@ -15666,7 +15020,6 @@
                 <a:solidFill>
                   <a:prstClr val="black"/>
                 </a:solidFill>
-                <a:latin typeface="Calibri" panose="020F0502020204030204" pitchFamily="34" charset="0"/>
                 <a:cs typeface="Calibri" panose="020F0502020204030204" pitchFamily="34" charset="0"/>
               </a:rPr>
               <a:t>fix</a:t>
@@ -15676,7 +15029,6 @@
                 <a:solidFill>
                   <a:prstClr val="black"/>
                 </a:solidFill>
-                <a:latin typeface="Calibri" panose="020F0502020204030204" pitchFamily="34" charset="0"/>
                 <a:cs typeface="Calibri" panose="020F0502020204030204" pitchFamily="34" charset="0"/>
               </a:rPr>
               <a:t> bug”</a:t>
@@ -15695,7 +15047,6 @@
                 <a:solidFill>
                   <a:prstClr val="black"/>
                 </a:solidFill>
-                <a:latin typeface="Calibri" panose="020F0502020204030204" pitchFamily="34" charset="0"/>
                 <a:cs typeface="Calibri" panose="020F0502020204030204" pitchFamily="34" charset="0"/>
               </a:rPr>
               <a:t>Português</a:t>
@@ -15714,7 +15065,6 @@
                 <a:solidFill>
                   <a:prstClr val="black"/>
                 </a:solidFill>
-                <a:latin typeface="Calibri" panose="020F0502020204030204" pitchFamily="34" charset="0"/>
                 <a:cs typeface="Calibri" panose="020F0502020204030204" pitchFamily="34" charset="0"/>
               </a:rPr>
               <a:t>Presente do indicativo</a:t>
@@ -15733,7 +15083,6 @@
                 <a:solidFill>
                   <a:prstClr val="black"/>
                 </a:solidFill>
-                <a:latin typeface="Calibri" panose="020F0502020204030204" pitchFamily="34" charset="0"/>
                 <a:cs typeface="Calibri" panose="020F0502020204030204" pitchFamily="34" charset="0"/>
               </a:rPr>
               <a:t>Ex</a:t>
@@ -15743,7 +15092,6 @@
                 <a:solidFill>
                   <a:prstClr val="black"/>
                 </a:solidFill>
-                <a:latin typeface="Calibri" panose="020F0502020204030204" pitchFamily="34" charset="0"/>
                 <a:cs typeface="Calibri" panose="020F0502020204030204" pitchFamily="34" charset="0"/>
               </a:rPr>
               <a:t>: “conserta bug”</a:t>
@@ -15754,7 +15102,7 @@
     </p:spTree>
     <p:extLst>
       <p:ext uri="{BB962C8B-B14F-4D97-AF65-F5344CB8AC3E}">
-        <p14:creationId xmlns:p14="http://schemas.microsoft.com/office/powerpoint/2010/main" val="3988556374"/>
+        <p14:creationId xmlns:p14="http://schemas.microsoft.com/office/powerpoint/2010/main" val="3646372080"/>
       </p:ext>
     </p:extLst>
   </p:cSld>
@@ -15775,39 +15123,39 @@
         <a:sysClr val="window" lastClr="FFFFFF"/>
       </a:lt1>
       <a:dk2>
-        <a:srgbClr val="0E2841"/>
+        <a:srgbClr val="44546A"/>
       </a:dk2>
       <a:lt2>
-        <a:srgbClr val="E8E8E8"/>
+        <a:srgbClr val="E7E6E6"/>
       </a:lt2>
       <a:accent1>
-        <a:srgbClr val="156082"/>
+        <a:srgbClr val="4472C4"/>
       </a:accent1>
       <a:accent2>
-        <a:srgbClr val="E97132"/>
+        <a:srgbClr val="ED7D31"/>
       </a:accent2>
       <a:accent3>
-        <a:srgbClr val="196B24"/>
+        <a:srgbClr val="A5A5A5"/>
       </a:accent3>
       <a:accent4>
-        <a:srgbClr val="0F9ED5"/>
+        <a:srgbClr val="FFC000"/>
       </a:accent4>
       <a:accent5>
-        <a:srgbClr val="A02B93"/>
+        <a:srgbClr val="5B9BD5"/>
       </a:accent5>
       <a:accent6>
-        <a:srgbClr val="4EA72E"/>
+        <a:srgbClr val="70AD47"/>
       </a:accent6>
       <a:hlink>
-        <a:srgbClr val="467886"/>
+        <a:srgbClr val="0563C1"/>
       </a:hlink>
       <a:folHlink>
-        <a:srgbClr val="96607D"/>
+        <a:srgbClr val="954F72"/>
       </a:folHlink>
     </a:clrScheme>
     <a:fontScheme name="Office">
       <a:majorFont>
-        <a:latin typeface="Aptos Display" panose="02110004020202020204"/>
+        <a:latin typeface="Calibri Light" panose="020F0302020204030204"/>
         <a:ea typeface=""/>
         <a:cs typeface=""/>
         <a:font script="Jpan" typeface="游ゴシック Light"/>
@@ -15859,7 +15207,7 @@
         <a:font script="Tfng" typeface="Ebrima"/>
       </a:majorFont>
       <a:minorFont>
-        <a:latin typeface="Aptos" panose="02110004020202020204"/>
+        <a:latin typeface="Calibri" panose="020F0502020204030204"/>
         <a:ea typeface=""/>
         <a:cs typeface=""/>
         <a:font script="Jpan" typeface="游ゴシック"/>
@@ -15970,6 +15318,13 @@
         </a:gradFill>
       </a:fillStyleLst>
       <a:lnStyleLst>
+        <a:ln w="6350" cap="flat" cmpd="sng" algn="ctr">
+          <a:solidFill>
+            <a:schemeClr val="phClr"/>
+          </a:solidFill>
+          <a:prstDash val="solid"/>
+          <a:miter lim="800000"/>
+        </a:ln>
         <a:ln w="12700" cap="flat" cmpd="sng" algn="ctr">
           <a:solidFill>
             <a:schemeClr val="phClr"/>
@@ -15978,13 +15333,6 @@
           <a:miter lim="800000"/>
         </a:ln>
         <a:ln w="19050" cap="flat" cmpd="sng" algn="ctr">
-          <a:solidFill>
-            <a:schemeClr val="phClr"/>
-          </a:solidFill>
-          <a:prstDash val="solid"/>
-          <a:miter lim="800000"/>
-        </a:ln>
-        <a:ln w="25400" cap="flat" cmpd="sng" algn="ctr">
           <a:solidFill>
             <a:schemeClr val="phClr"/>
           </a:solidFill>
@@ -16049,31 +15397,11 @@
       </a:bgFillStyleLst>
     </a:fmtScheme>
   </a:themeElements>
-  <a:objectDefaults>
-    <a:lnDef>
-      <a:spPr/>
-      <a:bodyPr/>
-      <a:lstStyle/>
-      <a:style>
-        <a:lnRef idx="2">
-          <a:schemeClr val="accent1"/>
-        </a:lnRef>
-        <a:fillRef idx="0">
-          <a:schemeClr val="accent1"/>
-        </a:fillRef>
-        <a:effectRef idx="1">
-          <a:schemeClr val="accent1"/>
-        </a:effectRef>
-        <a:fontRef idx="minor">
-          <a:schemeClr val="tx1"/>
-        </a:fontRef>
-      </a:style>
-    </a:lnDef>
-  </a:objectDefaults>
+  <a:objectDefaults/>
   <a:extraClrSchemeLst/>
   <a:extLst>
     <a:ext uri="{05A4C25C-085E-4340-85A3-A5531E510DB2}">
-      <thm15:themeFamily xmlns:thm15="http://schemas.microsoft.com/office/thememl/2012/main" name="Office Theme" id="{2E142A2C-CD16-42D6-873A-C26D2A0506FA}" vid="{1BDDFF52-6CD6-40A5-AB3C-68EB2F1E4D0A}"/>
+      <thm15:themeFamily xmlns:thm15="http://schemas.microsoft.com/office/thememl/2012/main" name="Office Theme" id="{62F939B6-93AF-4DB8-9C6B-D6C7DFDC589F}" vid="{4A3C46E8-61CC-4603-A589-7422A47A8E4A}"/>
     </a:ext>
   </a:extLst>
 </a:theme>
